--- a/docs/evidencias/AeroTrack-Apresentacao-Modulo6.pptx
+++ b/docs/evidencias/AeroTrack-Apresentacao-Modulo6.pptx
@@ -19,6 +19,8 @@
     <p:sldId id="267" r:id="rId18"/>
     <p:sldId id="268" r:id="rId19"/>
     <p:sldId id="269" r:id="rId20"/>
+    <p:sldId id="270" r:id="rId21"/>
+    <p:sldId id="271" r:id="rId22"/>
   </p:sldIdLst>
   <p:sldSz cx="12191695" cy="6858000" type="screen4x3"/>
   <p:notesSz cx="6858000" cy="9144000"/>
@@ -3111,7 +3113,99 @@
       <p:grpSpPr/>
       <p:sp>
         <p:nvSpPr>
-          <p:cNvPr id="2" name="Rectangle 1"/>
+          <p:cNvPr id="2" name="Rounded Rectangle 1"/>
+          <p:cNvSpPr/>
+          <p:nvPr/>
+        </p:nvSpPr>
+        <p:spPr>
+          <a:xfrm>
+            <a:off x="-1828800" y="-1828800"/>
+            <a:ext cx="6400800" cy="6400800"/>
+          </a:xfrm>
+          <a:prstGeom prst="roundRect">
+            <a:avLst>
+              <a:gd name="adj" fmla="val 50000"/>
+            </a:avLst>
+          </a:prstGeom>
+          <a:solidFill>
+            <a:srgbClr val="162E4A"/>
+          </a:solidFill>
+          <a:ln>
+            <a:noFill/>
+          </a:ln>
+          <a:effectLst/>
+        </p:spPr>
+        <p:style>
+          <a:lnRef idx="1">
+            <a:schemeClr val="accent1"/>
+          </a:lnRef>
+          <a:fillRef idx="3">
+            <a:schemeClr val="accent1"/>
+          </a:fillRef>
+          <a:effectRef idx="2">
+            <a:schemeClr val="accent1"/>
+          </a:effectRef>
+          <a:fontRef idx="minor">
+            <a:schemeClr val="lt1"/>
+          </a:fontRef>
+        </p:style>
+        <p:txBody>
+          <a:bodyPr rtlCol="0" anchor="ctr"/>
+          <a:lstStyle/>
+          <a:p>
+            <a:pPr algn="ctr"/>
+          </a:p>
+        </p:txBody>
+      </p:sp>
+      <p:sp>
+        <p:nvSpPr>
+          <p:cNvPr id="3" name="Rounded Rectangle 2"/>
+          <p:cNvSpPr/>
+          <p:nvPr/>
+        </p:nvSpPr>
+        <p:spPr>
+          <a:xfrm>
+            <a:off x="9601200" y="4114800"/>
+            <a:ext cx="5486400" cy="5486400"/>
+          </a:xfrm>
+          <a:prstGeom prst="roundRect">
+            <a:avLst>
+              <a:gd name="adj" fmla="val 50000"/>
+            </a:avLst>
+          </a:prstGeom>
+          <a:solidFill>
+            <a:srgbClr val="162E4A"/>
+          </a:solidFill>
+          <a:ln>
+            <a:noFill/>
+          </a:ln>
+          <a:effectLst/>
+        </p:spPr>
+        <p:style>
+          <a:lnRef idx="1">
+            <a:schemeClr val="accent1"/>
+          </a:lnRef>
+          <a:fillRef idx="3">
+            <a:schemeClr val="accent1"/>
+          </a:fillRef>
+          <a:effectRef idx="2">
+            <a:schemeClr val="accent1"/>
+          </a:effectRef>
+          <a:fontRef idx="minor">
+            <a:schemeClr val="lt1"/>
+          </a:fontRef>
+        </p:style>
+        <p:txBody>
+          <a:bodyPr rtlCol="0" anchor="ctr"/>
+          <a:lstStyle/>
+          <a:p>
+            <a:pPr algn="ctr"/>
+          </a:p>
+        </p:txBody>
+      </p:sp>
+      <p:sp>
+        <p:nvSpPr>
+          <p:cNvPr id="4" name="Rectangle 3"/>
           <p:cNvSpPr/>
           <p:nvPr/>
         </p:nvSpPr>
@@ -3155,7 +3249,7 @@
       </p:sp>
       <p:pic>
         <p:nvPicPr>
-          <p:cNvPr id="3" name="Picture 2" descr="aerotrack-logo-dark.png"/>
+          <p:cNvPr id="5" name="Picture 4" descr="aerotrack-logo.png"/>
           <p:cNvPicPr>
             <a:picLocks noChangeAspect="1"/>
           </p:cNvPicPr>
@@ -3169,7 +3263,7 @@
         </p:blipFill>
         <p:spPr>
           <a:xfrm>
-            <a:off x="3566160" y="2148840"/>
+            <a:off x="3566160" y="1965960"/>
             <a:ext cx="4114800" cy="1005840"/>
           </a:xfrm>
           <a:prstGeom prst="rect">
@@ -3179,13 +3273,13 @@
       </p:pic>
       <p:sp>
         <p:nvSpPr>
-          <p:cNvPr id="4" name="TextBox 3"/>
+          <p:cNvPr id="6" name="TextBox 5"/>
           <p:cNvSpPr txBox="1"/>
           <p:nvPr/>
         </p:nvSpPr>
         <p:spPr>
           <a:xfrm>
-            <a:off x="0" y="3429000"/>
+            <a:off x="0" y="3246120"/>
             <a:ext cx="12191695" cy="548640"/>
           </a:xfrm>
           <a:prstGeom prst="rect">
@@ -3211,20 +3305,20 @@
                 </a:solidFill>
                 <a:latin typeface="Arial"/>
               </a:rPr>
-              <a:t>Monitoramento de Qualidade do Ar com Apache Hop</a:t>
-            </a:r>
-          </a:p>
-        </p:txBody>
-      </p:sp>
-      <p:sp>
-        <p:nvSpPr>
-          <p:cNvPr id="5" name="TextBox 4"/>
+              <a:t>Air Quality Monitoring with Apache Hop</a:t>
+            </a:r>
+          </a:p>
+        </p:txBody>
+      </p:sp>
+      <p:sp>
+        <p:nvSpPr>
+          <p:cNvPr id="7" name="TextBox 6"/>
           <p:cNvSpPr txBox="1"/>
           <p:nvPr/>
         </p:nvSpPr>
         <p:spPr>
           <a:xfrm>
-            <a:off x="0" y="3977639"/>
+            <a:off x="0" y="3794760"/>
             <a:ext cx="12191695" cy="457200"/>
           </a:xfrm>
           <a:prstGeom prst="rect">
@@ -3250,20 +3344,20 @@
                 </a:solidFill>
                 <a:latin typeface="Arial"/>
               </a:rPr>
-              <a:t>Trabalho Final | Modulo 6 | Apache Hop</a:t>
-            </a:r>
-          </a:p>
-        </p:txBody>
-      </p:sp>
-      <p:sp>
-        <p:nvSpPr>
-          <p:cNvPr id="6" name="TextBox 5"/>
+              <a:t>Module 6 Final Project | Apache Hop</a:t>
+            </a:r>
+          </a:p>
+        </p:txBody>
+      </p:sp>
+      <p:sp>
+        <p:nvSpPr>
+          <p:cNvPr id="8" name="TextBox 7"/>
           <p:cNvSpPr txBox="1"/>
           <p:nvPr/>
         </p:nvSpPr>
         <p:spPr>
           <a:xfrm>
-            <a:off x="0" y="4892040"/>
+            <a:off x="0" y="4709160"/>
             <a:ext cx="12191695" cy="822960"/>
           </a:xfrm>
           <a:prstGeom prst="rect">
@@ -3296,7 +3390,7 @@
       </p:sp>
       <p:sp>
         <p:nvSpPr>
-          <p:cNvPr id="7" name="TextBox 6"/>
+          <p:cNvPr id="9" name="TextBox 8"/>
           <p:cNvSpPr txBox="1"/>
           <p:nvPr/>
         </p:nvSpPr>
@@ -3328,7 +3422,7 @@
                 </a:solidFill>
                 <a:latin typeface="Arial"/>
               </a:rPr>
-              <a:t>Capacitacao em IA e Transformacao Digital</a:t>
+              <a:t>AI and Digital Transformation Program</a:t>
             </a:r>
           </a:p>
         </p:txBody>
@@ -3411,8 +3505,8 @@
         </p:nvSpPr>
         <p:spPr>
           <a:xfrm>
-            <a:off x="640080" y="320040"/>
-            <a:ext cx="7315200" cy="365760"/>
+            <a:off x="640080" y="292608"/>
+            <a:ext cx="8686800" cy="365760"/>
           </a:xfrm>
           <a:prstGeom prst="rect">
             <a:avLst/>
@@ -3437,7 +3531,7 @@
                 </a:solidFill>
                 <a:latin typeface="Arial"/>
               </a:rPr>
-              <a:t>VISUALIZACAO</a:t>
+              <a:t>PERSISTENCE</a:t>
             </a:r>
           </a:p>
         </p:txBody>
@@ -3450,7 +3544,7 @@
         </p:nvSpPr>
         <p:spPr>
           <a:xfrm>
-            <a:off x="640080" y="621792"/>
+            <a:off x="640080" y="594360"/>
             <a:ext cx="10789920" cy="822960"/>
           </a:xfrm>
           <a:prstGeom prst="rect">
@@ -3470,30 +3564,32 @@
               </a:lnSpc>
             </a:pPr>
             <a:r>
-              <a:rPr sz="3000" b="1" i="0">
+              <a:rPr sz="2900" b="1" i="0">
                 <a:solidFill>
                   <a:srgbClr val="0B1F33"/>
                 </a:solidFill>
                 <a:latin typeface="Arial"/>
               </a:rPr>
-              <a:t>Dashboard AeroTrack</a:t>
-            </a:r>
-          </a:p>
-        </p:txBody>
-      </p:sp>
-      <p:sp>
-        <p:nvSpPr>
-          <p:cNvPr id="5" name="Rectangle 4"/>
+              <a:t>Database and rerun safety</a:t>
+            </a:r>
+          </a:p>
+        </p:txBody>
+      </p:sp>
+      <p:sp>
+        <p:nvSpPr>
+          <p:cNvPr id="5" name="Rounded Rectangle 4"/>
           <p:cNvSpPr/>
           <p:nvPr/>
         </p:nvSpPr>
         <p:spPr>
           <a:xfrm>
-            <a:off x="658368" y="1298448"/>
-            <a:ext cx="1188720" cy="38100"/>
-          </a:xfrm>
-          <a:prstGeom prst="rect">
-            <a:avLst/>
+            <a:off x="658368" y="1261872"/>
+            <a:ext cx="1188720" cy="50800"/>
+          </a:xfrm>
+          <a:prstGeom prst="roundRect">
+            <a:avLst>
+              <a:gd name="adj" fmla="val 50000"/>
+            </a:avLst>
           </a:prstGeom>
           <a:solidFill>
             <a:srgbClr val="1BAF7A"/>
@@ -3541,7 +3637,7 @@
         </p:blipFill>
         <p:spPr>
           <a:xfrm>
-            <a:off x="11292840" y="292608"/>
+            <a:off x="11292840" y="274320"/>
             <a:ext cx="502920" cy="502920"/>
           </a:xfrm>
           <a:prstGeom prst="rect">
@@ -3549,40 +3645,16 @@
           </a:prstGeom>
         </p:spPr>
       </p:pic>
-      <p:pic>
-        <p:nvPicPr>
-          <p:cNvPr id="7" name="Picture 6" descr="E01-dashboard-visao-geral.png"/>
-          <p:cNvPicPr>
-            <a:picLocks noChangeAspect="1"/>
-          </p:cNvPicPr>
-          <p:nvPr/>
-        </p:nvPicPr>
-        <p:blipFill>
-          <a:blip r:embed="rId3"/>
-          <a:stretch>
-            <a:fillRect/>
-          </a:stretch>
-        </p:blipFill>
-        <p:spPr>
-          <a:xfrm>
-            <a:off x="1234440" y="1600200"/>
-            <a:ext cx="9692640" cy="11358562"/>
-          </a:xfrm>
-          <a:prstGeom prst="rect">
-            <a:avLst/>
-          </a:prstGeom>
-        </p:spPr>
-      </p:pic>
-      <p:sp>
-        <p:nvSpPr>
-          <p:cNvPr id="8" name="TextBox 7"/>
+      <p:sp>
+        <p:nvSpPr>
+          <p:cNvPr id="7" name="TextBox 6"/>
           <p:cNvSpPr txBox="1"/>
           <p:nvPr/>
         </p:nvSpPr>
         <p:spPr>
           <a:xfrm>
-            <a:off x="640080" y="6510528"/>
-            <a:ext cx="5486400" cy="274320"/>
+            <a:off x="822960" y="1737360"/>
+            <a:ext cx="3931920" cy="457200"/>
           </a:xfrm>
           <a:prstGeom prst="rect">
             <a:avLst/>
@@ -3601,20 +3673,418 @@
               </a:lnSpc>
             </a:pPr>
             <a:r>
+              <a:rPr sz="1500" b="1" i="0">
+                <a:solidFill>
+                  <a:srgbClr val="2A78D6"/>
+                </a:solidFill>
+                <a:latin typeface="Consolas"/>
+              </a:rPr>
+              <a:t>leituras_qualidade_ar</a:t>
+            </a:r>
+          </a:p>
+        </p:txBody>
+      </p:sp>
+      <p:sp>
+        <p:nvSpPr>
+          <p:cNvPr id="8" name="TextBox 7"/>
+          <p:cNvSpPr txBox="1"/>
+          <p:nvPr/>
+        </p:nvSpPr>
+        <p:spPr>
+          <a:xfrm>
+            <a:off x="4846320" y="1737360"/>
+            <a:ext cx="6400800" cy="457200"/>
+          </a:xfrm>
+          <a:prstGeom prst="rect">
+            <a:avLst/>
+          </a:prstGeom>
+          <a:noFill/>
+        </p:spPr>
+        <p:txBody>
+          <a:bodyPr wrap="square" anchor="t">
+            <a:spAutoFit/>
+          </a:bodyPr>
+          <a:lstStyle/>
+          <a:p>
+            <a:pPr algn="l">
+              <a:lnSpc>
+                <a:spcPct val="115000"/>
+              </a:lnSpc>
+            </a:pPr>
+            <a:r>
+              <a:rPr sz="1500" b="0" i="0">
+                <a:solidFill>
+                  <a:srgbClr val="26364A"/>
+                </a:solidFill>
+                <a:latin typeface="Arial"/>
+              </a:rPr>
+              <a:t>Treated, detailed data, one row per valid reading</a:t>
+            </a:r>
+          </a:p>
+        </p:txBody>
+      </p:sp>
+      <p:sp>
+        <p:nvSpPr>
+          <p:cNvPr id="9" name="TextBox 8"/>
+          <p:cNvSpPr txBox="1"/>
+          <p:nvPr/>
+        </p:nvSpPr>
+        <p:spPr>
+          <a:xfrm>
+            <a:off x="822960" y="2286000"/>
+            <a:ext cx="3931920" cy="457200"/>
+          </a:xfrm>
+          <a:prstGeom prst="rect">
+            <a:avLst/>
+          </a:prstGeom>
+          <a:noFill/>
+        </p:spPr>
+        <p:txBody>
+          <a:bodyPr wrap="square" anchor="t">
+            <a:spAutoFit/>
+          </a:bodyPr>
+          <a:lstStyle/>
+          <a:p>
+            <a:pPr algn="l">
+              <a:lnSpc>
+                <a:spcPct val="115000"/>
+              </a:lnSpc>
+            </a:pPr>
+            <a:r>
+              <a:rPr sz="1500" b="1" i="0">
+                <a:solidFill>
+                  <a:srgbClr val="2A78D6"/>
+                </a:solidFill>
+                <a:latin typeface="Consolas"/>
+              </a:rPr>
+              <a:t>leituras_rejeitadas</a:t>
+            </a:r>
+          </a:p>
+        </p:txBody>
+      </p:sp>
+      <p:sp>
+        <p:nvSpPr>
+          <p:cNvPr id="10" name="TextBox 9"/>
+          <p:cNvSpPr txBox="1"/>
+          <p:nvPr/>
+        </p:nvSpPr>
+        <p:spPr>
+          <a:xfrm>
+            <a:off x="4846320" y="2286000"/>
+            <a:ext cx="6400800" cy="457200"/>
+          </a:xfrm>
+          <a:prstGeom prst="rect">
+            <a:avLst/>
+          </a:prstGeom>
+          <a:noFill/>
+        </p:spPr>
+        <p:txBody>
+          <a:bodyPr wrap="square" anchor="t">
+            <a:spAutoFit/>
+          </a:bodyPr>
+          <a:lstStyle/>
+          <a:p>
+            <a:pPr algn="l">
+              <a:lnSpc>
+                <a:spcPct val="115000"/>
+              </a:lnSpc>
+            </a:pPr>
+            <a:r>
+              <a:rPr sz="1500" b="0" i="0">
+                <a:solidFill>
+                  <a:srgbClr val="26364A"/>
+                </a:solidFill>
+                <a:latin typeface="Arial"/>
+              </a:rPr>
+              <a:t>Readings with no reference pollutant</a:t>
+            </a:r>
+          </a:p>
+        </p:txBody>
+      </p:sp>
+      <p:sp>
+        <p:nvSpPr>
+          <p:cNvPr id="11" name="TextBox 10"/>
+          <p:cNvSpPr txBox="1"/>
+          <p:nvPr/>
+        </p:nvSpPr>
+        <p:spPr>
+          <a:xfrm>
+            <a:off x="822960" y="2834640"/>
+            <a:ext cx="3931920" cy="457200"/>
+          </a:xfrm>
+          <a:prstGeom prst="rect">
+            <a:avLst/>
+          </a:prstGeom>
+          <a:noFill/>
+        </p:spPr>
+        <p:txBody>
+          <a:bodyPr wrap="square" anchor="t">
+            <a:spAutoFit/>
+          </a:bodyPr>
+          <a:lstStyle/>
+          <a:p>
+            <a:pPr algn="l">
+              <a:lnSpc>
+                <a:spcPct val="115000"/>
+              </a:lnSpc>
+            </a:pPr>
+            <a:r>
+              <a:rPr sz="1500" b="1" i="0">
+                <a:solidFill>
+                  <a:srgbClr val="2A78D6"/>
+                </a:solidFill>
+                <a:latin typeface="Consolas"/>
+              </a:rPr>
+              <a:t>resumo_diario_qualidade_ar</a:t>
+            </a:r>
+          </a:p>
+        </p:txBody>
+      </p:sp>
+      <p:sp>
+        <p:nvSpPr>
+          <p:cNvPr id="12" name="TextBox 11"/>
+          <p:cNvSpPr txBox="1"/>
+          <p:nvPr/>
+        </p:nvSpPr>
+        <p:spPr>
+          <a:xfrm>
+            <a:off x="4846320" y="2834640"/>
+            <a:ext cx="6400800" cy="457200"/>
+          </a:xfrm>
+          <a:prstGeom prst="rect">
+            <a:avLst/>
+          </a:prstGeom>
+          <a:noFill/>
+        </p:spPr>
+        <p:txBody>
+          <a:bodyPr wrap="square" anchor="t">
+            <a:spAutoFit/>
+          </a:bodyPr>
+          <a:lstStyle/>
+          <a:p>
+            <a:pPr algn="l">
+              <a:lnSpc>
+                <a:spcPct val="115000"/>
+              </a:lnSpc>
+            </a:pPr>
+            <a:r>
+              <a:rPr sz="1500" b="0" i="0">
+                <a:solidFill>
+                  <a:srgbClr val="26364A"/>
+                </a:solidFill>
+                <a:latin typeface="Arial"/>
+              </a:rPr>
+              <a:t>Indicators aggregated by day</a:t>
+            </a:r>
+          </a:p>
+        </p:txBody>
+      </p:sp>
+      <p:sp>
+        <p:nvSpPr>
+          <p:cNvPr id="13" name="TextBox 12"/>
+          <p:cNvSpPr txBox="1"/>
+          <p:nvPr/>
+        </p:nvSpPr>
+        <p:spPr>
+          <a:xfrm>
+            <a:off x="822960" y="3383280"/>
+            <a:ext cx="3931920" cy="457200"/>
+          </a:xfrm>
+          <a:prstGeom prst="rect">
+            <a:avLst/>
+          </a:prstGeom>
+          <a:noFill/>
+        </p:spPr>
+        <p:txBody>
+          <a:bodyPr wrap="square" anchor="t">
+            <a:spAutoFit/>
+          </a:bodyPr>
+          <a:lstStyle/>
+          <a:p>
+            <a:pPr algn="l">
+              <a:lnSpc>
+                <a:spcPct val="115000"/>
+              </a:lnSpc>
+            </a:pPr>
+            <a:r>
+              <a:rPr sz="1500" b="1" i="0">
+                <a:solidFill>
+                  <a:srgbClr val="2A78D6"/>
+                </a:solidFill>
+                <a:latin typeface="Consolas"/>
+              </a:rPr>
+              <a:t>resumo_mensal_qualidade_ar</a:t>
+            </a:r>
+          </a:p>
+        </p:txBody>
+      </p:sp>
+      <p:sp>
+        <p:nvSpPr>
+          <p:cNvPr id="14" name="TextBox 13"/>
+          <p:cNvSpPr txBox="1"/>
+          <p:nvPr/>
+        </p:nvSpPr>
+        <p:spPr>
+          <a:xfrm>
+            <a:off x="4846320" y="3383280"/>
+            <a:ext cx="6400800" cy="457200"/>
+          </a:xfrm>
+          <a:prstGeom prst="rect">
+            <a:avLst/>
+          </a:prstGeom>
+          <a:noFill/>
+        </p:spPr>
+        <p:txBody>
+          <a:bodyPr wrap="square" anchor="t">
+            <a:spAutoFit/>
+          </a:bodyPr>
+          <a:lstStyle/>
+          <a:p>
+            <a:pPr algn="l">
+              <a:lnSpc>
+                <a:spcPct val="115000"/>
+              </a:lnSpc>
+            </a:pPr>
+            <a:r>
+              <a:rPr sz="1500" b="0" i="0">
+                <a:solidFill>
+                  <a:srgbClr val="26364A"/>
+                </a:solidFill>
+                <a:latin typeface="Arial"/>
+              </a:rPr>
+              <a:t>Indicators aggregated by month</a:t>
+            </a:r>
+          </a:p>
+        </p:txBody>
+      </p:sp>
+      <p:sp>
+        <p:nvSpPr>
+          <p:cNvPr id="15" name="Rounded Rectangle 14"/>
+          <p:cNvSpPr/>
+          <p:nvPr/>
+        </p:nvSpPr>
+        <p:spPr>
+          <a:xfrm>
+            <a:off x="822960" y="4297680"/>
+            <a:ext cx="10424160" cy="1645920"/>
+          </a:xfrm>
+          <a:prstGeom prst="roundRect">
+            <a:avLst>
+              <a:gd name="adj" fmla="val 12000"/>
+            </a:avLst>
+          </a:prstGeom>
+          <a:gradFill rotWithShape="1">
+            <a:gsLst>
+              <a:gs pos="0">
+                <a:srgbClr val="0B1F33"/>
+              </a:gs>
+              <a:gs pos="100000">
+                <a:srgbClr val="162E4A"/>
+              </a:gs>
+            </a:gsLst>
+            <a:lin scaled="0" ang="18900000"/>
+          </a:gradFill>
+          <a:ln>
+            <a:noFill/>
+          </a:ln>
+          <a:effectLst/>
+          <a:effectLst>
+            <a:outerShdw blurRad="180000" dist="45000" dir="5400000" rotWithShape="0">
+              <a:srgbClr val="0B1F33">
+                <a:alpha val="72000"/>
+              </a:srgbClr>
+            </a:outerShdw>
+          </a:effectLst>
+        </p:spPr>
+        <p:style>
+          <a:lnRef idx="1">
+            <a:schemeClr val="accent1"/>
+          </a:lnRef>
+          <a:fillRef idx="3">
+            <a:schemeClr val="accent1"/>
+          </a:fillRef>
+          <a:effectRef idx="2">
+            <a:schemeClr val="accent1"/>
+          </a:effectRef>
+          <a:fontRef idx="minor">
+            <a:schemeClr val="lt1"/>
+          </a:fontRef>
+        </p:style>
+        <p:txBody>
+          <a:bodyPr rtlCol="0" anchor="ctr" wrap="square" lIns="320040" rIns="320040"/>
+          <a:lstStyle/>
+          <a:p>
+            <a:pPr algn="ctr"/>
+            <a:r>
+              <a:rPr sz="1500" b="1">
+                <a:solidFill>
+                  <a:srgbClr val="E8A300"/>
+                </a:solidFill>
+                <a:latin typeface="Arial"/>
+              </a:rPr>
+              <a:t>Rerun without duplicates</a:t>
+            </a:r>
+          </a:p>
+          <a:p>
+            <a:pPr>
+              <a:spcBef>
+                <a:spcPts val="600"/>
+              </a:spcBef>
+            </a:pPr>
+            <a:r>
+              <a:rPr sz="1400">
+                <a:solidFill>
+                  <a:srgbClr val="FFFFFF"/>
+                </a:solidFill>
+                <a:latin typeface="Arial"/>
+              </a:rPr>
+              <a:t>UNIQUE key on data_hora plus Insert/Update: rerunning the process updates existing records instead of duplicating. Validated by running the workflow twice in a row (8131 rows both times).</a:t>
+            </a:r>
+          </a:p>
+        </p:txBody>
+      </p:sp>
+      <p:sp>
+        <p:nvSpPr>
+          <p:cNvPr id="16" name="TextBox 15"/>
+          <p:cNvSpPr txBox="1"/>
+          <p:nvPr/>
+        </p:nvSpPr>
+        <p:spPr>
+          <a:xfrm>
+            <a:off x="640080" y="6510528"/>
+            <a:ext cx="5486400" cy="274320"/>
+          </a:xfrm>
+          <a:prstGeom prst="rect">
+            <a:avLst/>
+          </a:prstGeom>
+          <a:noFill/>
+        </p:spPr>
+        <p:txBody>
+          <a:bodyPr wrap="square" anchor="t">
+            <a:spAutoFit/>
+          </a:bodyPr>
+          <a:lstStyle/>
+          <a:p>
+            <a:pPr algn="l">
+              <a:lnSpc>
+                <a:spcPct val="115000"/>
+              </a:lnSpc>
+            </a:pPr>
+            <a:r>
               <a:rPr sz="1000" b="0" i="0">
                 <a:solidFill>
                   <a:srgbClr val="898781"/>
                 </a:solidFill>
                 <a:latin typeface="Arial"/>
               </a:rPr>
-              <a:t>AeroTrack | Modulo 6 | Apache Hop</a:t>
-            </a:r>
-          </a:p>
-        </p:txBody>
-      </p:sp>
-      <p:sp>
-        <p:nvSpPr>
-          <p:cNvPr id="9" name="TextBox 8"/>
+              <a:t>AeroTrack | Module 6 | Apache Hop</a:t>
+            </a:r>
+          </a:p>
+        </p:txBody>
+      </p:sp>
+      <p:sp>
+        <p:nvSpPr>
+          <p:cNvPr id="17" name="TextBox 16"/>
           <p:cNvSpPr txBox="1"/>
           <p:nvPr/>
         </p:nvSpPr>
@@ -3729,8 +4199,8 @@
         </p:nvSpPr>
         <p:spPr>
           <a:xfrm>
-            <a:off x="640080" y="320040"/>
-            <a:ext cx="7315200" cy="365760"/>
+            <a:off x="640080" y="292608"/>
+            <a:ext cx="8686800" cy="365760"/>
           </a:xfrm>
           <a:prstGeom prst="rect">
             <a:avLst/>
@@ -3755,7 +4225,7 @@
                 </a:solidFill>
                 <a:latin typeface="Arial"/>
               </a:rPr>
-              <a:t>RESULTADO</a:t>
+              <a:t>ANALYSIS</a:t>
             </a:r>
           </a:p>
         </p:txBody>
@@ -3768,7 +4238,7 @@
         </p:nvSpPr>
         <p:spPr>
           <a:xfrm>
-            <a:off x="640080" y="621792"/>
+            <a:off x="640080" y="594360"/>
             <a:ext cx="10789920" cy="822960"/>
           </a:xfrm>
           <a:prstGeom prst="rect">
@@ -3788,30 +4258,32 @@
               </a:lnSpc>
             </a:pPr>
             <a:r>
-              <a:rPr sz="3000" b="1" i="0">
+              <a:rPr sz="2900" b="1" i="0">
                 <a:solidFill>
                   <a:srgbClr val="0B1F33"/>
                 </a:solidFill>
                 <a:latin typeface="Arial"/>
               </a:rPr>
-              <a:t>Ranking dos dez piores dias</a:t>
-            </a:r>
-          </a:p>
-        </p:txBody>
-      </p:sp>
-      <p:sp>
-        <p:nvSpPr>
-          <p:cNvPr id="5" name="Rectangle 4"/>
+              <a:t>Indicators calculated</a:t>
+            </a:r>
+          </a:p>
+        </p:txBody>
+      </p:sp>
+      <p:sp>
+        <p:nvSpPr>
+          <p:cNvPr id="5" name="Rounded Rectangle 4"/>
           <p:cNvSpPr/>
           <p:nvPr/>
         </p:nvSpPr>
         <p:spPr>
           <a:xfrm>
-            <a:off x="658368" y="1298448"/>
-            <a:ext cx="1188720" cy="38100"/>
-          </a:xfrm>
-          <a:prstGeom prst="rect">
-            <a:avLst/>
+            <a:off x="658368" y="1261872"/>
+            <a:ext cx="1188720" cy="50800"/>
+          </a:xfrm>
+          <a:prstGeom prst="roundRect">
+            <a:avLst>
+              <a:gd name="adj" fmla="val 50000"/>
+            </a:avLst>
           </a:prstGeom>
           <a:solidFill>
             <a:srgbClr val="1BAF7A"/>
@@ -3859,7 +4331,7 @@
         </p:blipFill>
         <p:spPr>
           <a:xfrm>
-            <a:off x="11292840" y="292608"/>
+            <a:off x="11292840" y="274320"/>
             <a:ext cx="502920" cy="502920"/>
           </a:xfrm>
           <a:prstGeom prst="rect">
@@ -3867,30 +4339,162 @@
           </a:prstGeom>
         </p:spPr>
       </p:pic>
-      <p:pic>
-        <p:nvPicPr>
-          <p:cNvPr id="7" name="Picture 6" descr="E02-dashboard-ranking-dias.png"/>
-          <p:cNvPicPr>
-            <a:picLocks noChangeAspect="1"/>
-          </p:cNvPicPr>
-          <p:nvPr/>
-        </p:nvPicPr>
-        <p:blipFill>
-          <a:blip r:embed="rId3"/>
-          <a:stretch>
-            <a:fillRect/>
-          </a:stretch>
-        </p:blipFill>
-        <p:spPr>
-          <a:xfrm>
-            <a:off x="1737360" y="1691640"/>
-            <a:ext cx="8686800" cy="4750594"/>
-          </a:xfrm>
-          <a:prstGeom prst="rect">
-            <a:avLst/>
-          </a:prstGeom>
-        </p:spPr>
-      </p:pic>
+      <p:sp>
+        <p:nvSpPr>
+          <p:cNvPr id="7" name="TextBox 6"/>
+          <p:cNvSpPr txBox="1"/>
+          <p:nvPr/>
+        </p:nvSpPr>
+        <p:spPr>
+          <a:xfrm>
+            <a:off x="822960" y="1737360"/>
+            <a:ext cx="10607040" cy="4389120"/>
+          </a:xfrm>
+          <a:prstGeom prst="rect">
+            <a:avLst/>
+          </a:prstGeom>
+          <a:noFill/>
+        </p:spPr>
+        <p:txBody>
+          <a:bodyPr wrap="square">
+            <a:spAutoFit/>
+          </a:bodyPr>
+          <a:lstStyle/>
+          <a:p>
+            <a:pPr>
+              <a:lnSpc>
+                <a:spcPct val="115000"/>
+              </a:lnSpc>
+              <a:spcAft>
+                <a:spcPts val="1300"/>
+              </a:spcAft>
+            </a:pPr>
+            <a:r>
+              <a:rPr sz="1800">
+                <a:solidFill>
+                  <a:srgbClr val="26364A"/>
+                </a:solidFill>
+                <a:latin typeface="Arial"/>
+              </a:rPr>
+              <a:t>•  Total treated and rejected readings</a:t>
+            </a:r>
+          </a:p>
+          <a:p>
+            <a:pPr>
+              <a:lnSpc>
+                <a:spcPct val="115000"/>
+              </a:lnSpc>
+              <a:spcAft>
+                <a:spcPts val="1300"/>
+              </a:spcAft>
+            </a:pPr>
+            <a:r>
+              <a:rPr sz="1800">
+                <a:solidFill>
+                  <a:srgbClr val="26364A"/>
+                </a:solidFill>
+                <a:latin typeface="Arial"/>
+              </a:rPr>
+              <a:t>•  Percentage of hours in critical condition</a:t>
+            </a:r>
+          </a:p>
+          <a:p>
+            <a:pPr>
+              <a:lnSpc>
+                <a:spcPct val="115000"/>
+              </a:lnSpc>
+              <a:spcAft>
+                <a:spcPts val="1300"/>
+              </a:spcAft>
+            </a:pPr>
+            <a:r>
+              <a:rPr sz="1800">
+                <a:solidFill>
+                  <a:srgbClr val="26364A"/>
+                </a:solidFill>
+                <a:latin typeface="Arial"/>
+              </a:rPr>
+              <a:t>•  Average and maximum CO and NO2</a:t>
+            </a:r>
+          </a:p>
+          <a:p>
+            <a:pPr>
+              <a:lnSpc>
+                <a:spcPct val="115000"/>
+              </a:lnSpc>
+              <a:spcAft>
+                <a:spcPts val="1300"/>
+              </a:spcAft>
+            </a:pPr>
+            <a:r>
+              <a:rPr sz="1800">
+                <a:solidFill>
+                  <a:srgbClr val="26364A"/>
+                </a:solidFill>
+                <a:latin typeface="Arial"/>
+              </a:rPr>
+              <a:t>•  Monthly trend of CO and NO2</a:t>
+            </a:r>
+          </a:p>
+          <a:p>
+            <a:pPr>
+              <a:lnSpc>
+                <a:spcPct val="115000"/>
+              </a:lnSpc>
+              <a:spcAft>
+                <a:spcPts val="1300"/>
+              </a:spcAft>
+            </a:pPr>
+            <a:r>
+              <a:rPr sz="1800">
+                <a:solidFill>
+                  <a:srgbClr val="26364A"/>
+                </a:solidFill>
+                <a:latin typeface="Arial"/>
+              </a:rPr>
+              <a:t>•  Distribution of readings by level (good, moderate, critical)</a:t>
+            </a:r>
+          </a:p>
+          <a:p>
+            <a:pPr>
+              <a:lnSpc>
+                <a:spcPct val="115000"/>
+              </a:lnSpc>
+              <a:spcAft>
+                <a:spcPts val="1300"/>
+              </a:spcAft>
+            </a:pPr>
+            <a:r>
+              <a:rPr sz="1800">
+                <a:solidFill>
+                  <a:srgbClr val="26364A"/>
+                </a:solidFill>
+                <a:latin typeface="Arial"/>
+              </a:rPr>
+              <a:t>•  Readings by time of day</a:t>
+            </a:r>
+          </a:p>
+          <a:p>
+            <a:pPr>
+              <a:lnSpc>
+                <a:spcPct val="115000"/>
+              </a:lnSpc>
+              <a:spcAft>
+                <a:spcPts val="1300"/>
+              </a:spcAft>
+            </a:pPr>
+            <a:r>
+              <a:rPr sz="1800">
+                <a:solidFill>
+                  <a:srgbClr val="26364A"/>
+                </a:solidFill>
+                <a:latin typeface="Arial"/>
+              </a:rPr>
+              <a:t>•  Ranking of the ten worst days</a:t>
+            </a:r>
+          </a:p>
+        </p:txBody>
+      </p:sp>
       <p:sp>
         <p:nvSpPr>
           <p:cNvPr id="8" name="TextBox 7"/>
@@ -3925,7 +4529,7 @@
                 </a:solidFill>
                 <a:latin typeface="Arial"/>
               </a:rPr>
-              <a:t>AeroTrack | Modulo 6 | Apache Hop</a:t>
+              <a:t>AeroTrack | Module 6 | Apache Hop</a:t>
             </a:r>
           </a:p>
         </p:txBody>
@@ -4047,8 +4651,8 @@
         </p:nvSpPr>
         <p:spPr>
           <a:xfrm>
-            <a:off x="640080" y="320040"/>
-            <a:ext cx="7315200" cy="365760"/>
+            <a:off x="640080" y="292608"/>
+            <a:ext cx="8686800" cy="365760"/>
           </a:xfrm>
           <a:prstGeom prst="rect">
             <a:avLst/>
@@ -4073,7 +4677,7 @@
                 </a:solidFill>
                 <a:latin typeface="Arial"/>
               </a:rPr>
-              <a:t>RESULTADOS</a:t>
+              <a:t>VISUALIZATION</a:t>
             </a:r>
           </a:p>
         </p:txBody>
@@ -4086,7 +4690,7 @@
         </p:nvSpPr>
         <p:spPr>
           <a:xfrm>
-            <a:off x="640080" y="621792"/>
+            <a:off x="640080" y="594360"/>
             <a:ext cx="10789920" cy="822960"/>
           </a:xfrm>
           <a:prstGeom prst="rect">
@@ -4106,30 +4710,32 @@
               </a:lnSpc>
             </a:pPr>
             <a:r>
-              <a:rPr sz="3000" b="1" i="0">
+              <a:rPr sz="2900" b="1" i="0">
                 <a:solidFill>
                   <a:srgbClr val="0B1F33"/>
                 </a:solidFill>
                 <a:latin typeface="Arial"/>
               </a:rPr>
-              <a:t>Validacao dos resultados</a:t>
-            </a:r>
-          </a:p>
-        </p:txBody>
-      </p:sp>
-      <p:sp>
-        <p:nvSpPr>
-          <p:cNvPr id="5" name="Rectangle 4"/>
+              <a:t>AeroTrack dashboard</a:t>
+            </a:r>
+          </a:p>
+        </p:txBody>
+      </p:sp>
+      <p:sp>
+        <p:nvSpPr>
+          <p:cNvPr id="5" name="Rounded Rectangle 4"/>
           <p:cNvSpPr/>
           <p:nvPr/>
         </p:nvSpPr>
         <p:spPr>
           <a:xfrm>
-            <a:off x="658368" y="1298448"/>
-            <a:ext cx="1188720" cy="38100"/>
-          </a:xfrm>
-          <a:prstGeom prst="rect">
-            <a:avLst/>
+            <a:off x="658368" y="1261872"/>
+            <a:ext cx="1188720" cy="50800"/>
+          </a:xfrm>
+          <a:prstGeom prst="roundRect">
+            <a:avLst>
+              <a:gd name="adj" fmla="val 50000"/>
+            </a:avLst>
           </a:prstGeom>
           <a:solidFill>
             <a:srgbClr val="1BAF7A"/>
@@ -4177,7 +4783,7 @@
         </p:blipFill>
         <p:spPr>
           <a:xfrm>
-            <a:off x="11292840" y="292608"/>
+            <a:off x="11292840" y="274320"/>
             <a:ext cx="502920" cy="502920"/>
           </a:xfrm>
           <a:prstGeom prst="rect">
@@ -4185,52 +4791,30 @@
           </a:prstGeom>
         </p:spPr>
       </p:pic>
-      <p:sp>
-        <p:nvSpPr>
-          <p:cNvPr id="7" name="Rectangle 6"/>
-          <p:cNvSpPr/>
-          <p:nvPr/>
-        </p:nvSpPr>
-        <p:spPr>
-          <a:xfrm>
-            <a:off x="822960" y="1783080"/>
-            <a:ext cx="3291840" cy="1234440"/>
-          </a:xfrm>
-          <a:prstGeom prst="rect">
-            <a:avLst/>
-          </a:prstGeom>
-          <a:solidFill>
-            <a:srgbClr val="F2F7FB"/>
-          </a:solidFill>
-          <a:ln w="9525">
-            <a:solidFill>
-              <a:srgbClr val="C9D8E8"/>
-            </a:solidFill>
-          </a:ln>
-          <a:effectLst/>
-        </p:spPr>
-        <p:style>
-          <a:lnRef idx="1">
-            <a:schemeClr val="accent1"/>
-          </a:lnRef>
-          <a:fillRef idx="3">
-            <a:schemeClr val="accent1"/>
-          </a:fillRef>
-          <a:effectRef idx="2">
-            <a:schemeClr val="accent1"/>
-          </a:effectRef>
-          <a:fontRef idx="minor">
-            <a:schemeClr val="lt1"/>
-          </a:fontRef>
-        </p:style>
-        <p:txBody>
-          <a:bodyPr rtlCol="0" anchor="ctr"/>
-          <a:lstStyle/>
-          <a:p>
-            <a:pPr algn="ctr"/>
-          </a:p>
-        </p:txBody>
-      </p:sp>
+      <p:pic>
+        <p:nvPicPr>
+          <p:cNvPr id="7" name="Picture 6" descr="E01-dashboard-overview.png"/>
+          <p:cNvPicPr>
+            <a:picLocks noChangeAspect="1"/>
+          </p:cNvPicPr>
+          <p:nvPr/>
+        </p:nvPicPr>
+        <p:blipFill>
+          <a:blip r:embed="rId3"/>
+          <a:stretch>
+            <a:fillRect/>
+          </a:stretch>
+        </p:blipFill>
+        <p:spPr>
+          <a:xfrm>
+            <a:off x="1234440" y="1600200"/>
+            <a:ext cx="9692640" cy="11358562"/>
+          </a:xfrm>
+          <a:prstGeom prst="rect">
+            <a:avLst/>
+          </a:prstGeom>
+        </p:spPr>
+      </p:pic>
       <p:sp>
         <p:nvSpPr>
           <p:cNvPr id="8" name="TextBox 7"/>
@@ -4239,8 +4823,8 @@
         </p:nvSpPr>
         <p:spPr>
           <a:xfrm>
-            <a:off x="960120" y="1892808"/>
-            <a:ext cx="3017520" cy="320040"/>
+            <a:off x="640080" y="6510528"/>
+            <a:ext cx="5486400" cy="274320"/>
           </a:xfrm>
           <a:prstGeom prst="rect">
             <a:avLst/>
@@ -4259,13 +4843,13 @@
               </a:lnSpc>
             </a:pPr>
             <a:r>
-              <a:rPr sz="1100" b="1" i="0">
+              <a:rPr sz="1000" b="0" i="0">
                 <a:solidFill>
                   <a:srgbClr val="898781"/>
                 </a:solidFill>
                 <a:latin typeface="Arial"/>
               </a:rPr>
-              <a:t>LEITURAS TRATADAS</a:t>
+              <a:t>AeroTrack | Module 6 | Apache Hop</a:t>
             </a:r>
           </a:p>
         </p:txBody>
@@ -4273,743 +4857,6 @@
       <p:sp>
         <p:nvSpPr>
           <p:cNvPr id="9" name="TextBox 8"/>
-          <p:cNvSpPr txBox="1"/>
-          <p:nvPr/>
-        </p:nvSpPr>
-        <p:spPr>
-          <a:xfrm>
-            <a:off x="960120" y="2167128"/>
-            <a:ext cx="3017520" cy="777240"/>
-          </a:xfrm>
-          <a:prstGeom prst="rect">
-            <a:avLst/>
-          </a:prstGeom>
-          <a:noFill/>
-        </p:spPr>
-        <p:txBody>
-          <a:bodyPr wrap="square" anchor="t">
-            <a:spAutoFit/>
-          </a:bodyPr>
-          <a:lstStyle/>
-          <a:p>
-            <a:pPr algn="l">
-              <a:lnSpc>
-                <a:spcPct val="115000"/>
-              </a:lnSpc>
-            </a:pPr>
-            <a:r>
-              <a:rPr sz="2600" b="1" i="0">
-                <a:solidFill>
-                  <a:srgbClr val="0B1F33"/>
-                </a:solidFill>
-                <a:latin typeface="Arial"/>
-              </a:rPr>
-              <a:t>8.131</a:t>
-            </a:r>
-          </a:p>
-        </p:txBody>
-      </p:sp>
-      <p:sp>
-        <p:nvSpPr>
-          <p:cNvPr id="10" name="Rectangle 9"/>
-          <p:cNvSpPr/>
-          <p:nvPr/>
-        </p:nvSpPr>
-        <p:spPr>
-          <a:xfrm>
-            <a:off x="4343400" y="1783080"/>
-            <a:ext cx="3291840" cy="1234440"/>
-          </a:xfrm>
-          <a:prstGeom prst="rect">
-            <a:avLst/>
-          </a:prstGeom>
-          <a:solidFill>
-            <a:srgbClr val="F2F7FB"/>
-          </a:solidFill>
-          <a:ln w="9525">
-            <a:solidFill>
-              <a:srgbClr val="C9D8E8"/>
-            </a:solidFill>
-          </a:ln>
-          <a:effectLst/>
-        </p:spPr>
-        <p:style>
-          <a:lnRef idx="1">
-            <a:schemeClr val="accent1"/>
-          </a:lnRef>
-          <a:fillRef idx="3">
-            <a:schemeClr val="accent1"/>
-          </a:fillRef>
-          <a:effectRef idx="2">
-            <a:schemeClr val="accent1"/>
-          </a:effectRef>
-          <a:fontRef idx="minor">
-            <a:schemeClr val="lt1"/>
-          </a:fontRef>
-        </p:style>
-        <p:txBody>
-          <a:bodyPr rtlCol="0" anchor="ctr"/>
-          <a:lstStyle/>
-          <a:p>
-            <a:pPr algn="ctr"/>
-          </a:p>
-        </p:txBody>
-      </p:sp>
-      <p:sp>
-        <p:nvSpPr>
-          <p:cNvPr id="11" name="TextBox 10"/>
-          <p:cNvSpPr txBox="1"/>
-          <p:nvPr/>
-        </p:nvSpPr>
-        <p:spPr>
-          <a:xfrm>
-            <a:off x="4480560" y="1892808"/>
-            <a:ext cx="3017520" cy="320040"/>
-          </a:xfrm>
-          <a:prstGeom prst="rect">
-            <a:avLst/>
-          </a:prstGeom>
-          <a:noFill/>
-        </p:spPr>
-        <p:txBody>
-          <a:bodyPr wrap="square" anchor="t">
-            <a:spAutoFit/>
-          </a:bodyPr>
-          <a:lstStyle/>
-          <a:p>
-            <a:pPr algn="l">
-              <a:lnSpc>
-                <a:spcPct val="115000"/>
-              </a:lnSpc>
-            </a:pPr>
-            <a:r>
-              <a:rPr sz="1100" b="1" i="0">
-                <a:solidFill>
-                  <a:srgbClr val="898781"/>
-                </a:solidFill>
-                <a:latin typeface="Arial"/>
-              </a:rPr>
-              <a:t>LEITURAS REJEITADAS</a:t>
-            </a:r>
-          </a:p>
-        </p:txBody>
-      </p:sp>
-      <p:sp>
-        <p:nvSpPr>
-          <p:cNvPr id="12" name="TextBox 11"/>
-          <p:cNvSpPr txBox="1"/>
-          <p:nvPr/>
-        </p:nvSpPr>
-        <p:spPr>
-          <a:xfrm>
-            <a:off x="4480560" y="2167128"/>
-            <a:ext cx="3017520" cy="777240"/>
-          </a:xfrm>
-          <a:prstGeom prst="rect">
-            <a:avLst/>
-          </a:prstGeom>
-          <a:noFill/>
-        </p:spPr>
-        <p:txBody>
-          <a:bodyPr wrap="square" anchor="t">
-            <a:spAutoFit/>
-          </a:bodyPr>
-          <a:lstStyle/>
-          <a:p>
-            <a:pPr algn="l">
-              <a:lnSpc>
-                <a:spcPct val="115000"/>
-              </a:lnSpc>
-            </a:pPr>
-            <a:r>
-              <a:rPr sz="2600" b="1" i="0">
-                <a:solidFill>
-                  <a:srgbClr val="0B1F33"/>
-                </a:solidFill>
-                <a:latin typeface="Arial"/>
-              </a:rPr>
-              <a:t>1.226</a:t>
-            </a:r>
-          </a:p>
-        </p:txBody>
-      </p:sp>
-      <p:sp>
-        <p:nvSpPr>
-          <p:cNvPr id="13" name="Rectangle 12"/>
-          <p:cNvSpPr/>
-          <p:nvPr/>
-        </p:nvSpPr>
-        <p:spPr>
-          <a:xfrm>
-            <a:off x="7863840" y="1783080"/>
-            <a:ext cx="3291840" cy="1234440"/>
-          </a:xfrm>
-          <a:prstGeom prst="rect">
-            <a:avLst/>
-          </a:prstGeom>
-          <a:solidFill>
-            <a:srgbClr val="F2F7FB"/>
-          </a:solidFill>
-          <a:ln w="9525">
-            <a:solidFill>
-              <a:srgbClr val="C9D8E8"/>
-            </a:solidFill>
-          </a:ln>
-          <a:effectLst/>
-        </p:spPr>
-        <p:style>
-          <a:lnRef idx="1">
-            <a:schemeClr val="accent1"/>
-          </a:lnRef>
-          <a:fillRef idx="3">
-            <a:schemeClr val="accent1"/>
-          </a:fillRef>
-          <a:effectRef idx="2">
-            <a:schemeClr val="accent1"/>
-          </a:effectRef>
-          <a:fontRef idx="minor">
-            <a:schemeClr val="lt1"/>
-          </a:fontRef>
-        </p:style>
-        <p:txBody>
-          <a:bodyPr rtlCol="0" anchor="ctr"/>
-          <a:lstStyle/>
-          <a:p>
-            <a:pPr algn="ctr"/>
-          </a:p>
-        </p:txBody>
-      </p:sp>
-      <p:sp>
-        <p:nvSpPr>
-          <p:cNvPr id="14" name="TextBox 13"/>
-          <p:cNvSpPr txBox="1"/>
-          <p:nvPr/>
-        </p:nvSpPr>
-        <p:spPr>
-          <a:xfrm>
-            <a:off x="8001000" y="1892808"/>
-            <a:ext cx="3017520" cy="320040"/>
-          </a:xfrm>
-          <a:prstGeom prst="rect">
-            <a:avLst/>
-          </a:prstGeom>
-          <a:noFill/>
-        </p:spPr>
-        <p:txBody>
-          <a:bodyPr wrap="square" anchor="t">
-            <a:spAutoFit/>
-          </a:bodyPr>
-          <a:lstStyle/>
-          <a:p>
-            <a:pPr algn="l">
-              <a:lnSpc>
-                <a:spcPct val="115000"/>
-              </a:lnSpc>
-            </a:pPr>
-            <a:r>
-              <a:rPr sz="1100" b="1" i="0">
-                <a:solidFill>
-                  <a:srgbClr val="898781"/>
-                </a:solidFill>
-                <a:latin typeface="Arial"/>
-              </a:rPr>
-              <a:t>% HORAS CRITICAS</a:t>
-            </a:r>
-          </a:p>
-        </p:txBody>
-      </p:sp>
-      <p:sp>
-        <p:nvSpPr>
-          <p:cNvPr id="15" name="TextBox 14"/>
-          <p:cNvSpPr txBox="1"/>
-          <p:nvPr/>
-        </p:nvSpPr>
-        <p:spPr>
-          <a:xfrm>
-            <a:off x="8001000" y="2167128"/>
-            <a:ext cx="3017520" cy="777240"/>
-          </a:xfrm>
-          <a:prstGeom prst="rect">
-            <a:avLst/>
-          </a:prstGeom>
-          <a:noFill/>
-        </p:spPr>
-        <p:txBody>
-          <a:bodyPr wrap="square" anchor="t">
-            <a:spAutoFit/>
-          </a:bodyPr>
-          <a:lstStyle/>
-          <a:p>
-            <a:pPr algn="l">
-              <a:lnSpc>
-                <a:spcPct val="115000"/>
-              </a:lnSpc>
-            </a:pPr>
-            <a:r>
-              <a:rPr sz="2600" b="1" i="0">
-                <a:solidFill>
-                  <a:srgbClr val="D03B3B"/>
-                </a:solidFill>
-                <a:latin typeface="Arial"/>
-              </a:rPr>
-              <a:t>13,11%</a:t>
-            </a:r>
-          </a:p>
-        </p:txBody>
-      </p:sp>
-      <p:sp>
-        <p:nvSpPr>
-          <p:cNvPr id="16" name="Rectangle 15"/>
-          <p:cNvSpPr/>
-          <p:nvPr/>
-        </p:nvSpPr>
-        <p:spPr>
-          <a:xfrm>
-            <a:off x="822960" y="3246120"/>
-            <a:ext cx="3291840" cy="1234440"/>
-          </a:xfrm>
-          <a:prstGeom prst="rect">
-            <a:avLst/>
-          </a:prstGeom>
-          <a:solidFill>
-            <a:srgbClr val="F2F7FB"/>
-          </a:solidFill>
-          <a:ln w="9525">
-            <a:solidFill>
-              <a:srgbClr val="C9D8E8"/>
-            </a:solidFill>
-          </a:ln>
-          <a:effectLst/>
-        </p:spPr>
-        <p:style>
-          <a:lnRef idx="1">
-            <a:schemeClr val="accent1"/>
-          </a:lnRef>
-          <a:fillRef idx="3">
-            <a:schemeClr val="accent1"/>
-          </a:fillRef>
-          <a:effectRef idx="2">
-            <a:schemeClr val="accent1"/>
-          </a:effectRef>
-          <a:fontRef idx="minor">
-            <a:schemeClr val="lt1"/>
-          </a:fontRef>
-        </p:style>
-        <p:txBody>
-          <a:bodyPr rtlCol="0" anchor="ctr"/>
-          <a:lstStyle/>
-          <a:p>
-            <a:pPr algn="ctr"/>
-          </a:p>
-        </p:txBody>
-      </p:sp>
-      <p:sp>
-        <p:nvSpPr>
-          <p:cNvPr id="17" name="TextBox 16"/>
-          <p:cNvSpPr txBox="1"/>
-          <p:nvPr/>
-        </p:nvSpPr>
-        <p:spPr>
-          <a:xfrm>
-            <a:off x="960120" y="3355848"/>
-            <a:ext cx="3017520" cy="320040"/>
-          </a:xfrm>
-          <a:prstGeom prst="rect">
-            <a:avLst/>
-          </a:prstGeom>
-          <a:noFill/>
-        </p:spPr>
-        <p:txBody>
-          <a:bodyPr wrap="square" anchor="t">
-            <a:spAutoFit/>
-          </a:bodyPr>
-          <a:lstStyle/>
-          <a:p>
-            <a:pPr algn="l">
-              <a:lnSpc>
-                <a:spcPct val="115000"/>
-              </a:lnSpc>
-            </a:pPr>
-            <a:r>
-              <a:rPr sz="1100" b="1" i="0">
-                <a:solidFill>
-                  <a:srgbClr val="898781"/>
-                </a:solidFill>
-                <a:latin typeface="Arial"/>
-              </a:rPr>
-              <a:t>CO MEDIO</a:t>
-            </a:r>
-          </a:p>
-        </p:txBody>
-      </p:sp>
-      <p:sp>
-        <p:nvSpPr>
-          <p:cNvPr id="18" name="TextBox 17"/>
-          <p:cNvSpPr txBox="1"/>
-          <p:nvPr/>
-        </p:nvSpPr>
-        <p:spPr>
-          <a:xfrm>
-            <a:off x="960120" y="3630168"/>
-            <a:ext cx="3017520" cy="777240"/>
-          </a:xfrm>
-          <a:prstGeom prst="rect">
-            <a:avLst/>
-          </a:prstGeom>
-          <a:noFill/>
-        </p:spPr>
-        <p:txBody>
-          <a:bodyPr wrap="square" anchor="t">
-            <a:spAutoFit/>
-          </a:bodyPr>
-          <a:lstStyle/>
-          <a:p>
-            <a:pPr algn="l">
-              <a:lnSpc>
-                <a:spcPct val="115000"/>
-              </a:lnSpc>
-            </a:pPr>
-            <a:r>
-              <a:rPr sz="2600" b="1" i="0">
-                <a:solidFill>
-                  <a:srgbClr val="0B1F33"/>
-                </a:solidFill>
-                <a:latin typeface="Arial"/>
-              </a:rPr>
-              <a:t>2,15 mg/m3</a:t>
-            </a:r>
-          </a:p>
-        </p:txBody>
-      </p:sp>
-      <p:sp>
-        <p:nvSpPr>
-          <p:cNvPr id="19" name="Rectangle 18"/>
-          <p:cNvSpPr/>
-          <p:nvPr/>
-        </p:nvSpPr>
-        <p:spPr>
-          <a:xfrm>
-            <a:off x="4343400" y="3246120"/>
-            <a:ext cx="3291840" cy="1234440"/>
-          </a:xfrm>
-          <a:prstGeom prst="rect">
-            <a:avLst/>
-          </a:prstGeom>
-          <a:solidFill>
-            <a:srgbClr val="F2F7FB"/>
-          </a:solidFill>
-          <a:ln w="9525">
-            <a:solidFill>
-              <a:srgbClr val="C9D8E8"/>
-            </a:solidFill>
-          </a:ln>
-          <a:effectLst/>
-        </p:spPr>
-        <p:style>
-          <a:lnRef idx="1">
-            <a:schemeClr val="accent1"/>
-          </a:lnRef>
-          <a:fillRef idx="3">
-            <a:schemeClr val="accent1"/>
-          </a:fillRef>
-          <a:effectRef idx="2">
-            <a:schemeClr val="accent1"/>
-          </a:effectRef>
-          <a:fontRef idx="minor">
-            <a:schemeClr val="lt1"/>
-          </a:fontRef>
-        </p:style>
-        <p:txBody>
-          <a:bodyPr rtlCol="0" anchor="ctr"/>
-          <a:lstStyle/>
-          <a:p>
-            <a:pPr algn="ctr"/>
-          </a:p>
-        </p:txBody>
-      </p:sp>
-      <p:sp>
-        <p:nvSpPr>
-          <p:cNvPr id="20" name="TextBox 19"/>
-          <p:cNvSpPr txBox="1"/>
-          <p:nvPr/>
-        </p:nvSpPr>
-        <p:spPr>
-          <a:xfrm>
-            <a:off x="4480560" y="3355848"/>
-            <a:ext cx="3017520" cy="320040"/>
-          </a:xfrm>
-          <a:prstGeom prst="rect">
-            <a:avLst/>
-          </a:prstGeom>
-          <a:noFill/>
-        </p:spPr>
-        <p:txBody>
-          <a:bodyPr wrap="square" anchor="t">
-            <a:spAutoFit/>
-          </a:bodyPr>
-          <a:lstStyle/>
-          <a:p>
-            <a:pPr algn="l">
-              <a:lnSpc>
-                <a:spcPct val="115000"/>
-              </a:lnSpc>
-            </a:pPr>
-            <a:r>
-              <a:rPr sz="1100" b="1" i="0">
-                <a:solidFill>
-                  <a:srgbClr val="898781"/>
-                </a:solidFill>
-                <a:latin typeface="Arial"/>
-              </a:rPr>
-              <a:t>NO2 MEDIO</a:t>
-            </a:r>
-          </a:p>
-        </p:txBody>
-      </p:sp>
-      <p:sp>
-        <p:nvSpPr>
-          <p:cNvPr id="21" name="TextBox 20"/>
-          <p:cNvSpPr txBox="1"/>
-          <p:nvPr/>
-        </p:nvSpPr>
-        <p:spPr>
-          <a:xfrm>
-            <a:off x="4480560" y="3630168"/>
-            <a:ext cx="3017520" cy="777240"/>
-          </a:xfrm>
-          <a:prstGeom prst="rect">
-            <a:avLst/>
-          </a:prstGeom>
-          <a:noFill/>
-        </p:spPr>
-        <p:txBody>
-          <a:bodyPr wrap="square" anchor="t">
-            <a:spAutoFit/>
-          </a:bodyPr>
-          <a:lstStyle/>
-          <a:p>
-            <a:pPr algn="l">
-              <a:lnSpc>
-                <a:spcPct val="115000"/>
-              </a:lnSpc>
-            </a:pPr>
-            <a:r>
-              <a:rPr sz="2600" b="1" i="0">
-                <a:solidFill>
-                  <a:srgbClr val="0B1F33"/>
-                </a:solidFill>
-                <a:latin typeface="Arial"/>
-              </a:rPr>
-              <a:t>113,09 ug/m3</a:t>
-            </a:r>
-          </a:p>
-        </p:txBody>
-      </p:sp>
-      <p:sp>
-        <p:nvSpPr>
-          <p:cNvPr id="22" name="Rectangle 21"/>
-          <p:cNvSpPr/>
-          <p:nvPr/>
-        </p:nvSpPr>
-        <p:spPr>
-          <a:xfrm>
-            <a:off x="7863840" y="3246120"/>
-            <a:ext cx="3291840" cy="1234440"/>
-          </a:xfrm>
-          <a:prstGeom prst="rect">
-            <a:avLst/>
-          </a:prstGeom>
-          <a:solidFill>
-            <a:srgbClr val="F2F7FB"/>
-          </a:solidFill>
-          <a:ln w="9525">
-            <a:solidFill>
-              <a:srgbClr val="C9D8E8"/>
-            </a:solidFill>
-          </a:ln>
-          <a:effectLst/>
-        </p:spPr>
-        <p:style>
-          <a:lnRef idx="1">
-            <a:schemeClr val="accent1"/>
-          </a:lnRef>
-          <a:fillRef idx="3">
-            <a:schemeClr val="accent1"/>
-          </a:fillRef>
-          <a:effectRef idx="2">
-            <a:schemeClr val="accent1"/>
-          </a:effectRef>
-          <a:fontRef idx="minor">
-            <a:schemeClr val="lt1"/>
-          </a:fontRef>
-        </p:style>
-        <p:txBody>
-          <a:bodyPr rtlCol="0" anchor="ctr"/>
-          <a:lstStyle/>
-          <a:p>
-            <a:pPr algn="ctr"/>
-          </a:p>
-        </p:txBody>
-      </p:sp>
-      <p:sp>
-        <p:nvSpPr>
-          <p:cNvPr id="23" name="TextBox 22"/>
-          <p:cNvSpPr txBox="1"/>
-          <p:nvPr/>
-        </p:nvSpPr>
-        <p:spPr>
-          <a:xfrm>
-            <a:off x="8001000" y="3355848"/>
-            <a:ext cx="3017520" cy="320040"/>
-          </a:xfrm>
-          <a:prstGeom prst="rect">
-            <a:avLst/>
-          </a:prstGeom>
-          <a:noFill/>
-        </p:spPr>
-        <p:txBody>
-          <a:bodyPr wrap="square" anchor="t">
-            <a:spAutoFit/>
-          </a:bodyPr>
-          <a:lstStyle/>
-          <a:p>
-            <a:pPr algn="l">
-              <a:lnSpc>
-                <a:spcPct val="115000"/>
-              </a:lnSpc>
-            </a:pPr>
-            <a:r>
-              <a:rPr sz="1100" b="1" i="0">
-                <a:solidFill>
-                  <a:srgbClr val="898781"/>
-                </a:solidFill>
-                <a:latin typeface="Arial"/>
-              </a:rPr>
-              <a:t>DIAS CONSOLIDADOS</a:t>
-            </a:r>
-          </a:p>
-        </p:txBody>
-      </p:sp>
-      <p:sp>
-        <p:nvSpPr>
-          <p:cNvPr id="24" name="TextBox 23"/>
-          <p:cNvSpPr txBox="1"/>
-          <p:nvPr/>
-        </p:nvSpPr>
-        <p:spPr>
-          <a:xfrm>
-            <a:off x="8001000" y="3630168"/>
-            <a:ext cx="3017520" cy="777240"/>
-          </a:xfrm>
-          <a:prstGeom prst="rect">
-            <a:avLst/>
-          </a:prstGeom>
-          <a:noFill/>
-        </p:spPr>
-        <p:txBody>
-          <a:bodyPr wrap="square" anchor="t">
-            <a:spAutoFit/>
-          </a:bodyPr>
-          <a:lstStyle/>
-          <a:p>
-            <a:pPr algn="l">
-              <a:lnSpc>
-                <a:spcPct val="115000"/>
-              </a:lnSpc>
-            </a:pPr>
-            <a:r>
-              <a:rPr sz="2600" b="1" i="0">
-                <a:solidFill>
-                  <a:srgbClr val="0B1F33"/>
-                </a:solidFill>
-                <a:latin typeface="Arial"/>
-              </a:rPr>
-              <a:t>363</a:t>
-            </a:r>
-          </a:p>
-        </p:txBody>
-      </p:sp>
-      <p:sp>
-        <p:nvSpPr>
-          <p:cNvPr id="25" name="TextBox 24"/>
-          <p:cNvSpPr txBox="1"/>
-          <p:nvPr/>
-        </p:nvSpPr>
-        <p:spPr>
-          <a:xfrm>
-            <a:off x="822960" y="4709160"/>
-            <a:ext cx="10424160" cy="1463040"/>
-          </a:xfrm>
-          <a:prstGeom prst="rect">
-            <a:avLst/>
-          </a:prstGeom>
-          <a:noFill/>
-        </p:spPr>
-        <p:txBody>
-          <a:bodyPr wrap="square" anchor="t">
-            <a:spAutoFit/>
-          </a:bodyPr>
-          <a:lstStyle/>
-          <a:p>
-            <a:pPr algn="l">
-              <a:lnSpc>
-                <a:spcPct val="130000"/>
-              </a:lnSpc>
-            </a:pPr>
-            <a:r>
-              <a:rPr sz="1500" b="0" i="0">
-                <a:solidFill>
-                  <a:srgbClr val="26364A"/>
-                </a:solidFill>
-                <a:latin typeface="Arial"/>
-              </a:rPr>
-              <a:t>A soma de leituras validas e rejeitadas confere com o total de linhas de dados apos a remocao das 114 linhas vazias do export. O ranking dos piores dias mostra media de NO2 e percentual de horas criticas elevados nas mesmas datas de maior media de CO.</a:t>
-            </a:r>
-          </a:p>
-        </p:txBody>
-      </p:sp>
-      <p:sp>
-        <p:nvSpPr>
-          <p:cNvPr id="26" name="TextBox 25"/>
-          <p:cNvSpPr txBox="1"/>
-          <p:nvPr/>
-        </p:nvSpPr>
-        <p:spPr>
-          <a:xfrm>
-            <a:off x="640080" y="6510528"/>
-            <a:ext cx="5486400" cy="274320"/>
-          </a:xfrm>
-          <a:prstGeom prst="rect">
-            <a:avLst/>
-          </a:prstGeom>
-          <a:noFill/>
-        </p:spPr>
-        <p:txBody>
-          <a:bodyPr wrap="square" anchor="t">
-            <a:spAutoFit/>
-          </a:bodyPr>
-          <a:lstStyle/>
-          <a:p>
-            <a:pPr algn="l">
-              <a:lnSpc>
-                <a:spcPct val="115000"/>
-              </a:lnSpc>
-            </a:pPr>
-            <a:r>
-              <a:rPr sz="1000" b="0" i="0">
-                <a:solidFill>
-                  <a:srgbClr val="898781"/>
-                </a:solidFill>
-                <a:latin typeface="Arial"/>
-              </a:rPr>
-              <a:t>AeroTrack | Modulo 6 | Apache Hop</a:t>
-            </a:r>
-          </a:p>
-        </p:txBody>
-      </p:sp>
-      <p:sp>
-        <p:nvSpPr>
-          <p:cNvPr id="27" name="TextBox 26"/>
           <p:cNvSpPr txBox="1"/>
           <p:nvPr/>
         </p:nvSpPr>
@@ -5124,8 +4971,8 @@
         </p:nvSpPr>
         <p:spPr>
           <a:xfrm>
-            <a:off x="640080" y="320040"/>
-            <a:ext cx="7315200" cy="365760"/>
+            <a:off x="640080" y="292608"/>
+            <a:ext cx="8686800" cy="365760"/>
           </a:xfrm>
           <a:prstGeom prst="rect">
             <a:avLst/>
@@ -5150,7 +4997,7 @@
                 </a:solidFill>
                 <a:latin typeface="Arial"/>
               </a:rPr>
-              <a:t>FECHAMENTO</a:t>
+              <a:t>ANSWERING THE QUESTION</a:t>
             </a:r>
           </a:p>
         </p:txBody>
@@ -5163,7 +5010,7 @@
         </p:nvSpPr>
         <p:spPr>
           <a:xfrm>
-            <a:off x="640080" y="621792"/>
+            <a:off x="640080" y="594360"/>
             <a:ext cx="10789920" cy="822960"/>
           </a:xfrm>
           <a:prstGeom prst="rect">
@@ -5183,30 +5030,32 @@
               </a:lnSpc>
             </a:pPr>
             <a:r>
-              <a:rPr sz="3000" b="1" i="0">
+              <a:rPr sz="2900" b="1" i="0">
                 <a:solidFill>
                   <a:srgbClr val="0B1F33"/>
                 </a:solidFill>
                 <a:latin typeface="Arial"/>
               </a:rPr>
-              <a:t>Conclusao</a:t>
-            </a:r>
-          </a:p>
-        </p:txBody>
-      </p:sp>
-      <p:sp>
-        <p:nvSpPr>
-          <p:cNvPr id="5" name="Rectangle 4"/>
+              <a:t>Ranking of the ten worst days</a:t>
+            </a:r>
+          </a:p>
+        </p:txBody>
+      </p:sp>
+      <p:sp>
+        <p:nvSpPr>
+          <p:cNvPr id="5" name="Rounded Rectangle 4"/>
           <p:cNvSpPr/>
           <p:nvPr/>
         </p:nvSpPr>
         <p:spPr>
           <a:xfrm>
-            <a:off x="658368" y="1298448"/>
-            <a:ext cx="1188720" cy="38100"/>
-          </a:xfrm>
-          <a:prstGeom prst="rect">
-            <a:avLst/>
+            <a:off x="658368" y="1261872"/>
+            <a:ext cx="1188720" cy="50800"/>
+          </a:xfrm>
+          <a:prstGeom prst="roundRect">
+            <a:avLst>
+              <a:gd name="adj" fmla="val 50000"/>
+            </a:avLst>
           </a:prstGeom>
           <a:solidFill>
             <a:srgbClr val="1BAF7A"/>
@@ -5254,7 +5103,7 @@
         </p:blipFill>
         <p:spPr>
           <a:xfrm>
-            <a:off x="11292840" y="292608"/>
+            <a:off x="11292840" y="274320"/>
             <a:ext cx="502920" cy="502920"/>
           </a:xfrm>
           <a:prstGeom prst="rect">
@@ -5262,86 +5111,30 @@
           </a:prstGeom>
         </p:spPr>
       </p:pic>
-      <p:sp>
-        <p:nvSpPr>
-          <p:cNvPr id="7" name="TextBox 6"/>
-          <p:cNvSpPr txBox="1"/>
-          <p:nvPr/>
-        </p:nvSpPr>
-        <p:spPr>
-          <a:xfrm>
-            <a:off x="822960" y="1737360"/>
-            <a:ext cx="10607040" cy="4206240"/>
-          </a:xfrm>
-          <a:prstGeom prst="rect">
-            <a:avLst/>
-          </a:prstGeom>
-          <a:noFill/>
-        </p:spPr>
-        <p:txBody>
-          <a:bodyPr wrap="square">
-            <a:spAutoFit/>
-          </a:bodyPr>
-          <a:lstStyle/>
-          <a:p>
-            <a:pPr>
-              <a:lnSpc>
-                <a:spcPct val="112000"/>
-              </a:lnSpc>
-              <a:spcAft>
-                <a:spcPts val="1600"/>
-              </a:spcAft>
-            </a:pPr>
-            <a:r>
-              <a:rPr sz="1800">
-                <a:solidFill>
-                  <a:srgbClr val="26364A"/>
-                </a:solidFill>
-                <a:latin typeface="Arial"/>
-              </a:rPr>
-              <a:t>•  O AeroTrack cobre o ciclo completo do trabalho final: ingestao, tratamento real dentro do Apache Hop, persistencia reexecutavel, orquestracao por workflow e indicadores em dashboard</a:t>
-            </a:r>
-          </a:p>
-          <a:p>
-            <a:pPr>
-              <a:lnSpc>
-                <a:spcPct val="112000"/>
-              </a:lnSpc>
-              <a:spcAft>
-                <a:spcPts val="1600"/>
-              </a:spcAft>
-            </a:pPr>
-            <a:r>
-              <a:rPr sz="1800">
-                <a:solidFill>
-                  <a:srgbClr val="26364A"/>
-                </a:solidFill>
-                <a:latin typeface="Arial"/>
-              </a:rPr>
-              <a:t>•  A classificacao de CO e NO2 foi calibrada pelos percentis reais do dataset, tornando o indicador de horas criticas informativo</a:t>
-            </a:r>
-          </a:p>
-          <a:p>
-            <a:pPr>
-              <a:lnSpc>
-                <a:spcPct val="112000"/>
-              </a:lnSpc>
-              <a:spcAft>
-                <a:spcPts val="1600"/>
-              </a:spcAft>
-            </a:pPr>
-            <a:r>
-              <a:rPr sz="1800">
-                <a:solidFill>
-                  <a:srgbClr val="26364A"/>
-                </a:solidFill>
-                <a:latin typeface="Arial"/>
-              </a:rPr>
-              <a:t>•  A etapa mais trabalhosa foi garantir que cada transformacao gravasse exatamente os campos esperados, validado executando a pipeline real contra o banco de dados a cada ajuste</a:t>
-            </a:r>
-          </a:p>
-        </p:txBody>
-      </p:sp>
+      <p:pic>
+        <p:nvPicPr>
+          <p:cNvPr id="7" name="Picture 6" descr="E02-dashboard-ranking.png"/>
+          <p:cNvPicPr>
+            <a:picLocks noChangeAspect="1"/>
+          </p:cNvPicPr>
+          <p:nvPr/>
+        </p:nvPicPr>
+        <p:blipFill>
+          <a:blip r:embed="rId3"/>
+          <a:stretch>
+            <a:fillRect/>
+          </a:stretch>
+        </p:blipFill>
+        <p:spPr>
+          <a:xfrm>
+            <a:off x="1737360" y="1737360"/>
+            <a:ext cx="8686800" cy="3053953"/>
+          </a:xfrm>
+          <a:prstGeom prst="rect">
+            <a:avLst/>
+          </a:prstGeom>
+        </p:spPr>
+      </p:pic>
       <p:sp>
         <p:nvSpPr>
           <p:cNvPr id="8" name="TextBox 7"/>
@@ -5376,7 +5169,7 @@
                 </a:solidFill>
                 <a:latin typeface="Arial"/>
               </a:rPr>
-              <a:t>AeroTrack | Modulo 6 | Apache Hop</a:t>
+              <a:t>AeroTrack | Module 6 | Apache Hop</a:t>
             </a:r>
           </a:p>
         </p:txBody>
@@ -5429,6 +5222,1195 @@
 </file>
 
 <file path=ppt/slides/slide14.xml><?xml version="1.0" encoding="utf-8"?>
+<p:sld xmlns:a="http://schemas.openxmlformats.org/drawingml/2006/main" xmlns:p="http://schemas.openxmlformats.org/presentationml/2006/main" xmlns:r="http://schemas.openxmlformats.org/officeDocument/2006/relationships">
+  <p:cSld>
+    <p:bg>
+      <p:bgPr>
+        <a:solidFill>
+          <a:srgbClr val="FFFFFF"/>
+        </a:solidFill>
+        <a:effectLst/>
+      </p:bgPr>
+    </p:bg>
+    <p:spTree>
+      <p:nvGrpSpPr>
+        <p:cNvPr id="1" name=""/>
+        <p:cNvGrpSpPr/>
+        <p:nvPr/>
+      </p:nvGrpSpPr>
+      <p:grpSpPr/>
+      <p:sp>
+        <p:nvSpPr>
+          <p:cNvPr id="2" name="Rectangle 1"/>
+          <p:cNvSpPr/>
+          <p:nvPr/>
+        </p:nvSpPr>
+        <p:spPr>
+          <a:xfrm>
+            <a:off x="0" y="0"/>
+            <a:ext cx="12191695" cy="128016"/>
+          </a:xfrm>
+          <a:prstGeom prst="rect">
+            <a:avLst/>
+          </a:prstGeom>
+          <a:solidFill>
+            <a:srgbClr val="2A78D6"/>
+          </a:solidFill>
+          <a:ln>
+            <a:noFill/>
+          </a:ln>
+          <a:effectLst/>
+        </p:spPr>
+        <p:style>
+          <a:lnRef idx="1">
+            <a:schemeClr val="accent1"/>
+          </a:lnRef>
+          <a:fillRef idx="3">
+            <a:schemeClr val="accent1"/>
+          </a:fillRef>
+          <a:effectRef idx="2">
+            <a:schemeClr val="accent1"/>
+          </a:effectRef>
+          <a:fontRef idx="minor">
+            <a:schemeClr val="lt1"/>
+          </a:fontRef>
+        </p:style>
+        <p:txBody>
+          <a:bodyPr rtlCol="0" anchor="ctr"/>
+          <a:lstStyle/>
+          <a:p>
+            <a:pPr algn="ctr"/>
+          </a:p>
+        </p:txBody>
+      </p:sp>
+      <p:sp>
+        <p:nvSpPr>
+          <p:cNvPr id="3" name="TextBox 2"/>
+          <p:cNvSpPr txBox="1"/>
+          <p:nvPr/>
+        </p:nvSpPr>
+        <p:spPr>
+          <a:xfrm>
+            <a:off x="640080" y="292608"/>
+            <a:ext cx="8686800" cy="365760"/>
+          </a:xfrm>
+          <a:prstGeom prst="rect">
+            <a:avLst/>
+          </a:prstGeom>
+          <a:noFill/>
+        </p:spPr>
+        <p:txBody>
+          <a:bodyPr wrap="square" anchor="t">
+            <a:spAutoFit/>
+          </a:bodyPr>
+          <a:lstStyle/>
+          <a:p>
+            <a:pPr algn="l">
+              <a:lnSpc>
+                <a:spcPct val="115000"/>
+              </a:lnSpc>
+            </a:pPr>
+            <a:r>
+              <a:rPr sz="1400" b="1" i="0">
+                <a:solidFill>
+                  <a:srgbClr val="1BAF7A"/>
+                </a:solidFill>
+                <a:latin typeface="Arial"/>
+              </a:rPr>
+              <a:t>RESULTS</a:t>
+            </a:r>
+          </a:p>
+        </p:txBody>
+      </p:sp>
+      <p:sp>
+        <p:nvSpPr>
+          <p:cNvPr id="4" name="TextBox 3"/>
+          <p:cNvSpPr txBox="1"/>
+          <p:nvPr/>
+        </p:nvSpPr>
+        <p:spPr>
+          <a:xfrm>
+            <a:off x="640080" y="594360"/>
+            <a:ext cx="10789920" cy="822960"/>
+          </a:xfrm>
+          <a:prstGeom prst="rect">
+            <a:avLst/>
+          </a:prstGeom>
+          <a:noFill/>
+        </p:spPr>
+        <p:txBody>
+          <a:bodyPr wrap="square" anchor="t">
+            <a:spAutoFit/>
+          </a:bodyPr>
+          <a:lstStyle/>
+          <a:p>
+            <a:pPr algn="l">
+              <a:lnSpc>
+                <a:spcPct val="115000"/>
+              </a:lnSpc>
+            </a:pPr>
+            <a:r>
+              <a:rPr sz="2900" b="1" i="0">
+                <a:solidFill>
+                  <a:srgbClr val="0B1F33"/>
+                </a:solidFill>
+                <a:latin typeface="Arial"/>
+              </a:rPr>
+              <a:t>Validation of results</a:t>
+            </a:r>
+          </a:p>
+        </p:txBody>
+      </p:sp>
+      <p:sp>
+        <p:nvSpPr>
+          <p:cNvPr id="5" name="Rounded Rectangle 4"/>
+          <p:cNvSpPr/>
+          <p:nvPr/>
+        </p:nvSpPr>
+        <p:spPr>
+          <a:xfrm>
+            <a:off x="658368" y="1261872"/>
+            <a:ext cx="1188720" cy="50800"/>
+          </a:xfrm>
+          <a:prstGeom prst="roundRect">
+            <a:avLst>
+              <a:gd name="adj" fmla="val 50000"/>
+            </a:avLst>
+          </a:prstGeom>
+          <a:solidFill>
+            <a:srgbClr val="1BAF7A"/>
+          </a:solidFill>
+          <a:ln>
+            <a:noFill/>
+          </a:ln>
+          <a:effectLst/>
+        </p:spPr>
+        <p:style>
+          <a:lnRef idx="1">
+            <a:schemeClr val="accent1"/>
+          </a:lnRef>
+          <a:fillRef idx="3">
+            <a:schemeClr val="accent1"/>
+          </a:fillRef>
+          <a:effectRef idx="2">
+            <a:schemeClr val="accent1"/>
+          </a:effectRef>
+          <a:fontRef idx="minor">
+            <a:schemeClr val="lt1"/>
+          </a:fontRef>
+        </p:style>
+        <p:txBody>
+          <a:bodyPr rtlCol="0" anchor="ctr"/>
+          <a:lstStyle/>
+          <a:p>
+            <a:pPr algn="ctr"/>
+          </a:p>
+        </p:txBody>
+      </p:sp>
+      <p:pic>
+        <p:nvPicPr>
+          <p:cNvPr id="6" name="Picture 5" descr="aerotrack-icon.png"/>
+          <p:cNvPicPr>
+            <a:picLocks noChangeAspect="1"/>
+          </p:cNvPicPr>
+          <p:nvPr/>
+        </p:nvPicPr>
+        <p:blipFill>
+          <a:blip r:embed="rId2"/>
+          <a:stretch>
+            <a:fillRect/>
+          </a:stretch>
+        </p:blipFill>
+        <p:spPr>
+          <a:xfrm>
+            <a:off x="11292840" y="274320"/>
+            <a:ext cx="502920" cy="502920"/>
+          </a:xfrm>
+          <a:prstGeom prst="rect">
+            <a:avLst/>
+          </a:prstGeom>
+        </p:spPr>
+      </p:pic>
+      <p:sp>
+        <p:nvSpPr>
+          <p:cNvPr id="7" name="Rounded Rectangle 6"/>
+          <p:cNvSpPr/>
+          <p:nvPr/>
+        </p:nvSpPr>
+        <p:spPr>
+          <a:xfrm>
+            <a:off x="822960" y="1737360"/>
+            <a:ext cx="3291840" cy="1234440"/>
+          </a:xfrm>
+          <a:prstGeom prst="roundRect">
+            <a:avLst>
+              <a:gd name="adj" fmla="val 16000"/>
+            </a:avLst>
+          </a:prstGeom>
+          <a:solidFill>
+            <a:srgbClr val="F2F7FB"/>
+          </a:solidFill>
+          <a:ln w="9525">
+            <a:solidFill>
+              <a:srgbClr val="C9D8E8"/>
+            </a:solidFill>
+          </a:ln>
+          <a:effectLst/>
+          <a:effectLst>
+            <a:outerShdw blurRad="180000" dist="45000" dir="5400000" rotWithShape="0">
+              <a:srgbClr val="0B1F33">
+                <a:alpha val="72000"/>
+              </a:srgbClr>
+            </a:outerShdw>
+          </a:effectLst>
+        </p:spPr>
+        <p:style>
+          <a:lnRef idx="1">
+            <a:schemeClr val="accent1"/>
+          </a:lnRef>
+          <a:fillRef idx="3">
+            <a:schemeClr val="accent1"/>
+          </a:fillRef>
+          <a:effectRef idx="2">
+            <a:schemeClr val="accent1"/>
+          </a:effectRef>
+          <a:fontRef idx="minor">
+            <a:schemeClr val="lt1"/>
+          </a:fontRef>
+        </p:style>
+        <p:txBody>
+          <a:bodyPr rtlCol="0" anchor="ctr"/>
+          <a:lstStyle/>
+          <a:p>
+            <a:pPr algn="ctr"/>
+          </a:p>
+        </p:txBody>
+      </p:sp>
+      <p:sp>
+        <p:nvSpPr>
+          <p:cNvPr id="8" name="TextBox 7"/>
+          <p:cNvSpPr txBox="1"/>
+          <p:nvPr/>
+        </p:nvSpPr>
+        <p:spPr>
+          <a:xfrm>
+            <a:off x="987552" y="1865376"/>
+            <a:ext cx="2962656" cy="320040"/>
+          </a:xfrm>
+          <a:prstGeom prst="rect">
+            <a:avLst/>
+          </a:prstGeom>
+          <a:noFill/>
+        </p:spPr>
+        <p:txBody>
+          <a:bodyPr wrap="square" anchor="t">
+            <a:spAutoFit/>
+          </a:bodyPr>
+          <a:lstStyle/>
+          <a:p>
+            <a:pPr algn="l">
+              <a:lnSpc>
+                <a:spcPct val="115000"/>
+              </a:lnSpc>
+            </a:pPr>
+            <a:r>
+              <a:rPr sz="1100" b="1" i="0">
+                <a:solidFill>
+                  <a:srgbClr val="898781"/>
+                </a:solidFill>
+                <a:latin typeface="Arial"/>
+              </a:rPr>
+              <a:t>TREATED READINGS</a:t>
+            </a:r>
+          </a:p>
+        </p:txBody>
+      </p:sp>
+      <p:sp>
+        <p:nvSpPr>
+          <p:cNvPr id="9" name="TextBox 8"/>
+          <p:cNvSpPr txBox="1"/>
+          <p:nvPr/>
+        </p:nvSpPr>
+        <p:spPr>
+          <a:xfrm>
+            <a:off x="987552" y="2157984"/>
+            <a:ext cx="2962656" cy="731520"/>
+          </a:xfrm>
+          <a:prstGeom prst="rect">
+            <a:avLst/>
+          </a:prstGeom>
+          <a:noFill/>
+        </p:spPr>
+        <p:txBody>
+          <a:bodyPr wrap="square" anchor="t">
+            <a:spAutoFit/>
+          </a:bodyPr>
+          <a:lstStyle/>
+          <a:p>
+            <a:pPr algn="l">
+              <a:lnSpc>
+                <a:spcPct val="115000"/>
+              </a:lnSpc>
+            </a:pPr>
+            <a:r>
+              <a:rPr sz="2700" b="1" i="0">
+                <a:solidFill>
+                  <a:srgbClr val="0B1F33"/>
+                </a:solidFill>
+                <a:latin typeface="Arial"/>
+              </a:rPr>
+              <a:t>8,131</a:t>
+            </a:r>
+          </a:p>
+        </p:txBody>
+      </p:sp>
+      <p:sp>
+        <p:nvSpPr>
+          <p:cNvPr id="10" name="Rounded Rectangle 9"/>
+          <p:cNvSpPr/>
+          <p:nvPr/>
+        </p:nvSpPr>
+        <p:spPr>
+          <a:xfrm>
+            <a:off x="4343400" y="1737360"/>
+            <a:ext cx="3291840" cy="1234440"/>
+          </a:xfrm>
+          <a:prstGeom prst="roundRect">
+            <a:avLst>
+              <a:gd name="adj" fmla="val 16000"/>
+            </a:avLst>
+          </a:prstGeom>
+          <a:solidFill>
+            <a:srgbClr val="F2F7FB"/>
+          </a:solidFill>
+          <a:ln w="9525">
+            <a:solidFill>
+              <a:srgbClr val="C9D8E8"/>
+            </a:solidFill>
+          </a:ln>
+          <a:effectLst/>
+          <a:effectLst>
+            <a:outerShdw blurRad="180000" dist="45000" dir="5400000" rotWithShape="0">
+              <a:srgbClr val="0B1F33">
+                <a:alpha val="72000"/>
+              </a:srgbClr>
+            </a:outerShdw>
+          </a:effectLst>
+        </p:spPr>
+        <p:style>
+          <a:lnRef idx="1">
+            <a:schemeClr val="accent1"/>
+          </a:lnRef>
+          <a:fillRef idx="3">
+            <a:schemeClr val="accent1"/>
+          </a:fillRef>
+          <a:effectRef idx="2">
+            <a:schemeClr val="accent1"/>
+          </a:effectRef>
+          <a:fontRef idx="minor">
+            <a:schemeClr val="lt1"/>
+          </a:fontRef>
+        </p:style>
+        <p:txBody>
+          <a:bodyPr rtlCol="0" anchor="ctr"/>
+          <a:lstStyle/>
+          <a:p>
+            <a:pPr algn="ctr"/>
+          </a:p>
+        </p:txBody>
+      </p:sp>
+      <p:sp>
+        <p:nvSpPr>
+          <p:cNvPr id="11" name="TextBox 10"/>
+          <p:cNvSpPr txBox="1"/>
+          <p:nvPr/>
+        </p:nvSpPr>
+        <p:spPr>
+          <a:xfrm>
+            <a:off x="4507992" y="1865376"/>
+            <a:ext cx="2962656" cy="320040"/>
+          </a:xfrm>
+          <a:prstGeom prst="rect">
+            <a:avLst/>
+          </a:prstGeom>
+          <a:noFill/>
+        </p:spPr>
+        <p:txBody>
+          <a:bodyPr wrap="square" anchor="t">
+            <a:spAutoFit/>
+          </a:bodyPr>
+          <a:lstStyle/>
+          <a:p>
+            <a:pPr algn="l">
+              <a:lnSpc>
+                <a:spcPct val="115000"/>
+              </a:lnSpc>
+            </a:pPr>
+            <a:r>
+              <a:rPr sz="1100" b="1" i="0">
+                <a:solidFill>
+                  <a:srgbClr val="898781"/>
+                </a:solidFill>
+                <a:latin typeface="Arial"/>
+              </a:rPr>
+              <a:t>REJECTED RECORDS</a:t>
+            </a:r>
+          </a:p>
+        </p:txBody>
+      </p:sp>
+      <p:sp>
+        <p:nvSpPr>
+          <p:cNvPr id="12" name="TextBox 11"/>
+          <p:cNvSpPr txBox="1"/>
+          <p:nvPr/>
+        </p:nvSpPr>
+        <p:spPr>
+          <a:xfrm>
+            <a:off x="4507992" y="2157984"/>
+            <a:ext cx="2962656" cy="731520"/>
+          </a:xfrm>
+          <a:prstGeom prst="rect">
+            <a:avLst/>
+          </a:prstGeom>
+          <a:noFill/>
+        </p:spPr>
+        <p:txBody>
+          <a:bodyPr wrap="square" anchor="t">
+            <a:spAutoFit/>
+          </a:bodyPr>
+          <a:lstStyle/>
+          <a:p>
+            <a:pPr algn="l">
+              <a:lnSpc>
+                <a:spcPct val="115000"/>
+              </a:lnSpc>
+            </a:pPr>
+            <a:r>
+              <a:rPr sz="2700" b="1" i="0">
+                <a:solidFill>
+                  <a:srgbClr val="0B1F33"/>
+                </a:solidFill>
+                <a:latin typeface="Arial"/>
+              </a:rPr>
+              <a:t>1,226</a:t>
+            </a:r>
+          </a:p>
+        </p:txBody>
+      </p:sp>
+      <p:sp>
+        <p:nvSpPr>
+          <p:cNvPr id="13" name="Rounded Rectangle 12"/>
+          <p:cNvSpPr/>
+          <p:nvPr/>
+        </p:nvSpPr>
+        <p:spPr>
+          <a:xfrm>
+            <a:off x="7863840" y="1737360"/>
+            <a:ext cx="3291840" cy="1234440"/>
+          </a:xfrm>
+          <a:prstGeom prst="roundRect">
+            <a:avLst>
+              <a:gd name="adj" fmla="val 16000"/>
+            </a:avLst>
+          </a:prstGeom>
+          <a:solidFill>
+            <a:srgbClr val="F2F7FB"/>
+          </a:solidFill>
+          <a:ln w="9525">
+            <a:solidFill>
+              <a:srgbClr val="C9D8E8"/>
+            </a:solidFill>
+          </a:ln>
+          <a:effectLst/>
+          <a:effectLst>
+            <a:outerShdw blurRad="180000" dist="45000" dir="5400000" rotWithShape="0">
+              <a:srgbClr val="0B1F33">
+                <a:alpha val="72000"/>
+              </a:srgbClr>
+            </a:outerShdw>
+          </a:effectLst>
+        </p:spPr>
+        <p:style>
+          <a:lnRef idx="1">
+            <a:schemeClr val="accent1"/>
+          </a:lnRef>
+          <a:fillRef idx="3">
+            <a:schemeClr val="accent1"/>
+          </a:fillRef>
+          <a:effectRef idx="2">
+            <a:schemeClr val="accent1"/>
+          </a:effectRef>
+          <a:fontRef idx="minor">
+            <a:schemeClr val="lt1"/>
+          </a:fontRef>
+        </p:style>
+        <p:txBody>
+          <a:bodyPr rtlCol="0" anchor="ctr"/>
+          <a:lstStyle/>
+          <a:p>
+            <a:pPr algn="ctr"/>
+          </a:p>
+        </p:txBody>
+      </p:sp>
+      <p:sp>
+        <p:nvSpPr>
+          <p:cNvPr id="14" name="TextBox 13"/>
+          <p:cNvSpPr txBox="1"/>
+          <p:nvPr/>
+        </p:nvSpPr>
+        <p:spPr>
+          <a:xfrm>
+            <a:off x="8028432" y="1865376"/>
+            <a:ext cx="2962656" cy="320040"/>
+          </a:xfrm>
+          <a:prstGeom prst="rect">
+            <a:avLst/>
+          </a:prstGeom>
+          <a:noFill/>
+        </p:spPr>
+        <p:txBody>
+          <a:bodyPr wrap="square" anchor="t">
+            <a:spAutoFit/>
+          </a:bodyPr>
+          <a:lstStyle/>
+          <a:p>
+            <a:pPr algn="l">
+              <a:lnSpc>
+                <a:spcPct val="115000"/>
+              </a:lnSpc>
+            </a:pPr>
+            <a:r>
+              <a:rPr sz="1100" b="1" i="0">
+                <a:solidFill>
+                  <a:srgbClr val="898781"/>
+                </a:solidFill>
+                <a:latin typeface="Arial"/>
+              </a:rPr>
+              <a:t>% CRITICAL HOURS</a:t>
+            </a:r>
+          </a:p>
+        </p:txBody>
+      </p:sp>
+      <p:sp>
+        <p:nvSpPr>
+          <p:cNvPr id="15" name="TextBox 14"/>
+          <p:cNvSpPr txBox="1"/>
+          <p:nvPr/>
+        </p:nvSpPr>
+        <p:spPr>
+          <a:xfrm>
+            <a:off x="8028432" y="2157984"/>
+            <a:ext cx="2962656" cy="731520"/>
+          </a:xfrm>
+          <a:prstGeom prst="rect">
+            <a:avLst/>
+          </a:prstGeom>
+          <a:noFill/>
+        </p:spPr>
+        <p:txBody>
+          <a:bodyPr wrap="square" anchor="t">
+            <a:spAutoFit/>
+          </a:bodyPr>
+          <a:lstStyle/>
+          <a:p>
+            <a:pPr algn="l">
+              <a:lnSpc>
+                <a:spcPct val="115000"/>
+              </a:lnSpc>
+            </a:pPr>
+            <a:r>
+              <a:rPr sz="2700" b="1" i="0">
+                <a:solidFill>
+                  <a:srgbClr val="D03B3B"/>
+                </a:solidFill>
+                <a:latin typeface="Arial"/>
+              </a:rPr>
+              <a:t>13.11%</a:t>
+            </a:r>
+          </a:p>
+        </p:txBody>
+      </p:sp>
+      <p:sp>
+        <p:nvSpPr>
+          <p:cNvPr id="16" name="Rounded Rectangle 15"/>
+          <p:cNvSpPr/>
+          <p:nvPr/>
+        </p:nvSpPr>
+        <p:spPr>
+          <a:xfrm>
+            <a:off x="822960" y="3200400"/>
+            <a:ext cx="3291840" cy="1234440"/>
+          </a:xfrm>
+          <a:prstGeom prst="roundRect">
+            <a:avLst>
+              <a:gd name="adj" fmla="val 16000"/>
+            </a:avLst>
+          </a:prstGeom>
+          <a:solidFill>
+            <a:srgbClr val="F2F7FB"/>
+          </a:solidFill>
+          <a:ln w="9525">
+            <a:solidFill>
+              <a:srgbClr val="C9D8E8"/>
+            </a:solidFill>
+          </a:ln>
+          <a:effectLst/>
+          <a:effectLst>
+            <a:outerShdw blurRad="180000" dist="45000" dir="5400000" rotWithShape="0">
+              <a:srgbClr val="0B1F33">
+                <a:alpha val="72000"/>
+              </a:srgbClr>
+            </a:outerShdw>
+          </a:effectLst>
+        </p:spPr>
+        <p:style>
+          <a:lnRef idx="1">
+            <a:schemeClr val="accent1"/>
+          </a:lnRef>
+          <a:fillRef idx="3">
+            <a:schemeClr val="accent1"/>
+          </a:fillRef>
+          <a:effectRef idx="2">
+            <a:schemeClr val="accent1"/>
+          </a:effectRef>
+          <a:fontRef idx="minor">
+            <a:schemeClr val="lt1"/>
+          </a:fontRef>
+        </p:style>
+        <p:txBody>
+          <a:bodyPr rtlCol="0" anchor="ctr"/>
+          <a:lstStyle/>
+          <a:p>
+            <a:pPr algn="ctr"/>
+          </a:p>
+        </p:txBody>
+      </p:sp>
+      <p:sp>
+        <p:nvSpPr>
+          <p:cNvPr id="17" name="TextBox 16"/>
+          <p:cNvSpPr txBox="1"/>
+          <p:nvPr/>
+        </p:nvSpPr>
+        <p:spPr>
+          <a:xfrm>
+            <a:off x="987552" y="3328416"/>
+            <a:ext cx="2962656" cy="320040"/>
+          </a:xfrm>
+          <a:prstGeom prst="rect">
+            <a:avLst/>
+          </a:prstGeom>
+          <a:noFill/>
+        </p:spPr>
+        <p:txBody>
+          <a:bodyPr wrap="square" anchor="t">
+            <a:spAutoFit/>
+          </a:bodyPr>
+          <a:lstStyle/>
+          <a:p>
+            <a:pPr algn="l">
+              <a:lnSpc>
+                <a:spcPct val="115000"/>
+              </a:lnSpc>
+            </a:pPr>
+            <a:r>
+              <a:rPr sz="1100" b="1" i="0">
+                <a:solidFill>
+                  <a:srgbClr val="898781"/>
+                </a:solidFill>
+                <a:latin typeface="Arial"/>
+              </a:rPr>
+              <a:t>AVG. CO</a:t>
+            </a:r>
+          </a:p>
+        </p:txBody>
+      </p:sp>
+      <p:sp>
+        <p:nvSpPr>
+          <p:cNvPr id="18" name="TextBox 17"/>
+          <p:cNvSpPr txBox="1"/>
+          <p:nvPr/>
+        </p:nvSpPr>
+        <p:spPr>
+          <a:xfrm>
+            <a:off x="987552" y="3621024"/>
+            <a:ext cx="2962656" cy="731520"/>
+          </a:xfrm>
+          <a:prstGeom prst="rect">
+            <a:avLst/>
+          </a:prstGeom>
+          <a:noFill/>
+        </p:spPr>
+        <p:txBody>
+          <a:bodyPr wrap="square" anchor="t">
+            <a:spAutoFit/>
+          </a:bodyPr>
+          <a:lstStyle/>
+          <a:p>
+            <a:pPr algn="l">
+              <a:lnSpc>
+                <a:spcPct val="115000"/>
+              </a:lnSpc>
+            </a:pPr>
+            <a:r>
+              <a:rPr sz="2700" b="1" i="0">
+                <a:solidFill>
+                  <a:srgbClr val="0B1F33"/>
+                </a:solidFill>
+                <a:latin typeface="Arial"/>
+              </a:rPr>
+              <a:t>2.15 mg/m3</a:t>
+            </a:r>
+          </a:p>
+        </p:txBody>
+      </p:sp>
+      <p:sp>
+        <p:nvSpPr>
+          <p:cNvPr id="19" name="Rounded Rectangle 18"/>
+          <p:cNvSpPr/>
+          <p:nvPr/>
+        </p:nvSpPr>
+        <p:spPr>
+          <a:xfrm>
+            <a:off x="4343400" y="3200400"/>
+            <a:ext cx="3291840" cy="1234440"/>
+          </a:xfrm>
+          <a:prstGeom prst="roundRect">
+            <a:avLst>
+              <a:gd name="adj" fmla="val 16000"/>
+            </a:avLst>
+          </a:prstGeom>
+          <a:solidFill>
+            <a:srgbClr val="F2F7FB"/>
+          </a:solidFill>
+          <a:ln w="9525">
+            <a:solidFill>
+              <a:srgbClr val="C9D8E8"/>
+            </a:solidFill>
+          </a:ln>
+          <a:effectLst/>
+          <a:effectLst>
+            <a:outerShdw blurRad="180000" dist="45000" dir="5400000" rotWithShape="0">
+              <a:srgbClr val="0B1F33">
+                <a:alpha val="72000"/>
+              </a:srgbClr>
+            </a:outerShdw>
+          </a:effectLst>
+        </p:spPr>
+        <p:style>
+          <a:lnRef idx="1">
+            <a:schemeClr val="accent1"/>
+          </a:lnRef>
+          <a:fillRef idx="3">
+            <a:schemeClr val="accent1"/>
+          </a:fillRef>
+          <a:effectRef idx="2">
+            <a:schemeClr val="accent1"/>
+          </a:effectRef>
+          <a:fontRef idx="minor">
+            <a:schemeClr val="lt1"/>
+          </a:fontRef>
+        </p:style>
+        <p:txBody>
+          <a:bodyPr rtlCol="0" anchor="ctr"/>
+          <a:lstStyle/>
+          <a:p>
+            <a:pPr algn="ctr"/>
+          </a:p>
+        </p:txBody>
+      </p:sp>
+      <p:sp>
+        <p:nvSpPr>
+          <p:cNvPr id="20" name="TextBox 19"/>
+          <p:cNvSpPr txBox="1"/>
+          <p:nvPr/>
+        </p:nvSpPr>
+        <p:spPr>
+          <a:xfrm>
+            <a:off x="4507992" y="3328416"/>
+            <a:ext cx="2962656" cy="320040"/>
+          </a:xfrm>
+          <a:prstGeom prst="rect">
+            <a:avLst/>
+          </a:prstGeom>
+          <a:noFill/>
+        </p:spPr>
+        <p:txBody>
+          <a:bodyPr wrap="square" anchor="t">
+            <a:spAutoFit/>
+          </a:bodyPr>
+          <a:lstStyle/>
+          <a:p>
+            <a:pPr algn="l">
+              <a:lnSpc>
+                <a:spcPct val="115000"/>
+              </a:lnSpc>
+            </a:pPr>
+            <a:r>
+              <a:rPr sz="1100" b="1" i="0">
+                <a:solidFill>
+                  <a:srgbClr val="898781"/>
+                </a:solidFill>
+                <a:latin typeface="Arial"/>
+              </a:rPr>
+              <a:t>AVG. NO2</a:t>
+            </a:r>
+          </a:p>
+        </p:txBody>
+      </p:sp>
+      <p:sp>
+        <p:nvSpPr>
+          <p:cNvPr id="21" name="TextBox 20"/>
+          <p:cNvSpPr txBox="1"/>
+          <p:nvPr/>
+        </p:nvSpPr>
+        <p:spPr>
+          <a:xfrm>
+            <a:off x="4507992" y="3621024"/>
+            <a:ext cx="2962656" cy="731520"/>
+          </a:xfrm>
+          <a:prstGeom prst="rect">
+            <a:avLst/>
+          </a:prstGeom>
+          <a:noFill/>
+        </p:spPr>
+        <p:txBody>
+          <a:bodyPr wrap="square" anchor="t">
+            <a:spAutoFit/>
+          </a:bodyPr>
+          <a:lstStyle/>
+          <a:p>
+            <a:pPr algn="l">
+              <a:lnSpc>
+                <a:spcPct val="115000"/>
+              </a:lnSpc>
+            </a:pPr>
+            <a:r>
+              <a:rPr sz="2700" b="1" i="0">
+                <a:solidFill>
+                  <a:srgbClr val="0B1F33"/>
+                </a:solidFill>
+                <a:latin typeface="Arial"/>
+              </a:rPr>
+              <a:t>113.09 ug/m3</a:t>
+            </a:r>
+          </a:p>
+        </p:txBody>
+      </p:sp>
+      <p:sp>
+        <p:nvSpPr>
+          <p:cNvPr id="22" name="Rounded Rectangle 21"/>
+          <p:cNvSpPr/>
+          <p:nvPr/>
+        </p:nvSpPr>
+        <p:spPr>
+          <a:xfrm>
+            <a:off x="7863840" y="3200400"/>
+            <a:ext cx="3291840" cy="1234440"/>
+          </a:xfrm>
+          <a:prstGeom prst="roundRect">
+            <a:avLst>
+              <a:gd name="adj" fmla="val 16000"/>
+            </a:avLst>
+          </a:prstGeom>
+          <a:solidFill>
+            <a:srgbClr val="F2F7FB"/>
+          </a:solidFill>
+          <a:ln w="9525">
+            <a:solidFill>
+              <a:srgbClr val="C9D8E8"/>
+            </a:solidFill>
+          </a:ln>
+          <a:effectLst/>
+          <a:effectLst>
+            <a:outerShdw blurRad="180000" dist="45000" dir="5400000" rotWithShape="0">
+              <a:srgbClr val="0B1F33">
+                <a:alpha val="72000"/>
+              </a:srgbClr>
+            </a:outerShdw>
+          </a:effectLst>
+        </p:spPr>
+        <p:style>
+          <a:lnRef idx="1">
+            <a:schemeClr val="accent1"/>
+          </a:lnRef>
+          <a:fillRef idx="3">
+            <a:schemeClr val="accent1"/>
+          </a:fillRef>
+          <a:effectRef idx="2">
+            <a:schemeClr val="accent1"/>
+          </a:effectRef>
+          <a:fontRef idx="minor">
+            <a:schemeClr val="lt1"/>
+          </a:fontRef>
+        </p:style>
+        <p:txBody>
+          <a:bodyPr rtlCol="0" anchor="ctr"/>
+          <a:lstStyle/>
+          <a:p>
+            <a:pPr algn="ctr"/>
+          </a:p>
+        </p:txBody>
+      </p:sp>
+      <p:sp>
+        <p:nvSpPr>
+          <p:cNvPr id="23" name="TextBox 22"/>
+          <p:cNvSpPr txBox="1"/>
+          <p:nvPr/>
+        </p:nvSpPr>
+        <p:spPr>
+          <a:xfrm>
+            <a:off x="8028432" y="3328416"/>
+            <a:ext cx="2962656" cy="320040"/>
+          </a:xfrm>
+          <a:prstGeom prst="rect">
+            <a:avLst/>
+          </a:prstGeom>
+          <a:noFill/>
+        </p:spPr>
+        <p:txBody>
+          <a:bodyPr wrap="square" anchor="t">
+            <a:spAutoFit/>
+          </a:bodyPr>
+          <a:lstStyle/>
+          <a:p>
+            <a:pPr algn="l">
+              <a:lnSpc>
+                <a:spcPct val="115000"/>
+              </a:lnSpc>
+            </a:pPr>
+            <a:r>
+              <a:rPr sz="1100" b="1" i="0">
+                <a:solidFill>
+                  <a:srgbClr val="898781"/>
+                </a:solidFill>
+                <a:latin typeface="Arial"/>
+              </a:rPr>
+              <a:t>DAYS CONSOLIDATED</a:t>
+            </a:r>
+          </a:p>
+        </p:txBody>
+      </p:sp>
+      <p:sp>
+        <p:nvSpPr>
+          <p:cNvPr id="24" name="TextBox 23"/>
+          <p:cNvSpPr txBox="1"/>
+          <p:nvPr/>
+        </p:nvSpPr>
+        <p:spPr>
+          <a:xfrm>
+            <a:off x="8028432" y="3621024"/>
+            <a:ext cx="2962656" cy="731520"/>
+          </a:xfrm>
+          <a:prstGeom prst="rect">
+            <a:avLst/>
+          </a:prstGeom>
+          <a:noFill/>
+        </p:spPr>
+        <p:txBody>
+          <a:bodyPr wrap="square" anchor="t">
+            <a:spAutoFit/>
+          </a:bodyPr>
+          <a:lstStyle/>
+          <a:p>
+            <a:pPr algn="l">
+              <a:lnSpc>
+                <a:spcPct val="115000"/>
+              </a:lnSpc>
+            </a:pPr>
+            <a:r>
+              <a:rPr sz="2700" b="1" i="0">
+                <a:solidFill>
+                  <a:srgbClr val="0B1F33"/>
+                </a:solidFill>
+                <a:latin typeface="Arial"/>
+              </a:rPr>
+              <a:t>363</a:t>
+            </a:r>
+          </a:p>
+        </p:txBody>
+      </p:sp>
+      <p:pic>
+        <p:nvPicPr>
+          <p:cNvPr id="25" name="Picture 24" descr="icon_check.png"/>
+          <p:cNvPicPr>
+            <a:picLocks noChangeAspect="1"/>
+          </p:cNvPicPr>
+          <p:nvPr/>
+        </p:nvPicPr>
+        <p:blipFill>
+          <a:blip r:embed="rId3"/>
+          <a:stretch>
+            <a:fillRect/>
+          </a:stretch>
+        </p:blipFill>
+        <p:spPr>
+          <a:xfrm>
+            <a:off x="822960" y="4709160"/>
+            <a:ext cx="502920" cy="502920"/>
+          </a:xfrm>
+          <a:prstGeom prst="rect">
+            <a:avLst/>
+          </a:prstGeom>
+        </p:spPr>
+      </p:pic>
+      <p:sp>
+        <p:nvSpPr>
+          <p:cNvPr id="26" name="TextBox 25"/>
+          <p:cNvSpPr txBox="1"/>
+          <p:nvPr/>
+        </p:nvSpPr>
+        <p:spPr>
+          <a:xfrm>
+            <a:off x="1463040" y="4709160"/>
+            <a:ext cx="9784080" cy="1371600"/>
+          </a:xfrm>
+          <a:prstGeom prst="rect">
+            <a:avLst/>
+          </a:prstGeom>
+          <a:noFill/>
+        </p:spPr>
+        <p:txBody>
+          <a:bodyPr wrap="square" anchor="t">
+            <a:spAutoFit/>
+          </a:bodyPr>
+          <a:lstStyle/>
+          <a:p>
+            <a:pPr algn="l">
+              <a:lnSpc>
+                <a:spcPct val="130000"/>
+              </a:lnSpc>
+            </a:pPr>
+            <a:r>
+              <a:rPr sz="1400" b="0" i="0">
+                <a:solidFill>
+                  <a:srgbClr val="26364A"/>
+                </a:solidFill>
+                <a:latin typeface="Arial"/>
+              </a:rPr>
+              <a:t>Valid plus rejected readings match the dataset total after removing the 114 empty export rows. The</a:t>
+            </a:r>
+          </a:p>
+          <a:p>
+            <a:pPr algn="l">
+              <a:lnSpc>
+                <a:spcPct val="130000"/>
+              </a:lnSpc>
+            </a:pPr>
+            <a:r>
+              <a:rPr sz="1400" b="0" i="0">
+                <a:solidFill>
+                  <a:srgbClr val="26364A"/>
+                </a:solidFill>
+                <a:latin typeface="Arial"/>
+              </a:rPr>
+              <a:t>worst-day ranking shows high NO2 and a high critical-hour share on the same dates as the highest CO,</a:t>
+            </a:r>
+          </a:p>
+          <a:p>
+            <a:pPr algn="l">
+              <a:lnSpc>
+                <a:spcPct val="130000"/>
+              </a:lnSpc>
+            </a:pPr>
+            <a:r>
+              <a:rPr sz="1400" b="0" i="0">
+                <a:solidFill>
+                  <a:srgbClr val="26364A"/>
+                </a:solidFill>
+                <a:latin typeface="Arial"/>
+              </a:rPr>
+              <a:t>consistent with real pollutant behavior.</a:t>
+            </a:r>
+          </a:p>
+        </p:txBody>
+      </p:sp>
+      <p:sp>
+        <p:nvSpPr>
+          <p:cNvPr id="27" name="TextBox 26"/>
+          <p:cNvSpPr txBox="1"/>
+          <p:nvPr/>
+        </p:nvSpPr>
+        <p:spPr>
+          <a:xfrm>
+            <a:off x="640080" y="6510528"/>
+            <a:ext cx="5486400" cy="274320"/>
+          </a:xfrm>
+          <a:prstGeom prst="rect">
+            <a:avLst/>
+          </a:prstGeom>
+          <a:noFill/>
+        </p:spPr>
+        <p:txBody>
+          <a:bodyPr wrap="square" anchor="t">
+            <a:spAutoFit/>
+          </a:bodyPr>
+          <a:lstStyle/>
+          <a:p>
+            <a:pPr algn="l">
+              <a:lnSpc>
+                <a:spcPct val="115000"/>
+              </a:lnSpc>
+            </a:pPr>
+            <a:r>
+              <a:rPr sz="1000" b="0" i="0">
+                <a:solidFill>
+                  <a:srgbClr val="898781"/>
+                </a:solidFill>
+                <a:latin typeface="Arial"/>
+              </a:rPr>
+              <a:t>AeroTrack | Module 6 | Apache Hop</a:t>
+            </a:r>
+          </a:p>
+        </p:txBody>
+      </p:sp>
+      <p:sp>
+        <p:nvSpPr>
+          <p:cNvPr id="28" name="TextBox 27"/>
+          <p:cNvSpPr txBox="1"/>
+          <p:nvPr/>
+        </p:nvSpPr>
+        <p:spPr>
+          <a:xfrm>
+            <a:off x="10972800" y="6510528"/>
+            <a:ext cx="640080" cy="274320"/>
+          </a:xfrm>
+          <a:prstGeom prst="rect">
+            <a:avLst/>
+          </a:prstGeom>
+          <a:noFill/>
+        </p:spPr>
+        <p:txBody>
+          <a:bodyPr wrap="square" anchor="t">
+            <a:spAutoFit/>
+          </a:bodyPr>
+          <a:lstStyle/>
+          <a:p>
+            <a:pPr algn="r">
+              <a:lnSpc>
+                <a:spcPct val="115000"/>
+              </a:lnSpc>
+            </a:pPr>
+            <a:r>
+              <a:rPr sz="1000" b="0" i="0">
+                <a:solidFill>
+                  <a:srgbClr val="898781"/>
+                </a:solidFill>
+                <a:latin typeface="Arial"/>
+              </a:rPr>
+              <a:t>14</a:t>
+            </a:r>
+          </a:p>
+        </p:txBody>
+      </p:sp>
+    </p:spTree>
+  </p:cSld>
+  <p:clrMapOvr>
+    <a:masterClrMapping/>
+  </p:clrMapOvr>
+</p:sld>
+</file>
+
+<file path=ppt/slides/slide15.xml><?xml version="1.0" encoding="utf-8"?>
 <p:sld xmlns:a="http://schemas.openxmlformats.org/drawingml/2006/main" xmlns:p="http://schemas.openxmlformats.org/presentationml/2006/main" xmlns:r="http://schemas.openxmlformats.org/officeDocument/2006/relationships">
   <p:cSld>
     <p:bg>
@@ -5454,8 +6436,8 @@
         </p:nvSpPr>
         <p:spPr>
           <a:xfrm>
-            <a:off x="0" y="914400"/>
-            <a:ext cx="12191695" cy="548640"/>
+            <a:off x="640080" y="640080"/>
+            <a:ext cx="10515600" cy="822960"/>
           </a:xfrm>
           <a:prstGeom prst="rect">
             <a:avLst/>
@@ -5468,7 +6450,7 @@
           </a:bodyPr>
           <a:lstStyle/>
           <a:p>
-            <a:pPr algn="ctr">
+            <a:pPr algn="l">
               <a:lnSpc>
                 <a:spcPct val="115000"/>
               </a:lnSpc>
@@ -5480,27 +6462,29 @@
                 </a:solidFill>
                 <a:latin typeface="Arial"/>
               </a:rPr>
-              <a:t>Equipe AeroTrack</a:t>
-            </a:r>
-          </a:p>
-        </p:txBody>
-      </p:sp>
-      <p:sp>
-        <p:nvSpPr>
-          <p:cNvPr id="3" name="Rectangle 2"/>
+              <a:t>Every critical hour now has a record</a:t>
+            </a:r>
+          </a:p>
+        </p:txBody>
+      </p:sp>
+      <p:sp>
+        <p:nvSpPr>
+          <p:cNvPr id="3" name="Rounded Rectangle 2"/>
           <p:cNvSpPr/>
           <p:nvPr/>
         </p:nvSpPr>
         <p:spPr>
           <a:xfrm>
-            <a:off x="5486400" y="1600200"/>
-            <a:ext cx="1216152" cy="38100"/>
-          </a:xfrm>
-          <a:prstGeom prst="rect">
-            <a:avLst/>
+            <a:off x="658368" y="1417320"/>
+            <a:ext cx="1188720" cy="50800"/>
+          </a:xfrm>
+          <a:prstGeom prst="roundRect">
+            <a:avLst>
+              <a:gd name="adj" fmla="val 50000"/>
+            </a:avLst>
           </a:prstGeom>
           <a:solidFill>
-            <a:srgbClr val="1BAF7A"/>
+            <a:srgbClr val="E8A300"/>
           </a:solidFill>
           <a:ln>
             <a:noFill/>
@@ -5537,8 +6521,88 @@
         </p:nvSpPr>
         <p:spPr>
           <a:xfrm>
-            <a:off x="0" y="2194560"/>
-            <a:ext cx="12191695" cy="411480"/>
+            <a:off x="822960" y="1920240"/>
+            <a:ext cx="10424160" cy="3840480"/>
+          </a:xfrm>
+          <a:prstGeom prst="rect">
+            <a:avLst/>
+          </a:prstGeom>
+          <a:noFill/>
+        </p:spPr>
+        <p:txBody>
+          <a:bodyPr wrap="square">
+            <a:spAutoFit/>
+          </a:bodyPr>
+          <a:lstStyle/>
+          <a:p>
+            <a:pPr>
+              <a:lnSpc>
+                <a:spcPct val="115000"/>
+              </a:lnSpc>
+              <a:spcAft>
+                <a:spcPts val="1600"/>
+              </a:spcAft>
+            </a:pPr>
+            <a:r>
+              <a:rPr sz="1700">
+                <a:solidFill>
+                  <a:srgbClr val="CFE3F7"/>
+                </a:solidFill>
+                <a:latin typeface="Arial"/>
+              </a:rPr>
+              <a:t>•  AeroTrack turns raw, noisy sensor exports into a database that can answer, with evidence, when air quality was worst</a:t>
+            </a:r>
+          </a:p>
+          <a:p>
+            <a:pPr>
+              <a:lnSpc>
+                <a:spcPct val="115000"/>
+              </a:lnSpc>
+              <a:spcAft>
+                <a:spcPts val="1600"/>
+              </a:spcAft>
+            </a:pPr>
+            <a:r>
+              <a:rPr sz="1700">
+                <a:solidFill>
+                  <a:srgbClr val="CFE3F7"/>
+                </a:solidFill>
+                <a:latin typeface="Arial"/>
+              </a:rPr>
+              <a:t>•  The CO/NO2 classification was calibrated on the dataset's real distribution, not arbitrary thresholds</a:t>
+            </a:r>
+          </a:p>
+          <a:p>
+            <a:pPr>
+              <a:lnSpc>
+                <a:spcPct val="115000"/>
+              </a:lnSpc>
+              <a:spcAft>
+                <a:spcPts val="1600"/>
+              </a:spcAft>
+            </a:pPr>
+            <a:r>
+              <a:rPr sz="1700">
+                <a:solidFill>
+                  <a:srgbClr val="CFE3F7"/>
+                </a:solidFill>
+                <a:latin typeface="Arial"/>
+              </a:rPr>
+              <a:t>•  Every table is safe to reload: Insert/Update guarantees no duplicate history, run after run</a:t>
+            </a:r>
+          </a:p>
+        </p:txBody>
+      </p:sp>
+      <p:sp>
+        <p:nvSpPr>
+          <p:cNvPr id="5" name="TextBox 4"/>
+          <p:cNvSpPr txBox="1"/>
+          <p:nvPr/>
+        </p:nvSpPr>
+        <p:spPr>
+          <a:xfrm>
+            <a:off x="640080" y="6510528"/>
+            <a:ext cx="5486400" cy="274320"/>
           </a:xfrm>
           <a:prstGeom prst="rect">
             <a:avLst/>
@@ -5551,33 +6615,33 @@
           </a:bodyPr>
           <a:lstStyle/>
           <a:p>
-            <a:pPr algn="ctr">
-              <a:lnSpc>
-                <a:spcPct val="115000"/>
-              </a:lnSpc>
-            </a:pPr>
-            <a:r>
-              <a:rPr sz="1900" b="1" i="0">
-                <a:solidFill>
-                  <a:srgbClr val="FFFFFF"/>
-                </a:solidFill>
-                <a:latin typeface="Arial"/>
-              </a:rPr>
-              <a:t>Juliana Ballin Lima</a:t>
-            </a:r>
-          </a:p>
-        </p:txBody>
-      </p:sp>
-      <p:sp>
-        <p:nvSpPr>
-          <p:cNvPr id="5" name="TextBox 4"/>
+            <a:pPr algn="l">
+              <a:lnSpc>
+                <a:spcPct val="115000"/>
+              </a:lnSpc>
+            </a:pPr>
+            <a:r>
+              <a:rPr sz="1000" b="0" i="0">
+                <a:solidFill>
+                  <a:srgbClr val="898781"/>
+                </a:solidFill>
+                <a:latin typeface="Arial"/>
+              </a:rPr>
+              <a:t>AeroTrack | Module 6 | Apache Hop</a:t>
+            </a:r>
+          </a:p>
+        </p:txBody>
+      </p:sp>
+      <p:sp>
+        <p:nvSpPr>
+          <p:cNvPr id="6" name="TextBox 5"/>
           <p:cNvSpPr txBox="1"/>
           <p:nvPr/>
         </p:nvSpPr>
         <p:spPr>
           <a:xfrm>
-            <a:off x="0" y="2578608"/>
-            <a:ext cx="12191695" cy="365760"/>
+            <a:off x="10972800" y="6510528"/>
+            <a:ext cx="640080" cy="274320"/>
           </a:xfrm>
           <a:prstGeom prst="rect">
             <a:avLst/>
@@ -5590,33 +6654,151 @@
           </a:bodyPr>
           <a:lstStyle/>
           <a:p>
-            <a:pPr algn="ctr">
-              <a:lnSpc>
-                <a:spcPct val="115000"/>
-              </a:lnSpc>
-            </a:pPr>
-            <a:r>
-              <a:rPr sz="1400" b="0" i="0">
-                <a:solidFill>
-                  <a:srgbClr val="1BAF7A"/>
-                </a:solidFill>
-                <a:latin typeface="Arial"/>
-              </a:rPr>
-              <a:t>@JulianaBallin</a:t>
-            </a:r>
-          </a:p>
-        </p:txBody>
-      </p:sp>
-      <p:sp>
-        <p:nvSpPr>
-          <p:cNvPr id="6" name="TextBox 5"/>
+            <a:pPr algn="r">
+              <a:lnSpc>
+                <a:spcPct val="115000"/>
+              </a:lnSpc>
+            </a:pPr>
+            <a:r>
+              <a:rPr sz="1000" b="0" i="0">
+                <a:solidFill>
+                  <a:srgbClr val="898781"/>
+                </a:solidFill>
+                <a:latin typeface="Arial"/>
+              </a:rPr>
+              <a:t>15</a:t>
+            </a:r>
+          </a:p>
+        </p:txBody>
+      </p:sp>
+    </p:spTree>
+  </p:cSld>
+  <p:clrMapOvr>
+    <a:masterClrMapping/>
+  </p:clrMapOvr>
+</p:sld>
+</file>
+
+<file path=ppt/slides/slide16.xml><?xml version="1.0" encoding="utf-8"?>
+<p:sld xmlns:a="http://schemas.openxmlformats.org/drawingml/2006/main" xmlns:p="http://schemas.openxmlformats.org/presentationml/2006/main" xmlns:r="http://schemas.openxmlformats.org/officeDocument/2006/relationships">
+  <p:cSld>
+    <p:bg>
+      <p:bgPr>
+        <a:solidFill>
+          <a:srgbClr val="0B1F33"/>
+        </a:solidFill>
+        <a:effectLst/>
+      </p:bgPr>
+    </p:bg>
+    <p:spTree>
+      <p:nvGrpSpPr>
+        <p:cNvPr id="1" name=""/>
+        <p:cNvGrpSpPr/>
+        <p:nvPr/>
+      </p:nvGrpSpPr>
+      <p:grpSpPr/>
+      <p:sp>
+        <p:nvSpPr>
+          <p:cNvPr id="2" name="Rounded Rectangle 1"/>
+          <p:cNvSpPr/>
+          <p:nvPr/>
+        </p:nvSpPr>
+        <p:spPr>
+          <a:xfrm>
+            <a:off x="-1828800" y="-1828800"/>
+            <a:ext cx="6400800" cy="6400800"/>
+          </a:xfrm>
+          <a:prstGeom prst="roundRect">
+            <a:avLst>
+              <a:gd name="adj" fmla="val 50000"/>
+            </a:avLst>
+          </a:prstGeom>
+          <a:solidFill>
+            <a:srgbClr val="162E4A"/>
+          </a:solidFill>
+          <a:ln>
+            <a:noFill/>
+          </a:ln>
+          <a:effectLst/>
+        </p:spPr>
+        <p:style>
+          <a:lnRef idx="1">
+            <a:schemeClr val="accent1"/>
+          </a:lnRef>
+          <a:fillRef idx="3">
+            <a:schemeClr val="accent1"/>
+          </a:fillRef>
+          <a:effectRef idx="2">
+            <a:schemeClr val="accent1"/>
+          </a:effectRef>
+          <a:fontRef idx="minor">
+            <a:schemeClr val="lt1"/>
+          </a:fontRef>
+        </p:style>
+        <p:txBody>
+          <a:bodyPr rtlCol="0" anchor="ctr"/>
+          <a:lstStyle/>
+          <a:p>
+            <a:pPr algn="ctr"/>
+          </a:p>
+        </p:txBody>
+      </p:sp>
+      <p:sp>
+        <p:nvSpPr>
+          <p:cNvPr id="3" name="Rounded Rectangle 2"/>
+          <p:cNvSpPr/>
+          <p:nvPr/>
+        </p:nvSpPr>
+        <p:spPr>
+          <a:xfrm>
+            <a:off x="9601200" y="4114800"/>
+            <a:ext cx="5486400" cy="5486400"/>
+          </a:xfrm>
+          <a:prstGeom prst="roundRect">
+            <a:avLst>
+              <a:gd name="adj" fmla="val 50000"/>
+            </a:avLst>
+          </a:prstGeom>
+          <a:solidFill>
+            <a:srgbClr val="162E4A"/>
+          </a:solidFill>
+          <a:ln>
+            <a:noFill/>
+          </a:ln>
+          <a:effectLst/>
+        </p:spPr>
+        <p:style>
+          <a:lnRef idx="1">
+            <a:schemeClr val="accent1"/>
+          </a:lnRef>
+          <a:fillRef idx="3">
+            <a:schemeClr val="accent1"/>
+          </a:fillRef>
+          <a:effectRef idx="2">
+            <a:schemeClr val="accent1"/>
+          </a:effectRef>
+          <a:fontRef idx="minor">
+            <a:schemeClr val="lt1"/>
+          </a:fontRef>
+        </p:style>
+        <p:txBody>
+          <a:bodyPr rtlCol="0" anchor="ctr"/>
+          <a:lstStyle/>
+          <a:p>
+            <a:pPr algn="ctr"/>
+          </a:p>
+        </p:txBody>
+      </p:sp>
+      <p:sp>
+        <p:nvSpPr>
+          <p:cNvPr id="4" name="TextBox 3"/>
           <p:cNvSpPr txBox="1"/>
           <p:nvPr/>
         </p:nvSpPr>
         <p:spPr>
           <a:xfrm>
-            <a:off x="0" y="3108960"/>
-            <a:ext cx="12191695" cy="411480"/>
+            <a:off x="0" y="914400"/>
+            <a:ext cx="12191695" cy="548640"/>
           </a:xfrm>
           <a:prstGeom prst="rect">
             <a:avLst/>
@@ -5635,27 +6817,73 @@
               </a:lnSpc>
             </a:pPr>
             <a:r>
-              <a:rPr sz="1900" b="1" i="0">
+              <a:rPr sz="3000" b="1" i="0">
                 <a:solidFill>
                   <a:srgbClr val="FFFFFF"/>
                 </a:solidFill>
                 <a:latin typeface="Arial"/>
               </a:rPr>
-              <a:t>Allef Oliveira Ramos</a:t>
-            </a:r>
-          </a:p>
-        </p:txBody>
-      </p:sp>
-      <p:sp>
-        <p:nvSpPr>
-          <p:cNvPr id="7" name="TextBox 6"/>
+              <a:t>AeroTrack Team</a:t>
+            </a:r>
+          </a:p>
+        </p:txBody>
+      </p:sp>
+      <p:sp>
+        <p:nvSpPr>
+          <p:cNvPr id="5" name="Rounded Rectangle 4"/>
+          <p:cNvSpPr/>
+          <p:nvPr/>
+        </p:nvSpPr>
+        <p:spPr>
+          <a:xfrm>
+            <a:off x="5486400" y="1600200"/>
+            <a:ext cx="1216152" cy="50800"/>
+          </a:xfrm>
+          <a:prstGeom prst="roundRect">
+            <a:avLst>
+              <a:gd name="adj" fmla="val 50000"/>
+            </a:avLst>
+          </a:prstGeom>
+          <a:solidFill>
+            <a:srgbClr val="E8A300"/>
+          </a:solidFill>
+          <a:ln>
+            <a:noFill/>
+          </a:ln>
+          <a:effectLst/>
+        </p:spPr>
+        <p:style>
+          <a:lnRef idx="1">
+            <a:schemeClr val="accent1"/>
+          </a:lnRef>
+          <a:fillRef idx="3">
+            <a:schemeClr val="accent1"/>
+          </a:fillRef>
+          <a:effectRef idx="2">
+            <a:schemeClr val="accent1"/>
+          </a:effectRef>
+          <a:fontRef idx="minor">
+            <a:schemeClr val="lt1"/>
+          </a:fontRef>
+        </p:style>
+        <p:txBody>
+          <a:bodyPr rtlCol="0" anchor="ctr"/>
+          <a:lstStyle/>
+          <a:p>
+            <a:pPr algn="ctr"/>
+          </a:p>
+        </p:txBody>
+      </p:sp>
+      <p:sp>
+        <p:nvSpPr>
+          <p:cNvPr id="6" name="TextBox 5"/>
           <p:cNvSpPr txBox="1"/>
           <p:nvPr/>
         </p:nvSpPr>
         <p:spPr>
           <a:xfrm>
-            <a:off x="0" y="3493008"/>
-            <a:ext cx="12191695" cy="365760"/>
+            <a:off x="0" y="2194560"/>
+            <a:ext cx="12191695" cy="411480"/>
           </a:xfrm>
           <a:prstGeom prst="rect">
             <a:avLst/>
@@ -5674,27 +6902,27 @@
               </a:lnSpc>
             </a:pPr>
             <a:r>
-              <a:rPr sz="1400" b="0" i="0">
-                <a:solidFill>
-                  <a:srgbClr val="1BAF7A"/>
-                </a:solidFill>
-                <a:latin typeface="Arial"/>
-              </a:rPr>
-              <a:t>@allef-oliveira</a:t>
-            </a:r>
-          </a:p>
-        </p:txBody>
-      </p:sp>
-      <p:sp>
-        <p:nvSpPr>
-          <p:cNvPr id="8" name="TextBox 7"/>
+              <a:rPr sz="1900" b="1" i="0">
+                <a:solidFill>
+                  <a:srgbClr val="FFFFFF"/>
+                </a:solidFill>
+                <a:latin typeface="Arial"/>
+              </a:rPr>
+              <a:t>Juliana Ballin Lima</a:t>
+            </a:r>
+          </a:p>
+        </p:txBody>
+      </p:sp>
+      <p:sp>
+        <p:nvSpPr>
+          <p:cNvPr id="7" name="TextBox 6"/>
           <p:cNvSpPr txBox="1"/>
           <p:nvPr/>
         </p:nvSpPr>
         <p:spPr>
           <a:xfrm>
-            <a:off x="0" y="4023360"/>
-            <a:ext cx="12191695" cy="411480"/>
+            <a:off x="0" y="2578608"/>
+            <a:ext cx="12191695" cy="365760"/>
           </a:xfrm>
           <a:prstGeom prst="rect">
             <a:avLst/>
@@ -5713,27 +6941,27 @@
               </a:lnSpc>
             </a:pPr>
             <a:r>
-              <a:rPr sz="1900" b="1" i="0">
-                <a:solidFill>
-                  <a:srgbClr val="FFFFFF"/>
-                </a:solidFill>
-                <a:latin typeface="Arial"/>
-              </a:rPr>
-              <a:t>Fernanda de Oliveira da Costa</a:t>
-            </a:r>
-          </a:p>
-        </p:txBody>
-      </p:sp>
-      <p:sp>
-        <p:nvSpPr>
-          <p:cNvPr id="9" name="TextBox 8"/>
+              <a:rPr sz="1400" b="0" i="0">
+                <a:solidFill>
+                  <a:srgbClr val="1BAF7A"/>
+                </a:solidFill>
+                <a:latin typeface="Arial"/>
+              </a:rPr>
+              <a:t>@JulianaBallin</a:t>
+            </a:r>
+          </a:p>
+        </p:txBody>
+      </p:sp>
+      <p:sp>
+        <p:nvSpPr>
+          <p:cNvPr id="8" name="TextBox 7"/>
           <p:cNvSpPr txBox="1"/>
           <p:nvPr/>
         </p:nvSpPr>
         <p:spPr>
           <a:xfrm>
-            <a:off x="0" y="4407408"/>
-            <a:ext cx="12191695" cy="365760"/>
+            <a:off x="0" y="3108960"/>
+            <a:ext cx="12191695" cy="411480"/>
           </a:xfrm>
           <a:prstGeom prst="rect">
             <a:avLst/>
@@ -5752,27 +6980,27 @@
               </a:lnSpc>
             </a:pPr>
             <a:r>
-              <a:rPr sz="1400" b="0" i="0">
-                <a:solidFill>
-                  <a:srgbClr val="1BAF7A"/>
-                </a:solidFill>
-                <a:latin typeface="Arial"/>
-              </a:rPr>
-              <a:t>@nanda-costa</a:t>
-            </a:r>
-          </a:p>
-        </p:txBody>
-      </p:sp>
-      <p:sp>
-        <p:nvSpPr>
-          <p:cNvPr id="10" name="TextBox 9"/>
+              <a:rPr sz="1900" b="1" i="0">
+                <a:solidFill>
+                  <a:srgbClr val="FFFFFF"/>
+                </a:solidFill>
+                <a:latin typeface="Arial"/>
+              </a:rPr>
+              <a:t>Allef Oliveira Ramos</a:t>
+            </a:r>
+          </a:p>
+        </p:txBody>
+      </p:sp>
+      <p:sp>
+        <p:nvSpPr>
+          <p:cNvPr id="9" name="TextBox 8"/>
           <p:cNvSpPr txBox="1"/>
           <p:nvPr/>
         </p:nvSpPr>
         <p:spPr>
           <a:xfrm>
-            <a:off x="0" y="4937760"/>
-            <a:ext cx="12191695" cy="411480"/>
+            <a:off x="0" y="3493008"/>
+            <a:ext cx="12191695" cy="365760"/>
           </a:xfrm>
           <a:prstGeom prst="rect">
             <a:avLst/>
@@ -5791,27 +7019,27 @@
               </a:lnSpc>
             </a:pPr>
             <a:r>
-              <a:rPr sz="1900" b="1" i="0">
-                <a:solidFill>
-                  <a:srgbClr val="FFFFFF"/>
-                </a:solidFill>
-                <a:latin typeface="Arial"/>
-              </a:rPr>
-              <a:t>Pedro Henrique Oliveira Dias</a:t>
-            </a:r>
-          </a:p>
-        </p:txBody>
-      </p:sp>
-      <p:sp>
-        <p:nvSpPr>
-          <p:cNvPr id="11" name="TextBox 10"/>
+              <a:rPr sz="1400" b="0" i="0">
+                <a:solidFill>
+                  <a:srgbClr val="1BAF7A"/>
+                </a:solidFill>
+                <a:latin typeface="Arial"/>
+              </a:rPr>
+              <a:t>@allef-oliveira</a:t>
+            </a:r>
+          </a:p>
+        </p:txBody>
+      </p:sp>
+      <p:sp>
+        <p:nvSpPr>
+          <p:cNvPr id="10" name="TextBox 9"/>
           <p:cNvSpPr txBox="1"/>
           <p:nvPr/>
         </p:nvSpPr>
         <p:spPr>
           <a:xfrm>
-            <a:off x="0" y="5321808"/>
-            <a:ext cx="12191695" cy="365760"/>
+            <a:off x="0" y="4023360"/>
+            <a:ext cx="12191695" cy="411480"/>
           </a:xfrm>
           <a:prstGeom prst="rect">
             <a:avLst/>
@@ -5830,26 +7058,26 @@
               </a:lnSpc>
             </a:pPr>
             <a:r>
-              <a:rPr sz="1400" b="0" i="0">
-                <a:solidFill>
-                  <a:srgbClr val="1BAF7A"/>
-                </a:solidFill>
-                <a:latin typeface="Arial"/>
-              </a:rPr>
-              <a:t>@pedroddias-oss</a:t>
-            </a:r>
-          </a:p>
-        </p:txBody>
-      </p:sp>
-      <p:sp>
-        <p:nvSpPr>
-          <p:cNvPr id="12" name="TextBox 11"/>
+              <a:rPr sz="1900" b="1" i="0">
+                <a:solidFill>
+                  <a:srgbClr val="FFFFFF"/>
+                </a:solidFill>
+                <a:latin typeface="Arial"/>
+              </a:rPr>
+              <a:t>Fernanda de Oliveira da Costa</a:t>
+            </a:r>
+          </a:p>
+        </p:txBody>
+      </p:sp>
+      <p:sp>
+        <p:nvSpPr>
+          <p:cNvPr id="11" name="TextBox 10"/>
           <p:cNvSpPr txBox="1"/>
           <p:nvPr/>
         </p:nvSpPr>
         <p:spPr>
           <a:xfrm>
-            <a:off x="0" y="6309360"/>
+            <a:off x="0" y="4407408"/>
             <a:ext cx="12191695" cy="365760"/>
           </a:xfrm>
           <a:prstGeom prst="rect">
@@ -5869,13 +7097,130 @@
               </a:lnSpc>
             </a:pPr>
             <a:r>
+              <a:rPr sz="1400" b="0" i="0">
+                <a:solidFill>
+                  <a:srgbClr val="1BAF7A"/>
+                </a:solidFill>
+                <a:latin typeface="Arial"/>
+              </a:rPr>
+              <a:t>@nanda-costa</a:t>
+            </a:r>
+          </a:p>
+        </p:txBody>
+      </p:sp>
+      <p:sp>
+        <p:nvSpPr>
+          <p:cNvPr id="12" name="TextBox 11"/>
+          <p:cNvSpPr txBox="1"/>
+          <p:nvPr/>
+        </p:nvSpPr>
+        <p:spPr>
+          <a:xfrm>
+            <a:off x="0" y="4937760"/>
+            <a:ext cx="12191695" cy="411480"/>
+          </a:xfrm>
+          <a:prstGeom prst="rect">
+            <a:avLst/>
+          </a:prstGeom>
+          <a:noFill/>
+        </p:spPr>
+        <p:txBody>
+          <a:bodyPr wrap="square" anchor="t">
+            <a:spAutoFit/>
+          </a:bodyPr>
+          <a:lstStyle/>
+          <a:p>
+            <a:pPr algn="ctr">
+              <a:lnSpc>
+                <a:spcPct val="115000"/>
+              </a:lnSpc>
+            </a:pPr>
+            <a:r>
+              <a:rPr sz="1900" b="1" i="0">
+                <a:solidFill>
+                  <a:srgbClr val="FFFFFF"/>
+                </a:solidFill>
+                <a:latin typeface="Arial"/>
+              </a:rPr>
+              <a:t>Pedro Henrique Oliveira Dias</a:t>
+            </a:r>
+          </a:p>
+        </p:txBody>
+      </p:sp>
+      <p:sp>
+        <p:nvSpPr>
+          <p:cNvPr id="13" name="TextBox 12"/>
+          <p:cNvSpPr txBox="1"/>
+          <p:nvPr/>
+        </p:nvSpPr>
+        <p:spPr>
+          <a:xfrm>
+            <a:off x="0" y="5321808"/>
+            <a:ext cx="12191695" cy="365760"/>
+          </a:xfrm>
+          <a:prstGeom prst="rect">
+            <a:avLst/>
+          </a:prstGeom>
+          <a:noFill/>
+        </p:spPr>
+        <p:txBody>
+          <a:bodyPr wrap="square" anchor="t">
+            <a:spAutoFit/>
+          </a:bodyPr>
+          <a:lstStyle/>
+          <a:p>
+            <a:pPr algn="ctr">
+              <a:lnSpc>
+                <a:spcPct val="115000"/>
+              </a:lnSpc>
+            </a:pPr>
+            <a:r>
+              <a:rPr sz="1400" b="0" i="0">
+                <a:solidFill>
+                  <a:srgbClr val="1BAF7A"/>
+                </a:solidFill>
+                <a:latin typeface="Arial"/>
+              </a:rPr>
+              <a:t>@pedroddias-oss</a:t>
+            </a:r>
+          </a:p>
+        </p:txBody>
+      </p:sp>
+      <p:sp>
+        <p:nvSpPr>
+          <p:cNvPr id="14" name="TextBox 13"/>
+          <p:cNvSpPr txBox="1"/>
+          <p:nvPr/>
+        </p:nvSpPr>
+        <p:spPr>
+          <a:xfrm>
+            <a:off x="0" y="6309360"/>
+            <a:ext cx="12191695" cy="365760"/>
+          </a:xfrm>
+          <a:prstGeom prst="rect">
+            <a:avLst/>
+          </a:prstGeom>
+          <a:noFill/>
+        </p:spPr>
+        <p:txBody>
+          <a:bodyPr wrap="square" anchor="t">
+            <a:spAutoFit/>
+          </a:bodyPr>
+          <a:lstStyle/>
+          <a:p>
+            <a:pPr algn="ctr">
+              <a:lnSpc>
+                <a:spcPct val="115000"/>
+              </a:lnSpc>
+            </a:pPr>
+            <a:r>
               <a:rPr sz="1600" b="0" i="0">
                 <a:solidFill>
                   <a:srgbClr val="898781"/>
                 </a:solidFill>
                 <a:latin typeface="Arial"/>
               </a:rPr>
-              <a:t>Obrigado</a:t>
+              <a:t>Thank you</a:t>
             </a:r>
           </a:p>
         </p:txBody>
@@ -5894,7 +7239,7 @@
     <p:bg>
       <p:bgPr>
         <a:solidFill>
-          <a:srgbClr val="FFFFFF"/>
+          <a:srgbClr val="0B1F33"/>
         </a:solidFill>
         <a:effectLst/>
       </p:bgPr>
@@ -5906,175 +7251,9 @@
         <p:nvPr/>
       </p:nvGrpSpPr>
       <p:grpSpPr/>
-      <p:sp>
-        <p:nvSpPr>
-          <p:cNvPr id="2" name="Rectangle 1"/>
-          <p:cNvSpPr/>
-          <p:nvPr/>
-        </p:nvSpPr>
-        <p:spPr>
-          <a:xfrm>
-            <a:off x="0" y="0"/>
-            <a:ext cx="12191695" cy="128016"/>
-          </a:xfrm>
-          <a:prstGeom prst="rect">
-            <a:avLst/>
-          </a:prstGeom>
-          <a:solidFill>
-            <a:srgbClr val="2A78D6"/>
-          </a:solidFill>
-          <a:ln>
-            <a:noFill/>
-          </a:ln>
-          <a:effectLst/>
-        </p:spPr>
-        <p:style>
-          <a:lnRef idx="1">
-            <a:schemeClr val="accent1"/>
-          </a:lnRef>
-          <a:fillRef idx="3">
-            <a:schemeClr val="accent1"/>
-          </a:fillRef>
-          <a:effectRef idx="2">
-            <a:schemeClr val="accent1"/>
-          </a:effectRef>
-          <a:fontRef idx="minor">
-            <a:schemeClr val="lt1"/>
-          </a:fontRef>
-        </p:style>
-        <p:txBody>
-          <a:bodyPr rtlCol="0" anchor="ctr"/>
-          <a:lstStyle/>
-          <a:p>
-            <a:pPr algn="ctr"/>
-          </a:p>
-        </p:txBody>
-      </p:sp>
-      <p:sp>
-        <p:nvSpPr>
-          <p:cNvPr id="3" name="TextBox 2"/>
-          <p:cNvSpPr txBox="1"/>
-          <p:nvPr/>
-        </p:nvSpPr>
-        <p:spPr>
-          <a:xfrm>
-            <a:off x="640080" y="320040"/>
-            <a:ext cx="7315200" cy="365760"/>
-          </a:xfrm>
-          <a:prstGeom prst="rect">
-            <a:avLst/>
-          </a:prstGeom>
-          <a:noFill/>
-        </p:spPr>
-        <p:txBody>
-          <a:bodyPr wrap="square" anchor="t">
-            <a:spAutoFit/>
-          </a:bodyPr>
-          <a:lstStyle/>
-          <a:p>
-            <a:pPr algn="l">
-              <a:lnSpc>
-                <a:spcPct val="115000"/>
-              </a:lnSpc>
-            </a:pPr>
-            <a:r>
-              <a:rPr sz="1400" b="1" i="0">
-                <a:solidFill>
-                  <a:srgbClr val="1BAF7A"/>
-                </a:solidFill>
-                <a:latin typeface="Arial"/>
-              </a:rPr>
-              <a:t>ROTEIRO</a:t>
-            </a:r>
-          </a:p>
-        </p:txBody>
-      </p:sp>
-      <p:sp>
-        <p:nvSpPr>
-          <p:cNvPr id="4" name="TextBox 3"/>
-          <p:cNvSpPr txBox="1"/>
-          <p:nvPr/>
-        </p:nvSpPr>
-        <p:spPr>
-          <a:xfrm>
-            <a:off x="640080" y="621792"/>
-            <a:ext cx="10789920" cy="822960"/>
-          </a:xfrm>
-          <a:prstGeom prst="rect">
-            <a:avLst/>
-          </a:prstGeom>
-          <a:noFill/>
-        </p:spPr>
-        <p:txBody>
-          <a:bodyPr wrap="square" anchor="t">
-            <a:spAutoFit/>
-          </a:bodyPr>
-          <a:lstStyle/>
-          <a:p>
-            <a:pPr algn="l">
-              <a:lnSpc>
-                <a:spcPct val="115000"/>
-              </a:lnSpc>
-            </a:pPr>
-            <a:r>
-              <a:rPr sz="3000" b="1" i="0">
-                <a:solidFill>
-                  <a:srgbClr val="0B1F33"/>
-                </a:solidFill>
-                <a:latin typeface="Arial"/>
-              </a:rPr>
-              <a:t>Agenda da apresentacao</a:t>
-            </a:r>
-          </a:p>
-        </p:txBody>
-      </p:sp>
-      <p:sp>
-        <p:nvSpPr>
-          <p:cNvPr id="5" name="Rectangle 4"/>
-          <p:cNvSpPr/>
-          <p:nvPr/>
-        </p:nvSpPr>
-        <p:spPr>
-          <a:xfrm>
-            <a:off x="658368" y="1298448"/>
-            <a:ext cx="1188720" cy="38100"/>
-          </a:xfrm>
-          <a:prstGeom prst="rect">
-            <a:avLst/>
-          </a:prstGeom>
-          <a:solidFill>
-            <a:srgbClr val="1BAF7A"/>
-          </a:solidFill>
-          <a:ln>
-            <a:noFill/>
-          </a:ln>
-          <a:effectLst/>
-        </p:spPr>
-        <p:style>
-          <a:lnRef idx="1">
-            <a:schemeClr val="accent1"/>
-          </a:lnRef>
-          <a:fillRef idx="3">
-            <a:schemeClr val="accent1"/>
-          </a:fillRef>
-          <a:effectRef idx="2">
-            <a:schemeClr val="accent1"/>
-          </a:effectRef>
-          <a:fontRef idx="minor">
-            <a:schemeClr val="lt1"/>
-          </a:fontRef>
-        </p:style>
-        <p:txBody>
-          <a:bodyPr rtlCol="0" anchor="ctr"/>
-          <a:lstStyle/>
-          <a:p>
-            <a:pPr algn="ctr"/>
-          </a:p>
-        </p:txBody>
-      </p:sp>
       <p:pic>
         <p:nvPicPr>
-          <p:cNvPr id="6" name="Picture 5" descr="aerotrack-icon.png"/>
+          <p:cNvPr id="2" name="Picture 1" descr="icon_lungs.png"/>
           <p:cNvPicPr>
             <a:picLocks noChangeAspect="1"/>
           </p:cNvPicPr>
@@ -6088,8 +7267,8 @@
         </p:blipFill>
         <p:spPr>
           <a:xfrm>
-            <a:off x="11292840" y="292608"/>
-            <a:ext cx="502920" cy="502920"/>
+            <a:off x="822960" y="914400"/>
+            <a:ext cx="1371600" cy="1371600"/>
           </a:xfrm>
           <a:prstGeom prst="rect">
             <a:avLst/>
@@ -6098,189 +7277,14 @@
       </p:pic>
       <p:sp>
         <p:nvSpPr>
-          <p:cNvPr id="7" name="TextBox 6"/>
+          <p:cNvPr id="3" name="TextBox 2"/>
           <p:cNvSpPr txBox="1"/>
           <p:nvPr/>
         </p:nvSpPr>
         <p:spPr>
           <a:xfrm>
-            <a:off x="822960" y="1737360"/>
-            <a:ext cx="10058400" cy="4389120"/>
-          </a:xfrm>
-          <a:prstGeom prst="rect">
-            <a:avLst/>
-          </a:prstGeom>
-          <a:noFill/>
-        </p:spPr>
-        <p:txBody>
-          <a:bodyPr wrap="square">
-            <a:spAutoFit/>
-          </a:bodyPr>
-          <a:lstStyle/>
-          <a:p>
-            <a:pPr>
-              <a:lnSpc>
-                <a:spcPct val="112000"/>
-              </a:lnSpc>
-              <a:spcAft>
-                <a:spcPts val="1400"/>
-              </a:spcAft>
-            </a:pPr>
-            <a:r>
-              <a:rPr sz="1900">
-                <a:solidFill>
-                  <a:srgbClr val="26364A"/>
-                </a:solidFill>
-                <a:latin typeface="Arial"/>
-              </a:rPr>
-              <a:t>•  Contexto, dataset e problema</a:t>
-            </a:r>
-          </a:p>
-          <a:p>
-            <a:pPr>
-              <a:lnSpc>
-                <a:spcPct val="112000"/>
-              </a:lnSpc>
-              <a:spcAft>
-                <a:spcPts val="1400"/>
-              </a:spcAft>
-            </a:pPr>
-            <a:r>
-              <a:rPr sz="1900">
-                <a:solidFill>
-                  <a:srgbClr val="26364A"/>
-                </a:solidFill>
-                <a:latin typeface="Arial"/>
-              </a:rPr>
-              <a:t>•  Arquitetura da solucao</a:t>
-            </a:r>
-          </a:p>
-          <a:p>
-            <a:pPr>
-              <a:lnSpc>
-                <a:spcPct val="112000"/>
-              </a:lnSpc>
-              <a:spcAft>
-                <a:spcPts val="1400"/>
-              </a:spcAft>
-            </a:pPr>
-            <a:r>
-              <a:rPr sz="1900">
-                <a:solidFill>
-                  <a:srgbClr val="26364A"/>
-                </a:solidFill>
-                <a:latin typeface="Arial"/>
-              </a:rPr>
-              <a:t>•  Pipelines e workflow no Apache Hop</a:t>
-            </a:r>
-          </a:p>
-          <a:p>
-            <a:pPr>
-              <a:lnSpc>
-                <a:spcPct val="112000"/>
-              </a:lnSpc>
-              <a:spcAft>
-                <a:spcPts val="1400"/>
-              </a:spcAft>
-            </a:pPr>
-            <a:r>
-              <a:rPr sz="1900">
-                <a:solidFill>
-                  <a:srgbClr val="26364A"/>
-                </a:solidFill>
-                <a:latin typeface="Arial"/>
-              </a:rPr>
-              <a:t>•  Tratamento de dados</a:t>
-            </a:r>
-          </a:p>
-          <a:p>
-            <a:pPr>
-              <a:lnSpc>
-                <a:spcPct val="112000"/>
-              </a:lnSpc>
-              <a:spcAft>
-                <a:spcPts val="1400"/>
-              </a:spcAft>
-            </a:pPr>
-            <a:r>
-              <a:rPr sz="1900">
-                <a:solidFill>
-                  <a:srgbClr val="26364A"/>
-                </a:solidFill>
-                <a:latin typeface="Arial"/>
-              </a:rPr>
-              <a:t>•  Banco de dados e estrategia de reexecucao</a:t>
-            </a:r>
-          </a:p>
-          <a:p>
-            <a:pPr>
-              <a:lnSpc>
-                <a:spcPct val="112000"/>
-              </a:lnSpc>
-              <a:spcAft>
-                <a:spcPts val="1400"/>
-              </a:spcAft>
-            </a:pPr>
-            <a:r>
-              <a:rPr sz="1900">
-                <a:solidFill>
-                  <a:srgbClr val="26364A"/>
-                </a:solidFill>
-                <a:latin typeface="Arial"/>
-              </a:rPr>
-              <a:t>•  Indicadores e dashboard</a:t>
-            </a:r>
-          </a:p>
-          <a:p>
-            <a:pPr>
-              <a:lnSpc>
-                <a:spcPct val="112000"/>
-              </a:lnSpc>
-              <a:spcAft>
-                <a:spcPts val="1400"/>
-              </a:spcAft>
-            </a:pPr>
-            <a:r>
-              <a:rPr sz="1900">
-                <a:solidFill>
-                  <a:srgbClr val="26364A"/>
-                </a:solidFill>
-                <a:latin typeface="Arial"/>
-              </a:rPr>
-              <a:t>•  Validacao dos resultados</a:t>
-            </a:r>
-          </a:p>
-          <a:p>
-            <a:pPr>
-              <a:lnSpc>
-                <a:spcPct val="112000"/>
-              </a:lnSpc>
-              <a:spcAft>
-                <a:spcPts val="1400"/>
-              </a:spcAft>
-            </a:pPr>
-            <a:r>
-              <a:rPr sz="1900">
-                <a:solidFill>
-                  <a:srgbClr val="26364A"/>
-                </a:solidFill>
-                <a:latin typeface="Arial"/>
-              </a:rPr>
-              <a:t>•  Conclusao</a:t>
-            </a:r>
-          </a:p>
-        </p:txBody>
-      </p:sp>
-      <p:sp>
-        <p:nvSpPr>
-          <p:cNvPr id="8" name="TextBox 7"/>
-          <p:cNvSpPr txBox="1"/>
-          <p:nvPr/>
-        </p:nvSpPr>
-        <p:spPr>
-          <a:xfrm>
-            <a:off x="640080" y="6510528"/>
-            <a:ext cx="5486400" cy="274320"/>
+            <a:off x="2468880" y="914400"/>
+            <a:ext cx="9052560" cy="1371600"/>
           </a:xfrm>
           <a:prstGeom prst="rect">
             <a:avLst/>
@@ -6295,6 +7299,240 @@
           <a:p>
             <a:pPr algn="l">
               <a:lnSpc>
+                <a:spcPct val="110000"/>
+              </a:lnSpc>
+            </a:pPr>
+            <a:r>
+              <a:rPr sz="4000" b="1" i="0">
+                <a:solidFill>
+                  <a:srgbClr val="FFFFFF"/>
+                </a:solidFill>
+                <a:latin typeface="Arial"/>
+              </a:rPr>
+              <a:t>You cannot see the air</a:t>
+            </a:r>
+          </a:p>
+          <a:p>
+            <a:pPr algn="l">
+              <a:lnSpc>
+                <a:spcPct val="110000"/>
+              </a:lnSpc>
+            </a:pPr>
+            <a:r>
+              <a:rPr sz="4000" b="1" i="0">
+                <a:solidFill>
+                  <a:srgbClr val="FFFFFF"/>
+                </a:solidFill>
+                <a:latin typeface="Arial"/>
+              </a:rPr>
+              <a:t>you breathe.</a:t>
+            </a:r>
+          </a:p>
+        </p:txBody>
+      </p:sp>
+      <p:sp>
+        <p:nvSpPr>
+          <p:cNvPr id="4" name="TextBox 3"/>
+          <p:cNvSpPr txBox="1"/>
+          <p:nvPr/>
+        </p:nvSpPr>
+        <p:spPr>
+          <a:xfrm>
+            <a:off x="2487168" y="2514600"/>
+            <a:ext cx="8869680" cy="1463040"/>
+          </a:xfrm>
+          <a:prstGeom prst="rect">
+            <a:avLst/>
+          </a:prstGeom>
+          <a:noFill/>
+        </p:spPr>
+        <p:txBody>
+          <a:bodyPr wrap="square" anchor="t">
+            <a:spAutoFit/>
+          </a:bodyPr>
+          <a:lstStyle/>
+          <a:p>
+            <a:pPr algn="l">
+              <a:lnSpc>
+                <a:spcPct val="135000"/>
+              </a:lnSpc>
+            </a:pPr>
+            <a:r>
+              <a:rPr sz="1900" b="0" i="0">
+                <a:solidFill>
+                  <a:srgbClr val="CFE3F7"/>
+                </a:solidFill>
+                <a:latin typeface="Arial"/>
+              </a:rPr>
+              <a:t>Air pollution is one of the world's largest environmental health risks.</a:t>
+            </a:r>
+          </a:p>
+          <a:p>
+            <a:pPr algn="l">
+              <a:lnSpc>
+                <a:spcPct val="135000"/>
+              </a:lnSpc>
+            </a:pPr>
+            <a:r>
+              <a:rPr sz="1900" b="0" i="0">
+                <a:solidFill>
+                  <a:srgbClr val="CFE3F7"/>
+                </a:solidFill>
+                <a:latin typeface="Arial"/>
+              </a:rPr>
+              <a:t>CO and NO2 levels can spike for hours without anyone noticing,</a:t>
+            </a:r>
+          </a:p>
+          <a:p>
+            <a:pPr algn="l">
+              <a:lnSpc>
+                <a:spcPct val="135000"/>
+              </a:lnSpc>
+            </a:pPr>
+            <a:r>
+              <a:rPr sz="1900" b="0" i="0">
+                <a:solidFill>
+                  <a:srgbClr val="CFE3F7"/>
+                </a:solidFill>
+                <a:latin typeface="Arial"/>
+              </a:rPr>
+              <a:t>until the exposure has already happened.</a:t>
+            </a:r>
+          </a:p>
+        </p:txBody>
+      </p:sp>
+      <p:sp>
+        <p:nvSpPr>
+          <p:cNvPr id="5" name="Rounded Rectangle 4"/>
+          <p:cNvSpPr/>
+          <p:nvPr/>
+        </p:nvSpPr>
+        <p:spPr>
+          <a:xfrm>
+            <a:off x="822960" y="4663440"/>
+            <a:ext cx="10515600" cy="1463040"/>
+          </a:xfrm>
+          <a:prstGeom prst="roundRect">
+            <a:avLst>
+              <a:gd name="adj" fmla="val 12000"/>
+            </a:avLst>
+          </a:prstGeom>
+          <a:solidFill>
+            <a:srgbClr val="162E4A"/>
+          </a:solidFill>
+          <a:ln>
+            <a:noFill/>
+          </a:ln>
+          <a:effectLst/>
+          <a:effectLst>
+            <a:outerShdw blurRad="180000" dist="45000" dir="5400000" rotWithShape="0">
+              <a:srgbClr val="0B1F33">
+                <a:alpha val="72000"/>
+              </a:srgbClr>
+            </a:outerShdw>
+          </a:effectLst>
+        </p:spPr>
+        <p:style>
+          <a:lnRef idx="1">
+            <a:schemeClr val="accent1"/>
+          </a:lnRef>
+          <a:fillRef idx="3">
+            <a:schemeClr val="accent1"/>
+          </a:fillRef>
+          <a:effectRef idx="2">
+            <a:schemeClr val="accent1"/>
+          </a:effectRef>
+          <a:fontRef idx="minor">
+            <a:schemeClr val="lt1"/>
+          </a:fontRef>
+        </p:style>
+        <p:txBody>
+          <a:bodyPr rtlCol="0" anchor="ctr"/>
+          <a:lstStyle/>
+          <a:p>
+            <a:pPr algn="ctr"/>
+          </a:p>
+        </p:txBody>
+      </p:sp>
+      <p:sp>
+        <p:nvSpPr>
+          <p:cNvPr id="6" name="TextBox 5"/>
+          <p:cNvSpPr txBox="1"/>
+          <p:nvPr/>
+        </p:nvSpPr>
+        <p:spPr>
+          <a:xfrm>
+            <a:off x="1143000" y="4892040"/>
+            <a:ext cx="9875520" cy="1005840"/>
+          </a:xfrm>
+          <a:prstGeom prst="rect">
+            <a:avLst/>
+          </a:prstGeom>
+          <a:noFill/>
+        </p:spPr>
+        <p:txBody>
+          <a:bodyPr wrap="square" anchor="t">
+            <a:spAutoFit/>
+          </a:bodyPr>
+          <a:lstStyle/>
+          <a:p>
+            <a:pPr algn="l">
+              <a:lnSpc>
+                <a:spcPct val="130000"/>
+              </a:lnSpc>
+            </a:pPr>
+            <a:r>
+              <a:rPr sz="1700" b="0" i="1">
+                <a:solidFill>
+                  <a:srgbClr val="E8A300"/>
+                </a:solidFill>
+                <a:latin typeface="Arial"/>
+              </a:rPr>
+              <a:t>The real question is not “is the air polluted”. It is: exactly WHEN was it</a:t>
+            </a:r>
+          </a:p>
+          <a:p>
+            <a:pPr algn="l">
+              <a:lnSpc>
+                <a:spcPct val="130000"/>
+              </a:lnSpc>
+            </a:pPr>
+            <a:r>
+              <a:rPr sz="1700" b="0" i="1">
+                <a:solidFill>
+                  <a:srgbClr val="E8A300"/>
+                </a:solidFill>
+                <a:latin typeface="Arial"/>
+              </a:rPr>
+              <a:t>worst, and what conditions made it worse?</a:t>
+            </a:r>
+          </a:p>
+        </p:txBody>
+      </p:sp>
+      <p:sp>
+        <p:nvSpPr>
+          <p:cNvPr id="7" name="TextBox 6"/>
+          <p:cNvSpPr txBox="1"/>
+          <p:nvPr/>
+        </p:nvSpPr>
+        <p:spPr>
+          <a:xfrm>
+            <a:off x="640080" y="6510528"/>
+            <a:ext cx="5486400" cy="274320"/>
+          </a:xfrm>
+          <a:prstGeom prst="rect">
+            <a:avLst/>
+          </a:prstGeom>
+          <a:noFill/>
+        </p:spPr>
+        <p:txBody>
+          <a:bodyPr wrap="square" anchor="t">
+            <a:spAutoFit/>
+          </a:bodyPr>
+          <a:lstStyle/>
+          <a:p>
+            <a:pPr algn="l">
+              <a:lnSpc>
                 <a:spcPct val="115000"/>
               </a:lnSpc>
             </a:pPr>
@@ -6305,14 +7543,14 @@
                 </a:solidFill>
                 <a:latin typeface="Arial"/>
               </a:rPr>
-              <a:t>AeroTrack | Modulo 6 | Apache Hop</a:t>
-            </a:r>
-          </a:p>
-        </p:txBody>
-      </p:sp>
-      <p:sp>
-        <p:nvSpPr>
-          <p:cNvPr id="9" name="TextBox 8"/>
+              <a:t>AeroTrack | Module 6 | Apache Hop</a:t>
+            </a:r>
+          </a:p>
+        </p:txBody>
+      </p:sp>
+      <p:sp>
+        <p:nvSpPr>
+          <p:cNvPr id="8" name="TextBox 7"/>
           <p:cNvSpPr txBox="1"/>
           <p:nvPr/>
         </p:nvSpPr>
@@ -6363,7 +7601,7 @@
     <p:bg>
       <p:bgPr>
         <a:solidFill>
-          <a:srgbClr val="FFFFFF"/>
+          <a:srgbClr val="0B1F33"/>
         </a:solidFill>
         <a:effectLst/>
       </p:bgPr>
@@ -6377,20 +7615,61 @@
       <p:grpSpPr/>
       <p:sp>
         <p:nvSpPr>
-          <p:cNvPr id="2" name="Rectangle 1"/>
+          <p:cNvPr id="2" name="TextBox 1"/>
+          <p:cNvSpPr txBox="1"/>
+          <p:nvPr/>
+        </p:nvSpPr>
+        <p:spPr>
+          <a:xfrm>
+            <a:off x="640080" y="502920"/>
+            <a:ext cx="10058400" cy="822960"/>
+          </a:xfrm>
+          <a:prstGeom prst="rect">
+            <a:avLst/>
+          </a:prstGeom>
+          <a:noFill/>
+        </p:spPr>
+        <p:txBody>
+          <a:bodyPr wrap="square" anchor="t">
+            <a:spAutoFit/>
+          </a:bodyPr>
+          <a:lstStyle/>
+          <a:p>
+            <a:pPr algn="l">
+              <a:lnSpc>
+                <a:spcPct val="115000"/>
+              </a:lnSpc>
+            </a:pPr>
+            <a:r>
+              <a:rPr sz="2800" b="1" i="0">
+                <a:solidFill>
+                  <a:srgbClr val="FFFFFF"/>
+                </a:solidFill>
+                <a:latin typeface="Arial"/>
+              </a:rPr>
+              <a:t>Without treated data, that question has no answer</a:t>
+            </a:r>
+          </a:p>
+        </p:txBody>
+      </p:sp>
+      <p:sp>
+        <p:nvSpPr>
+          <p:cNvPr id="3" name="Rounded Rectangle 2"/>
           <p:cNvSpPr/>
           <p:nvPr/>
         </p:nvSpPr>
         <p:spPr>
           <a:xfrm>
-            <a:off x="0" y="0"/>
-            <a:ext cx="12191695" cy="128016"/>
-          </a:xfrm>
-          <a:prstGeom prst="rect">
-            <a:avLst/>
+            <a:off x="658368" y="1234440"/>
+            <a:ext cx="1188720" cy="50800"/>
+          </a:xfrm>
+          <a:prstGeom prst="roundRect">
+            <a:avLst>
+              <a:gd name="adj" fmla="val 50000"/>
+            </a:avLst>
           </a:prstGeom>
           <a:solidFill>
-            <a:srgbClr val="2A78D6"/>
+            <a:srgbClr val="E8A300"/>
           </a:solidFill>
           <a:ln>
             <a:noFill/>
@@ -6421,103 +7700,42 @@
       </p:sp>
       <p:sp>
         <p:nvSpPr>
-          <p:cNvPr id="3" name="TextBox 2"/>
-          <p:cNvSpPr txBox="1"/>
-          <p:nvPr/>
-        </p:nvSpPr>
-        <p:spPr>
-          <a:xfrm>
-            <a:off x="640080" y="320040"/>
-            <a:ext cx="7315200" cy="365760"/>
-          </a:xfrm>
-          <a:prstGeom prst="rect">
-            <a:avLst/>
-          </a:prstGeom>
-          <a:noFill/>
-        </p:spPr>
-        <p:txBody>
-          <a:bodyPr wrap="square" anchor="t">
-            <a:spAutoFit/>
-          </a:bodyPr>
-          <a:lstStyle/>
-          <a:p>
-            <a:pPr algn="l">
-              <a:lnSpc>
-                <a:spcPct val="115000"/>
-              </a:lnSpc>
-            </a:pPr>
-            <a:r>
-              <a:rPr sz="1400" b="1" i="0">
-                <a:solidFill>
-                  <a:srgbClr val="1BAF7A"/>
-                </a:solidFill>
-                <a:latin typeface="Arial"/>
-              </a:rPr>
-              <a:t>CONTEXTO</a:t>
-            </a:r>
-          </a:p>
-        </p:txBody>
-      </p:sp>
-      <p:sp>
-        <p:nvSpPr>
-          <p:cNvPr id="4" name="TextBox 3"/>
-          <p:cNvSpPr txBox="1"/>
-          <p:nvPr/>
-        </p:nvSpPr>
-        <p:spPr>
-          <a:xfrm>
-            <a:off x="640080" y="621792"/>
-            <a:ext cx="10789920" cy="822960"/>
-          </a:xfrm>
-          <a:prstGeom prst="rect">
-            <a:avLst/>
-          </a:prstGeom>
-          <a:noFill/>
-        </p:spPr>
-        <p:txBody>
-          <a:bodyPr wrap="square" anchor="t">
-            <a:spAutoFit/>
-          </a:bodyPr>
-          <a:lstStyle/>
-          <a:p>
-            <a:pPr algn="l">
-              <a:lnSpc>
-                <a:spcPct val="115000"/>
-              </a:lnSpc>
-            </a:pPr>
-            <a:r>
-              <a:rPr sz="3000" b="1" i="0">
-                <a:solidFill>
-                  <a:srgbClr val="0B1F33"/>
-                </a:solidFill>
-                <a:latin typeface="Arial"/>
-              </a:rPr>
-              <a:t>Dataset e problema principal</a:t>
-            </a:r>
-          </a:p>
-        </p:txBody>
-      </p:sp>
-      <p:sp>
-        <p:nvSpPr>
-          <p:cNvPr id="5" name="Rectangle 4"/>
+          <p:cNvPr id="4" name="Rounded Rectangle 3"/>
           <p:cNvSpPr/>
           <p:nvPr/>
         </p:nvSpPr>
         <p:spPr>
           <a:xfrm>
-            <a:off x="658368" y="1298448"/>
-            <a:ext cx="1188720" cy="38100"/>
-          </a:xfrm>
-          <a:prstGeom prst="rect">
-            <a:avLst/>
-          </a:prstGeom>
-          <a:solidFill>
-            <a:srgbClr val="1BAF7A"/>
-          </a:solidFill>
+            <a:off x="822960" y="1828800"/>
+            <a:ext cx="3383280" cy="3291840"/>
+          </a:xfrm>
+          <a:prstGeom prst="roundRect">
+            <a:avLst>
+              <a:gd name="adj" fmla="val 12000"/>
+            </a:avLst>
+          </a:prstGeom>
+          <a:gradFill rotWithShape="1">
+            <a:gsLst>
+              <a:gs pos="0">
+                <a:srgbClr val="162E4A"/>
+              </a:gs>
+              <a:gs pos="100000">
+                <a:srgbClr val="1C3252"/>
+              </a:gs>
+            </a:gsLst>
+            <a:lin scaled="0" ang="18900000"/>
+          </a:gradFill>
           <a:ln>
             <a:noFill/>
           </a:ln>
           <a:effectLst/>
+          <a:effectLst>
+            <a:outerShdw blurRad="180000" dist="45000" dir="5400000" rotWithShape="0">
+              <a:srgbClr val="0B1F33">
+                <a:alpha val="72000"/>
+              </a:srgbClr>
+            </a:outerShdw>
+          </a:effectLst>
         </p:spPr>
         <p:style>
           <a:lnRef idx="1">
@@ -6543,7 +7761,7 @@
       </p:sp>
       <p:pic>
         <p:nvPicPr>
-          <p:cNvPr id="6" name="Picture 5" descr="aerotrack-icon.png"/>
+          <p:cNvPr id="5" name="Picture 4" descr="icon_warning.png"/>
           <p:cNvPicPr>
             <a:picLocks noChangeAspect="1"/>
           </p:cNvPicPr>
@@ -6557,14 +7775,53 @@
         </p:blipFill>
         <p:spPr>
           <a:xfrm>
-            <a:off x="11292840" y="292608"/>
-            <a:ext cx="502920" cy="502920"/>
+            <a:off x="2103120" y="2084832"/>
+            <a:ext cx="822960" cy="822960"/>
           </a:xfrm>
           <a:prstGeom prst="rect">
             <a:avLst/>
           </a:prstGeom>
         </p:spPr>
       </p:pic>
+      <p:sp>
+        <p:nvSpPr>
+          <p:cNvPr id="6" name="TextBox 5"/>
+          <p:cNvSpPr txBox="1"/>
+          <p:nvPr/>
+        </p:nvSpPr>
+        <p:spPr>
+          <a:xfrm>
+            <a:off x="960120" y="3063240"/>
+            <a:ext cx="3108960" cy="457200"/>
+          </a:xfrm>
+          <a:prstGeom prst="rect">
+            <a:avLst/>
+          </a:prstGeom>
+          <a:noFill/>
+        </p:spPr>
+        <p:txBody>
+          <a:bodyPr wrap="square" anchor="t">
+            <a:spAutoFit/>
+          </a:bodyPr>
+          <a:lstStyle/>
+          <a:p>
+            <a:pPr algn="ctr">
+              <a:lnSpc>
+                <a:spcPct val="115000"/>
+              </a:lnSpc>
+            </a:pPr>
+            <a:r>
+              <a:rPr sz="1600" b="1" i="0">
+                <a:solidFill>
+                  <a:srgbClr val="FFFFFF"/>
+                </a:solidFill>
+                <a:latin typeface="Arial"/>
+              </a:rPr>
+              <a:t>Raw sensor noise</a:t>
+            </a:r>
+          </a:p>
+        </p:txBody>
+      </p:sp>
       <p:sp>
         <p:nvSpPr>
           <p:cNvPr id="7" name="TextBox 6"/>
@@ -6573,8 +7830,8 @@
         </p:nvSpPr>
         <p:spPr>
           <a:xfrm>
-            <a:off x="822960" y="1737360"/>
-            <a:ext cx="6949440" cy="4206240"/>
+            <a:off x="1005840" y="3520440"/>
+            <a:ext cx="3017520" cy="1554480"/>
           </a:xfrm>
           <a:prstGeom prst="rect">
             <a:avLst/>
@@ -6582,111 +7839,66 @@
           <a:noFill/>
         </p:spPr>
         <p:txBody>
-          <a:bodyPr wrap="square">
+          <a:bodyPr wrap="square" anchor="t">
             <a:spAutoFit/>
           </a:bodyPr>
           <a:lstStyle/>
           <a:p>
-            <a:pPr>
-              <a:lnSpc>
-                <a:spcPct val="112000"/>
-              </a:lnSpc>
-              <a:spcAft>
-                <a:spcPts val="1400"/>
-              </a:spcAft>
-            </a:pPr>
-            <a:r>
-              <a:rPr sz="1800">
-                <a:solidFill>
-                  <a:srgbClr val="26364A"/>
-                </a:solidFill>
-                <a:latin typeface="Arial"/>
-              </a:rPr>
-              <a:t>•  Dataset: Air Quality, UCI Machine Learning Repository</a:t>
-            </a:r>
-          </a:p>
-          <a:p>
-            <a:pPr>
-              <a:lnSpc>
-                <a:spcPct val="112000"/>
-              </a:lnSpc>
-              <a:spcAft>
-                <a:spcPts val="1400"/>
-              </a:spcAft>
-            </a:pPr>
-            <a:r>
-              <a:rPr sz="1800">
-                <a:solidFill>
-                  <a:srgbClr val="26364A"/>
-                </a:solidFill>
-                <a:latin typeface="Arial"/>
-              </a:rPr>
-              <a:t>•  Origem: estacao de monitoramento em uma cidade italiana (De Vito et al.)</a:t>
-            </a:r>
-          </a:p>
-          <a:p>
-            <a:pPr>
-              <a:lnSpc>
-                <a:spcPct val="112000"/>
-              </a:lnSpc>
-              <a:spcAft>
-                <a:spcPts val="1400"/>
-              </a:spcAft>
-            </a:pPr>
-            <a:r>
-              <a:rPr sz="1800">
-                <a:solidFill>
-                  <a:srgbClr val="26364A"/>
-                </a:solidFill>
-                <a:latin typeface="Arial"/>
-              </a:rPr>
-              <a:t>•  Periodo: marco de 2004 a fevereiro de 2005</a:t>
-            </a:r>
-          </a:p>
-          <a:p>
-            <a:pPr>
-              <a:lnSpc>
-                <a:spcPct val="112000"/>
-              </a:lnSpc>
-              <a:spcAft>
-                <a:spcPts val="1400"/>
-              </a:spcAft>
-            </a:pPr>
-            <a:r>
-              <a:rPr sz="1800">
-                <a:solidFill>
-                  <a:srgbClr val="26364A"/>
-                </a:solidFill>
-                <a:latin typeface="Arial"/>
-              </a:rPr>
-              <a:t>•  Volume: 9357 leituras horarias, 15 variaveis</a:t>
-            </a:r>
-          </a:p>
-        </p:txBody>
-      </p:sp>
-      <p:sp>
-        <p:nvSpPr>
-          <p:cNvPr id="8" name="Rectangle 7"/>
+            <a:pPr algn="ctr">
+              <a:lnSpc>
+                <a:spcPct val="120000"/>
+              </a:lnSpc>
+            </a:pPr>
+            <a:r>
+              <a:rPr sz="1200" b="0" i="0">
+                <a:solidFill>
+                  <a:srgbClr val="FFFFFF"/>
+                </a:solidFill>
+                <a:latin typeface="Arial"/>
+              </a:rPr>
+              <a:t>Missing readings, a -200 sentinel value and empty export rows hide the real signal.</a:t>
+            </a:r>
+          </a:p>
+        </p:txBody>
+      </p:sp>
+      <p:sp>
+        <p:nvSpPr>
+          <p:cNvPr id="8" name="Rounded Rectangle 7"/>
           <p:cNvSpPr/>
           <p:nvPr/>
         </p:nvSpPr>
         <p:spPr>
           <a:xfrm>
-            <a:off x="8092440" y="1783080"/>
-            <a:ext cx="3383280" cy="3108960"/>
-          </a:xfrm>
-          <a:prstGeom prst="rect">
-            <a:avLst/>
-          </a:prstGeom>
-          <a:solidFill>
-            <a:srgbClr val="F2F7FB"/>
-          </a:solidFill>
+            <a:off x="4434840" y="1828800"/>
+            <a:ext cx="3383280" cy="3291840"/>
+          </a:xfrm>
+          <a:prstGeom prst="roundRect">
+            <a:avLst>
+              <a:gd name="adj" fmla="val 12000"/>
+            </a:avLst>
+          </a:prstGeom>
+          <a:gradFill rotWithShape="1">
+            <a:gsLst>
+              <a:gs pos="0">
+                <a:srgbClr val="162E4A"/>
+              </a:gs>
+              <a:gs pos="100000">
+                <a:srgbClr val="1C3252"/>
+              </a:gs>
+            </a:gsLst>
+            <a:lin scaled="0" ang="18900000"/>
+          </a:gradFill>
           <a:ln>
-            <a:solidFill>
-              <a:srgbClr val="C9D8E8"/>
-            </a:solidFill>
+            <a:noFill/>
           </a:ln>
           <a:effectLst/>
+          <a:effectLst>
+            <a:outerShdw blurRad="180000" dist="45000" dir="5400000" rotWithShape="0">
+              <a:srgbClr val="0B1F33">
+                <a:alpha val="72000"/>
+              </a:srgbClr>
+            </a:outerShdw>
+          </a:effectLst>
         </p:spPr>
         <p:style>
           <a:lnRef idx="1">
@@ -6710,16 +7922,40 @@
           </a:p>
         </p:txBody>
       </p:sp>
-      <p:sp>
-        <p:nvSpPr>
-          <p:cNvPr id="9" name="TextBox 8"/>
+      <p:pic>
+        <p:nvPicPr>
+          <p:cNvPr id="9" name="Picture 8" descr="icon_question.png"/>
+          <p:cNvPicPr>
+            <a:picLocks noChangeAspect="1"/>
+          </p:cNvPicPr>
+          <p:nvPr/>
+        </p:nvPicPr>
+        <p:blipFill>
+          <a:blip r:embed="rId3"/>
+          <a:stretch>
+            <a:fillRect/>
+          </a:stretch>
+        </p:blipFill>
+        <p:spPr>
+          <a:xfrm>
+            <a:off x="5715000" y="2084832"/>
+            <a:ext cx="822960" cy="822960"/>
+          </a:xfrm>
+          <a:prstGeom prst="rect">
+            <a:avLst/>
+          </a:prstGeom>
+        </p:spPr>
+      </p:pic>
+      <p:sp>
+        <p:nvSpPr>
+          <p:cNvPr id="10" name="TextBox 9"/>
           <p:cNvSpPr txBox="1"/>
           <p:nvPr/>
         </p:nvSpPr>
         <p:spPr>
           <a:xfrm>
-            <a:off x="8321040" y="1965960"/>
-            <a:ext cx="2926080" cy="365760"/>
+            <a:off x="4572000" y="3063240"/>
+            <a:ext cx="3108960" cy="457200"/>
           </a:xfrm>
           <a:prstGeom prst="rect">
             <a:avLst/>
@@ -6732,33 +7968,33 @@
           </a:bodyPr>
           <a:lstStyle/>
           <a:p>
-            <a:pPr algn="l">
-              <a:lnSpc>
-                <a:spcPct val="115000"/>
-              </a:lnSpc>
-            </a:pPr>
-            <a:r>
-              <a:rPr sz="1200" b="1" i="0">
-                <a:solidFill>
-                  <a:srgbClr val="1BAF7A"/>
-                </a:solidFill>
-                <a:latin typeface="Arial"/>
-              </a:rPr>
-              <a:t>PROBLEMA</a:t>
-            </a:r>
-          </a:p>
-        </p:txBody>
-      </p:sp>
-      <p:sp>
-        <p:nvSpPr>
-          <p:cNvPr id="10" name="TextBox 9"/>
+            <a:pPr algn="ctr">
+              <a:lnSpc>
+                <a:spcPct val="115000"/>
+              </a:lnSpc>
+            </a:pPr>
+            <a:r>
+              <a:rPr sz="1600" b="1" i="0">
+                <a:solidFill>
+                  <a:srgbClr val="FFFFFF"/>
+                </a:solidFill>
+                <a:latin typeface="Arial"/>
+              </a:rPr>
+              <a:t>No structure</a:t>
+            </a:r>
+          </a:p>
+        </p:txBody>
+      </p:sp>
+      <p:sp>
+        <p:nvSpPr>
+          <p:cNvPr id="11" name="TextBox 10"/>
           <p:cNvSpPr txBox="1"/>
           <p:nvPr/>
         </p:nvSpPr>
         <p:spPr>
           <a:xfrm>
-            <a:off x="8321040" y="2331720"/>
-            <a:ext cx="2971800" cy="2377440"/>
+            <a:off x="4617720" y="3520440"/>
+            <a:ext cx="3017520" cy="1554480"/>
           </a:xfrm>
           <a:prstGeom prst="rect">
             <a:avLst/>
@@ -6771,33 +8007,118 @@
           </a:bodyPr>
           <a:lstStyle/>
           <a:p>
-            <a:pPr algn="l">
-              <a:lnSpc>
-                <a:spcPct val="125000"/>
-              </a:lnSpc>
-            </a:pPr>
-            <a:r>
-              <a:rPr sz="1500" b="0" i="0">
-                <a:solidFill>
-                  <a:srgbClr val="0B1F33"/>
-                </a:solidFill>
-                <a:latin typeface="Arial"/>
-              </a:rPr>
-              <a:t>Em quais periodos ocorreram as piores condicoes de qualidade do ar registradas, e quais variaveis ambientais estavam associadas a esses periodos?</a:t>
-            </a:r>
-          </a:p>
-        </p:txBody>
-      </p:sp>
-      <p:sp>
-        <p:nvSpPr>
-          <p:cNvPr id="11" name="TextBox 10"/>
+            <a:pPr algn="ctr">
+              <a:lnSpc>
+                <a:spcPct val="120000"/>
+              </a:lnSpc>
+            </a:pPr>
+            <a:r>
+              <a:rPr sz="1200" b="0" i="0">
+                <a:solidFill>
+                  <a:srgbClr val="FFFFFF"/>
+                </a:solidFill>
+                <a:latin typeface="Arial"/>
+              </a:rPr>
+              <a:t>Nothing tells you which hours, days or months were actually critical.</a:t>
+            </a:r>
+          </a:p>
+        </p:txBody>
+      </p:sp>
+      <p:sp>
+        <p:nvSpPr>
+          <p:cNvPr id="12" name="Rounded Rectangle 11"/>
+          <p:cNvSpPr/>
+          <p:nvPr/>
+        </p:nvSpPr>
+        <p:spPr>
+          <a:xfrm>
+            <a:off x="8046720" y="1828800"/>
+            <a:ext cx="3383280" cy="3291840"/>
+          </a:xfrm>
+          <a:prstGeom prst="roundRect">
+            <a:avLst>
+              <a:gd name="adj" fmla="val 12000"/>
+            </a:avLst>
+          </a:prstGeom>
+          <a:gradFill rotWithShape="1">
+            <a:gsLst>
+              <a:gs pos="0">
+                <a:srgbClr val="162E4A"/>
+              </a:gs>
+              <a:gs pos="100000">
+                <a:srgbClr val="1C3252"/>
+              </a:gs>
+            </a:gsLst>
+            <a:lin scaled="0" ang="18900000"/>
+          </a:gradFill>
+          <a:ln>
+            <a:noFill/>
+          </a:ln>
+          <a:effectLst/>
+          <a:effectLst>
+            <a:outerShdw blurRad="180000" dist="45000" dir="5400000" rotWithShape="0">
+              <a:srgbClr val="0B1F33">
+                <a:alpha val="72000"/>
+              </a:srgbClr>
+            </a:outerShdw>
+          </a:effectLst>
+        </p:spPr>
+        <p:style>
+          <a:lnRef idx="1">
+            <a:schemeClr val="accent1"/>
+          </a:lnRef>
+          <a:fillRef idx="3">
+            <a:schemeClr val="accent1"/>
+          </a:fillRef>
+          <a:effectRef idx="2">
+            <a:schemeClr val="accent1"/>
+          </a:effectRef>
+          <a:fontRef idx="minor">
+            <a:schemeClr val="lt1"/>
+          </a:fontRef>
+        </p:style>
+        <p:txBody>
+          <a:bodyPr rtlCol="0" anchor="ctr"/>
+          <a:lstStyle/>
+          <a:p>
+            <a:pPr algn="ctr"/>
+          </a:p>
+        </p:txBody>
+      </p:sp>
+      <p:pic>
+        <p:nvPicPr>
+          <p:cNvPr id="13" name="Picture 12" descr="icon_warning.png"/>
+          <p:cNvPicPr>
+            <a:picLocks noChangeAspect="1"/>
+          </p:cNvPicPr>
+          <p:nvPr/>
+        </p:nvPicPr>
+        <p:blipFill>
+          <a:blip r:embed="rId2"/>
+          <a:stretch>
+            <a:fillRect/>
+          </a:stretch>
+        </p:blipFill>
+        <p:spPr>
+          <a:xfrm>
+            <a:off x="9326880" y="2084832"/>
+            <a:ext cx="822960" cy="822960"/>
+          </a:xfrm>
+          <a:prstGeom prst="rect">
+            <a:avLst/>
+          </a:prstGeom>
+        </p:spPr>
+      </p:pic>
+      <p:sp>
+        <p:nvSpPr>
+          <p:cNvPr id="14" name="TextBox 13"/>
           <p:cNvSpPr txBox="1"/>
           <p:nvPr/>
         </p:nvSpPr>
         <p:spPr>
           <a:xfrm>
-            <a:off x="640080" y="6510528"/>
-            <a:ext cx="5486400" cy="274320"/>
+            <a:off x="8183880" y="3063240"/>
+            <a:ext cx="3108960" cy="457200"/>
           </a:xfrm>
           <a:prstGeom prst="rect">
             <a:avLst/>
@@ -6810,26 +8131,143 @@
           </a:bodyPr>
           <a:lstStyle/>
           <a:p>
+            <a:pPr algn="ctr">
+              <a:lnSpc>
+                <a:spcPct val="115000"/>
+              </a:lnSpc>
+            </a:pPr>
+            <a:r>
+              <a:rPr sz="1600" b="1" i="0">
+                <a:solidFill>
+                  <a:srgbClr val="FFFFFF"/>
+                </a:solidFill>
+                <a:latin typeface="Arial"/>
+              </a:rPr>
+              <a:t>No memory</a:t>
+            </a:r>
+          </a:p>
+        </p:txBody>
+      </p:sp>
+      <p:sp>
+        <p:nvSpPr>
+          <p:cNvPr id="15" name="TextBox 14"/>
+          <p:cNvSpPr txBox="1"/>
+          <p:nvPr/>
+        </p:nvSpPr>
+        <p:spPr>
+          <a:xfrm>
+            <a:off x="8229600" y="3520440"/>
+            <a:ext cx="3017520" cy="1554480"/>
+          </a:xfrm>
+          <a:prstGeom prst="rect">
+            <a:avLst/>
+          </a:prstGeom>
+          <a:noFill/>
+        </p:spPr>
+        <p:txBody>
+          <a:bodyPr wrap="square" anchor="t">
+            <a:spAutoFit/>
+          </a:bodyPr>
+          <a:lstStyle/>
+          <a:p>
+            <a:pPr algn="ctr">
+              <a:lnSpc>
+                <a:spcPct val="120000"/>
+              </a:lnSpc>
+            </a:pPr>
+            <a:r>
+              <a:rPr sz="1200" b="0" i="0">
+                <a:solidFill>
+                  <a:srgbClr val="FFFFFF"/>
+                </a:solidFill>
+                <a:latin typeface="Arial"/>
+              </a:rPr>
+              <a:t>Without a database, every analysis starts from zero, every single time.</a:t>
+            </a:r>
+          </a:p>
+        </p:txBody>
+      </p:sp>
+      <p:sp>
+        <p:nvSpPr>
+          <p:cNvPr id="16" name="TextBox 15"/>
+          <p:cNvSpPr txBox="1"/>
+          <p:nvPr/>
+        </p:nvSpPr>
+        <p:spPr>
+          <a:xfrm>
+            <a:off x="822960" y="5532120"/>
+            <a:ext cx="10515600" cy="822960"/>
+          </a:xfrm>
+          <a:prstGeom prst="rect">
+            <a:avLst/>
+          </a:prstGeom>
+          <a:noFill/>
+        </p:spPr>
+        <p:txBody>
+          <a:bodyPr wrap="square" anchor="t">
+            <a:spAutoFit/>
+          </a:bodyPr>
+          <a:lstStyle/>
+          <a:p>
             <a:pPr algn="l">
               <a:lnSpc>
                 <a:spcPct val="115000"/>
               </a:lnSpc>
             </a:pPr>
             <a:r>
+              <a:rPr sz="1800" b="1" i="1">
+                <a:solidFill>
+                  <a:srgbClr val="28C48C"/>
+                </a:solidFill>
+                <a:latin typeface="Arial"/>
+              </a:rPr>
+              <a:t>AeroTrack was built to close exactly this gap.</a:t>
+            </a:r>
+          </a:p>
+        </p:txBody>
+      </p:sp>
+      <p:sp>
+        <p:nvSpPr>
+          <p:cNvPr id="17" name="TextBox 16"/>
+          <p:cNvSpPr txBox="1"/>
+          <p:nvPr/>
+        </p:nvSpPr>
+        <p:spPr>
+          <a:xfrm>
+            <a:off x="640080" y="6510528"/>
+            <a:ext cx="5486400" cy="274320"/>
+          </a:xfrm>
+          <a:prstGeom prst="rect">
+            <a:avLst/>
+          </a:prstGeom>
+          <a:noFill/>
+        </p:spPr>
+        <p:txBody>
+          <a:bodyPr wrap="square" anchor="t">
+            <a:spAutoFit/>
+          </a:bodyPr>
+          <a:lstStyle/>
+          <a:p>
+            <a:pPr algn="l">
+              <a:lnSpc>
+                <a:spcPct val="115000"/>
+              </a:lnSpc>
+            </a:pPr>
+            <a:r>
               <a:rPr sz="1000" b="0" i="0">
                 <a:solidFill>
                   <a:srgbClr val="898781"/>
                 </a:solidFill>
                 <a:latin typeface="Arial"/>
               </a:rPr>
-              <a:t>AeroTrack | Modulo 6 | Apache Hop</a:t>
-            </a:r>
-          </a:p>
-        </p:txBody>
-      </p:sp>
-      <p:sp>
-        <p:nvSpPr>
-          <p:cNvPr id="12" name="TextBox 11"/>
+              <a:t>AeroTrack | Module 6 | Apache Hop</a:t>
+            </a:r>
+          </a:p>
+        </p:txBody>
+      </p:sp>
+      <p:sp>
+        <p:nvSpPr>
+          <p:cNvPr id="18" name="TextBox 17"/>
           <p:cNvSpPr txBox="1"/>
           <p:nvPr/>
         </p:nvSpPr>
@@ -6880,7 +8318,7 @@
     <p:bg>
       <p:bgPr>
         <a:solidFill>
-          <a:srgbClr val="FFFFFF"/>
+          <a:srgbClr val="0B1F33"/>
         </a:solidFill>
         <a:effectLst/>
       </p:bgPr>
@@ -6894,20 +8332,22 @@
       <p:grpSpPr/>
       <p:sp>
         <p:nvSpPr>
-          <p:cNvPr id="2" name="Rectangle 1"/>
+          <p:cNvPr id="2" name="Rounded Rectangle 1"/>
           <p:cNvSpPr/>
           <p:nvPr/>
         </p:nvSpPr>
         <p:spPr>
           <a:xfrm>
-            <a:off x="0" y="0"/>
-            <a:ext cx="12191695" cy="128016"/>
-          </a:xfrm>
-          <a:prstGeom prst="rect">
-            <a:avLst/>
+            <a:off x="-1828800" y="-1828800"/>
+            <a:ext cx="6400800" cy="6400800"/>
+          </a:xfrm>
+          <a:prstGeom prst="roundRect">
+            <a:avLst>
+              <a:gd name="adj" fmla="val 50000"/>
+            </a:avLst>
           </a:prstGeom>
           <a:solidFill>
-            <a:srgbClr val="2A78D6"/>
+            <a:srgbClr val="162E4A"/>
           </a:solidFill>
           <a:ln>
             <a:noFill/>
@@ -6938,98 +8378,22 @@
       </p:sp>
       <p:sp>
         <p:nvSpPr>
-          <p:cNvPr id="3" name="TextBox 2"/>
-          <p:cNvSpPr txBox="1"/>
-          <p:nvPr/>
-        </p:nvSpPr>
-        <p:spPr>
-          <a:xfrm>
-            <a:off x="640080" y="320040"/>
-            <a:ext cx="7315200" cy="365760"/>
-          </a:xfrm>
-          <a:prstGeom prst="rect">
-            <a:avLst/>
-          </a:prstGeom>
-          <a:noFill/>
-        </p:spPr>
-        <p:txBody>
-          <a:bodyPr wrap="square" anchor="t">
-            <a:spAutoFit/>
-          </a:bodyPr>
-          <a:lstStyle/>
-          <a:p>
-            <a:pPr algn="l">
-              <a:lnSpc>
-                <a:spcPct val="115000"/>
-              </a:lnSpc>
-            </a:pPr>
-            <a:r>
-              <a:rPr sz="1400" b="1" i="0">
-                <a:solidFill>
-                  <a:srgbClr val="1BAF7A"/>
-                </a:solidFill>
-                <a:latin typeface="Arial"/>
-              </a:rPr>
-              <a:t>SOLUCAO</a:t>
-            </a:r>
-          </a:p>
-        </p:txBody>
-      </p:sp>
-      <p:sp>
-        <p:nvSpPr>
-          <p:cNvPr id="4" name="TextBox 3"/>
-          <p:cNvSpPr txBox="1"/>
-          <p:nvPr/>
-        </p:nvSpPr>
-        <p:spPr>
-          <a:xfrm>
-            <a:off x="640080" y="621792"/>
-            <a:ext cx="10789920" cy="822960"/>
-          </a:xfrm>
-          <a:prstGeom prst="rect">
-            <a:avLst/>
-          </a:prstGeom>
-          <a:noFill/>
-        </p:spPr>
-        <p:txBody>
-          <a:bodyPr wrap="square" anchor="t">
-            <a:spAutoFit/>
-          </a:bodyPr>
-          <a:lstStyle/>
-          <a:p>
-            <a:pPr algn="l">
-              <a:lnSpc>
-                <a:spcPct val="115000"/>
-              </a:lnSpc>
-            </a:pPr>
-            <a:r>
-              <a:rPr sz="3000" b="1" i="0">
-                <a:solidFill>
-                  <a:srgbClr val="0B1F33"/>
-                </a:solidFill>
-                <a:latin typeface="Arial"/>
-              </a:rPr>
-              <a:t>Arquitetura da solucao</a:t>
-            </a:r>
-          </a:p>
-        </p:txBody>
-      </p:sp>
-      <p:sp>
-        <p:nvSpPr>
-          <p:cNvPr id="5" name="Rectangle 4"/>
+          <p:cNvPr id="3" name="Rounded Rectangle 2"/>
           <p:cNvSpPr/>
           <p:nvPr/>
         </p:nvSpPr>
         <p:spPr>
           <a:xfrm>
-            <a:off x="658368" y="1298448"/>
-            <a:ext cx="1188720" cy="38100"/>
-          </a:xfrm>
-          <a:prstGeom prst="rect">
-            <a:avLst/>
+            <a:off x="9601200" y="4114800"/>
+            <a:ext cx="5486400" cy="5486400"/>
+          </a:xfrm>
+          <a:prstGeom prst="roundRect">
+            <a:avLst>
+              <a:gd name="adj" fmla="val 50000"/>
+            </a:avLst>
           </a:prstGeom>
           <a:solidFill>
-            <a:srgbClr val="1BAF7A"/>
+            <a:srgbClr val="162E4A"/>
           </a:solidFill>
           <a:ln>
             <a:noFill/>
@@ -7060,7 +8424,7 @@
       </p:sp>
       <p:pic>
         <p:nvPicPr>
-          <p:cNvPr id="6" name="Picture 5" descr="aerotrack-icon.png"/>
+          <p:cNvPr id="4" name="Picture 3" descr="aerotrack-logo.png"/>
           <p:cNvPicPr>
             <a:picLocks noChangeAspect="1"/>
           </p:cNvPicPr>
@@ -7074,8 +8438,8 @@
         </p:blipFill>
         <p:spPr>
           <a:xfrm>
-            <a:off x="11292840" y="292608"/>
-            <a:ext cx="502920" cy="502920"/>
+            <a:off x="3566160" y="2286000"/>
+            <a:ext cx="3740727" cy="914400"/>
           </a:xfrm>
           <a:prstGeom prst="rect">
             <a:avLst/>
@@ -7084,554 +8448,14 @@
       </p:pic>
       <p:sp>
         <p:nvSpPr>
-          <p:cNvPr id="7" name="Rectangle 6"/>
-          <p:cNvSpPr/>
-          <p:nvPr/>
-        </p:nvSpPr>
-        <p:spPr>
-          <a:xfrm>
-            <a:off x="640080" y="2651760"/>
-            <a:ext cx="1605229" cy="1371600"/>
-          </a:xfrm>
-          <a:prstGeom prst="rect">
-            <a:avLst/>
-          </a:prstGeom>
-          <a:solidFill>
-            <a:srgbClr val="2A78D6"/>
-          </a:solidFill>
-          <a:ln>
-            <a:noFill/>
-          </a:ln>
-          <a:effectLst/>
-        </p:spPr>
-        <p:style>
-          <a:lnRef idx="1">
-            <a:schemeClr val="accent1"/>
-          </a:lnRef>
-          <a:fillRef idx="3">
-            <a:schemeClr val="accent1"/>
-          </a:fillRef>
-          <a:effectRef idx="2">
-            <a:schemeClr val="accent1"/>
-          </a:effectRef>
-          <a:fontRef idx="minor">
-            <a:schemeClr val="lt1"/>
-          </a:fontRef>
-        </p:style>
-        <p:txBody>
-          <a:bodyPr rtlCol="0" anchor="ctr" wrap="square"/>
-          <a:lstStyle/>
-          <a:p>
-            <a:pPr algn="ctr"/>
-            <a:r>
-              <a:rPr sz="1300" b="1">
-                <a:solidFill>
-                  <a:srgbClr val="FFFFFF"/>
-                </a:solidFill>
-                <a:latin typeface="Arial"/>
-              </a:rPr>
-              <a:t>Dataset
-publico</a:t>
-            </a:r>
-          </a:p>
-        </p:txBody>
-      </p:sp>
-      <p:sp>
-        <p:nvSpPr>
-          <p:cNvPr id="8" name="Right Arrow 7"/>
-          <p:cNvSpPr/>
-          <p:nvPr/>
-        </p:nvSpPr>
-        <p:spPr>
-          <a:xfrm>
-            <a:off x="2245308" y="3246120"/>
-            <a:ext cx="256034" cy="182880"/>
-          </a:xfrm>
-          <a:prstGeom prst="rightArrow">
-            <a:avLst/>
-          </a:prstGeom>
-          <a:solidFill>
-            <a:srgbClr val="898781"/>
-          </a:solidFill>
-          <a:ln>
-            <a:noFill/>
-          </a:ln>
-        </p:spPr>
-        <p:style>
-          <a:lnRef idx="1">
-            <a:schemeClr val="accent1"/>
-          </a:lnRef>
-          <a:fillRef idx="3">
-            <a:schemeClr val="accent1"/>
-          </a:fillRef>
-          <a:effectRef idx="2">
-            <a:schemeClr val="accent1"/>
-          </a:effectRef>
-          <a:fontRef idx="minor">
-            <a:schemeClr val="lt1"/>
-          </a:fontRef>
-        </p:style>
-        <p:txBody>
-          <a:bodyPr rtlCol="0" anchor="ctr"/>
-          <a:lstStyle/>
-          <a:p>
-            <a:pPr algn="ctr"/>
-          </a:p>
-        </p:txBody>
-      </p:sp>
-      <p:sp>
-        <p:nvSpPr>
-          <p:cNvPr id="9" name="Rectangle 8"/>
-          <p:cNvSpPr/>
-          <p:nvPr/>
-        </p:nvSpPr>
-        <p:spPr>
-          <a:xfrm>
-            <a:off x="2501341" y="2651760"/>
-            <a:ext cx="1605229" cy="1371600"/>
-          </a:xfrm>
-          <a:prstGeom prst="rect">
-            <a:avLst/>
-          </a:prstGeom>
-          <a:solidFill>
-            <a:srgbClr val="1BAF7A"/>
-          </a:solidFill>
-          <a:ln>
-            <a:noFill/>
-          </a:ln>
-          <a:effectLst/>
-        </p:spPr>
-        <p:style>
-          <a:lnRef idx="1">
-            <a:schemeClr val="accent1"/>
-          </a:lnRef>
-          <a:fillRef idx="3">
-            <a:schemeClr val="accent1"/>
-          </a:fillRef>
-          <a:effectRef idx="2">
-            <a:schemeClr val="accent1"/>
-          </a:effectRef>
-          <a:fontRef idx="minor">
-            <a:schemeClr val="lt1"/>
-          </a:fontRef>
-        </p:style>
-        <p:txBody>
-          <a:bodyPr rtlCol="0" anchor="ctr" wrap="square"/>
-          <a:lstStyle/>
-          <a:p>
-            <a:pPr algn="ctr"/>
-            <a:r>
-              <a:rPr sz="1300" b="1">
-                <a:solidFill>
-                  <a:srgbClr val="FFFFFF"/>
-                </a:solidFill>
-                <a:latin typeface="Arial"/>
-              </a:rPr>
-              <a:t>Pipeline de
-ingestao e
-tratamento</a:t>
-            </a:r>
-          </a:p>
-        </p:txBody>
-      </p:sp>
-      <p:sp>
-        <p:nvSpPr>
-          <p:cNvPr id="10" name="Right Arrow 9"/>
-          <p:cNvSpPr/>
-          <p:nvPr/>
-        </p:nvSpPr>
-        <p:spPr>
-          <a:xfrm>
-            <a:off x="4106569" y="3246120"/>
-            <a:ext cx="256034" cy="182880"/>
-          </a:xfrm>
-          <a:prstGeom prst="rightArrow">
-            <a:avLst/>
-          </a:prstGeom>
-          <a:solidFill>
-            <a:srgbClr val="898781"/>
-          </a:solidFill>
-          <a:ln>
-            <a:noFill/>
-          </a:ln>
-        </p:spPr>
-        <p:style>
-          <a:lnRef idx="1">
-            <a:schemeClr val="accent1"/>
-          </a:lnRef>
-          <a:fillRef idx="3">
-            <a:schemeClr val="accent1"/>
-          </a:fillRef>
-          <a:effectRef idx="2">
-            <a:schemeClr val="accent1"/>
-          </a:effectRef>
-          <a:fontRef idx="minor">
-            <a:schemeClr val="lt1"/>
-          </a:fontRef>
-        </p:style>
-        <p:txBody>
-          <a:bodyPr rtlCol="0" anchor="ctr"/>
-          <a:lstStyle/>
-          <a:p>
-            <a:pPr algn="ctr"/>
-          </a:p>
-        </p:txBody>
-      </p:sp>
-      <p:sp>
-        <p:nvSpPr>
-          <p:cNvPr id="11" name="Rectangle 10"/>
-          <p:cNvSpPr/>
-          <p:nvPr/>
-        </p:nvSpPr>
-        <p:spPr>
-          <a:xfrm>
-            <a:off x="4362602" y="2651760"/>
-            <a:ext cx="1605229" cy="1371600"/>
-          </a:xfrm>
-          <a:prstGeom prst="rect">
-            <a:avLst/>
-          </a:prstGeom>
-          <a:solidFill>
-            <a:srgbClr val="E5A000"/>
-          </a:solidFill>
-          <a:ln>
-            <a:noFill/>
-          </a:ln>
-          <a:effectLst/>
-        </p:spPr>
-        <p:style>
-          <a:lnRef idx="1">
-            <a:schemeClr val="accent1"/>
-          </a:lnRef>
-          <a:fillRef idx="3">
-            <a:schemeClr val="accent1"/>
-          </a:fillRef>
-          <a:effectRef idx="2">
-            <a:schemeClr val="accent1"/>
-          </a:effectRef>
-          <a:fontRef idx="minor">
-            <a:schemeClr val="lt1"/>
-          </a:fontRef>
-        </p:style>
-        <p:txBody>
-          <a:bodyPr rtlCol="0" anchor="ctr" wrap="square"/>
-          <a:lstStyle/>
-          <a:p>
-            <a:pPr algn="ctr"/>
-            <a:r>
-              <a:rPr sz="1300" b="1">
-                <a:solidFill>
-                  <a:srgbClr val="FFFFFF"/>
-                </a:solidFill>
-                <a:latin typeface="Arial"/>
-              </a:rPr>
-              <a:t>Classificacao
-analitica</a:t>
-            </a:r>
-          </a:p>
-        </p:txBody>
-      </p:sp>
-      <p:sp>
-        <p:nvSpPr>
-          <p:cNvPr id="12" name="Right Arrow 11"/>
-          <p:cNvSpPr/>
-          <p:nvPr/>
-        </p:nvSpPr>
-        <p:spPr>
-          <a:xfrm>
-            <a:off x="5967830" y="3246120"/>
-            <a:ext cx="256034" cy="182880"/>
-          </a:xfrm>
-          <a:prstGeom prst="rightArrow">
-            <a:avLst/>
-          </a:prstGeom>
-          <a:solidFill>
-            <a:srgbClr val="898781"/>
-          </a:solidFill>
-          <a:ln>
-            <a:noFill/>
-          </a:ln>
-        </p:spPr>
-        <p:style>
-          <a:lnRef idx="1">
-            <a:schemeClr val="accent1"/>
-          </a:lnRef>
-          <a:fillRef idx="3">
-            <a:schemeClr val="accent1"/>
-          </a:fillRef>
-          <a:effectRef idx="2">
-            <a:schemeClr val="accent1"/>
-          </a:effectRef>
-          <a:fontRef idx="minor">
-            <a:schemeClr val="lt1"/>
-          </a:fontRef>
-        </p:style>
-        <p:txBody>
-          <a:bodyPr rtlCol="0" anchor="ctr"/>
-          <a:lstStyle/>
-          <a:p>
-            <a:pPr algn="ctr"/>
-          </a:p>
-        </p:txBody>
-      </p:sp>
-      <p:sp>
-        <p:nvSpPr>
-          <p:cNvPr id="13" name="Rectangle 12"/>
-          <p:cNvSpPr/>
-          <p:nvPr/>
-        </p:nvSpPr>
-        <p:spPr>
-          <a:xfrm>
-            <a:off x="6223863" y="2651760"/>
-            <a:ext cx="1605229" cy="1371600"/>
-          </a:xfrm>
-          <a:prstGeom prst="rect">
-            <a:avLst/>
-          </a:prstGeom>
-          <a:solidFill>
-            <a:srgbClr val="0B1F33"/>
-          </a:solidFill>
-          <a:ln>
-            <a:noFill/>
-          </a:ln>
-          <a:effectLst/>
-        </p:spPr>
-        <p:style>
-          <a:lnRef idx="1">
-            <a:schemeClr val="accent1"/>
-          </a:lnRef>
-          <a:fillRef idx="3">
-            <a:schemeClr val="accent1"/>
-          </a:fillRef>
-          <a:effectRef idx="2">
-            <a:schemeClr val="accent1"/>
-          </a:effectRef>
-          <a:fontRef idx="minor">
-            <a:schemeClr val="lt1"/>
-          </a:fontRef>
-        </p:style>
-        <p:txBody>
-          <a:bodyPr rtlCol="0" anchor="ctr" wrap="square"/>
-          <a:lstStyle/>
-          <a:p>
-            <a:pPr algn="ctr"/>
-            <a:r>
-              <a:rPr sz="1300" b="1">
-                <a:solidFill>
-                  <a:srgbClr val="FFFFFF"/>
-                </a:solidFill>
-                <a:latin typeface="Arial"/>
-              </a:rPr>
-              <a:t>Banco de
-dados
-PostgreSQL</a:t>
-            </a:r>
-          </a:p>
-        </p:txBody>
-      </p:sp>
-      <p:sp>
-        <p:nvSpPr>
-          <p:cNvPr id="14" name="Right Arrow 13"/>
-          <p:cNvSpPr/>
-          <p:nvPr/>
-        </p:nvSpPr>
-        <p:spPr>
-          <a:xfrm>
-            <a:off x="7829091" y="3246120"/>
-            <a:ext cx="256034" cy="182880"/>
-          </a:xfrm>
-          <a:prstGeom prst="rightArrow">
-            <a:avLst/>
-          </a:prstGeom>
-          <a:solidFill>
-            <a:srgbClr val="898781"/>
-          </a:solidFill>
-          <a:ln>
-            <a:noFill/>
-          </a:ln>
-        </p:spPr>
-        <p:style>
-          <a:lnRef idx="1">
-            <a:schemeClr val="accent1"/>
-          </a:lnRef>
-          <a:fillRef idx="3">
-            <a:schemeClr val="accent1"/>
-          </a:fillRef>
-          <a:effectRef idx="2">
-            <a:schemeClr val="accent1"/>
-          </a:effectRef>
-          <a:fontRef idx="minor">
-            <a:schemeClr val="lt1"/>
-          </a:fontRef>
-        </p:style>
-        <p:txBody>
-          <a:bodyPr rtlCol="0" anchor="ctr"/>
-          <a:lstStyle/>
-          <a:p>
-            <a:pPr algn="ctr"/>
-          </a:p>
-        </p:txBody>
-      </p:sp>
-      <p:sp>
-        <p:nvSpPr>
-          <p:cNvPr id="15" name="Rectangle 14"/>
-          <p:cNvSpPr/>
-          <p:nvPr/>
-        </p:nvSpPr>
-        <p:spPr>
-          <a:xfrm>
-            <a:off x="8085124" y="2651760"/>
-            <a:ext cx="1605229" cy="1371600"/>
-          </a:xfrm>
-          <a:prstGeom prst="rect">
-            <a:avLst/>
-          </a:prstGeom>
-          <a:solidFill>
-            <a:srgbClr val="1BAF7A"/>
-          </a:solidFill>
-          <a:ln>
-            <a:noFill/>
-          </a:ln>
-          <a:effectLst/>
-        </p:spPr>
-        <p:style>
-          <a:lnRef idx="1">
-            <a:schemeClr val="accent1"/>
-          </a:lnRef>
-          <a:fillRef idx="3">
-            <a:schemeClr val="accent1"/>
-          </a:fillRef>
-          <a:effectRef idx="2">
-            <a:schemeClr val="accent1"/>
-          </a:effectRef>
-          <a:fontRef idx="minor">
-            <a:schemeClr val="lt1"/>
-          </a:fontRef>
-        </p:style>
-        <p:txBody>
-          <a:bodyPr rtlCol="0" anchor="ctr" wrap="square"/>
-          <a:lstStyle/>
-          <a:p>
-            <a:pPr algn="ctr"/>
-            <a:r>
-              <a:rPr sz="1300" b="1">
-                <a:solidFill>
-                  <a:srgbClr val="FFFFFF"/>
-                </a:solidFill>
-                <a:latin typeface="Arial"/>
-              </a:rPr>
-              <a:t>Pipeline de
-consolidacao</a:t>
-            </a:r>
-          </a:p>
-        </p:txBody>
-      </p:sp>
-      <p:sp>
-        <p:nvSpPr>
-          <p:cNvPr id="16" name="Right Arrow 15"/>
-          <p:cNvSpPr/>
-          <p:nvPr/>
-        </p:nvSpPr>
-        <p:spPr>
-          <a:xfrm>
-            <a:off x="9690352" y="3246120"/>
-            <a:ext cx="256034" cy="182880"/>
-          </a:xfrm>
-          <a:prstGeom prst="rightArrow">
-            <a:avLst/>
-          </a:prstGeom>
-          <a:solidFill>
-            <a:srgbClr val="898781"/>
-          </a:solidFill>
-          <a:ln>
-            <a:noFill/>
-          </a:ln>
-        </p:spPr>
-        <p:style>
-          <a:lnRef idx="1">
-            <a:schemeClr val="accent1"/>
-          </a:lnRef>
-          <a:fillRef idx="3">
-            <a:schemeClr val="accent1"/>
-          </a:fillRef>
-          <a:effectRef idx="2">
-            <a:schemeClr val="accent1"/>
-          </a:effectRef>
-          <a:fontRef idx="minor">
-            <a:schemeClr val="lt1"/>
-          </a:fontRef>
-        </p:style>
-        <p:txBody>
-          <a:bodyPr rtlCol="0" anchor="ctr"/>
-          <a:lstStyle/>
-          <a:p>
-            <a:pPr algn="ctr"/>
-          </a:p>
-        </p:txBody>
-      </p:sp>
-      <p:sp>
-        <p:nvSpPr>
-          <p:cNvPr id="17" name="Rectangle 16"/>
-          <p:cNvSpPr/>
-          <p:nvPr/>
-        </p:nvSpPr>
-        <p:spPr>
-          <a:xfrm>
-            <a:off x="9946385" y="2651760"/>
-            <a:ext cx="1605229" cy="1371600"/>
-          </a:xfrm>
-          <a:prstGeom prst="rect">
-            <a:avLst/>
-          </a:prstGeom>
-          <a:solidFill>
-            <a:srgbClr val="2A78D6"/>
-          </a:solidFill>
-          <a:ln>
-            <a:noFill/>
-          </a:ln>
-          <a:effectLst/>
-        </p:spPr>
-        <p:style>
-          <a:lnRef idx="1">
-            <a:schemeClr val="accent1"/>
-          </a:lnRef>
-          <a:fillRef idx="3">
-            <a:schemeClr val="accent1"/>
-          </a:fillRef>
-          <a:effectRef idx="2">
-            <a:schemeClr val="accent1"/>
-          </a:effectRef>
-          <a:fontRef idx="minor">
-            <a:schemeClr val="lt1"/>
-          </a:fontRef>
-        </p:style>
-        <p:txBody>
-          <a:bodyPr rtlCol="0" anchor="ctr" wrap="square"/>
-          <a:lstStyle/>
-          <a:p>
-            <a:pPr algn="ctr"/>
-            <a:r>
-              <a:rPr sz="1300" b="1">
-                <a:solidFill>
-                  <a:srgbClr val="FFFFFF"/>
-                </a:solidFill>
-                <a:latin typeface="Arial"/>
-              </a:rPr>
-              <a:t>Dashboard</a:t>
-            </a:r>
-          </a:p>
-        </p:txBody>
-      </p:sp>
-      <p:sp>
-        <p:nvSpPr>
-          <p:cNvPr id="18" name="TextBox 17"/>
+          <p:cNvPr id="5" name="TextBox 4"/>
           <p:cNvSpPr txBox="1"/>
           <p:nvPr/>
         </p:nvSpPr>
         <p:spPr>
           <a:xfrm>
-            <a:off x="822960" y="4480560"/>
-            <a:ext cx="10515600" cy="1188720"/>
+            <a:off x="0" y="3520440"/>
+            <a:ext cx="12191695" cy="548640"/>
           </a:xfrm>
           <a:prstGeom prst="rect">
             <a:avLst/>
@@ -7644,33 +8468,33 @@
           </a:bodyPr>
           <a:lstStyle/>
           <a:p>
-            <a:pPr algn="l">
-              <a:lnSpc>
-                <a:spcPct val="130000"/>
-              </a:lnSpc>
-            </a:pPr>
-            <a:r>
-              <a:rPr sz="1600" b="0" i="0">
-                <a:solidFill>
-                  <a:srgbClr val="26364A"/>
-                </a:solidFill>
-                <a:latin typeface="Arial"/>
-              </a:rPr>
-              <a:t>Duas pipelines Apache Hop (pl_01_ingestao_tratamento e pl_02_consolidacao_indicadores), orquestradas pelo workflow wf_orquestracao_qualidade_ar, que so avanca para a consolidacao apos o sucesso da ingestao.</a:t>
-            </a:r>
-          </a:p>
-        </p:txBody>
-      </p:sp>
-      <p:sp>
-        <p:nvSpPr>
-          <p:cNvPr id="19" name="TextBox 18"/>
+            <a:pPr algn="ctr">
+              <a:lnSpc>
+                <a:spcPct val="115000"/>
+              </a:lnSpc>
+            </a:pPr>
+            <a:r>
+              <a:rPr sz="2000" b="0" i="0">
+                <a:solidFill>
+                  <a:srgbClr val="CFE3F7"/>
+                </a:solidFill>
+                <a:latin typeface="Arial"/>
+              </a:rPr>
+              <a:t>From raw sensor data to a clear, trustworthy answer.</a:t>
+            </a:r>
+          </a:p>
+        </p:txBody>
+      </p:sp>
+      <p:sp>
+        <p:nvSpPr>
+          <p:cNvPr id="6" name="TextBox 5"/>
           <p:cNvSpPr txBox="1"/>
           <p:nvPr/>
         </p:nvSpPr>
         <p:spPr>
           <a:xfrm>
-            <a:off x="640080" y="6510528"/>
-            <a:ext cx="5486400" cy="274320"/>
+            <a:off x="0" y="4206240"/>
+            <a:ext cx="12191695" cy="548640"/>
           </a:xfrm>
           <a:prstGeom prst="rect">
             <a:avLst/>
@@ -7683,6 +8507,45 @@
           </a:bodyPr>
           <a:lstStyle/>
           <a:p>
+            <a:pPr algn="ctr">
+              <a:lnSpc>
+                <a:spcPct val="115000"/>
+              </a:lnSpc>
+            </a:pPr>
+            <a:r>
+              <a:rPr sz="1600" b="1" i="0">
+                <a:solidFill>
+                  <a:srgbClr val="E8A300"/>
+                </a:solidFill>
+                <a:latin typeface="Arial"/>
+              </a:rPr>
+              <a:t>Built end to end with Apache Hop</a:t>
+            </a:r>
+          </a:p>
+        </p:txBody>
+      </p:sp>
+      <p:sp>
+        <p:nvSpPr>
+          <p:cNvPr id="7" name="TextBox 6"/>
+          <p:cNvSpPr txBox="1"/>
+          <p:nvPr/>
+        </p:nvSpPr>
+        <p:spPr>
+          <a:xfrm>
+            <a:off x="640080" y="6510528"/>
+            <a:ext cx="5486400" cy="274320"/>
+          </a:xfrm>
+          <a:prstGeom prst="rect">
+            <a:avLst/>
+          </a:prstGeom>
+          <a:noFill/>
+        </p:spPr>
+        <p:txBody>
+          <a:bodyPr wrap="square" anchor="t">
+            <a:spAutoFit/>
+          </a:bodyPr>
+          <a:lstStyle/>
+          <a:p>
             <a:pPr algn="l">
               <a:lnSpc>
                 <a:spcPct val="115000"/>
@@ -7695,14 +8558,14 @@
                 </a:solidFill>
                 <a:latin typeface="Arial"/>
               </a:rPr>
-              <a:t>AeroTrack | Modulo 6 | Apache Hop</a:t>
-            </a:r>
-          </a:p>
-        </p:txBody>
-      </p:sp>
-      <p:sp>
-        <p:nvSpPr>
-          <p:cNvPr id="20" name="TextBox 19"/>
+              <a:t>AeroTrack | Module 6 | Apache Hop</a:t>
+            </a:r>
+          </a:p>
+        </p:txBody>
+      </p:sp>
+      <p:sp>
+        <p:nvSpPr>
+          <p:cNvPr id="8" name="TextBox 7"/>
           <p:cNvSpPr txBox="1"/>
           <p:nvPr/>
         </p:nvSpPr>
@@ -7817,8 +8680,8 @@
         </p:nvSpPr>
         <p:spPr>
           <a:xfrm>
-            <a:off x="640080" y="320040"/>
-            <a:ext cx="7315200" cy="365760"/>
+            <a:off x="640080" y="292608"/>
+            <a:ext cx="8686800" cy="365760"/>
           </a:xfrm>
           <a:prstGeom prst="rect">
             <a:avLst/>
@@ -7843,7 +8706,7 @@
                 </a:solidFill>
                 <a:latin typeface="Arial"/>
               </a:rPr>
-              <a:t>APACHE HOP</a:t>
+              <a:t>THE DATA</a:t>
             </a:r>
           </a:p>
         </p:txBody>
@@ -7856,7 +8719,7 @@
         </p:nvSpPr>
         <p:spPr>
           <a:xfrm>
-            <a:off x="640080" y="621792"/>
+            <a:off x="640080" y="594360"/>
             <a:ext cx="10789920" cy="822960"/>
           </a:xfrm>
           <a:prstGeom prst="rect">
@@ -7876,30 +8739,32 @@
               </a:lnSpc>
             </a:pPr>
             <a:r>
-              <a:rPr sz="3000" b="1" i="0">
+              <a:rPr sz="2900" b="1" i="0">
                 <a:solidFill>
                   <a:srgbClr val="0B1F33"/>
                 </a:solidFill>
                 <a:latin typeface="Arial"/>
               </a:rPr>
-              <a:t>Pipeline de ingestao e tratamento</a:t>
-            </a:r>
-          </a:p>
-        </p:txBody>
-      </p:sp>
-      <p:sp>
-        <p:nvSpPr>
-          <p:cNvPr id="5" name="Rectangle 4"/>
+              <a:t>Dataset and problem statement</a:t>
+            </a:r>
+          </a:p>
+        </p:txBody>
+      </p:sp>
+      <p:sp>
+        <p:nvSpPr>
+          <p:cNvPr id="5" name="Rounded Rectangle 4"/>
           <p:cNvSpPr/>
           <p:nvPr/>
         </p:nvSpPr>
         <p:spPr>
           <a:xfrm>
-            <a:off x="658368" y="1298448"/>
-            <a:ext cx="1188720" cy="38100"/>
-          </a:xfrm>
-          <a:prstGeom prst="rect">
-            <a:avLst/>
+            <a:off x="658368" y="1261872"/>
+            <a:ext cx="1188720" cy="50800"/>
+          </a:xfrm>
+          <a:prstGeom prst="roundRect">
+            <a:avLst>
+              <a:gd name="adj" fmla="val 50000"/>
+            </a:avLst>
           </a:prstGeom>
           <a:solidFill>
             <a:srgbClr val="1BAF7A"/>
@@ -7947,7 +8812,7 @@
         </p:blipFill>
         <p:spPr>
           <a:xfrm>
-            <a:off x="11292840" y="292608"/>
+            <a:off x="11292840" y="274320"/>
             <a:ext cx="502920" cy="502920"/>
           </a:xfrm>
           <a:prstGeom prst="rect">
@@ -7964,7 +8829,7 @@
         <p:spPr>
           <a:xfrm>
             <a:off x="822960" y="1691640"/>
-            <a:ext cx="10607040" cy="4480560"/>
+            <a:ext cx="6766560" cy="4206240"/>
           </a:xfrm>
           <a:prstGeom prst="rect">
             <a:avLst/>
@@ -7979,148 +8844,152 @@
           <a:p>
             <a:pPr>
               <a:lnSpc>
-                <a:spcPct val="112000"/>
+                <a:spcPct val="115000"/>
               </a:lnSpc>
               <a:spcAft>
-                <a:spcPts val="1200"/>
+                <a:spcPts val="1600"/>
               </a:spcAft>
             </a:pPr>
             <a:r>
-              <a:rPr sz="1700">
+              <a:rPr sz="1800">
                 <a:solidFill>
                   <a:srgbClr val="26364A"/>
                 </a:solidFill>
                 <a:latin typeface="Arial"/>
               </a:rPr>
-              <a:t>•  CSV Input le o dataset bruto (separador ponto e virgula, decimal com virgula)</a:t>
+              <a:t>•  Dataset: Air Quality, UCI Machine Learning Repository</a:t>
             </a:r>
           </a:p>
           <a:p>
             <a:pPr>
               <a:lnSpc>
-                <a:spcPct val="112000"/>
+                <a:spcPct val="115000"/>
               </a:lnSpc>
               <a:spcAft>
-                <a:spcPts val="1200"/>
+                <a:spcPts val="1600"/>
               </a:spcAft>
             </a:pPr>
             <a:r>
-              <a:rPr sz="1700">
+              <a:rPr sz="1800">
                 <a:solidFill>
                   <a:srgbClr val="26364A"/>
                 </a:solidFill>
                 <a:latin typeface="Arial"/>
               </a:rPr>
-              <a:t>•  Filter Rows remove as linhas vazias deixadas pelo export do dataset</a:t>
+              <a:t>•  Source: a monitoring station in an Italian city (De Vito et al.)</a:t>
             </a:r>
           </a:p>
           <a:p>
             <a:pPr>
               <a:lnSpc>
-                <a:spcPct val="112000"/>
+                <a:spcPct val="115000"/>
               </a:lnSpc>
               <a:spcAft>
-                <a:spcPts val="1200"/>
+                <a:spcPts val="1600"/>
               </a:spcAft>
             </a:pPr>
             <a:r>
-              <a:rPr sz="1700">
+              <a:rPr sz="1800">
                 <a:solidFill>
                   <a:srgbClr val="26364A"/>
                 </a:solidFill>
                 <a:latin typeface="Arial"/>
               </a:rPr>
-              <a:t>•  Formula combina data e hora em um texto unico; Null If trata o valor -200 (ausencia de leitura)</a:t>
+              <a:t>•  Period: March 2004 to February 2005</a:t>
             </a:r>
           </a:p>
           <a:p>
             <a:pPr>
               <a:lnSpc>
-                <a:spcPct val="112000"/>
+                <a:spcPct val="115000"/>
               </a:lnSpc>
               <a:spcAft>
-                <a:spcPts val="1200"/>
+                <a:spcPts val="1600"/>
               </a:spcAft>
             </a:pPr>
             <a:r>
-              <a:rPr sz="1700">
+              <a:rPr sz="1800">
                 <a:solidFill>
                   <a:srgbClr val="26364A"/>
                 </a:solidFill>
                 <a:latin typeface="Arial"/>
               </a:rPr>
-              <a:t>•  Select Values renomeia os campos e converte o texto de data para o tipo Data</a:t>
-            </a:r>
-          </a:p>
-          <a:p>
-            <a:pPr>
-              <a:lnSpc>
-                <a:spcPct val="112000"/>
-              </a:lnSpc>
-              <a:spcAft>
-                <a:spcPts val="1200"/>
-              </a:spcAft>
-            </a:pPr>
-            <a:r>
-              <a:rPr sz="1700">
-                <a:solidFill>
-                  <a:srgbClr val="26364A"/>
-                </a:solidFill>
-                <a:latin typeface="Arial"/>
-              </a:rPr>
-              <a:t>•  Calculator, Value Mapper e Number Range derivam ano, mes, turno e o nivel de CO e de NO2</a:t>
-            </a:r>
-          </a:p>
-          <a:p>
-            <a:pPr>
-              <a:lnSpc>
-                <a:spcPct val="112000"/>
-              </a:lnSpc>
-              <a:spcAft>
-                <a:spcPts val="1200"/>
-              </a:spcAft>
-            </a:pPr>
-            <a:r>
-              <a:rPr sz="1700">
-                <a:solidFill>
-                  <a:srgbClr val="26364A"/>
-                </a:solidFill>
-                <a:latin typeface="Arial"/>
-              </a:rPr>
-              <a:t>•  Janino calcula se a leitura e valida; Filter Rows separa leituras validas das rejeitadas</a:t>
-            </a:r>
-          </a:p>
-          <a:p>
-            <a:pPr>
-              <a:lnSpc>
-                <a:spcPct val="112000"/>
-              </a:lnSpc>
-              <a:spcAft>
-                <a:spcPts val="1200"/>
-              </a:spcAft>
-            </a:pPr>
-            <a:r>
-              <a:rPr sz="1700">
-                <a:solidFill>
-                  <a:srgbClr val="26364A"/>
-                </a:solidFill>
-                <a:latin typeface="Arial"/>
-              </a:rPr>
-              <a:t>•  Insert/Update grava no PostgreSQL, com chave em data_hora (sem duplicar em reexecucoes)</a:t>
-            </a:r>
-          </a:p>
-        </p:txBody>
-      </p:sp>
-      <p:sp>
-        <p:nvSpPr>
-          <p:cNvPr id="8" name="TextBox 7"/>
+              <a:t>•  Volume: 9357 hourly readings, 15 variables</a:t>
+            </a:r>
+          </a:p>
+        </p:txBody>
+      </p:sp>
+      <p:sp>
+        <p:nvSpPr>
+          <p:cNvPr id="8" name="Rounded Rectangle 7"/>
+          <p:cNvSpPr/>
+          <p:nvPr/>
+        </p:nvSpPr>
+        <p:spPr>
+          <a:xfrm>
+            <a:off x="7955279" y="1737360"/>
+            <a:ext cx="3520440" cy="3291840"/>
+          </a:xfrm>
+          <a:prstGeom prst="roundRect">
+            <a:avLst>
+              <a:gd name="adj" fmla="val 10000"/>
+            </a:avLst>
+          </a:prstGeom>
+          <a:gradFill rotWithShape="1">
+            <a:gsLst>
+              <a:gs pos="0">
+                <a:srgbClr val="2A78D6"/>
+              </a:gs>
+              <a:gs pos="100000">
+                <a:srgbClr val="1BAF7A"/>
+              </a:gs>
+            </a:gsLst>
+            <a:lin scaled="0" ang="18900000"/>
+          </a:gradFill>
+          <a:ln>
+            <a:noFill/>
+          </a:ln>
+          <a:effectLst/>
+          <a:effectLst>
+            <a:outerShdw blurRad="180000" dist="45000" dir="5400000" rotWithShape="0">
+              <a:srgbClr val="0B1F33">
+                <a:alpha val="72000"/>
+              </a:srgbClr>
+            </a:outerShdw>
+          </a:effectLst>
+        </p:spPr>
+        <p:style>
+          <a:lnRef idx="1">
+            <a:schemeClr val="accent1"/>
+          </a:lnRef>
+          <a:fillRef idx="3">
+            <a:schemeClr val="accent1"/>
+          </a:fillRef>
+          <a:effectRef idx="2">
+            <a:schemeClr val="accent1"/>
+          </a:effectRef>
+          <a:fontRef idx="minor">
+            <a:schemeClr val="lt1"/>
+          </a:fontRef>
+        </p:style>
+        <p:txBody>
+          <a:bodyPr rtlCol="0" anchor="ctr"/>
+          <a:lstStyle/>
+          <a:p>
+            <a:pPr algn="ctr"/>
+          </a:p>
+        </p:txBody>
+      </p:sp>
+      <p:sp>
+        <p:nvSpPr>
+          <p:cNvPr id="9" name="TextBox 8"/>
           <p:cNvSpPr txBox="1"/>
           <p:nvPr/>
         </p:nvSpPr>
         <p:spPr>
           <a:xfrm>
-            <a:off x="640080" y="6510528"/>
-            <a:ext cx="5486400" cy="274320"/>
+            <a:off x="8229600" y="1965960"/>
+            <a:ext cx="3017520" cy="365760"/>
           </a:xfrm>
           <a:prstGeom prst="rect">
             <a:avLst/>
@@ -8139,20 +9008,98 @@
               </a:lnSpc>
             </a:pPr>
             <a:r>
+              <a:rPr sz="1200" b="1" i="0">
+                <a:solidFill>
+                  <a:srgbClr val="FFFFFF"/>
+                </a:solidFill>
+                <a:latin typeface="Arial"/>
+              </a:rPr>
+              <a:t>PROBLEM</a:t>
+            </a:r>
+          </a:p>
+        </p:txBody>
+      </p:sp>
+      <p:sp>
+        <p:nvSpPr>
+          <p:cNvPr id="10" name="TextBox 9"/>
+          <p:cNvSpPr txBox="1"/>
+          <p:nvPr/>
+        </p:nvSpPr>
+        <p:spPr>
+          <a:xfrm>
+            <a:off x="8229600" y="2377440"/>
+            <a:ext cx="3063240" cy="2468880"/>
+          </a:xfrm>
+          <a:prstGeom prst="rect">
+            <a:avLst/>
+          </a:prstGeom>
+          <a:noFill/>
+        </p:spPr>
+        <p:txBody>
+          <a:bodyPr wrap="square" anchor="t">
+            <a:spAutoFit/>
+          </a:bodyPr>
+          <a:lstStyle/>
+          <a:p>
+            <a:pPr algn="l">
+              <a:lnSpc>
+                <a:spcPct val="130000"/>
+              </a:lnSpc>
+            </a:pPr>
+            <a:r>
+              <a:rPr sz="1600" b="0" i="0">
+                <a:solidFill>
+                  <a:srgbClr val="FFFFFF"/>
+                </a:solidFill>
+                <a:latin typeface="Arial"/>
+              </a:rPr>
+              <a:t>In which periods were the worst air quality conditions recorded, and which environmental variables were associated with them?</a:t>
+            </a:r>
+          </a:p>
+        </p:txBody>
+      </p:sp>
+      <p:sp>
+        <p:nvSpPr>
+          <p:cNvPr id="11" name="TextBox 10"/>
+          <p:cNvSpPr txBox="1"/>
+          <p:nvPr/>
+        </p:nvSpPr>
+        <p:spPr>
+          <a:xfrm>
+            <a:off x="640080" y="6510528"/>
+            <a:ext cx="5486400" cy="274320"/>
+          </a:xfrm>
+          <a:prstGeom prst="rect">
+            <a:avLst/>
+          </a:prstGeom>
+          <a:noFill/>
+        </p:spPr>
+        <p:txBody>
+          <a:bodyPr wrap="square" anchor="t">
+            <a:spAutoFit/>
+          </a:bodyPr>
+          <a:lstStyle/>
+          <a:p>
+            <a:pPr algn="l">
+              <a:lnSpc>
+                <a:spcPct val="115000"/>
+              </a:lnSpc>
+            </a:pPr>
+            <a:r>
               <a:rPr sz="1000" b="0" i="0">
                 <a:solidFill>
                   <a:srgbClr val="898781"/>
                 </a:solidFill>
                 <a:latin typeface="Arial"/>
               </a:rPr>
-              <a:t>AeroTrack | Modulo 6 | Apache Hop</a:t>
-            </a:r>
-          </a:p>
-        </p:txBody>
-      </p:sp>
-      <p:sp>
-        <p:nvSpPr>
-          <p:cNvPr id="9" name="TextBox 8"/>
+              <a:t>AeroTrack | Module 6 | Apache Hop</a:t>
+            </a:r>
+          </a:p>
+        </p:txBody>
+      </p:sp>
+      <p:sp>
+        <p:nvSpPr>
+          <p:cNvPr id="12" name="TextBox 11"/>
           <p:cNvSpPr txBox="1"/>
           <p:nvPr/>
         </p:nvSpPr>
@@ -8267,8 +9214,8 @@
         </p:nvSpPr>
         <p:spPr>
           <a:xfrm>
-            <a:off x="640080" y="320040"/>
-            <a:ext cx="7315200" cy="365760"/>
+            <a:off x="640080" y="292608"/>
+            <a:ext cx="8686800" cy="365760"/>
           </a:xfrm>
           <a:prstGeom prst="rect">
             <a:avLst/>
@@ -8293,7 +9240,7 @@
                 </a:solidFill>
                 <a:latin typeface="Arial"/>
               </a:rPr>
-              <a:t>APACHE HOP</a:t>
+              <a:t>THE SOLUTION</a:t>
             </a:r>
           </a:p>
         </p:txBody>
@@ -8306,7 +9253,7 @@
         </p:nvSpPr>
         <p:spPr>
           <a:xfrm>
-            <a:off x="640080" y="621792"/>
+            <a:off x="640080" y="594360"/>
             <a:ext cx="10789920" cy="822960"/>
           </a:xfrm>
           <a:prstGeom prst="rect">
@@ -8326,30 +9273,32 @@
               </a:lnSpc>
             </a:pPr>
             <a:r>
-              <a:rPr sz="3000" b="1" i="0">
+              <a:rPr sz="2900" b="1" i="0">
                 <a:solidFill>
                   <a:srgbClr val="0B1F33"/>
                 </a:solidFill>
                 <a:latin typeface="Arial"/>
               </a:rPr>
-              <a:t>Pipeline de consolidacao e workflow</a:t>
-            </a:r>
-          </a:p>
-        </p:txBody>
-      </p:sp>
-      <p:sp>
-        <p:nvSpPr>
-          <p:cNvPr id="5" name="Rectangle 4"/>
+              <a:t>End-to-end architecture</a:t>
+            </a:r>
+          </a:p>
+        </p:txBody>
+      </p:sp>
+      <p:sp>
+        <p:nvSpPr>
+          <p:cNvPr id="5" name="Rounded Rectangle 4"/>
           <p:cNvSpPr/>
           <p:nvPr/>
         </p:nvSpPr>
         <p:spPr>
           <a:xfrm>
-            <a:off x="658368" y="1298448"/>
-            <a:ext cx="1188720" cy="38100"/>
-          </a:xfrm>
-          <a:prstGeom prst="rect">
-            <a:avLst/>
+            <a:off x="658368" y="1261872"/>
+            <a:ext cx="1188720" cy="50800"/>
+          </a:xfrm>
+          <a:prstGeom prst="roundRect">
+            <a:avLst>
+              <a:gd name="adj" fmla="val 50000"/>
+            </a:avLst>
           </a:prstGeom>
           <a:solidFill>
             <a:srgbClr val="1BAF7A"/>
@@ -8397,7 +9346,7 @@
         </p:blipFill>
         <p:spPr>
           <a:xfrm>
-            <a:off x="11292840" y="292608"/>
+            <a:off x="11292840" y="274320"/>
             <a:ext cx="502920" cy="502920"/>
           </a:xfrm>
           <a:prstGeom prst="rect">
@@ -8405,16 +9354,40 @@
           </a:prstGeom>
         </p:spPr>
       </p:pic>
-      <p:sp>
-        <p:nvSpPr>
-          <p:cNvPr id="7" name="TextBox 6"/>
+      <p:pic>
+        <p:nvPicPr>
+          <p:cNvPr id="7" name="Picture 6" descr="aerotrack-flowchart.png"/>
+          <p:cNvPicPr>
+            <a:picLocks noChangeAspect="1"/>
+          </p:cNvPicPr>
+          <p:nvPr/>
+        </p:nvPicPr>
+        <p:blipFill>
+          <a:blip r:embed="rId3"/>
+          <a:stretch>
+            <a:fillRect/>
+          </a:stretch>
+        </p:blipFill>
+        <p:spPr>
+          <a:xfrm>
+            <a:off x="457200" y="2103120"/>
+            <a:ext cx="11247120" cy="1968246"/>
+          </a:xfrm>
+          <a:prstGeom prst="rect">
+            <a:avLst/>
+          </a:prstGeom>
+        </p:spPr>
+      </p:pic>
+      <p:sp>
+        <p:nvSpPr>
+          <p:cNvPr id="8" name="TextBox 7"/>
           <p:cNvSpPr txBox="1"/>
           <p:nvPr/>
         </p:nvSpPr>
         <p:spPr>
           <a:xfrm>
-            <a:off x="822960" y="1691640"/>
-            <a:ext cx="10058400" cy="365760"/>
+            <a:off x="822960" y="4846320"/>
+            <a:ext cx="10515600" cy="1188720"/>
           </a:xfrm>
           <a:prstGeom prst="rect">
             <a:avLst/>
@@ -8429,78 +9402,33 @@
           <a:p>
             <a:pPr algn="l">
               <a:lnSpc>
-                <a:spcPct val="115000"/>
-              </a:lnSpc>
-            </a:pPr>
-            <a:r>
-              <a:rPr sz="1800" b="1" i="0">
-                <a:solidFill>
-                  <a:srgbClr val="1BAF7A"/>
-                </a:solidFill>
-                <a:latin typeface="Arial"/>
-              </a:rPr>
-              <a:t>pl_02_consolidacao_indicadores</a:t>
-            </a:r>
-          </a:p>
-        </p:txBody>
-      </p:sp>
-      <p:sp>
-        <p:nvSpPr>
-          <p:cNvPr id="8" name="TextBox 7"/>
-          <p:cNvSpPr txBox="1"/>
-          <p:nvPr/>
-        </p:nvSpPr>
-        <p:spPr>
-          <a:xfrm>
-            <a:off x="822960" y="2103120"/>
-            <a:ext cx="10607040" cy="1645920"/>
-          </a:xfrm>
-          <a:prstGeom prst="rect">
-            <a:avLst/>
-          </a:prstGeom>
-          <a:noFill/>
-        </p:spPr>
-        <p:txBody>
-          <a:bodyPr wrap="square">
-            <a:spAutoFit/>
-          </a:bodyPr>
-          <a:lstStyle/>
-          <a:p>
-            <a:pPr>
-              <a:lnSpc>
-                <a:spcPct val="112000"/>
-              </a:lnSpc>
-              <a:spcAft>
-                <a:spcPts val="1000"/>
-              </a:spcAft>
-            </a:pPr>
-            <a:r>
-              <a:rPr sz="1700">
+                <a:spcPct val="135000"/>
+              </a:lnSpc>
+            </a:pPr>
+            <a:r>
+              <a:rPr sz="1600" b="0" i="0">
                 <a:solidFill>
                   <a:srgbClr val="26364A"/>
                 </a:solidFill>
                 <a:latin typeface="Arial"/>
               </a:rPr>
-              <a:t>•  Table Input agrega as leituras tratadas por dia e por mes</a:t>
-            </a:r>
-          </a:p>
-          <a:p>
-            <a:pPr>
-              <a:lnSpc>
-                <a:spcPct val="112000"/>
-              </a:lnSpc>
-              <a:spcAft>
-                <a:spcPts val="1000"/>
-              </a:spcAft>
-            </a:pPr>
-            <a:r>
-              <a:rPr sz="1700">
+              <a:t>Two Apache Hop pipelines, orchestrated by a workflow: pl_01_ingestion_treatment and</a:t>
+            </a:r>
+          </a:p>
+          <a:p>
+            <a:pPr algn="l">
+              <a:lnSpc>
+                <a:spcPct val="135000"/>
+              </a:lnSpc>
+            </a:pPr>
+            <a:r>
+              <a:rPr sz="1600" b="0" i="0">
                 <a:solidFill>
                   <a:srgbClr val="26364A"/>
                 </a:solidFill>
                 <a:latin typeface="Arial"/>
               </a:rPr>
-              <a:t>•  Insert/Update grava os resumos em resumo_diario_qualidade_ar e resumo_mensal_qualidade_ar</a:t>
+              <a:t>pl_02_indicator_consolidation, feeding a PostgreSQL database and a live dashboard.</a:t>
             </a:r>
           </a:p>
         </p:txBody>
@@ -8513,8 +9441,8 @@
         </p:nvSpPr>
         <p:spPr>
           <a:xfrm>
-            <a:off x="822960" y="3794760"/>
-            <a:ext cx="10058400" cy="365760"/>
+            <a:off x="640080" y="6510528"/>
+            <a:ext cx="5486400" cy="274320"/>
           </a:xfrm>
           <a:prstGeom prst="rect">
             <a:avLst/>
@@ -8533,114 +9461,20 @@
               </a:lnSpc>
             </a:pPr>
             <a:r>
-              <a:rPr sz="1800" b="1" i="0">
-                <a:solidFill>
-                  <a:srgbClr val="1BAF7A"/>
-                </a:solidFill>
-                <a:latin typeface="Arial"/>
-              </a:rPr>
-              <a:t>wf_orquestracao_qualidade_ar</a:t>
-            </a:r>
-          </a:p>
-        </p:txBody>
-      </p:sp>
-      <p:sp>
-        <p:nvSpPr>
-          <p:cNvPr id="10" name="Rectangle 9"/>
-          <p:cNvSpPr/>
-          <p:nvPr/>
-        </p:nvSpPr>
-        <p:spPr>
-          <a:xfrm>
-            <a:off x="822960" y="4251960"/>
-            <a:ext cx="10424160" cy="822960"/>
-          </a:xfrm>
-          <a:prstGeom prst="rect">
-            <a:avLst/>
-          </a:prstGeom>
-          <a:solidFill>
-            <a:srgbClr val="F2F7FB"/>
-          </a:solidFill>
-          <a:ln>
-            <a:solidFill>
-              <a:srgbClr val="C9D8E8"/>
-            </a:solidFill>
-          </a:ln>
-          <a:effectLst/>
-        </p:spPr>
-        <p:style>
-          <a:lnRef idx="1">
-            <a:schemeClr val="accent1"/>
-          </a:lnRef>
-          <a:fillRef idx="3">
-            <a:schemeClr val="accent1"/>
-          </a:fillRef>
-          <a:effectRef idx="2">
-            <a:schemeClr val="accent1"/>
-          </a:effectRef>
-          <a:fontRef idx="minor">
-            <a:schemeClr val="lt1"/>
-          </a:fontRef>
-        </p:style>
-        <p:txBody>
-          <a:bodyPr rtlCol="0" anchor="ctr" wrap="square"/>
-          <a:lstStyle/>
-          <a:p>
-            <a:pPr algn="ctr"/>
-            <a:r>
-              <a:rPr sz="1700" b="1">
-                <a:solidFill>
-                  <a:srgbClr val="0B1F33"/>
-                </a:solidFill>
-                <a:latin typeface="Consolas"/>
-              </a:rPr>
-              <a:t>START  →  Ingestao e tratamento  →  Consolidacao de indicadores  →  Processo concluido</a:t>
-            </a:r>
-          </a:p>
-        </p:txBody>
-      </p:sp>
-      <p:sp>
-        <p:nvSpPr>
-          <p:cNvPr id="11" name="TextBox 10"/>
-          <p:cNvSpPr txBox="1"/>
-          <p:nvPr/>
-        </p:nvSpPr>
-        <p:spPr>
-          <a:xfrm>
-            <a:off x="640080" y="6510528"/>
-            <a:ext cx="5486400" cy="274320"/>
-          </a:xfrm>
-          <a:prstGeom prst="rect">
-            <a:avLst/>
-          </a:prstGeom>
-          <a:noFill/>
-        </p:spPr>
-        <p:txBody>
-          <a:bodyPr wrap="square" anchor="t">
-            <a:spAutoFit/>
-          </a:bodyPr>
-          <a:lstStyle/>
-          <a:p>
-            <a:pPr algn="l">
-              <a:lnSpc>
-                <a:spcPct val="115000"/>
-              </a:lnSpc>
-            </a:pPr>
-            <a:r>
               <a:rPr sz="1000" b="0" i="0">
                 <a:solidFill>
                   <a:srgbClr val="898781"/>
                 </a:solidFill>
                 <a:latin typeface="Arial"/>
               </a:rPr>
-              <a:t>AeroTrack | Modulo 6 | Apache Hop</a:t>
-            </a:r>
-          </a:p>
-        </p:txBody>
-      </p:sp>
-      <p:sp>
-        <p:nvSpPr>
-          <p:cNvPr id="12" name="TextBox 11"/>
+              <a:t>AeroTrack | Module 6 | Apache Hop</a:t>
+            </a:r>
+          </a:p>
+        </p:txBody>
+      </p:sp>
+      <p:sp>
+        <p:nvSpPr>
+          <p:cNvPr id="10" name="TextBox 9"/>
           <p:cNvSpPr txBox="1"/>
           <p:nvPr/>
         </p:nvSpPr>
@@ -8755,8 +9589,8 @@
         </p:nvSpPr>
         <p:spPr>
           <a:xfrm>
-            <a:off x="640080" y="320040"/>
-            <a:ext cx="7315200" cy="365760"/>
+            <a:off x="640080" y="292608"/>
+            <a:ext cx="8686800" cy="365760"/>
           </a:xfrm>
           <a:prstGeom prst="rect">
             <a:avLst/>
@@ -8781,7 +9615,7 @@
                 </a:solidFill>
                 <a:latin typeface="Arial"/>
               </a:rPr>
-              <a:t>QUALIDADE DE DADOS</a:t>
+              <a:t>APACHE HOP</a:t>
             </a:r>
           </a:p>
         </p:txBody>
@@ -8794,7 +9628,7 @@
         </p:nvSpPr>
         <p:spPr>
           <a:xfrm>
-            <a:off x="640080" y="621792"/>
+            <a:off x="640080" y="594360"/>
             <a:ext cx="10789920" cy="822960"/>
           </a:xfrm>
           <a:prstGeom prst="rect">
@@ -8814,30 +9648,32 @@
               </a:lnSpc>
             </a:pPr>
             <a:r>
-              <a:rPr sz="3000" b="1" i="0">
+              <a:rPr sz="2900" b="1" i="0">
                 <a:solidFill>
                   <a:srgbClr val="0B1F33"/>
                 </a:solidFill>
                 <a:latin typeface="Arial"/>
               </a:rPr>
-              <a:t>Tratamentos aplicados</a:t>
-            </a:r>
-          </a:p>
-        </p:txBody>
-      </p:sp>
-      <p:sp>
-        <p:nvSpPr>
-          <p:cNvPr id="5" name="Rectangle 4"/>
+              <a:t>Ingestion and treatment pipeline</a:t>
+            </a:r>
+          </a:p>
+        </p:txBody>
+      </p:sp>
+      <p:sp>
+        <p:nvSpPr>
+          <p:cNvPr id="5" name="Rounded Rectangle 4"/>
           <p:cNvSpPr/>
           <p:nvPr/>
         </p:nvSpPr>
         <p:spPr>
           <a:xfrm>
-            <a:off x="658368" y="1298448"/>
-            <a:ext cx="1188720" cy="38100"/>
-          </a:xfrm>
-          <a:prstGeom prst="rect">
-            <a:avLst/>
+            <a:off x="658368" y="1261872"/>
+            <a:ext cx="1188720" cy="50800"/>
+          </a:xfrm>
+          <a:prstGeom prst="roundRect">
+            <a:avLst>
+              <a:gd name="adj" fmla="val 50000"/>
+            </a:avLst>
           </a:prstGeom>
           <a:solidFill>
             <a:srgbClr val="1BAF7A"/>
@@ -8885,7 +9721,7 @@
         </p:blipFill>
         <p:spPr>
           <a:xfrm>
-            <a:off x="11292840" y="292608"/>
+            <a:off x="11292840" y="274320"/>
             <a:ext cx="502920" cy="502920"/>
           </a:xfrm>
           <a:prstGeom prst="rect">
@@ -8901,8 +9737,8 @@
         </p:nvSpPr>
         <p:spPr>
           <a:xfrm>
-            <a:off x="822960" y="1737360"/>
-            <a:ext cx="10607040" cy="4389120"/>
+            <a:off x="822960" y="1691640"/>
+            <a:ext cx="10607040" cy="4480560"/>
           </a:xfrm>
           <a:prstGeom prst="rect">
             <a:avLst/>
@@ -8917,77 +9753,134 @@
           <a:p>
             <a:pPr>
               <a:lnSpc>
-                <a:spcPct val="112000"/>
+                <a:spcPct val="115000"/>
               </a:lnSpc>
               <a:spcAft>
-                <a:spcPts val="1600"/>
+                <a:spcPts val="1100"/>
               </a:spcAft>
             </a:pPr>
             <a:r>
-              <a:rPr sz="1800">
+              <a:rPr sz="1700">
                 <a:solidFill>
                   <a:srgbClr val="26364A"/>
                 </a:solidFill>
                 <a:latin typeface="Arial"/>
               </a:rPr>
-              <a:t>•  Valor sentinela -200: convertido em nulo antes de qualquer calculo (Null If)</a:t>
+              <a:t>•  CSV Input reads the raw dataset (semicolon separator, comma decimal)</a:t>
             </a:r>
           </a:p>
           <a:p>
             <a:pPr>
               <a:lnSpc>
-                <a:spcPct val="112000"/>
+                <a:spcPct val="115000"/>
               </a:lnSpc>
               <a:spcAft>
-                <a:spcPts val="1600"/>
+                <a:spcPts val="1100"/>
               </a:spcAft>
             </a:pPr>
             <a:r>
-              <a:rPr sz="1800">
+              <a:rPr sz="1700">
                 <a:solidFill>
                   <a:srgbClr val="26364A"/>
                 </a:solidFill>
                 <a:latin typeface="Arial"/>
               </a:rPr>
-              <a:t>•  114 linhas vazias do export do dataset: descartadas na ingestao (Filter Rows)</a:t>
+              <a:t>•  Filter Rows removes the empty rows left by the dataset export</a:t>
             </a:r>
           </a:p>
           <a:p>
             <a:pPr>
               <a:lnSpc>
-                <a:spcPct val="112000"/>
+                <a:spcPct val="115000"/>
               </a:lnSpc>
               <a:spcAft>
-                <a:spcPts val="1600"/>
+                <a:spcPts val="1100"/>
               </a:spcAft>
             </a:pPr>
             <a:r>
-              <a:rPr sz="1800">
+              <a:rPr sz="1700">
                 <a:solidFill>
                   <a:srgbClr val="26364A"/>
                 </a:solidFill>
                 <a:latin typeface="Arial"/>
               </a:rPr>
-              <a:t>•  Leituras sem nenhum poluente de referencia (CO, NOx e NO2): separadas em leituras_rejeitadas</a:t>
+              <a:t>•  Formula builds a single date-time text; Null If handles the -200 missing-value sentinel</a:t>
             </a:r>
           </a:p>
           <a:p>
             <a:pPr>
               <a:lnSpc>
-                <a:spcPct val="112000"/>
+                <a:spcPct val="115000"/>
               </a:lnSpc>
               <a:spcAft>
-                <a:spcPts val="1600"/>
+                <a:spcPts val="1100"/>
               </a:spcAft>
             </a:pPr>
             <a:r>
-              <a:rPr sz="1800">
+              <a:rPr sz="1700">
                 <a:solidFill>
                   <a:srgbClr val="26364A"/>
                 </a:solidFill>
                 <a:latin typeface="Arial"/>
               </a:rPr>
-              <a:t>•  Classificacao analitica de CO e de NO2 (BOM, MODERADO, CRITICO): calculada a partir dos percentis reais do dataset, sem referencia a norma regulatoria externa</a:t>
+              <a:t>•  Select Values renames fields and converts text into a proper Date</a:t>
+            </a:r>
+          </a:p>
+          <a:p>
+            <a:pPr>
+              <a:lnSpc>
+                <a:spcPct val="115000"/>
+              </a:lnSpc>
+              <a:spcAft>
+                <a:spcPts val="1100"/>
+              </a:spcAft>
+            </a:pPr>
+            <a:r>
+              <a:rPr sz="1700">
+                <a:solidFill>
+                  <a:srgbClr val="26364A"/>
+                </a:solidFill>
+                <a:latin typeface="Arial"/>
+              </a:rPr>
+              <a:t>•  Calculator, Value Mapper and Number Range derive year, month, time of day and CO/NO2 level</a:t>
+            </a:r>
+          </a:p>
+          <a:p>
+            <a:pPr>
+              <a:lnSpc>
+                <a:spcPct val="115000"/>
+              </a:lnSpc>
+              <a:spcAft>
+                <a:spcPts val="1100"/>
+              </a:spcAft>
+            </a:pPr>
+            <a:r>
+              <a:rPr sz="1700">
+                <a:solidFill>
+                  <a:srgbClr val="26364A"/>
+                </a:solidFill>
+                <a:latin typeface="Arial"/>
+              </a:rPr>
+              <a:t>•  Janino flags whether a reading is valid; Filter Rows splits valid from rejected readings</a:t>
+            </a:r>
+          </a:p>
+          <a:p>
+            <a:pPr>
+              <a:lnSpc>
+                <a:spcPct val="115000"/>
+              </a:lnSpc>
+              <a:spcAft>
+                <a:spcPts val="1100"/>
+              </a:spcAft>
+            </a:pPr>
+            <a:r>
+              <a:rPr sz="1700">
+                <a:solidFill>
+                  <a:srgbClr val="26364A"/>
+                </a:solidFill>
+                <a:latin typeface="Arial"/>
+              </a:rPr>
+              <a:t>•  Insert/Update loads PostgreSQL keyed on data_hora, safe to rerun</a:t>
             </a:r>
           </a:p>
         </p:txBody>
@@ -9026,7 +9919,7 @@
                 </a:solidFill>
                 <a:latin typeface="Arial"/>
               </a:rPr>
-              <a:t>AeroTrack | Modulo 6 | Apache Hop</a:t>
+              <a:t>AeroTrack | Module 6 | Apache Hop</a:t>
             </a:r>
           </a:p>
         </p:txBody>
@@ -9148,8 +10041,8 @@
         </p:nvSpPr>
         <p:spPr>
           <a:xfrm>
-            <a:off x="640080" y="320040"/>
-            <a:ext cx="7315200" cy="365760"/>
+            <a:off x="640080" y="292608"/>
+            <a:ext cx="8686800" cy="365760"/>
           </a:xfrm>
           <a:prstGeom prst="rect">
             <a:avLst/>
@@ -9174,7 +10067,7 @@
                 </a:solidFill>
                 <a:latin typeface="Arial"/>
               </a:rPr>
-              <a:t>PERSISTENCIA</a:t>
+              <a:t>APACHE HOP</a:t>
             </a:r>
           </a:p>
         </p:txBody>
@@ -9187,7 +10080,7 @@
         </p:nvSpPr>
         <p:spPr>
           <a:xfrm>
-            <a:off x="640080" y="621792"/>
+            <a:off x="640080" y="594360"/>
             <a:ext cx="10789920" cy="822960"/>
           </a:xfrm>
           <a:prstGeom prst="rect">
@@ -9207,30 +10100,32 @@
               </a:lnSpc>
             </a:pPr>
             <a:r>
-              <a:rPr sz="3000" b="1" i="0">
+              <a:rPr sz="2900" b="1" i="0">
                 <a:solidFill>
                   <a:srgbClr val="0B1F33"/>
                 </a:solidFill>
                 <a:latin typeface="Arial"/>
               </a:rPr>
-              <a:t>Banco de dados e reexecucao</a:t>
-            </a:r>
-          </a:p>
-        </p:txBody>
-      </p:sp>
-      <p:sp>
-        <p:nvSpPr>
-          <p:cNvPr id="5" name="Rectangle 4"/>
+              <a:t>Consolidation pipeline and orchestration</a:t>
+            </a:r>
+          </a:p>
+        </p:txBody>
+      </p:sp>
+      <p:sp>
+        <p:nvSpPr>
+          <p:cNvPr id="5" name="Rounded Rectangle 4"/>
           <p:cNvSpPr/>
           <p:nvPr/>
         </p:nvSpPr>
         <p:spPr>
           <a:xfrm>
-            <a:off x="658368" y="1298448"/>
-            <a:ext cx="1188720" cy="38100"/>
-          </a:xfrm>
-          <a:prstGeom prst="rect">
-            <a:avLst/>
+            <a:off x="658368" y="1261872"/>
+            <a:ext cx="1188720" cy="50800"/>
+          </a:xfrm>
+          <a:prstGeom prst="roundRect">
+            <a:avLst>
+              <a:gd name="adj" fmla="val 50000"/>
+            </a:avLst>
           </a:prstGeom>
           <a:solidFill>
             <a:srgbClr val="1BAF7A"/>
@@ -9278,7 +10173,7 @@
         </p:blipFill>
         <p:spPr>
           <a:xfrm>
-            <a:off x="11292840" y="292608"/>
+            <a:off x="11292840" y="274320"/>
             <a:ext cx="502920" cy="502920"/>
           </a:xfrm>
           <a:prstGeom prst="rect">
@@ -9294,8 +10189,8 @@
         </p:nvSpPr>
         <p:spPr>
           <a:xfrm>
-            <a:off x="822960" y="1737360"/>
-            <a:ext cx="3749039" cy="457200"/>
+            <a:off x="822960" y="1691640"/>
+            <a:ext cx="10058400" cy="365760"/>
           </a:xfrm>
           <a:prstGeom prst="rect">
             <a:avLst/>
@@ -9314,13 +10209,13 @@
               </a:lnSpc>
             </a:pPr>
             <a:r>
-              <a:rPr sz="1500" b="1" i="0">
-                <a:solidFill>
-                  <a:srgbClr val="2A78D6"/>
-                </a:solidFill>
-                <a:latin typeface="Consolas"/>
-              </a:rPr>
-              <a:t>leituras_qualidade_ar</a:t>
+              <a:rPr sz="1800" b="1" i="0">
+                <a:solidFill>
+                  <a:srgbClr val="1BAF7A"/>
+                </a:solidFill>
+                <a:latin typeface="Arial"/>
+              </a:rPr>
+              <a:t>pl_02_indicator_consolidation</a:t>
             </a:r>
           </a:p>
         </p:txBody>
@@ -9333,8 +10228,69 @@
         </p:nvSpPr>
         <p:spPr>
           <a:xfrm>
-            <a:off x="4663440" y="1737360"/>
-            <a:ext cx="6583680" cy="457200"/>
+            <a:off x="822960" y="2103120"/>
+            <a:ext cx="10607040" cy="1554480"/>
+          </a:xfrm>
+          <a:prstGeom prst="rect">
+            <a:avLst/>
+          </a:prstGeom>
+          <a:noFill/>
+        </p:spPr>
+        <p:txBody>
+          <a:bodyPr wrap="square">
+            <a:spAutoFit/>
+          </a:bodyPr>
+          <a:lstStyle/>
+          <a:p>
+            <a:pPr>
+              <a:lnSpc>
+                <a:spcPct val="115000"/>
+              </a:lnSpc>
+              <a:spcAft>
+                <a:spcPts val="1000"/>
+              </a:spcAft>
+            </a:pPr>
+            <a:r>
+              <a:rPr sz="1700">
+                <a:solidFill>
+                  <a:srgbClr val="26364A"/>
+                </a:solidFill>
+                <a:latin typeface="Arial"/>
+              </a:rPr>
+              <a:t>•  Table Input aggregates treated readings by day and by month</a:t>
+            </a:r>
+          </a:p>
+          <a:p>
+            <a:pPr>
+              <a:lnSpc>
+                <a:spcPct val="115000"/>
+              </a:lnSpc>
+              <a:spcAft>
+                <a:spcPts val="1000"/>
+              </a:spcAft>
+            </a:pPr>
+            <a:r>
+              <a:rPr sz="1700">
+                <a:solidFill>
+                  <a:srgbClr val="26364A"/>
+                </a:solidFill>
+                <a:latin typeface="Arial"/>
+              </a:rPr>
+              <a:t>•  Insert/Update writes resumo_diario_qualidade_ar and resumo_mensal_qualidade_ar</a:t>
+            </a:r>
+          </a:p>
+        </p:txBody>
+      </p:sp>
+      <p:sp>
+        <p:nvSpPr>
+          <p:cNvPr id="9" name="TextBox 8"/>
+          <p:cNvSpPr txBox="1"/>
+          <p:nvPr/>
+        </p:nvSpPr>
+        <p:spPr>
+          <a:xfrm>
+            <a:off x="822960" y="3703320"/>
+            <a:ext cx="10058400" cy="365760"/>
           </a:xfrm>
           <a:prstGeom prst="rect">
             <a:avLst/>
@@ -9353,272 +10309,55 @@
               </a:lnSpc>
             </a:pPr>
             <a:r>
-              <a:rPr sz="1500" b="0" i="0">
-                <a:solidFill>
-                  <a:srgbClr val="26364A"/>
-                </a:solidFill>
-                <a:latin typeface="Arial"/>
-              </a:rPr>
-              <a:t>Dados tratados e detalhados, uma linha por leitura valida</a:t>
-            </a:r>
-          </a:p>
-        </p:txBody>
-      </p:sp>
-      <p:sp>
-        <p:nvSpPr>
-          <p:cNvPr id="9" name="TextBox 8"/>
-          <p:cNvSpPr txBox="1"/>
-          <p:nvPr/>
-        </p:nvSpPr>
-        <p:spPr>
-          <a:xfrm>
-            <a:off x="822960" y="2304288"/>
-            <a:ext cx="3749039" cy="457200"/>
-          </a:xfrm>
-          <a:prstGeom prst="rect">
-            <a:avLst/>
-          </a:prstGeom>
-          <a:noFill/>
-        </p:spPr>
-        <p:txBody>
-          <a:bodyPr wrap="square" anchor="t">
-            <a:spAutoFit/>
-          </a:bodyPr>
-          <a:lstStyle/>
-          <a:p>
-            <a:pPr algn="l">
-              <a:lnSpc>
-                <a:spcPct val="115000"/>
-              </a:lnSpc>
-            </a:pPr>
-            <a:r>
-              <a:rPr sz="1500" b="1" i="0">
-                <a:solidFill>
-                  <a:srgbClr val="2A78D6"/>
-                </a:solidFill>
-                <a:latin typeface="Consolas"/>
-              </a:rPr>
-              <a:t>leituras_rejeitadas</a:t>
-            </a:r>
-          </a:p>
-        </p:txBody>
-      </p:sp>
-      <p:sp>
-        <p:nvSpPr>
-          <p:cNvPr id="10" name="TextBox 9"/>
-          <p:cNvSpPr txBox="1"/>
-          <p:nvPr/>
-        </p:nvSpPr>
-        <p:spPr>
-          <a:xfrm>
-            <a:off x="4663440" y="2304288"/>
-            <a:ext cx="6583680" cy="457200"/>
-          </a:xfrm>
-          <a:prstGeom prst="rect">
-            <a:avLst/>
-          </a:prstGeom>
-          <a:noFill/>
-        </p:spPr>
-        <p:txBody>
-          <a:bodyPr wrap="square" anchor="t">
-            <a:spAutoFit/>
-          </a:bodyPr>
-          <a:lstStyle/>
-          <a:p>
-            <a:pPr algn="l">
-              <a:lnSpc>
-                <a:spcPct val="115000"/>
-              </a:lnSpc>
-            </a:pPr>
-            <a:r>
-              <a:rPr sz="1500" b="0" i="0">
-                <a:solidFill>
-                  <a:srgbClr val="26364A"/>
-                </a:solidFill>
-                <a:latin typeface="Arial"/>
-              </a:rPr>
-              <a:t>Leituras sem poluente de referencia</a:t>
-            </a:r>
-          </a:p>
-        </p:txBody>
-      </p:sp>
-      <p:sp>
-        <p:nvSpPr>
-          <p:cNvPr id="11" name="TextBox 10"/>
-          <p:cNvSpPr txBox="1"/>
-          <p:nvPr/>
-        </p:nvSpPr>
-        <p:spPr>
-          <a:xfrm>
-            <a:off x="822960" y="2871216"/>
-            <a:ext cx="3749039" cy="457200"/>
-          </a:xfrm>
-          <a:prstGeom prst="rect">
-            <a:avLst/>
-          </a:prstGeom>
-          <a:noFill/>
-        </p:spPr>
-        <p:txBody>
-          <a:bodyPr wrap="square" anchor="t">
-            <a:spAutoFit/>
-          </a:bodyPr>
-          <a:lstStyle/>
-          <a:p>
-            <a:pPr algn="l">
-              <a:lnSpc>
-                <a:spcPct val="115000"/>
-              </a:lnSpc>
-            </a:pPr>
-            <a:r>
-              <a:rPr sz="1500" b="1" i="0">
-                <a:solidFill>
-                  <a:srgbClr val="2A78D6"/>
-                </a:solidFill>
-                <a:latin typeface="Consolas"/>
-              </a:rPr>
-              <a:t>resumo_diario_qualidade_ar</a:t>
-            </a:r>
-          </a:p>
-        </p:txBody>
-      </p:sp>
-      <p:sp>
-        <p:nvSpPr>
-          <p:cNvPr id="12" name="TextBox 11"/>
-          <p:cNvSpPr txBox="1"/>
-          <p:nvPr/>
-        </p:nvSpPr>
-        <p:spPr>
-          <a:xfrm>
-            <a:off x="4663440" y="2871216"/>
-            <a:ext cx="6583680" cy="457200"/>
-          </a:xfrm>
-          <a:prstGeom prst="rect">
-            <a:avLst/>
-          </a:prstGeom>
-          <a:noFill/>
-        </p:spPr>
-        <p:txBody>
-          <a:bodyPr wrap="square" anchor="t">
-            <a:spAutoFit/>
-          </a:bodyPr>
-          <a:lstStyle/>
-          <a:p>
-            <a:pPr algn="l">
-              <a:lnSpc>
-                <a:spcPct val="115000"/>
-              </a:lnSpc>
-            </a:pPr>
-            <a:r>
-              <a:rPr sz="1500" b="0" i="0">
-                <a:solidFill>
-                  <a:srgbClr val="26364A"/>
-                </a:solidFill>
-                <a:latin typeface="Arial"/>
-              </a:rPr>
-              <a:t>Indicadores agregados por dia</a:t>
-            </a:r>
-          </a:p>
-        </p:txBody>
-      </p:sp>
-      <p:sp>
-        <p:nvSpPr>
-          <p:cNvPr id="13" name="TextBox 12"/>
-          <p:cNvSpPr txBox="1"/>
-          <p:nvPr/>
-        </p:nvSpPr>
-        <p:spPr>
-          <a:xfrm>
-            <a:off x="822960" y="3438144"/>
-            <a:ext cx="3749039" cy="457200"/>
-          </a:xfrm>
-          <a:prstGeom prst="rect">
-            <a:avLst/>
-          </a:prstGeom>
-          <a:noFill/>
-        </p:spPr>
-        <p:txBody>
-          <a:bodyPr wrap="square" anchor="t">
-            <a:spAutoFit/>
-          </a:bodyPr>
-          <a:lstStyle/>
-          <a:p>
-            <a:pPr algn="l">
-              <a:lnSpc>
-                <a:spcPct val="115000"/>
-              </a:lnSpc>
-            </a:pPr>
-            <a:r>
-              <a:rPr sz="1500" b="1" i="0">
-                <a:solidFill>
-                  <a:srgbClr val="2A78D6"/>
-                </a:solidFill>
-                <a:latin typeface="Consolas"/>
-              </a:rPr>
-              <a:t>resumo_mensal_qualidade_ar</a:t>
-            </a:r>
-          </a:p>
-        </p:txBody>
-      </p:sp>
-      <p:sp>
-        <p:nvSpPr>
-          <p:cNvPr id="14" name="TextBox 13"/>
-          <p:cNvSpPr txBox="1"/>
-          <p:nvPr/>
-        </p:nvSpPr>
-        <p:spPr>
-          <a:xfrm>
-            <a:off x="4663440" y="3438144"/>
-            <a:ext cx="6583680" cy="457200"/>
-          </a:xfrm>
-          <a:prstGeom prst="rect">
-            <a:avLst/>
-          </a:prstGeom>
-          <a:noFill/>
-        </p:spPr>
-        <p:txBody>
-          <a:bodyPr wrap="square" anchor="t">
-            <a:spAutoFit/>
-          </a:bodyPr>
-          <a:lstStyle/>
-          <a:p>
-            <a:pPr algn="l">
-              <a:lnSpc>
-                <a:spcPct val="115000"/>
-              </a:lnSpc>
-            </a:pPr>
-            <a:r>
-              <a:rPr sz="1500" b="0" i="0">
-                <a:solidFill>
-                  <a:srgbClr val="26364A"/>
-                </a:solidFill>
-                <a:latin typeface="Arial"/>
-              </a:rPr>
-              <a:t>Indicadores agregados por mes</a:t>
-            </a:r>
-          </a:p>
-        </p:txBody>
-      </p:sp>
-      <p:sp>
-        <p:nvSpPr>
-          <p:cNvPr id="15" name="Rectangle 14"/>
+              <a:rPr sz="1800" b="1" i="0">
+                <a:solidFill>
+                  <a:srgbClr val="1BAF7A"/>
+                </a:solidFill>
+                <a:latin typeface="Arial"/>
+              </a:rPr>
+              <a:t>wf_air_quality_orchestration</a:t>
+            </a:r>
+          </a:p>
+        </p:txBody>
+      </p:sp>
+      <p:sp>
+        <p:nvSpPr>
+          <p:cNvPr id="10" name="Rounded Rectangle 9"/>
           <p:cNvSpPr/>
           <p:nvPr/>
         </p:nvSpPr>
         <p:spPr>
           <a:xfrm>
-            <a:off x="822960" y="4343400"/>
-            <a:ext cx="10424160" cy="1554480"/>
-          </a:xfrm>
-          <a:prstGeom prst="rect">
-            <a:avLst/>
-          </a:prstGeom>
-          <a:solidFill>
-            <a:srgbClr val="0B1F33"/>
-          </a:solidFill>
+            <a:off x="822960" y="4160520"/>
+            <a:ext cx="10424160" cy="914400"/>
+          </a:xfrm>
+          <a:prstGeom prst="roundRect">
+            <a:avLst>
+              <a:gd name="adj" fmla="val 14000"/>
+            </a:avLst>
+          </a:prstGeom>
+          <a:gradFill rotWithShape="1">
+            <a:gsLst>
+              <a:gs pos="0">
+                <a:srgbClr val="0B1F33"/>
+              </a:gs>
+              <a:gs pos="100000">
+                <a:srgbClr val="162E4A"/>
+              </a:gs>
+            </a:gsLst>
+            <a:lin scaled="0" ang="18900000"/>
+          </a:gradFill>
           <a:ln>
             <a:noFill/>
           </a:ln>
           <a:effectLst/>
+          <a:effectLst>
+            <a:outerShdw blurRad="180000" dist="45000" dir="5400000" rotWithShape="0">
+              <a:srgbClr val="0B1F33">
+                <a:alpha val="72000"/>
+              </a:srgbClr>
+            </a:outerShdw>
+          </a:effectLst>
         </p:spPr>
         <p:style>
           <a:lnRef idx="1">
@@ -9635,48 +10374,32 @@
           </a:fontRef>
         </p:style>
         <p:txBody>
-          <a:bodyPr rtlCol="0" anchor="ctr" wrap="square" lIns="274320" rIns="274320"/>
+          <a:bodyPr rtlCol="0" anchor="ctr" wrap="square"/>
           <a:lstStyle/>
           <a:p>
             <a:pPr algn="ctr"/>
             <a:r>
-              <a:rPr sz="1500" b="1">
-                <a:solidFill>
-                  <a:srgbClr val="1BAF7A"/>
-                </a:solidFill>
-                <a:latin typeface="Arial"/>
-              </a:rPr>
-              <a:t>Reexecucao sem duplicidade</a:t>
-            </a:r>
-          </a:p>
-          <a:p>
-            <a:pPr>
-              <a:spcBef>
-                <a:spcPts val="600"/>
-              </a:spcBef>
-            </a:pPr>
-            <a:r>
-              <a:rPr sz="1400">
+              <a:rPr sz="1600" b="1">
                 <a:solidFill>
                   <a:srgbClr val="FFFFFF"/>
                 </a:solidFill>
-                <a:latin typeface="Arial"/>
-              </a:rPr>
-              <a:t>Chave UNIQUE em data_hora e carga por Insert/Update: reexecutar o processo atualiza os registros existentes em vez de duplicar. Validado executando o workflow duas vezes seguidas (8131 linhas nas duas execucoes).</a:t>
-            </a:r>
-          </a:p>
-        </p:txBody>
-      </p:sp>
-      <p:sp>
-        <p:nvSpPr>
-          <p:cNvPr id="16" name="TextBox 15"/>
+                <a:latin typeface="Consolas"/>
+              </a:rPr>
+              <a:t>START  →  Ingestion and treatment  →  Indicator consolidation  →  Process completed</a:t>
+            </a:r>
+          </a:p>
+        </p:txBody>
+      </p:sp>
+      <p:sp>
+        <p:nvSpPr>
+          <p:cNvPr id="11" name="TextBox 10"/>
           <p:cNvSpPr txBox="1"/>
           <p:nvPr/>
         </p:nvSpPr>
         <p:spPr>
           <a:xfrm>
-            <a:off x="640080" y="6510528"/>
-            <a:ext cx="5486400" cy="274320"/>
+            <a:off x="822960" y="5349240"/>
+            <a:ext cx="10424160" cy="822960"/>
           </a:xfrm>
           <a:prstGeom prst="rect">
             <a:avLst/>
@@ -9695,20 +10418,59 @@
               </a:lnSpc>
             </a:pPr>
             <a:r>
+              <a:rPr sz="1400" b="0" i="1">
+                <a:solidFill>
+                  <a:srgbClr val="26364A"/>
+                </a:solidFill>
+                <a:latin typeface="Arial"/>
+              </a:rPr>
+              <a:t>The second hop only runs if ingestion succeeds, preventing indicators from ever being built on an incomplete load.</a:t>
+            </a:r>
+          </a:p>
+        </p:txBody>
+      </p:sp>
+      <p:sp>
+        <p:nvSpPr>
+          <p:cNvPr id="12" name="TextBox 11"/>
+          <p:cNvSpPr txBox="1"/>
+          <p:nvPr/>
+        </p:nvSpPr>
+        <p:spPr>
+          <a:xfrm>
+            <a:off x="640080" y="6510528"/>
+            <a:ext cx="5486400" cy="274320"/>
+          </a:xfrm>
+          <a:prstGeom prst="rect">
+            <a:avLst/>
+          </a:prstGeom>
+          <a:noFill/>
+        </p:spPr>
+        <p:txBody>
+          <a:bodyPr wrap="square" anchor="t">
+            <a:spAutoFit/>
+          </a:bodyPr>
+          <a:lstStyle/>
+          <a:p>
+            <a:pPr algn="l">
+              <a:lnSpc>
+                <a:spcPct val="115000"/>
+              </a:lnSpc>
+            </a:pPr>
+            <a:r>
               <a:rPr sz="1000" b="0" i="0">
                 <a:solidFill>
                   <a:srgbClr val="898781"/>
                 </a:solidFill>
                 <a:latin typeface="Arial"/>
               </a:rPr>
-              <a:t>AeroTrack | Modulo 6 | Apache Hop</a:t>
-            </a:r>
-          </a:p>
-        </p:txBody>
-      </p:sp>
-      <p:sp>
-        <p:nvSpPr>
-          <p:cNvPr id="17" name="TextBox 16"/>
+              <a:t>AeroTrack | Module 6 | Apache Hop</a:t>
+            </a:r>
+          </a:p>
+        </p:txBody>
+      </p:sp>
+      <p:sp>
+        <p:nvSpPr>
+          <p:cNvPr id="13" name="TextBox 12"/>
           <p:cNvSpPr txBox="1"/>
           <p:nvPr/>
         </p:nvSpPr>
@@ -9823,8 +10585,8 @@
         </p:nvSpPr>
         <p:spPr>
           <a:xfrm>
-            <a:off x="640080" y="320040"/>
-            <a:ext cx="7315200" cy="365760"/>
+            <a:off x="640080" y="292608"/>
+            <a:ext cx="8686800" cy="365760"/>
           </a:xfrm>
           <a:prstGeom prst="rect">
             <a:avLst/>
@@ -9849,7 +10611,7 @@
                 </a:solidFill>
                 <a:latin typeface="Arial"/>
               </a:rPr>
-              <a:t>ANALISE</a:t>
+              <a:t>DATA QUALITY</a:t>
             </a:r>
           </a:p>
         </p:txBody>
@@ -9862,7 +10624,7 @@
         </p:nvSpPr>
         <p:spPr>
           <a:xfrm>
-            <a:off x="640080" y="621792"/>
+            <a:off x="640080" y="594360"/>
             <a:ext cx="10789920" cy="822960"/>
           </a:xfrm>
           <a:prstGeom prst="rect">
@@ -9882,30 +10644,32 @@
               </a:lnSpc>
             </a:pPr>
             <a:r>
-              <a:rPr sz="3000" b="1" i="0">
+              <a:rPr sz="2900" b="1" i="0">
                 <a:solidFill>
                   <a:srgbClr val="0B1F33"/>
                 </a:solidFill>
                 <a:latin typeface="Arial"/>
               </a:rPr>
-              <a:t>Indicadores calculados</a:t>
-            </a:r>
-          </a:p>
-        </p:txBody>
-      </p:sp>
-      <p:sp>
-        <p:nvSpPr>
-          <p:cNvPr id="5" name="Rectangle 4"/>
+              <a:t>Treatments applied</a:t>
+            </a:r>
+          </a:p>
+        </p:txBody>
+      </p:sp>
+      <p:sp>
+        <p:nvSpPr>
+          <p:cNvPr id="5" name="Rounded Rectangle 4"/>
           <p:cNvSpPr/>
           <p:nvPr/>
         </p:nvSpPr>
         <p:spPr>
           <a:xfrm>
-            <a:off x="658368" y="1298448"/>
-            <a:ext cx="1188720" cy="38100"/>
-          </a:xfrm>
-          <a:prstGeom prst="rect">
-            <a:avLst/>
+            <a:off x="658368" y="1261872"/>
+            <a:ext cx="1188720" cy="50800"/>
+          </a:xfrm>
+          <a:prstGeom prst="roundRect">
+            <a:avLst>
+              <a:gd name="adj" fmla="val 50000"/>
+            </a:avLst>
           </a:prstGeom>
           <a:solidFill>
             <a:srgbClr val="1BAF7A"/>
@@ -9953,7 +10717,7 @@
         </p:blipFill>
         <p:spPr>
           <a:xfrm>
-            <a:off x="11292840" y="292608"/>
+            <a:off x="11292840" y="274320"/>
             <a:ext cx="502920" cy="502920"/>
           </a:xfrm>
           <a:prstGeom prst="rect">
@@ -9985,10 +10749,10 @@
           <a:p>
             <a:pPr>
               <a:lnSpc>
-                <a:spcPct val="112000"/>
+                <a:spcPct val="115000"/>
               </a:lnSpc>
               <a:spcAft>
-                <a:spcPts val="1300"/>
+                <a:spcPts val="1600"/>
               </a:spcAft>
             </a:pPr>
             <a:r>
@@ -9998,16 +10762,16 @@
                 </a:solidFill>
                 <a:latin typeface="Arial"/>
               </a:rPr>
-              <a:t>•  Total de leituras tratadas e rejeitadas</a:t>
+              <a:t>•  -200 sentinel: converted to null before any calculation (Null If)</a:t>
             </a:r>
           </a:p>
           <a:p>
             <a:pPr>
               <a:lnSpc>
-                <a:spcPct val="112000"/>
+                <a:spcPct val="115000"/>
               </a:lnSpc>
               <a:spcAft>
-                <a:spcPts val="1300"/>
+                <a:spcPts val="1600"/>
               </a:spcAft>
             </a:pPr>
             <a:r>
@@ -10017,16 +10781,16 @@
                 </a:solidFill>
                 <a:latin typeface="Arial"/>
               </a:rPr>
-              <a:t>•  Percentual de horas em condicao critica</a:t>
+              <a:t>•  114 empty export rows: dropped during ingestion (Filter Rows)</a:t>
             </a:r>
           </a:p>
           <a:p>
             <a:pPr>
               <a:lnSpc>
-                <a:spcPct val="112000"/>
+                <a:spcPct val="115000"/>
               </a:lnSpc>
               <a:spcAft>
-                <a:spcPts val="1300"/>
+                <a:spcPts val="1600"/>
               </a:spcAft>
             </a:pPr>
             <a:r>
@@ -10036,16 +10800,16 @@
                 </a:solidFill>
                 <a:latin typeface="Arial"/>
               </a:rPr>
-              <a:t>•  CO e NO2 medios e maximos do periodo</a:t>
+              <a:t>•  Readings with no reference pollutant (CO, NOx and NO2): separated into leituras_rejeitadas</a:t>
             </a:r>
           </a:p>
           <a:p>
             <a:pPr>
               <a:lnSpc>
-                <a:spcPct val="112000"/>
+                <a:spcPct val="115000"/>
               </a:lnSpc>
               <a:spcAft>
-                <a:spcPts val="1300"/>
+                <a:spcPts val="1600"/>
               </a:spcAft>
             </a:pPr>
             <a:r>
@@ -10055,64 +10819,7 @@
                 </a:solidFill>
                 <a:latin typeface="Arial"/>
               </a:rPr>
-              <a:t>•  Evolucao mensal de CO e de NO2</a:t>
-            </a:r>
-          </a:p>
-          <a:p>
-            <a:pPr>
-              <a:lnSpc>
-                <a:spcPct val="112000"/>
-              </a:lnSpc>
-              <a:spcAft>
-                <a:spcPts val="1300"/>
-              </a:spcAft>
-            </a:pPr>
-            <a:r>
-              <a:rPr sz="1800">
-                <a:solidFill>
-                  <a:srgbClr val="26364A"/>
-                </a:solidFill>
-                <a:latin typeface="Arial"/>
-              </a:rPr>
-              <a:t>•  Distribuicao das leituras por nivel (BOM, MODERADO, CRITICO)</a:t>
-            </a:r>
-          </a:p>
-          <a:p>
-            <a:pPr>
-              <a:lnSpc>
-                <a:spcPct val="112000"/>
-              </a:lnSpc>
-              <a:spcAft>
-                <a:spcPts val="1300"/>
-              </a:spcAft>
-            </a:pPr>
-            <a:r>
-              <a:rPr sz="1800">
-                <a:solidFill>
-                  <a:srgbClr val="26364A"/>
-                </a:solidFill>
-                <a:latin typeface="Arial"/>
-              </a:rPr>
-              <a:t>•  Leituras por turno do dia</a:t>
-            </a:r>
-          </a:p>
-          <a:p>
-            <a:pPr>
-              <a:lnSpc>
-                <a:spcPct val="112000"/>
-              </a:lnSpc>
-              <a:spcAft>
-                <a:spcPts val="1300"/>
-              </a:spcAft>
-            </a:pPr>
-            <a:r>
-              <a:rPr sz="1800">
-                <a:solidFill>
-                  <a:srgbClr val="26364A"/>
-                </a:solidFill>
-                <a:latin typeface="Arial"/>
-              </a:rPr>
-              <a:t>•  Ranking dos dez dias com piores condicoes</a:t>
+              <a:t>•  CO and NO2 analytical classification (GOOD, MODERATE, CRITICAL): calibrated from the dataset's own percentiles, with no external regulatory reference</a:t>
             </a:r>
           </a:p>
         </p:txBody>
@@ -10151,7 +10858,7 @@
                 </a:solidFill>
                 <a:latin typeface="Arial"/>
               </a:rPr>
-              <a:t>AeroTrack | Modulo 6 | Apache Hop</a:t>
+              <a:t>AeroTrack | Module 6 | Apache Hop</a:t>
             </a:r>
           </a:p>
         </p:txBody>

--- a/docs/evidencias/AeroTrack-Apresentacao-Modulo6.pptx
+++ b/docs/evidencias/AeroTrack-Apresentacao-Modulo6.pptx
@@ -3264,7 +3264,7 @@
         <p:spPr>
           <a:xfrm>
             <a:off x="3566160" y="1965960"/>
-            <a:ext cx="4114800" cy="1005840"/>
+            <a:ext cx="3685286" cy="1005840"/>
           </a:xfrm>
           <a:prstGeom prst="rect">
             <a:avLst/>
@@ -8439,7 +8439,7 @@
         <p:spPr>
           <a:xfrm>
             <a:off x="3566160" y="2286000"/>
-            <a:ext cx="3740727" cy="914400"/>
+            <a:ext cx="3350260" cy="914400"/>
           </a:xfrm>
           <a:prstGeom prst="rect">
             <a:avLst/>
@@ -10752,11 +10752,11 @@
                 <a:spcPct val="115000"/>
               </a:lnSpc>
               <a:spcAft>
-                <a:spcPts val="1600"/>
+                <a:spcPts val="1400"/>
               </a:spcAft>
             </a:pPr>
             <a:r>
-              <a:rPr sz="1800">
+              <a:rPr sz="1700">
                 <a:solidFill>
                   <a:srgbClr val="26364A"/>
                 </a:solidFill>
@@ -10771,11 +10771,11 @@
                 <a:spcPct val="115000"/>
               </a:lnSpc>
               <a:spcAft>
-                <a:spcPts val="1600"/>
+                <a:spcPts val="1400"/>
               </a:spcAft>
             </a:pPr>
             <a:r>
-              <a:rPr sz="1800">
+              <a:rPr sz="1700">
                 <a:solidFill>
                   <a:srgbClr val="26364A"/>
                 </a:solidFill>
@@ -10790,11 +10790,11 @@
                 <a:spcPct val="115000"/>
               </a:lnSpc>
               <a:spcAft>
-                <a:spcPts val="1600"/>
+                <a:spcPts val="1400"/>
               </a:spcAft>
             </a:pPr>
             <a:r>
-              <a:rPr sz="1800">
+              <a:rPr sz="1700">
                 <a:solidFill>
                   <a:srgbClr val="26364A"/>
                 </a:solidFill>
@@ -10809,17 +10809,36 @@
                 <a:spcPct val="115000"/>
               </a:lnSpc>
               <a:spcAft>
-                <a:spcPts val="1600"/>
+                <a:spcPts val="1400"/>
               </a:spcAft>
             </a:pPr>
             <a:r>
-              <a:rPr sz="1800">
+              <a:rPr sz="1700">
                 <a:solidFill>
                   <a:srgbClr val="26364A"/>
                 </a:solidFill>
                 <a:latin typeface="Arial"/>
               </a:rPr>
               <a:t>•  CO and NO2 analytical classification (GOOD, MODERATE, CRITICAL): calibrated from the dataset's own percentiles, with no external regulatory reference</a:t>
+            </a:r>
+          </a:p>
+          <a:p>
+            <a:pPr>
+              <a:lnSpc>
+                <a:spcPct val="115000"/>
+              </a:lnSpc>
+              <a:spcAft>
+                <a:spcPts val="1400"/>
+              </a:spcAft>
+            </a:pPr>
+            <a:r>
+              <a:rPr sz="1700">
+                <a:solidFill>
+                  <a:srgbClr val="26364A"/>
+                </a:solidFill>
+                <a:latin typeface="Arial"/>
+              </a:rPr>
+              <a:t>•  Time-of-day boundary fix: the NOITE (evening) range excluded hour 23 until it was widened to include it</a:t>
             </a:r>
           </a:p>
         </p:txBody>

--- a/docs/evidencias/AeroTrack-Apresentacao-Modulo6.pptx
+++ b/docs/evidencias/AeroTrack-Apresentacao-Modulo6.pptx
@@ -3305,7 +3305,7 @@
                 </a:solidFill>
                 <a:latin typeface="Arial"/>
               </a:rPr>
-              <a:t>Air Quality Monitoring with Apache Hop</a:t>
+              <a:t>Monitoramento de Qualidade do Ar com Apache Hop</a:t>
             </a:r>
           </a:p>
         </p:txBody>
@@ -3344,7 +3344,7 @@
                 </a:solidFill>
                 <a:latin typeface="Arial"/>
               </a:rPr>
-              <a:t>Module 6 Final Project | Apache Hop</a:t>
+              <a:t>Trabalho Final do Módulo 6 | Apache Hop</a:t>
             </a:r>
           </a:p>
         </p:txBody>
@@ -3422,7 +3422,7 @@
                 </a:solidFill>
                 <a:latin typeface="Arial"/>
               </a:rPr>
-              <a:t>AI and Digital Transformation Program</a:t>
+              <a:t>Capacitação em IA e Transformação Digital</a:t>
             </a:r>
           </a:p>
         </p:txBody>
@@ -3531,7 +3531,7 @@
                 </a:solidFill>
                 <a:latin typeface="Arial"/>
               </a:rPr>
-              <a:t>PERSISTENCE</a:t>
+              <a:t>PERSISTÊNCIA</a:t>
             </a:r>
           </a:p>
         </p:txBody>
@@ -3570,7 +3570,7 @@
                 </a:solidFill>
                 <a:latin typeface="Arial"/>
               </a:rPr>
-              <a:t>Database and rerun safety</a:t>
+              <a:t>Banco de dados e segurança de reexecução</a:t>
             </a:r>
           </a:p>
         </p:txBody>
@@ -3718,7 +3718,7 @@
                 </a:solidFill>
                 <a:latin typeface="Arial"/>
               </a:rPr>
-              <a:t>Treated, detailed data, one row per valid reading</a:t>
+              <a:t>Dados tratados e detalhados, uma linha por leitura válida</a:t>
             </a:r>
           </a:p>
         </p:txBody>
@@ -3796,7 +3796,7 @@
                 </a:solidFill>
                 <a:latin typeface="Arial"/>
               </a:rPr>
-              <a:t>Readings with no reference pollutant</a:t>
+              <a:t>Leituras sem nenhum poluente de referência</a:t>
             </a:r>
           </a:p>
         </p:txBody>
@@ -3874,7 +3874,7 @@
                 </a:solidFill>
                 <a:latin typeface="Arial"/>
               </a:rPr>
-              <a:t>Indicators aggregated by day</a:t>
+              <a:t>Indicadores agregados por dia</a:t>
             </a:r>
           </a:p>
         </p:txBody>
@@ -3952,7 +3952,7 @@
                 </a:solidFill>
                 <a:latin typeface="Arial"/>
               </a:rPr>
-              <a:t>Indicators aggregated by month</a:t>
+              <a:t>Indicadores agregados por mês</a:t>
             </a:r>
           </a:p>
         </p:txBody>
@@ -4022,7 +4022,7 @@
                 </a:solidFill>
                 <a:latin typeface="Arial"/>
               </a:rPr>
-              <a:t>Rerun without duplicates</a:t>
+              <a:t>Reexecução sem duplicidade</a:t>
             </a:r>
           </a:p>
           <a:p>
@@ -4038,7 +4038,7 @@
                 </a:solidFill>
                 <a:latin typeface="Arial"/>
               </a:rPr>
-              <a:t>UNIQUE key on data_hora plus Insert/Update: rerunning the process updates existing records instead of duplicating. Validated by running the workflow twice in a row (8131 rows both times).</a:t>
+              <a:t>Chave UNIQUE em data_hora mais Insert/Update: reexecutar o processo atualiza os registros existentes em vez de duplicar. Validado executando o workflow duas vezes seguidas (8131 linhas nas duas execuções).</a:t>
             </a:r>
           </a:p>
         </p:txBody>
@@ -4077,7 +4077,7 @@
                 </a:solidFill>
                 <a:latin typeface="Arial"/>
               </a:rPr>
-              <a:t>AeroTrack | Module 6 | Apache Hop</a:t>
+              <a:t>AeroTrack | Módulo 6 | Apache Hop</a:t>
             </a:r>
           </a:p>
         </p:txBody>
@@ -4225,7 +4225,7 @@
                 </a:solidFill>
                 <a:latin typeface="Arial"/>
               </a:rPr>
-              <a:t>ANALYSIS</a:t>
+              <a:t>ANÁLISE</a:t>
             </a:r>
           </a:p>
         </p:txBody>
@@ -4264,7 +4264,7 @@
                 </a:solidFill>
                 <a:latin typeface="Arial"/>
               </a:rPr>
-              <a:t>Indicators calculated</a:t>
+              <a:t>Indicadores calculados</a:t>
             </a:r>
           </a:p>
         </p:txBody>
@@ -4376,7 +4376,7 @@
                 </a:solidFill>
                 <a:latin typeface="Arial"/>
               </a:rPr>
-              <a:t>•  Total treated and rejected readings</a:t>
+              <a:t>•  Total de leituras tratadas e rejeitadas</a:t>
             </a:r>
           </a:p>
           <a:p>
@@ -4395,7 +4395,7 @@
                 </a:solidFill>
                 <a:latin typeface="Arial"/>
               </a:rPr>
-              <a:t>•  Percentage of hours in critical condition</a:t>
+              <a:t>•  Percentual de horas em condição crítica</a:t>
             </a:r>
           </a:p>
           <a:p>
@@ -4414,7 +4414,7 @@
                 </a:solidFill>
                 <a:latin typeface="Arial"/>
               </a:rPr>
-              <a:t>•  Average and maximum CO and NO2</a:t>
+              <a:t>•  CO e NO2 médios e máximos</a:t>
             </a:r>
           </a:p>
           <a:p>
@@ -4433,7 +4433,7 @@
                 </a:solidFill>
                 <a:latin typeface="Arial"/>
               </a:rPr>
-              <a:t>•  Monthly trend of CO and NO2</a:t>
+              <a:t>•  Evolução mensal de CO e de NO2</a:t>
             </a:r>
           </a:p>
           <a:p>
@@ -4452,7 +4452,7 @@
                 </a:solidFill>
                 <a:latin typeface="Arial"/>
               </a:rPr>
-              <a:t>•  Distribution of readings by level (good, moderate, critical)</a:t>
+              <a:t>•  Distribuição das leituras por nível (bom, moderado, crítico)</a:t>
             </a:r>
           </a:p>
           <a:p>
@@ -4471,7 +4471,7 @@
                 </a:solidFill>
                 <a:latin typeface="Arial"/>
               </a:rPr>
-              <a:t>•  Readings by time of day</a:t>
+              <a:t>•  Leituras por turno do dia</a:t>
             </a:r>
           </a:p>
           <a:p>
@@ -4490,7 +4490,7 @@
                 </a:solidFill>
                 <a:latin typeface="Arial"/>
               </a:rPr>
-              <a:t>•  Ranking of the ten worst days</a:t>
+              <a:t>•  Ranking dos dez piores dias</a:t>
             </a:r>
           </a:p>
         </p:txBody>
@@ -4529,7 +4529,7 @@
                 </a:solidFill>
                 <a:latin typeface="Arial"/>
               </a:rPr>
-              <a:t>AeroTrack | Module 6 | Apache Hop</a:t>
+              <a:t>AeroTrack | Módulo 6 | Apache Hop</a:t>
             </a:r>
           </a:p>
         </p:txBody>
@@ -4677,7 +4677,7 @@
                 </a:solidFill>
                 <a:latin typeface="Arial"/>
               </a:rPr>
-              <a:t>VISUALIZATION</a:t>
+              <a:t>VISUALIZAÇÃO</a:t>
             </a:r>
           </a:p>
         </p:txBody>
@@ -4716,7 +4716,7 @@
                 </a:solidFill>
                 <a:latin typeface="Arial"/>
               </a:rPr>
-              <a:t>AeroTrack dashboard</a:t>
+              <a:t>Dashboard AeroTrack</a:t>
             </a:r>
           </a:p>
         </p:txBody>
@@ -4823,8 +4823,8 @@
         </p:nvSpPr>
         <p:spPr>
           <a:xfrm>
-            <a:off x="640080" y="6510528"/>
-            <a:ext cx="5486400" cy="274320"/>
+            <a:off x="822960" y="6355080"/>
+            <a:ext cx="10515600" cy="365760"/>
           </a:xfrm>
           <a:prstGeom prst="rect">
             <a:avLst/>
@@ -4843,20 +4843,59 @@
               </a:lnSpc>
             </a:pPr>
             <a:r>
+              <a:rPr sz="1100" b="0" i="1">
+                <a:solidFill>
+                  <a:srgbClr val="898781"/>
+                </a:solidFill>
+                <a:latin typeface="Arial"/>
+              </a:rPr>
+              <a:t>Interface do dashboard em inglês, junto com o restante do código do projeto.</a:t>
+            </a:r>
+          </a:p>
+        </p:txBody>
+      </p:sp>
+      <p:sp>
+        <p:nvSpPr>
+          <p:cNvPr id="9" name="TextBox 8"/>
+          <p:cNvSpPr txBox="1"/>
+          <p:nvPr/>
+        </p:nvSpPr>
+        <p:spPr>
+          <a:xfrm>
+            <a:off x="640080" y="6510528"/>
+            <a:ext cx="5486400" cy="274320"/>
+          </a:xfrm>
+          <a:prstGeom prst="rect">
+            <a:avLst/>
+          </a:prstGeom>
+          <a:noFill/>
+        </p:spPr>
+        <p:txBody>
+          <a:bodyPr wrap="square" anchor="t">
+            <a:spAutoFit/>
+          </a:bodyPr>
+          <a:lstStyle/>
+          <a:p>
+            <a:pPr algn="l">
+              <a:lnSpc>
+                <a:spcPct val="115000"/>
+              </a:lnSpc>
+            </a:pPr>
+            <a:r>
               <a:rPr sz="1000" b="0" i="0">
                 <a:solidFill>
                   <a:srgbClr val="898781"/>
                 </a:solidFill>
                 <a:latin typeface="Arial"/>
               </a:rPr>
-              <a:t>AeroTrack | Module 6 | Apache Hop</a:t>
-            </a:r>
-          </a:p>
-        </p:txBody>
-      </p:sp>
-      <p:sp>
-        <p:nvSpPr>
-          <p:cNvPr id="9" name="TextBox 8"/>
+              <a:t>AeroTrack | Módulo 6 | Apache Hop</a:t>
+            </a:r>
+          </a:p>
+        </p:txBody>
+      </p:sp>
+      <p:sp>
+        <p:nvSpPr>
+          <p:cNvPr id="10" name="TextBox 9"/>
           <p:cNvSpPr txBox="1"/>
           <p:nvPr/>
         </p:nvSpPr>
@@ -4997,7 +5036,7 @@
                 </a:solidFill>
                 <a:latin typeface="Arial"/>
               </a:rPr>
-              <a:t>ANSWERING THE QUESTION</a:t>
+              <a:t>RESPONDENDO À PERGUNTA</a:t>
             </a:r>
           </a:p>
         </p:txBody>
@@ -5036,7 +5075,7 @@
                 </a:solidFill>
                 <a:latin typeface="Arial"/>
               </a:rPr>
-              <a:t>Ranking of the ten worst days</a:t>
+              <a:t>Ranking dos dez piores dias</a:t>
             </a:r>
           </a:p>
         </p:txBody>
@@ -5169,7 +5208,7 @@
                 </a:solidFill>
                 <a:latin typeface="Arial"/>
               </a:rPr>
-              <a:t>AeroTrack | Module 6 | Apache Hop</a:t>
+              <a:t>AeroTrack | Módulo 6 | Apache Hop</a:t>
             </a:r>
           </a:p>
         </p:txBody>
@@ -5317,7 +5356,7 @@
                 </a:solidFill>
                 <a:latin typeface="Arial"/>
               </a:rPr>
-              <a:t>RESULTS</a:t>
+              <a:t>RESULTADOS</a:t>
             </a:r>
           </a:p>
         </p:txBody>
@@ -5356,7 +5395,7 @@
                 </a:solidFill>
                 <a:latin typeface="Arial"/>
               </a:rPr>
-              <a:t>Validation of results</a:t>
+              <a:t>Validação dos resultados</a:t>
             </a:r>
           </a:p>
         </p:txBody>
@@ -5520,7 +5559,7 @@
                 </a:solidFill>
                 <a:latin typeface="Arial"/>
               </a:rPr>
-              <a:t>TREATED READINGS</a:t>
+              <a:t>LEITURAS TRATADAS</a:t>
             </a:r>
           </a:p>
         </p:txBody>
@@ -5559,7 +5598,7 @@
                 </a:solidFill>
                 <a:latin typeface="Arial"/>
               </a:rPr>
-              <a:t>8,131</a:t>
+              <a:t>8.131</a:t>
             </a:r>
           </a:p>
         </p:txBody>
@@ -5653,7 +5692,7 @@
                 </a:solidFill>
                 <a:latin typeface="Arial"/>
               </a:rPr>
-              <a:t>REJECTED RECORDS</a:t>
+              <a:t>REGISTROS REJEITADOS</a:t>
             </a:r>
           </a:p>
         </p:txBody>
@@ -5692,7 +5731,7 @@
                 </a:solidFill>
                 <a:latin typeface="Arial"/>
               </a:rPr>
-              <a:t>1,226</a:t>
+              <a:t>1.226</a:t>
             </a:r>
           </a:p>
         </p:txBody>
@@ -5786,7 +5825,7 @@
                 </a:solidFill>
                 <a:latin typeface="Arial"/>
               </a:rPr>
-              <a:t>% CRITICAL HOURS</a:t>
+              <a:t>% HORAS CRÍTICAS</a:t>
             </a:r>
           </a:p>
         </p:txBody>
@@ -5825,7 +5864,7 @@
                 </a:solidFill>
                 <a:latin typeface="Arial"/>
               </a:rPr>
-              <a:t>13.11%</a:t>
+              <a:t>13,11%</a:t>
             </a:r>
           </a:p>
         </p:txBody>
@@ -5919,7 +5958,7 @@
                 </a:solidFill>
                 <a:latin typeface="Arial"/>
               </a:rPr>
-              <a:t>AVG. CO</a:t>
+              <a:t>CO MÉDIO</a:t>
             </a:r>
           </a:p>
         </p:txBody>
@@ -5958,7 +5997,7 @@
                 </a:solidFill>
                 <a:latin typeface="Arial"/>
               </a:rPr>
-              <a:t>2.15 mg/m3</a:t>
+              <a:t>2,15 mg/m3</a:t>
             </a:r>
           </a:p>
         </p:txBody>
@@ -6052,7 +6091,7 @@
                 </a:solidFill>
                 <a:latin typeface="Arial"/>
               </a:rPr>
-              <a:t>AVG. NO2</a:t>
+              <a:t>NO2 MÉDIO</a:t>
             </a:r>
           </a:p>
         </p:txBody>
@@ -6091,7 +6130,7 @@
                 </a:solidFill>
                 <a:latin typeface="Arial"/>
               </a:rPr>
-              <a:t>113.09 ug/m3</a:t>
+              <a:t>113,09 ug/m3</a:t>
             </a:r>
           </a:p>
         </p:txBody>
@@ -6185,7 +6224,7 @@
                 </a:solidFill>
                 <a:latin typeface="Arial"/>
               </a:rPr>
-              <a:t>DAYS CONSOLIDATED</a:t>
+              <a:t>DIAS CONSOLIDADOS</a:t>
             </a:r>
           </a:p>
         </p:txBody>
@@ -6287,7 +6326,7 @@
                 </a:solidFill>
                 <a:latin typeface="Arial"/>
               </a:rPr>
-              <a:t>Valid plus rejected readings match the dataset total after removing the 114 empty export rows. The</a:t>
+              <a:t>Leituras válidas mais rejeitadas batem com o total do dataset após remover as 114 linhas vazias do</a:t>
             </a:r>
           </a:p>
           <a:p>
@@ -6303,7 +6342,7 @@
                 </a:solidFill>
                 <a:latin typeface="Arial"/>
               </a:rPr>
-              <a:t>worst-day ranking shows high NO2 and a high critical-hour share on the same dates as the highest CO,</a:t>
+              <a:t>export. O ranking dos piores dias mostra NO2 e percentual de horas críticas elevados nas mesmas datas</a:t>
             </a:r>
           </a:p>
           <a:p>
@@ -6319,7 +6358,7 @@
                 </a:solidFill>
                 <a:latin typeface="Arial"/>
               </a:rPr>
-              <a:t>consistent with real pollutant behavior.</a:t>
+              <a:t>de maior CO, consistente com o comportamento real dos poluentes.</a:t>
             </a:r>
           </a:p>
         </p:txBody>
@@ -6358,7 +6397,7 @@
                 </a:solidFill>
                 <a:latin typeface="Arial"/>
               </a:rPr>
-              <a:t>AeroTrack | Module 6 | Apache Hop</a:t>
+              <a:t>AeroTrack | Módulo 6 | Apache Hop</a:t>
             </a:r>
           </a:p>
         </p:txBody>
@@ -6456,13 +6495,13 @@
               </a:lnSpc>
             </a:pPr>
             <a:r>
-              <a:rPr sz="3000" b="1" i="0">
+              <a:rPr sz="2900" b="1" i="0">
                 <a:solidFill>
                   <a:srgbClr val="FFFFFF"/>
                 </a:solidFill>
                 <a:latin typeface="Arial"/>
               </a:rPr>
-              <a:t>Every critical hour now has a record</a:t>
+              <a:t>Toda hora crítica agora tem um registro</a:t>
             </a:r>
           </a:p>
         </p:txBody>
@@ -6550,7 +6589,7 @@
                 </a:solidFill>
                 <a:latin typeface="Arial"/>
               </a:rPr>
-              <a:t>•  AeroTrack turns raw, noisy sensor exports into a database that can answer, with evidence, when air quality was worst</a:t>
+              <a:t>•  O AeroTrack transforma exports brutos e ruidosos em um banco capaz de responder, com evidência, quando a qualidade do ar foi pior</a:t>
             </a:r>
           </a:p>
           <a:p>
@@ -6569,7 +6608,7 @@
                 </a:solidFill>
                 <a:latin typeface="Arial"/>
               </a:rPr>
-              <a:t>•  The CO/NO2 classification was calibrated on the dataset's real distribution, not arbitrary thresholds</a:t>
+              <a:t>•  A classificação de CO/NO2 foi calibrada pela distribuição real do dataset, não por limites arbitrários</a:t>
             </a:r>
           </a:p>
           <a:p>
@@ -6588,7 +6627,7 @@
                 </a:solidFill>
                 <a:latin typeface="Arial"/>
               </a:rPr>
-              <a:t>•  Every table is safe to reload: Insert/Update guarantees no duplicate history, run after run</a:t>
+              <a:t>•  Toda tabela é segura para recarregar: Insert/Update garante nenhuma duplicidade, execução após execução</a:t>
             </a:r>
           </a:p>
         </p:txBody>
@@ -6627,7 +6666,7 @@
                 </a:solidFill>
                 <a:latin typeface="Arial"/>
               </a:rPr>
-              <a:t>AeroTrack | Module 6 | Apache Hop</a:t>
+              <a:t>AeroTrack | Módulo 6 | Apache Hop</a:t>
             </a:r>
           </a:p>
         </p:txBody>
@@ -6823,7 +6862,7 @@
                 </a:solidFill>
                 <a:latin typeface="Arial"/>
               </a:rPr>
-              <a:t>AeroTrack Team</a:t>
+              <a:t>Equipe AeroTrack</a:t>
             </a:r>
           </a:p>
         </p:txBody>
@@ -7220,7 +7259,7 @@
                 </a:solidFill>
                 <a:latin typeface="Arial"/>
               </a:rPr>
-              <a:t>Thank you</a:t>
+              <a:t>Obrigado</a:t>
             </a:r>
           </a:p>
         </p:txBody>
@@ -7303,13 +7342,13 @@
               </a:lnSpc>
             </a:pPr>
             <a:r>
-              <a:rPr sz="4000" b="1" i="0">
+              <a:rPr sz="3800" b="1" i="0">
                 <a:solidFill>
                   <a:srgbClr val="FFFFFF"/>
                 </a:solidFill>
                 <a:latin typeface="Arial"/>
               </a:rPr>
-              <a:t>You cannot see the air</a:t>
+              <a:t>Você não consegue ver o ar</a:t>
             </a:r>
           </a:p>
           <a:p>
@@ -7319,13 +7358,13 @@
               </a:lnSpc>
             </a:pPr>
             <a:r>
-              <a:rPr sz="4000" b="1" i="0">
+              <a:rPr sz="3800" b="1" i="0">
                 <a:solidFill>
                   <a:srgbClr val="FFFFFF"/>
                 </a:solidFill>
                 <a:latin typeface="Arial"/>
               </a:rPr>
-              <a:t>you breathe.</a:t>
+              <a:t>que respira.</a:t>
             </a:r>
           </a:p>
         </p:txBody>
@@ -7358,13 +7397,13 @@
               </a:lnSpc>
             </a:pPr>
             <a:r>
-              <a:rPr sz="1900" b="0" i="0">
+              <a:rPr sz="1800" b="0" i="0">
                 <a:solidFill>
                   <a:srgbClr val="CFE3F7"/>
                 </a:solidFill>
                 <a:latin typeface="Arial"/>
               </a:rPr>
-              <a:t>Air pollution is one of the world's largest environmental health risks.</a:t>
+              <a:t>A poluição do ar é um dos maiores riscos ambientais à saúde no mundo.</a:t>
             </a:r>
           </a:p>
           <a:p>
@@ -7374,13 +7413,13 @@
               </a:lnSpc>
             </a:pPr>
             <a:r>
-              <a:rPr sz="1900" b="0" i="0">
+              <a:rPr sz="1800" b="0" i="0">
                 <a:solidFill>
                   <a:srgbClr val="CFE3F7"/>
                 </a:solidFill>
                 <a:latin typeface="Arial"/>
               </a:rPr>
-              <a:t>CO and NO2 levels can spike for hours without anyone noticing,</a:t>
+              <a:t>Os níveis de CO e NO2 podem disparar por horas sem que ninguém perceba,</a:t>
             </a:r>
           </a:p>
           <a:p>
@@ -7390,13 +7429,13 @@
               </a:lnSpc>
             </a:pPr>
             <a:r>
-              <a:rPr sz="1900" b="0" i="0">
+              <a:rPr sz="1800" b="0" i="0">
                 <a:solidFill>
                   <a:srgbClr val="CFE3F7"/>
                 </a:solidFill>
                 <a:latin typeface="Arial"/>
               </a:rPr>
-              <a:t>until the exposure has already happened.</a:t>
+              <a:t>até que a exposição já tenha acontecido.</a:t>
             </a:r>
           </a:p>
         </p:txBody>
@@ -7482,13 +7521,13 @@
               </a:lnSpc>
             </a:pPr>
             <a:r>
-              <a:rPr sz="1700" b="0" i="1">
+              <a:rPr sz="1600" b="0" i="1">
                 <a:solidFill>
                   <a:srgbClr val="E8A300"/>
                 </a:solidFill>
                 <a:latin typeface="Arial"/>
               </a:rPr>
-              <a:t>The real question is not “is the air polluted”. It is: exactly WHEN was it</a:t>
+              <a:t>A pergunta real não é “o ar está poluído”. É: exatamente QUANDO ele esteve</a:t>
             </a:r>
           </a:p>
           <a:p>
@@ -7498,13 +7537,13 @@
               </a:lnSpc>
             </a:pPr>
             <a:r>
-              <a:rPr sz="1700" b="0" i="1">
+              <a:rPr sz="1600" b="0" i="1">
                 <a:solidFill>
                   <a:srgbClr val="E8A300"/>
                 </a:solidFill>
                 <a:latin typeface="Arial"/>
               </a:rPr>
-              <a:t>worst, and what conditions made it worse?</a:t>
+              <a:t>pior, e quais condições contribuíram para isso?</a:t>
             </a:r>
           </a:p>
         </p:txBody>
@@ -7543,7 +7582,7 @@
                 </a:solidFill>
                 <a:latin typeface="Arial"/>
               </a:rPr>
-              <a:t>AeroTrack | Module 6 | Apache Hop</a:t>
+              <a:t>AeroTrack | Módulo 6 | Apache Hop</a:t>
             </a:r>
           </a:p>
         </p:txBody>
@@ -7641,13 +7680,13 @@
               </a:lnSpc>
             </a:pPr>
             <a:r>
-              <a:rPr sz="2800" b="1" i="0">
+              <a:rPr sz="2700" b="1" i="0">
                 <a:solidFill>
                   <a:srgbClr val="FFFFFF"/>
                 </a:solidFill>
                 <a:latin typeface="Arial"/>
               </a:rPr>
-              <a:t>Without treated data, that question has no answer</a:t>
+              <a:t>Sem dados tratados, essa pergunta não tem resposta</a:t>
             </a:r>
           </a:p>
         </p:txBody>
@@ -7817,7 +7856,7 @@
                 </a:solidFill>
                 <a:latin typeface="Arial"/>
               </a:rPr>
-              <a:t>Raw sensor noise</a:t>
+              <a:t>Ruído do sensor bruto</a:t>
             </a:r>
           </a:p>
         </p:txBody>
@@ -7856,7 +7895,7 @@
                 </a:solidFill>
                 <a:latin typeface="Arial"/>
               </a:rPr>
-              <a:t>Missing readings, a -200 sentinel value and empty export rows hide the real signal.</a:t>
+              <a:t>Leituras ausentes, um valor sentinela -200 e linhas vazias do export escondem o sinal real.</a:t>
             </a:r>
           </a:p>
         </p:txBody>
@@ -7980,7 +8019,7 @@
                 </a:solidFill>
                 <a:latin typeface="Arial"/>
               </a:rPr>
-              <a:t>No structure</a:t>
+              <a:t>Sem estrutura</a:t>
             </a:r>
           </a:p>
         </p:txBody>
@@ -8019,7 +8058,7 @@
                 </a:solidFill>
                 <a:latin typeface="Arial"/>
               </a:rPr>
-              <a:t>Nothing tells you which hours, days or months were actually critical.</a:t>
+              <a:t>Nada indica quais horas, dias ou meses foram realmente críticos.</a:t>
             </a:r>
           </a:p>
         </p:txBody>
@@ -8143,7 +8182,7 @@
                 </a:solidFill>
                 <a:latin typeface="Arial"/>
               </a:rPr>
-              <a:t>No memory</a:t>
+              <a:t>Sem memória</a:t>
             </a:r>
           </a:p>
         </p:txBody>
@@ -8182,7 +8221,7 @@
                 </a:solidFill>
                 <a:latin typeface="Arial"/>
               </a:rPr>
-              <a:t>Without a database, every analysis starts from zero, every single time.</a:t>
+              <a:t>Sem um banco de dados, toda análise recomeça do zero, sempre.</a:t>
             </a:r>
           </a:p>
         </p:txBody>
@@ -8221,7 +8260,7 @@
                 </a:solidFill>
                 <a:latin typeface="Arial"/>
               </a:rPr>
-              <a:t>AeroTrack was built to close exactly this gap.</a:t>
+              <a:t>O AeroTrack foi criado exatamente para preencher essa lacuna.</a:t>
             </a:r>
           </a:p>
         </p:txBody>
@@ -8260,7 +8299,7 @@
                 </a:solidFill>
                 <a:latin typeface="Arial"/>
               </a:rPr>
-              <a:t>AeroTrack | Module 6 | Apache Hop</a:t>
+              <a:t>AeroTrack | Módulo 6 | Apache Hop</a:t>
             </a:r>
           </a:p>
         </p:txBody>
@@ -8474,13 +8513,13 @@
               </a:lnSpc>
             </a:pPr>
             <a:r>
-              <a:rPr sz="2000" b="0" i="0">
+              <a:rPr sz="1900" b="0" i="0">
                 <a:solidFill>
                   <a:srgbClr val="CFE3F7"/>
                 </a:solidFill>
                 <a:latin typeface="Arial"/>
               </a:rPr>
-              <a:t>From raw sensor data to a clear, trustworthy answer.</a:t>
+              <a:t>Do dado bruto do sensor a uma resposta clara e confiável.</a:t>
             </a:r>
           </a:p>
         </p:txBody>
@@ -8519,7 +8558,7 @@
                 </a:solidFill>
                 <a:latin typeface="Arial"/>
               </a:rPr>
-              <a:t>Built end to end with Apache Hop</a:t>
+              <a:t>Construído de ponta a ponta com Apache Hop</a:t>
             </a:r>
           </a:p>
         </p:txBody>
@@ -8558,7 +8597,7 @@
                 </a:solidFill>
                 <a:latin typeface="Arial"/>
               </a:rPr>
-              <a:t>AeroTrack | Module 6 | Apache Hop</a:t>
+              <a:t>AeroTrack | Módulo 6 | Apache Hop</a:t>
             </a:r>
           </a:p>
         </p:txBody>
@@ -8706,7 +8745,7 @@
                 </a:solidFill>
                 <a:latin typeface="Arial"/>
               </a:rPr>
-              <a:t>THE DATA</a:t>
+              <a:t>OS DADOS</a:t>
             </a:r>
           </a:p>
         </p:txBody>
@@ -8745,7 +8784,7 @@
                 </a:solidFill>
                 <a:latin typeface="Arial"/>
               </a:rPr>
-              <a:t>Dataset and problem statement</a:t>
+              <a:t>Dataset e problema</a:t>
             </a:r>
           </a:p>
         </p:txBody>
@@ -8876,7 +8915,7 @@
                 </a:solidFill>
                 <a:latin typeface="Arial"/>
               </a:rPr>
-              <a:t>•  Source: a monitoring station in an Italian city (De Vito et al.)</a:t>
+              <a:t>•  Origem: estação de monitoramento em uma cidade italiana (De Vito et al.)</a:t>
             </a:r>
           </a:p>
           <a:p>
@@ -8895,7 +8934,7 @@
                 </a:solidFill>
                 <a:latin typeface="Arial"/>
               </a:rPr>
-              <a:t>•  Period: March 2004 to February 2005</a:t>
+              <a:t>•  Período: março de 2004 a fevereiro de 2005</a:t>
             </a:r>
           </a:p>
           <a:p>
@@ -8914,7 +8953,7 @@
                 </a:solidFill>
                 <a:latin typeface="Arial"/>
               </a:rPr>
-              <a:t>•  Volume: 9357 hourly readings, 15 variables</a:t>
+              <a:t>•  Volume: 9357 leituras horárias, 15 variáveis</a:t>
             </a:r>
           </a:p>
         </p:txBody>
@@ -9014,7 +9053,7 @@
                 </a:solidFill>
                 <a:latin typeface="Arial"/>
               </a:rPr>
-              <a:t>PROBLEM</a:t>
+              <a:t>PROBLEMA</a:t>
             </a:r>
           </a:p>
         </p:txBody>
@@ -9053,7 +9092,7 @@
                 </a:solidFill>
                 <a:latin typeface="Arial"/>
               </a:rPr>
-              <a:t>In which periods were the worst air quality conditions recorded, and which environmental variables were associated with them?</a:t>
+              <a:t>Em quais períodos ocorreram as piores condições de qualidade do ar, e quais variáveis ambientais estavam associadas a esses períodos?</a:t>
             </a:r>
           </a:p>
         </p:txBody>
@@ -9092,7 +9131,7 @@
                 </a:solidFill>
                 <a:latin typeface="Arial"/>
               </a:rPr>
-              <a:t>AeroTrack | Module 6 | Apache Hop</a:t>
+              <a:t>AeroTrack | Módulo 6 | Apache Hop</a:t>
             </a:r>
           </a:p>
         </p:txBody>
@@ -9240,7 +9279,7 @@
                 </a:solidFill>
                 <a:latin typeface="Arial"/>
               </a:rPr>
-              <a:t>THE SOLUTION</a:t>
+              <a:t>A SOLUÇÃO</a:t>
             </a:r>
           </a:p>
         </p:txBody>
@@ -9279,7 +9318,7 @@
                 </a:solidFill>
                 <a:latin typeface="Arial"/>
               </a:rPr>
-              <a:t>End-to-end architecture</a:t>
+              <a:t>Arquitetura de ponta a ponta</a:t>
             </a:r>
           </a:p>
         </p:txBody>
@@ -9356,7 +9395,7 @@
       </p:pic>
       <p:pic>
         <p:nvPicPr>
-          <p:cNvPr id="7" name="Picture 6" descr="aerotrack-flowchart.png"/>
+          <p:cNvPr id="7" name="Picture 6" descr="aerotrack-flowchart-pt.png"/>
           <p:cNvPicPr>
             <a:picLocks noChangeAspect="1"/>
           </p:cNvPicPr>
@@ -9412,7 +9451,7 @@
                 </a:solidFill>
                 <a:latin typeface="Arial"/>
               </a:rPr>
-              <a:t>Two Apache Hop pipelines, orchestrated by a workflow: pl_01_ingestion_treatment and</a:t>
+              <a:t>Duas pipelines Apache Hop, orquestradas por um workflow: pl_01_ingestion_treatment e</a:t>
             </a:r>
           </a:p>
           <a:p>
@@ -9428,7 +9467,7 @@
                 </a:solidFill>
                 <a:latin typeface="Arial"/>
               </a:rPr>
-              <a:t>pl_02_indicator_consolidation, feeding a PostgreSQL database and a live dashboard.</a:t>
+              <a:t>pl_02_indicator_consolidation, alimentando um banco PostgreSQL e um dashboard.</a:t>
             </a:r>
           </a:p>
         </p:txBody>
@@ -9467,7 +9506,7 @@
                 </a:solidFill>
                 <a:latin typeface="Arial"/>
               </a:rPr>
-              <a:t>AeroTrack | Module 6 | Apache Hop</a:t>
+              <a:t>AeroTrack | Módulo 6 | Apache Hop</a:t>
             </a:r>
           </a:p>
         </p:txBody>
@@ -9654,7 +9693,7 @@
                 </a:solidFill>
                 <a:latin typeface="Arial"/>
               </a:rPr>
-              <a:t>Ingestion and treatment pipeline</a:t>
+              <a:t>Pipeline de ingestão e tratamento</a:t>
             </a:r>
           </a:p>
         </p:txBody>
@@ -9766,7 +9805,7 @@
                 </a:solidFill>
                 <a:latin typeface="Arial"/>
               </a:rPr>
-              <a:t>•  CSV Input reads the raw dataset (semicolon separator, comma decimal)</a:t>
+              <a:t>•  CSV Input lê o dataset bruto (separador ponto e vírgula, decimal com vírgula)</a:t>
             </a:r>
           </a:p>
           <a:p>
@@ -9785,7 +9824,7 @@
                 </a:solidFill>
                 <a:latin typeface="Arial"/>
               </a:rPr>
-              <a:t>•  Filter Rows removes the empty rows left by the dataset export</a:t>
+              <a:t>•  Filter Rows remove as linhas vazias deixadas pelo export do dataset</a:t>
             </a:r>
           </a:p>
           <a:p>
@@ -9804,7 +9843,7 @@
                 </a:solidFill>
                 <a:latin typeface="Arial"/>
               </a:rPr>
-              <a:t>•  Formula builds a single date-time text; Null If handles the -200 missing-value sentinel</a:t>
+              <a:t>•  Formula monta um único texto de data e hora; Null If trata o sentinela -200</a:t>
             </a:r>
           </a:p>
           <a:p>
@@ -9823,7 +9862,7 @@
                 </a:solidFill>
                 <a:latin typeface="Arial"/>
               </a:rPr>
-              <a:t>•  Select Values renames fields and converts text into a proper Date</a:t>
+              <a:t>•  Select Values renomeia os campos e converte o texto em um tipo Data</a:t>
             </a:r>
           </a:p>
           <a:p>
@@ -9842,7 +9881,7 @@
                 </a:solidFill>
                 <a:latin typeface="Arial"/>
               </a:rPr>
-              <a:t>•  Calculator, Value Mapper and Number Range derive year, month, time of day and CO/NO2 level</a:t>
+              <a:t>•  Calculator, Value Mapper e Number Range derivam ano, mês, turno e o nível de CO/NO2</a:t>
             </a:r>
           </a:p>
           <a:p>
@@ -9861,7 +9900,7 @@
                 </a:solidFill>
                 <a:latin typeface="Arial"/>
               </a:rPr>
-              <a:t>•  Janino flags whether a reading is valid; Filter Rows splits valid from rejected readings</a:t>
+              <a:t>•  Janino calcula se a leitura é válida; Filter Rows separa leituras válidas das rejeitadas</a:t>
             </a:r>
           </a:p>
           <a:p>
@@ -9880,7 +9919,7 @@
                 </a:solidFill>
                 <a:latin typeface="Arial"/>
               </a:rPr>
-              <a:t>•  Insert/Update loads PostgreSQL keyed on data_hora, safe to rerun</a:t>
+              <a:t>•  Insert/Update grava no PostgreSQL com chave em data_hora, seguro para reexecutar</a:t>
             </a:r>
           </a:p>
         </p:txBody>
@@ -9919,7 +9958,7 @@
                 </a:solidFill>
                 <a:latin typeface="Arial"/>
               </a:rPr>
-              <a:t>AeroTrack | Module 6 | Apache Hop</a:t>
+              <a:t>AeroTrack | Módulo 6 | Apache Hop</a:t>
             </a:r>
           </a:p>
         </p:txBody>
@@ -10106,7 +10145,7 @@
                 </a:solidFill>
                 <a:latin typeface="Arial"/>
               </a:rPr>
-              <a:t>Consolidation pipeline and orchestration</a:t>
+              <a:t>Pipeline de consolidação e orquestração</a:t>
             </a:r>
           </a:p>
         </p:txBody>
@@ -10257,7 +10296,7 @@
                 </a:solidFill>
                 <a:latin typeface="Arial"/>
               </a:rPr>
-              <a:t>•  Table Input aggregates treated readings by day and by month</a:t>
+              <a:t>•  Table Input agrega as leituras tratadas por dia e por mês</a:t>
             </a:r>
           </a:p>
           <a:p>
@@ -10276,7 +10315,7 @@
                 </a:solidFill>
                 <a:latin typeface="Arial"/>
               </a:rPr>
-              <a:t>•  Insert/Update writes resumo_diario_qualidade_ar and resumo_mensal_qualidade_ar</a:t>
+              <a:t>•  Insert/Update grava resumo_diario_qualidade_ar e resumo_mensal_qualidade_ar</a:t>
             </a:r>
           </a:p>
         </p:txBody>
@@ -10379,13 +10418,13 @@
           <a:p>
             <a:pPr algn="ctr"/>
             <a:r>
-              <a:rPr sz="1600" b="1">
+              <a:rPr sz="1500" b="1">
                 <a:solidFill>
                   <a:srgbClr val="FFFFFF"/>
                 </a:solidFill>
                 <a:latin typeface="Consolas"/>
               </a:rPr>
-              <a:t>START  →  Ingestion and treatment  →  Indicator consolidation  →  Process completed</a:t>
+              <a:t>START  →  Ingestão e tratamento  →  Consolidação de indicadores  →  Processo concluído</a:t>
             </a:r>
           </a:p>
         </p:txBody>
@@ -10424,7 +10463,7 @@
                 </a:solidFill>
                 <a:latin typeface="Arial"/>
               </a:rPr>
-              <a:t>The second hop only runs if ingestion succeeds, preventing indicators from ever being built on an incomplete load.</a:t>
+              <a:t>O segundo hop só é seguido se a ingestão terminar com sucesso, evitando consolidar indicadores a partir de uma carga incompleta.</a:t>
             </a:r>
           </a:p>
         </p:txBody>
@@ -10463,7 +10502,7 @@
                 </a:solidFill>
                 <a:latin typeface="Arial"/>
               </a:rPr>
-              <a:t>AeroTrack | Module 6 | Apache Hop</a:t>
+              <a:t>AeroTrack | Módulo 6 | Apache Hop</a:t>
             </a:r>
           </a:p>
         </p:txBody>
@@ -10611,7 +10650,7 @@
                 </a:solidFill>
                 <a:latin typeface="Arial"/>
               </a:rPr>
-              <a:t>DATA QUALITY</a:t>
+              <a:t>QUALIDADE DE DADOS</a:t>
             </a:r>
           </a:p>
         </p:txBody>
@@ -10650,7 +10689,7 @@
                 </a:solidFill>
                 <a:latin typeface="Arial"/>
               </a:rPr>
-              <a:t>Treatments applied</a:t>
+              <a:t>Tratamentos aplicados</a:t>
             </a:r>
           </a:p>
         </p:txBody>
@@ -10762,7 +10801,7 @@
                 </a:solidFill>
                 <a:latin typeface="Arial"/>
               </a:rPr>
-              <a:t>•  -200 sentinel: converted to null before any calculation (Null If)</a:t>
+              <a:t>•  Sentinela -200: convertido em nulo antes de qualquer cálculo (Null If)</a:t>
             </a:r>
           </a:p>
           <a:p>
@@ -10781,7 +10820,7 @@
                 </a:solidFill>
                 <a:latin typeface="Arial"/>
               </a:rPr>
-              <a:t>•  114 empty export rows: dropped during ingestion (Filter Rows)</a:t>
+              <a:t>•  114 linhas vazias do export: descartadas na ingestão (Filter Rows)</a:t>
             </a:r>
           </a:p>
           <a:p>
@@ -10800,7 +10839,7 @@
                 </a:solidFill>
                 <a:latin typeface="Arial"/>
               </a:rPr>
-              <a:t>•  Readings with no reference pollutant (CO, NOx and NO2): separated into leituras_rejeitadas</a:t>
+              <a:t>•  Leituras sem nenhum poluente de referência (CO, NOx e NO2): separadas em leituras_rejeitadas</a:t>
             </a:r>
           </a:p>
           <a:p>
@@ -10819,7 +10858,7 @@
                 </a:solidFill>
                 <a:latin typeface="Arial"/>
               </a:rPr>
-              <a:t>•  CO and NO2 analytical classification (GOOD, MODERATE, CRITICAL): calibrated from the dataset's own percentiles, with no external regulatory reference</a:t>
+              <a:t>•  Classificação analítica de CO e NO2 (BOM, MODERADO, CRÍTICO): calibrada pelos percentis do próprio dataset, sem referência regulatória externa</a:t>
             </a:r>
           </a:p>
           <a:p>
@@ -10838,7 +10877,7 @@
                 </a:solidFill>
                 <a:latin typeface="Arial"/>
               </a:rPr>
-              <a:t>•  Time-of-day boundary fix: the NOITE (evening) range excluded hour 23 until it was widened to include it</a:t>
+              <a:t>•  Correção de limite: a faixa NOITE excluía a hora 23 até ser ampliada para incluí-la</a:t>
             </a:r>
           </a:p>
         </p:txBody>
@@ -10877,7 +10916,7 @@
                 </a:solidFill>
                 <a:latin typeface="Arial"/>
               </a:rPr>
-              <a:t>AeroTrack | Module 6 | Apache Hop</a:t>
+              <a:t>AeroTrack | Módulo 6 | Apache Hop</a:t>
             </a:r>
           </a:p>
         </p:txBody>

--- a/docs/evidencias/AeroTrack-Apresentacao-Modulo6.pptx
+++ b/docs/evidencias/AeroTrack-Apresentacao-Modulo6.pptx
@@ -21,6 +21,8 @@
     <p:sldId id="269" r:id="rId20"/>
     <p:sldId id="270" r:id="rId21"/>
     <p:sldId id="271" r:id="rId22"/>
+    <p:sldId id="272" r:id="rId23"/>
+    <p:sldId id="273" r:id="rId24"/>
   </p:sldIdLst>
   <p:sldSz cx="12191695" cy="6858000" type="screen4x3"/>
   <p:notesSz cx="6858000" cy="9144000"/>
@@ -3263,7 +3265,7 @@
         </p:blipFill>
         <p:spPr>
           <a:xfrm>
-            <a:off x="3566160" y="1965960"/>
+            <a:off x="4252874" y="1965960"/>
             <a:ext cx="3685286" cy="1005840"/>
           </a:xfrm>
           <a:prstGeom prst="rect">
@@ -4135,7 +4137,7 @@
     <p:bg>
       <p:bgPr>
         <a:solidFill>
-          <a:srgbClr val="FFFFFF"/>
+          <a:srgbClr val="0B1F33"/>
         </a:solidFill>
         <a:effectLst/>
       </p:bgPr>
@@ -4147,177 +4149,9 @@
         <p:nvPr/>
       </p:nvGrpSpPr>
       <p:grpSpPr/>
-      <p:sp>
-        <p:nvSpPr>
-          <p:cNvPr id="2" name="Rectangle 1"/>
-          <p:cNvSpPr/>
-          <p:nvPr/>
-        </p:nvSpPr>
-        <p:spPr>
-          <a:xfrm>
-            <a:off x="0" y="0"/>
-            <a:ext cx="12191695" cy="128016"/>
-          </a:xfrm>
-          <a:prstGeom prst="rect">
-            <a:avLst/>
-          </a:prstGeom>
-          <a:solidFill>
-            <a:srgbClr val="2A78D6"/>
-          </a:solidFill>
-          <a:ln>
-            <a:noFill/>
-          </a:ln>
-          <a:effectLst/>
-        </p:spPr>
-        <p:style>
-          <a:lnRef idx="1">
-            <a:schemeClr val="accent1"/>
-          </a:lnRef>
-          <a:fillRef idx="3">
-            <a:schemeClr val="accent1"/>
-          </a:fillRef>
-          <a:effectRef idx="2">
-            <a:schemeClr val="accent1"/>
-          </a:effectRef>
-          <a:fontRef idx="minor">
-            <a:schemeClr val="lt1"/>
-          </a:fontRef>
-        </p:style>
-        <p:txBody>
-          <a:bodyPr rtlCol="0" anchor="ctr"/>
-          <a:lstStyle/>
-          <a:p>
-            <a:pPr algn="ctr"/>
-          </a:p>
-        </p:txBody>
-      </p:sp>
-      <p:sp>
-        <p:nvSpPr>
-          <p:cNvPr id="3" name="TextBox 2"/>
-          <p:cNvSpPr txBox="1"/>
-          <p:nvPr/>
-        </p:nvSpPr>
-        <p:spPr>
-          <a:xfrm>
-            <a:off x="640080" y="292608"/>
-            <a:ext cx="8686800" cy="365760"/>
-          </a:xfrm>
-          <a:prstGeom prst="rect">
-            <a:avLst/>
-          </a:prstGeom>
-          <a:noFill/>
-        </p:spPr>
-        <p:txBody>
-          <a:bodyPr wrap="square" anchor="t">
-            <a:spAutoFit/>
-          </a:bodyPr>
-          <a:lstStyle/>
-          <a:p>
-            <a:pPr algn="l">
-              <a:lnSpc>
-                <a:spcPct val="115000"/>
-              </a:lnSpc>
-            </a:pPr>
-            <a:r>
-              <a:rPr sz="1400" b="1" i="0">
-                <a:solidFill>
-                  <a:srgbClr val="1BAF7A"/>
-                </a:solidFill>
-                <a:latin typeface="Arial"/>
-              </a:rPr>
-              <a:t>ANÁLISE</a:t>
-            </a:r>
-          </a:p>
-        </p:txBody>
-      </p:sp>
-      <p:sp>
-        <p:nvSpPr>
-          <p:cNvPr id="4" name="TextBox 3"/>
-          <p:cNvSpPr txBox="1"/>
-          <p:nvPr/>
-        </p:nvSpPr>
-        <p:spPr>
-          <a:xfrm>
-            <a:off x="640080" y="594360"/>
-            <a:ext cx="10789920" cy="822960"/>
-          </a:xfrm>
-          <a:prstGeom prst="rect">
-            <a:avLst/>
-          </a:prstGeom>
-          <a:noFill/>
-        </p:spPr>
-        <p:txBody>
-          <a:bodyPr wrap="square" anchor="t">
-            <a:spAutoFit/>
-          </a:bodyPr>
-          <a:lstStyle/>
-          <a:p>
-            <a:pPr algn="l">
-              <a:lnSpc>
-                <a:spcPct val="115000"/>
-              </a:lnSpc>
-            </a:pPr>
-            <a:r>
-              <a:rPr sz="2900" b="1" i="0">
-                <a:solidFill>
-                  <a:srgbClr val="0B1F33"/>
-                </a:solidFill>
-                <a:latin typeface="Arial"/>
-              </a:rPr>
-              <a:t>Indicadores calculados</a:t>
-            </a:r>
-          </a:p>
-        </p:txBody>
-      </p:sp>
-      <p:sp>
-        <p:nvSpPr>
-          <p:cNvPr id="5" name="Rounded Rectangle 4"/>
-          <p:cNvSpPr/>
-          <p:nvPr/>
-        </p:nvSpPr>
-        <p:spPr>
-          <a:xfrm>
-            <a:off x="658368" y="1261872"/>
-            <a:ext cx="1188720" cy="50800"/>
-          </a:xfrm>
-          <a:prstGeom prst="roundRect">
-            <a:avLst>
-              <a:gd name="adj" fmla="val 50000"/>
-            </a:avLst>
-          </a:prstGeom>
-          <a:solidFill>
-            <a:srgbClr val="1BAF7A"/>
-          </a:solidFill>
-          <a:ln>
-            <a:noFill/>
-          </a:ln>
-          <a:effectLst/>
-        </p:spPr>
-        <p:style>
-          <a:lnRef idx="1">
-            <a:schemeClr val="accent1"/>
-          </a:lnRef>
-          <a:fillRef idx="3">
-            <a:schemeClr val="accent1"/>
-          </a:fillRef>
-          <a:effectRef idx="2">
-            <a:schemeClr val="accent1"/>
-          </a:effectRef>
-          <a:fontRef idx="minor">
-            <a:schemeClr val="lt1"/>
-          </a:fontRef>
-        </p:style>
-        <p:txBody>
-          <a:bodyPr rtlCol="0" anchor="ctr"/>
-          <a:lstStyle/>
-          <a:p>
-            <a:pPr algn="ctr"/>
-          </a:p>
-        </p:txBody>
-      </p:sp>
       <p:pic>
         <p:nvPicPr>
-          <p:cNvPr id="6" name="Picture 5" descr="aerotrack-icon.png"/>
+          <p:cNvPr id="2" name="Picture 1" descr="icon_check.png"/>
           <p:cNvPicPr>
             <a:picLocks noChangeAspect="1"/>
           </p:cNvPicPr>
@@ -4331,14 +4165,263 @@
         </p:blipFill>
         <p:spPr>
           <a:xfrm>
-            <a:off x="11292840" y="274320"/>
-            <a:ext cx="502920" cy="502920"/>
+            <a:off x="822960" y="1005840"/>
+            <a:ext cx="1188720" cy="1188720"/>
           </a:xfrm>
           <a:prstGeom prst="rect">
             <a:avLst/>
           </a:prstGeom>
         </p:spPr>
       </p:pic>
+      <p:sp>
+        <p:nvSpPr>
+          <p:cNvPr id="3" name="TextBox 2"/>
+          <p:cNvSpPr txBox="1"/>
+          <p:nvPr/>
+        </p:nvSpPr>
+        <p:spPr>
+          <a:xfrm>
+            <a:off x="2286000" y="1051560"/>
+            <a:ext cx="9144000" cy="1097280"/>
+          </a:xfrm>
+          <a:prstGeom prst="rect">
+            <a:avLst/>
+          </a:prstGeom>
+          <a:noFill/>
+        </p:spPr>
+        <p:txBody>
+          <a:bodyPr wrap="square" anchor="t">
+            <a:spAutoFit/>
+          </a:bodyPr>
+          <a:lstStyle/>
+          <a:p>
+            <a:pPr algn="l">
+              <a:lnSpc>
+                <a:spcPct val="115000"/>
+              </a:lnSpc>
+            </a:pPr>
+            <a:r>
+              <a:rPr sz="3800" b="1" i="0">
+                <a:solidFill>
+                  <a:srgbClr val="FFFFFF"/>
+                </a:solidFill>
+                <a:latin typeface="Arial"/>
+              </a:rPr>
+              <a:t>Demonstração ao vivo</a:t>
+            </a:r>
+          </a:p>
+        </p:txBody>
+      </p:sp>
+      <p:sp>
+        <p:nvSpPr>
+          <p:cNvPr id="4" name="TextBox 3"/>
+          <p:cNvSpPr txBox="1"/>
+          <p:nvPr/>
+        </p:nvSpPr>
+        <p:spPr>
+          <a:xfrm>
+            <a:off x="2304288" y="1965960"/>
+            <a:ext cx="9052560" cy="548640"/>
+          </a:xfrm>
+          <a:prstGeom prst="rect">
+            <a:avLst/>
+          </a:prstGeom>
+          <a:noFill/>
+        </p:spPr>
+        <p:txBody>
+          <a:bodyPr wrap="square" anchor="t">
+            <a:spAutoFit/>
+          </a:bodyPr>
+          <a:lstStyle/>
+          <a:p>
+            <a:pPr algn="l">
+              <a:lnSpc>
+                <a:spcPct val="115000"/>
+              </a:lnSpc>
+            </a:pPr>
+            <a:r>
+              <a:rPr sz="1900" b="1" i="0">
+                <a:solidFill>
+                  <a:srgbClr val="E8A300"/>
+                </a:solidFill>
+                <a:latin typeface="Arial"/>
+              </a:rPr>
+              <a:t>Agora, direto no Apache Hop Designer</a:t>
+            </a:r>
+          </a:p>
+        </p:txBody>
+      </p:sp>
+      <p:sp>
+        <p:nvSpPr>
+          <p:cNvPr id="5" name="Rounded Rectangle 4"/>
+          <p:cNvSpPr/>
+          <p:nvPr/>
+        </p:nvSpPr>
+        <p:spPr>
+          <a:xfrm>
+            <a:off x="822960" y="2880360"/>
+            <a:ext cx="10515600" cy="2880360"/>
+          </a:xfrm>
+          <a:prstGeom prst="roundRect">
+            <a:avLst>
+              <a:gd name="adj" fmla="val 10000"/>
+            </a:avLst>
+          </a:prstGeom>
+          <a:solidFill>
+            <a:srgbClr val="162E4A"/>
+          </a:solidFill>
+          <a:ln>
+            <a:noFill/>
+          </a:ln>
+          <a:effectLst/>
+          <a:effectLst>
+            <a:outerShdw blurRad="180000" dist="45000" dir="5400000" rotWithShape="0">
+              <a:srgbClr val="0B1F33">
+                <a:alpha val="72000"/>
+              </a:srgbClr>
+            </a:outerShdw>
+          </a:effectLst>
+        </p:spPr>
+        <p:style>
+          <a:lnRef idx="1">
+            <a:schemeClr val="accent1"/>
+          </a:lnRef>
+          <a:fillRef idx="3">
+            <a:schemeClr val="accent1"/>
+          </a:fillRef>
+          <a:effectRef idx="2">
+            <a:schemeClr val="accent1"/>
+          </a:effectRef>
+          <a:fontRef idx="minor">
+            <a:schemeClr val="lt1"/>
+          </a:fontRef>
+        </p:style>
+        <p:txBody>
+          <a:bodyPr rtlCol="0" anchor="ctr"/>
+          <a:lstStyle/>
+          <a:p>
+            <a:pPr algn="ctr"/>
+          </a:p>
+        </p:txBody>
+      </p:sp>
+      <p:sp>
+        <p:nvSpPr>
+          <p:cNvPr id="6" name="TextBox 5"/>
+          <p:cNvSpPr txBox="1"/>
+          <p:nvPr/>
+        </p:nvSpPr>
+        <p:spPr>
+          <a:xfrm>
+            <a:off x="1188720" y="3200400"/>
+            <a:ext cx="9784080" cy="2468880"/>
+          </a:xfrm>
+          <a:prstGeom prst="rect">
+            <a:avLst/>
+          </a:prstGeom>
+          <a:noFill/>
+        </p:spPr>
+        <p:txBody>
+          <a:bodyPr wrap="square">
+            <a:spAutoFit/>
+          </a:bodyPr>
+          <a:lstStyle/>
+          <a:p>
+            <a:pPr>
+              <a:lnSpc>
+                <a:spcPct val="115000"/>
+              </a:lnSpc>
+              <a:spcAft>
+                <a:spcPts val="1400"/>
+              </a:spcAft>
+            </a:pPr>
+            <a:r>
+              <a:rPr sz="1700">
+                <a:solidFill>
+                  <a:srgbClr val="CFE3F7"/>
+                </a:solidFill>
+                <a:latin typeface="Arial"/>
+              </a:rPr>
+              <a:t>•  Abertura do projeto aerotrack no Hop Designer</a:t>
+            </a:r>
+          </a:p>
+          <a:p>
+            <a:pPr>
+              <a:lnSpc>
+                <a:spcPct val="115000"/>
+              </a:lnSpc>
+              <a:spcAft>
+                <a:spcPts val="1400"/>
+              </a:spcAft>
+            </a:pPr>
+            <a:r>
+              <a:rPr sz="1700">
+                <a:solidFill>
+                  <a:srgbClr val="CFE3F7"/>
+                </a:solidFill>
+                <a:latin typeface="Arial"/>
+              </a:rPr>
+              <a:t>•  Canvas de pl_01_ingestion_treatment: ingestão, tratamento e classificação</a:t>
+            </a:r>
+          </a:p>
+          <a:p>
+            <a:pPr>
+              <a:lnSpc>
+                <a:spcPct val="115000"/>
+              </a:lnSpc>
+              <a:spcAft>
+                <a:spcPts val="1400"/>
+              </a:spcAft>
+            </a:pPr>
+            <a:r>
+              <a:rPr sz="1700">
+                <a:solidFill>
+                  <a:srgbClr val="CFE3F7"/>
+                </a:solidFill>
+                <a:latin typeface="Arial"/>
+              </a:rPr>
+              <a:t>•  Canvas de pl_02_indicator_consolidation: resumos diário e mensal</a:t>
+            </a:r>
+          </a:p>
+          <a:p>
+            <a:pPr>
+              <a:lnSpc>
+                <a:spcPct val="115000"/>
+              </a:lnSpc>
+              <a:spcAft>
+                <a:spcPts val="1400"/>
+              </a:spcAft>
+            </a:pPr>
+            <a:r>
+              <a:rPr sz="1700">
+                <a:solidFill>
+                  <a:srgbClr val="CFE3F7"/>
+                </a:solidFill>
+                <a:latin typeface="Arial"/>
+              </a:rPr>
+              <a:t>•  Execução de wf_air_quality_orchestration de ponta a ponta, ao vivo</a:t>
+            </a:r>
+          </a:p>
+          <a:p>
+            <a:pPr>
+              <a:lnSpc>
+                <a:spcPct val="115000"/>
+              </a:lnSpc>
+              <a:spcAft>
+                <a:spcPts val="1400"/>
+              </a:spcAft>
+            </a:pPr>
+            <a:r>
+              <a:rPr sz="1700">
+                <a:solidFill>
+                  <a:srgbClr val="CFE3F7"/>
+                </a:solidFill>
+                <a:latin typeface="Arial"/>
+              </a:rPr>
+              <a:t>•  Conferência do resultado direto no PostgreSQL</a:t>
+            </a:r>
+          </a:p>
+        </p:txBody>
+      </p:sp>
       <p:sp>
         <p:nvSpPr>
           <p:cNvPr id="7" name="TextBox 6"/>
@@ -4347,162 +4430,6 @@
         </p:nvSpPr>
         <p:spPr>
           <a:xfrm>
-            <a:off x="822960" y="1737360"/>
-            <a:ext cx="10607040" cy="4389120"/>
-          </a:xfrm>
-          <a:prstGeom prst="rect">
-            <a:avLst/>
-          </a:prstGeom>
-          <a:noFill/>
-        </p:spPr>
-        <p:txBody>
-          <a:bodyPr wrap="square">
-            <a:spAutoFit/>
-          </a:bodyPr>
-          <a:lstStyle/>
-          <a:p>
-            <a:pPr>
-              <a:lnSpc>
-                <a:spcPct val="115000"/>
-              </a:lnSpc>
-              <a:spcAft>
-                <a:spcPts val="1300"/>
-              </a:spcAft>
-            </a:pPr>
-            <a:r>
-              <a:rPr sz="1800">
-                <a:solidFill>
-                  <a:srgbClr val="26364A"/>
-                </a:solidFill>
-                <a:latin typeface="Arial"/>
-              </a:rPr>
-              <a:t>•  Total de leituras tratadas e rejeitadas</a:t>
-            </a:r>
-          </a:p>
-          <a:p>
-            <a:pPr>
-              <a:lnSpc>
-                <a:spcPct val="115000"/>
-              </a:lnSpc>
-              <a:spcAft>
-                <a:spcPts val="1300"/>
-              </a:spcAft>
-            </a:pPr>
-            <a:r>
-              <a:rPr sz="1800">
-                <a:solidFill>
-                  <a:srgbClr val="26364A"/>
-                </a:solidFill>
-                <a:latin typeface="Arial"/>
-              </a:rPr>
-              <a:t>•  Percentual de horas em condição crítica</a:t>
-            </a:r>
-          </a:p>
-          <a:p>
-            <a:pPr>
-              <a:lnSpc>
-                <a:spcPct val="115000"/>
-              </a:lnSpc>
-              <a:spcAft>
-                <a:spcPts val="1300"/>
-              </a:spcAft>
-            </a:pPr>
-            <a:r>
-              <a:rPr sz="1800">
-                <a:solidFill>
-                  <a:srgbClr val="26364A"/>
-                </a:solidFill>
-                <a:latin typeface="Arial"/>
-              </a:rPr>
-              <a:t>•  CO e NO2 médios e máximos</a:t>
-            </a:r>
-          </a:p>
-          <a:p>
-            <a:pPr>
-              <a:lnSpc>
-                <a:spcPct val="115000"/>
-              </a:lnSpc>
-              <a:spcAft>
-                <a:spcPts val="1300"/>
-              </a:spcAft>
-            </a:pPr>
-            <a:r>
-              <a:rPr sz="1800">
-                <a:solidFill>
-                  <a:srgbClr val="26364A"/>
-                </a:solidFill>
-                <a:latin typeface="Arial"/>
-              </a:rPr>
-              <a:t>•  Evolução mensal de CO e de NO2</a:t>
-            </a:r>
-          </a:p>
-          <a:p>
-            <a:pPr>
-              <a:lnSpc>
-                <a:spcPct val="115000"/>
-              </a:lnSpc>
-              <a:spcAft>
-                <a:spcPts val="1300"/>
-              </a:spcAft>
-            </a:pPr>
-            <a:r>
-              <a:rPr sz="1800">
-                <a:solidFill>
-                  <a:srgbClr val="26364A"/>
-                </a:solidFill>
-                <a:latin typeface="Arial"/>
-              </a:rPr>
-              <a:t>•  Distribuição das leituras por nível (bom, moderado, crítico)</a:t>
-            </a:r>
-          </a:p>
-          <a:p>
-            <a:pPr>
-              <a:lnSpc>
-                <a:spcPct val="115000"/>
-              </a:lnSpc>
-              <a:spcAft>
-                <a:spcPts val="1300"/>
-              </a:spcAft>
-            </a:pPr>
-            <a:r>
-              <a:rPr sz="1800">
-                <a:solidFill>
-                  <a:srgbClr val="26364A"/>
-                </a:solidFill>
-                <a:latin typeface="Arial"/>
-              </a:rPr>
-              <a:t>•  Leituras por turno do dia</a:t>
-            </a:r>
-          </a:p>
-          <a:p>
-            <a:pPr>
-              <a:lnSpc>
-                <a:spcPct val="115000"/>
-              </a:lnSpc>
-              <a:spcAft>
-                <a:spcPts val="1300"/>
-              </a:spcAft>
-            </a:pPr>
-            <a:r>
-              <a:rPr sz="1800">
-                <a:solidFill>
-                  <a:srgbClr val="26364A"/>
-                </a:solidFill>
-                <a:latin typeface="Arial"/>
-              </a:rPr>
-              <a:t>•  Ranking dos dez piores dias</a:t>
-            </a:r>
-          </a:p>
-        </p:txBody>
-      </p:sp>
-      <p:sp>
-        <p:nvSpPr>
-          <p:cNvPr id="8" name="TextBox 7"/>
-          <p:cNvSpPr txBox="1"/>
-          <p:nvPr/>
-        </p:nvSpPr>
-        <p:spPr>
-          <a:xfrm>
             <a:off x="640080" y="6510528"/>
             <a:ext cx="5486400" cy="274320"/>
           </a:xfrm>
@@ -4536,7 +4463,7 @@
       </p:sp>
       <p:sp>
         <p:nvSpPr>
-          <p:cNvPr id="9" name="TextBox 8"/>
+          <p:cNvPr id="8" name="TextBox 7"/>
           <p:cNvSpPr txBox="1"/>
           <p:nvPr/>
         </p:nvSpPr>
@@ -4677,7 +4604,7 @@
                 </a:solidFill>
                 <a:latin typeface="Arial"/>
               </a:rPr>
-              <a:t>VISUALIZAÇÃO</a:t>
+              <a:t>ANÁLISE</a:t>
             </a:r>
           </a:p>
         </p:txBody>
@@ -4716,7 +4643,7 @@
                 </a:solidFill>
                 <a:latin typeface="Arial"/>
               </a:rPr>
-              <a:t>Dashboard AeroTrack</a:t>
+              <a:t>Indicadores calculados</a:t>
             </a:r>
           </a:p>
         </p:txBody>
@@ -4791,30 +4718,162 @@
           </a:prstGeom>
         </p:spPr>
       </p:pic>
-      <p:pic>
-        <p:nvPicPr>
-          <p:cNvPr id="7" name="Picture 6" descr="E01-dashboard-overview.png"/>
-          <p:cNvPicPr>
-            <a:picLocks noChangeAspect="1"/>
-          </p:cNvPicPr>
-          <p:nvPr/>
-        </p:nvPicPr>
-        <p:blipFill>
-          <a:blip r:embed="rId3"/>
-          <a:stretch>
-            <a:fillRect/>
-          </a:stretch>
-        </p:blipFill>
-        <p:spPr>
-          <a:xfrm>
-            <a:off x="1234440" y="1600200"/>
-            <a:ext cx="9692640" cy="11358562"/>
-          </a:xfrm>
-          <a:prstGeom prst="rect">
-            <a:avLst/>
-          </a:prstGeom>
-        </p:spPr>
-      </p:pic>
+      <p:sp>
+        <p:nvSpPr>
+          <p:cNvPr id="7" name="TextBox 6"/>
+          <p:cNvSpPr txBox="1"/>
+          <p:nvPr/>
+        </p:nvSpPr>
+        <p:spPr>
+          <a:xfrm>
+            <a:off x="822960" y="1737360"/>
+            <a:ext cx="10607040" cy="4389120"/>
+          </a:xfrm>
+          <a:prstGeom prst="rect">
+            <a:avLst/>
+          </a:prstGeom>
+          <a:noFill/>
+        </p:spPr>
+        <p:txBody>
+          <a:bodyPr wrap="square">
+            <a:spAutoFit/>
+          </a:bodyPr>
+          <a:lstStyle/>
+          <a:p>
+            <a:pPr>
+              <a:lnSpc>
+                <a:spcPct val="115000"/>
+              </a:lnSpc>
+              <a:spcAft>
+                <a:spcPts val="1300"/>
+              </a:spcAft>
+            </a:pPr>
+            <a:r>
+              <a:rPr sz="1800">
+                <a:solidFill>
+                  <a:srgbClr val="26364A"/>
+                </a:solidFill>
+                <a:latin typeface="Arial"/>
+              </a:rPr>
+              <a:t>•  Total de leituras tratadas e rejeitadas</a:t>
+            </a:r>
+          </a:p>
+          <a:p>
+            <a:pPr>
+              <a:lnSpc>
+                <a:spcPct val="115000"/>
+              </a:lnSpc>
+              <a:spcAft>
+                <a:spcPts val="1300"/>
+              </a:spcAft>
+            </a:pPr>
+            <a:r>
+              <a:rPr sz="1800">
+                <a:solidFill>
+                  <a:srgbClr val="26364A"/>
+                </a:solidFill>
+                <a:latin typeface="Arial"/>
+              </a:rPr>
+              <a:t>•  Percentual de horas em condição crítica</a:t>
+            </a:r>
+          </a:p>
+          <a:p>
+            <a:pPr>
+              <a:lnSpc>
+                <a:spcPct val="115000"/>
+              </a:lnSpc>
+              <a:spcAft>
+                <a:spcPts val="1300"/>
+              </a:spcAft>
+            </a:pPr>
+            <a:r>
+              <a:rPr sz="1800">
+                <a:solidFill>
+                  <a:srgbClr val="26364A"/>
+                </a:solidFill>
+                <a:latin typeface="Arial"/>
+              </a:rPr>
+              <a:t>•  CO e NO2 médios e máximos</a:t>
+            </a:r>
+          </a:p>
+          <a:p>
+            <a:pPr>
+              <a:lnSpc>
+                <a:spcPct val="115000"/>
+              </a:lnSpc>
+              <a:spcAft>
+                <a:spcPts val="1300"/>
+              </a:spcAft>
+            </a:pPr>
+            <a:r>
+              <a:rPr sz="1800">
+                <a:solidFill>
+                  <a:srgbClr val="26364A"/>
+                </a:solidFill>
+                <a:latin typeface="Arial"/>
+              </a:rPr>
+              <a:t>•  Evolução mensal de CO e de NO2</a:t>
+            </a:r>
+          </a:p>
+          <a:p>
+            <a:pPr>
+              <a:lnSpc>
+                <a:spcPct val="115000"/>
+              </a:lnSpc>
+              <a:spcAft>
+                <a:spcPts val="1300"/>
+              </a:spcAft>
+            </a:pPr>
+            <a:r>
+              <a:rPr sz="1800">
+                <a:solidFill>
+                  <a:srgbClr val="26364A"/>
+                </a:solidFill>
+                <a:latin typeface="Arial"/>
+              </a:rPr>
+              <a:t>•  Distribuição das leituras por nível (bom, moderado, crítico)</a:t>
+            </a:r>
+          </a:p>
+          <a:p>
+            <a:pPr>
+              <a:lnSpc>
+                <a:spcPct val="115000"/>
+              </a:lnSpc>
+              <a:spcAft>
+                <a:spcPts val="1300"/>
+              </a:spcAft>
+            </a:pPr>
+            <a:r>
+              <a:rPr sz="1800">
+                <a:solidFill>
+                  <a:srgbClr val="26364A"/>
+                </a:solidFill>
+                <a:latin typeface="Arial"/>
+              </a:rPr>
+              <a:t>•  Leituras por turno do dia</a:t>
+            </a:r>
+          </a:p>
+          <a:p>
+            <a:pPr>
+              <a:lnSpc>
+                <a:spcPct val="115000"/>
+              </a:lnSpc>
+              <a:spcAft>
+                <a:spcPts val="1300"/>
+              </a:spcAft>
+            </a:pPr>
+            <a:r>
+              <a:rPr sz="1800">
+                <a:solidFill>
+                  <a:srgbClr val="26364A"/>
+                </a:solidFill>
+                <a:latin typeface="Arial"/>
+              </a:rPr>
+              <a:t>•  Ranking dos dez piores dias</a:t>
+            </a:r>
+          </a:p>
+        </p:txBody>
+      </p:sp>
       <p:sp>
         <p:nvSpPr>
           <p:cNvPr id="8" name="TextBox 7"/>
@@ -4823,8 +4882,8 @@
         </p:nvSpPr>
         <p:spPr>
           <a:xfrm>
-            <a:off x="822960" y="6355080"/>
-            <a:ext cx="10515600" cy="365760"/>
+            <a:off x="640080" y="6510528"/>
+            <a:ext cx="5486400" cy="274320"/>
           </a:xfrm>
           <a:prstGeom prst="rect">
             <a:avLst/>
@@ -4843,13 +4902,13 @@
               </a:lnSpc>
             </a:pPr>
             <a:r>
-              <a:rPr sz="1100" b="0" i="1">
+              <a:rPr sz="1000" b="0" i="0">
                 <a:solidFill>
                   <a:srgbClr val="898781"/>
                 </a:solidFill>
                 <a:latin typeface="Arial"/>
               </a:rPr>
-              <a:t>Interface do dashboard em inglês, junto com o restante do código do projeto.</a:t>
+              <a:t>AeroTrack | Módulo 6 | Apache Hop</a:t>
             </a:r>
           </a:p>
         </p:txBody>
@@ -4857,45 +4916,6 @@
       <p:sp>
         <p:nvSpPr>
           <p:cNvPr id="9" name="TextBox 8"/>
-          <p:cNvSpPr txBox="1"/>
-          <p:nvPr/>
-        </p:nvSpPr>
-        <p:spPr>
-          <a:xfrm>
-            <a:off x="640080" y="6510528"/>
-            <a:ext cx="5486400" cy="274320"/>
-          </a:xfrm>
-          <a:prstGeom prst="rect">
-            <a:avLst/>
-          </a:prstGeom>
-          <a:noFill/>
-        </p:spPr>
-        <p:txBody>
-          <a:bodyPr wrap="square" anchor="t">
-            <a:spAutoFit/>
-          </a:bodyPr>
-          <a:lstStyle/>
-          <a:p>
-            <a:pPr algn="l">
-              <a:lnSpc>
-                <a:spcPct val="115000"/>
-              </a:lnSpc>
-            </a:pPr>
-            <a:r>
-              <a:rPr sz="1000" b="0" i="0">
-                <a:solidFill>
-                  <a:srgbClr val="898781"/>
-                </a:solidFill>
-                <a:latin typeface="Arial"/>
-              </a:rPr>
-              <a:t>AeroTrack | Módulo 6 | Apache Hop</a:t>
-            </a:r>
-          </a:p>
-        </p:txBody>
-      </p:sp>
-      <p:sp>
-        <p:nvSpPr>
-          <p:cNvPr id="10" name="TextBox 9"/>
           <p:cNvSpPr txBox="1"/>
           <p:nvPr/>
         </p:nvSpPr>
@@ -5036,7 +5056,7 @@
                 </a:solidFill>
                 <a:latin typeface="Arial"/>
               </a:rPr>
-              <a:t>RESPONDENDO À PERGUNTA</a:t>
+              <a:t>VISUALIZAÇÃO</a:t>
             </a:r>
           </a:p>
         </p:txBody>
@@ -5075,7 +5095,7 @@
                 </a:solidFill>
                 <a:latin typeface="Arial"/>
               </a:rPr>
-              <a:t>Ranking dos dez piores dias</a:t>
+              <a:t>Dashboard AeroTrack</a:t>
             </a:r>
           </a:p>
         </p:txBody>
@@ -5152,7 +5172,7 @@
       </p:pic>
       <p:pic>
         <p:nvPicPr>
-          <p:cNvPr id="7" name="Picture 6" descr="E02-dashboard-ranking.png"/>
+          <p:cNvPr id="7" name="Picture 6" descr="E01-dashboard-overview.png"/>
           <p:cNvPicPr>
             <a:picLocks noChangeAspect="1"/>
           </p:cNvPicPr>
@@ -5166,8 +5186,8 @@
         </p:blipFill>
         <p:spPr>
           <a:xfrm>
-            <a:off x="1737360" y="1737360"/>
-            <a:ext cx="8686800" cy="3053953"/>
+            <a:off x="1234440" y="1600200"/>
+            <a:ext cx="9692640" cy="11358562"/>
           </a:xfrm>
           <a:prstGeom prst="rect">
             <a:avLst/>
@@ -5182,6 +5202,45 @@
         </p:nvSpPr>
         <p:spPr>
           <a:xfrm>
+            <a:off x="822960" y="6355080"/>
+            <a:ext cx="10515600" cy="365760"/>
+          </a:xfrm>
+          <a:prstGeom prst="rect">
+            <a:avLst/>
+          </a:prstGeom>
+          <a:noFill/>
+        </p:spPr>
+        <p:txBody>
+          <a:bodyPr wrap="square" anchor="t">
+            <a:spAutoFit/>
+          </a:bodyPr>
+          <a:lstStyle/>
+          <a:p>
+            <a:pPr algn="l">
+              <a:lnSpc>
+                <a:spcPct val="115000"/>
+              </a:lnSpc>
+            </a:pPr>
+            <a:r>
+              <a:rPr sz="1100" b="0" i="1">
+                <a:solidFill>
+                  <a:srgbClr val="898781"/>
+                </a:solidFill>
+                <a:latin typeface="Arial"/>
+              </a:rPr>
+              <a:t>Interface do dashboard em inglês, junto com o restante do código do projeto.</a:t>
+            </a:r>
+          </a:p>
+        </p:txBody>
+      </p:sp>
+      <p:sp>
+        <p:nvSpPr>
+          <p:cNvPr id="9" name="TextBox 8"/>
+          <p:cNvSpPr txBox="1"/>
+          <p:nvPr/>
+        </p:nvSpPr>
+        <p:spPr>
+          <a:xfrm>
             <a:off x="640080" y="6510528"/>
             <a:ext cx="5486400" cy="274320"/>
           </a:xfrm>
@@ -5215,7 +5274,7 @@
       </p:sp>
       <p:sp>
         <p:nvSpPr>
-          <p:cNvPr id="9" name="TextBox 8"/>
+          <p:cNvPr id="10" name="TextBox 9"/>
           <p:cNvSpPr txBox="1"/>
           <p:nvPr/>
         </p:nvSpPr>
@@ -5356,6 +5415,326 @@
                 </a:solidFill>
                 <a:latin typeface="Arial"/>
               </a:rPr>
+              <a:t>RESPONDENDO À PERGUNTA</a:t>
+            </a:r>
+          </a:p>
+        </p:txBody>
+      </p:sp>
+      <p:sp>
+        <p:nvSpPr>
+          <p:cNvPr id="4" name="TextBox 3"/>
+          <p:cNvSpPr txBox="1"/>
+          <p:nvPr/>
+        </p:nvSpPr>
+        <p:spPr>
+          <a:xfrm>
+            <a:off x="640080" y="594360"/>
+            <a:ext cx="10789920" cy="822960"/>
+          </a:xfrm>
+          <a:prstGeom prst="rect">
+            <a:avLst/>
+          </a:prstGeom>
+          <a:noFill/>
+        </p:spPr>
+        <p:txBody>
+          <a:bodyPr wrap="square" anchor="t">
+            <a:spAutoFit/>
+          </a:bodyPr>
+          <a:lstStyle/>
+          <a:p>
+            <a:pPr algn="l">
+              <a:lnSpc>
+                <a:spcPct val="115000"/>
+              </a:lnSpc>
+            </a:pPr>
+            <a:r>
+              <a:rPr sz="2900" b="1" i="0">
+                <a:solidFill>
+                  <a:srgbClr val="0B1F33"/>
+                </a:solidFill>
+                <a:latin typeface="Arial"/>
+              </a:rPr>
+              <a:t>Ranking dos dez piores dias</a:t>
+            </a:r>
+          </a:p>
+        </p:txBody>
+      </p:sp>
+      <p:sp>
+        <p:nvSpPr>
+          <p:cNvPr id="5" name="Rounded Rectangle 4"/>
+          <p:cNvSpPr/>
+          <p:nvPr/>
+        </p:nvSpPr>
+        <p:spPr>
+          <a:xfrm>
+            <a:off x="658368" y="1261872"/>
+            <a:ext cx="1188720" cy="50800"/>
+          </a:xfrm>
+          <a:prstGeom prst="roundRect">
+            <a:avLst>
+              <a:gd name="adj" fmla="val 50000"/>
+            </a:avLst>
+          </a:prstGeom>
+          <a:solidFill>
+            <a:srgbClr val="1BAF7A"/>
+          </a:solidFill>
+          <a:ln>
+            <a:noFill/>
+          </a:ln>
+          <a:effectLst/>
+        </p:spPr>
+        <p:style>
+          <a:lnRef idx="1">
+            <a:schemeClr val="accent1"/>
+          </a:lnRef>
+          <a:fillRef idx="3">
+            <a:schemeClr val="accent1"/>
+          </a:fillRef>
+          <a:effectRef idx="2">
+            <a:schemeClr val="accent1"/>
+          </a:effectRef>
+          <a:fontRef idx="minor">
+            <a:schemeClr val="lt1"/>
+          </a:fontRef>
+        </p:style>
+        <p:txBody>
+          <a:bodyPr rtlCol="0" anchor="ctr"/>
+          <a:lstStyle/>
+          <a:p>
+            <a:pPr algn="ctr"/>
+          </a:p>
+        </p:txBody>
+      </p:sp>
+      <p:pic>
+        <p:nvPicPr>
+          <p:cNvPr id="6" name="Picture 5" descr="aerotrack-icon.png"/>
+          <p:cNvPicPr>
+            <a:picLocks noChangeAspect="1"/>
+          </p:cNvPicPr>
+          <p:nvPr/>
+        </p:nvPicPr>
+        <p:blipFill>
+          <a:blip r:embed="rId2"/>
+          <a:stretch>
+            <a:fillRect/>
+          </a:stretch>
+        </p:blipFill>
+        <p:spPr>
+          <a:xfrm>
+            <a:off x="11292840" y="274320"/>
+            <a:ext cx="502920" cy="502920"/>
+          </a:xfrm>
+          <a:prstGeom prst="rect">
+            <a:avLst/>
+          </a:prstGeom>
+        </p:spPr>
+      </p:pic>
+      <p:pic>
+        <p:nvPicPr>
+          <p:cNvPr id="7" name="Picture 6" descr="E02-dashboard-ranking.png"/>
+          <p:cNvPicPr>
+            <a:picLocks noChangeAspect="1"/>
+          </p:cNvPicPr>
+          <p:nvPr/>
+        </p:nvPicPr>
+        <p:blipFill>
+          <a:blip r:embed="rId3"/>
+          <a:stretch>
+            <a:fillRect/>
+          </a:stretch>
+        </p:blipFill>
+        <p:spPr>
+          <a:xfrm>
+            <a:off x="1737360" y="1737360"/>
+            <a:ext cx="8686800" cy="3053953"/>
+          </a:xfrm>
+          <a:prstGeom prst="rect">
+            <a:avLst/>
+          </a:prstGeom>
+        </p:spPr>
+      </p:pic>
+      <p:sp>
+        <p:nvSpPr>
+          <p:cNvPr id="8" name="TextBox 7"/>
+          <p:cNvSpPr txBox="1"/>
+          <p:nvPr/>
+        </p:nvSpPr>
+        <p:spPr>
+          <a:xfrm>
+            <a:off x="640080" y="6510528"/>
+            <a:ext cx="5486400" cy="274320"/>
+          </a:xfrm>
+          <a:prstGeom prst="rect">
+            <a:avLst/>
+          </a:prstGeom>
+          <a:noFill/>
+        </p:spPr>
+        <p:txBody>
+          <a:bodyPr wrap="square" anchor="t">
+            <a:spAutoFit/>
+          </a:bodyPr>
+          <a:lstStyle/>
+          <a:p>
+            <a:pPr algn="l">
+              <a:lnSpc>
+                <a:spcPct val="115000"/>
+              </a:lnSpc>
+            </a:pPr>
+            <a:r>
+              <a:rPr sz="1000" b="0" i="0">
+                <a:solidFill>
+                  <a:srgbClr val="898781"/>
+                </a:solidFill>
+                <a:latin typeface="Arial"/>
+              </a:rPr>
+              <a:t>AeroTrack | Módulo 6 | Apache Hop</a:t>
+            </a:r>
+          </a:p>
+        </p:txBody>
+      </p:sp>
+      <p:sp>
+        <p:nvSpPr>
+          <p:cNvPr id="9" name="TextBox 8"/>
+          <p:cNvSpPr txBox="1"/>
+          <p:nvPr/>
+        </p:nvSpPr>
+        <p:spPr>
+          <a:xfrm>
+            <a:off x="10972800" y="6510528"/>
+            <a:ext cx="640080" cy="274320"/>
+          </a:xfrm>
+          <a:prstGeom prst="rect">
+            <a:avLst/>
+          </a:prstGeom>
+          <a:noFill/>
+        </p:spPr>
+        <p:txBody>
+          <a:bodyPr wrap="square" anchor="t">
+            <a:spAutoFit/>
+          </a:bodyPr>
+          <a:lstStyle/>
+          <a:p>
+            <a:pPr algn="r">
+              <a:lnSpc>
+                <a:spcPct val="115000"/>
+              </a:lnSpc>
+            </a:pPr>
+            <a:r>
+              <a:rPr sz="1000" b="0" i="0">
+                <a:solidFill>
+                  <a:srgbClr val="898781"/>
+                </a:solidFill>
+                <a:latin typeface="Arial"/>
+              </a:rPr>
+              <a:t>14</a:t>
+            </a:r>
+          </a:p>
+        </p:txBody>
+      </p:sp>
+    </p:spTree>
+  </p:cSld>
+  <p:clrMapOvr>
+    <a:masterClrMapping/>
+  </p:clrMapOvr>
+</p:sld>
+</file>
+
+<file path=ppt/slides/slide15.xml><?xml version="1.0" encoding="utf-8"?>
+<p:sld xmlns:a="http://schemas.openxmlformats.org/drawingml/2006/main" xmlns:p="http://schemas.openxmlformats.org/presentationml/2006/main" xmlns:r="http://schemas.openxmlformats.org/officeDocument/2006/relationships">
+  <p:cSld>
+    <p:bg>
+      <p:bgPr>
+        <a:solidFill>
+          <a:srgbClr val="FFFFFF"/>
+        </a:solidFill>
+        <a:effectLst/>
+      </p:bgPr>
+    </p:bg>
+    <p:spTree>
+      <p:nvGrpSpPr>
+        <p:cNvPr id="1" name=""/>
+        <p:cNvGrpSpPr/>
+        <p:nvPr/>
+      </p:nvGrpSpPr>
+      <p:grpSpPr/>
+      <p:sp>
+        <p:nvSpPr>
+          <p:cNvPr id="2" name="Rectangle 1"/>
+          <p:cNvSpPr/>
+          <p:nvPr/>
+        </p:nvSpPr>
+        <p:spPr>
+          <a:xfrm>
+            <a:off x="0" y="0"/>
+            <a:ext cx="12191695" cy="128016"/>
+          </a:xfrm>
+          <a:prstGeom prst="rect">
+            <a:avLst/>
+          </a:prstGeom>
+          <a:solidFill>
+            <a:srgbClr val="2A78D6"/>
+          </a:solidFill>
+          <a:ln>
+            <a:noFill/>
+          </a:ln>
+          <a:effectLst/>
+        </p:spPr>
+        <p:style>
+          <a:lnRef idx="1">
+            <a:schemeClr val="accent1"/>
+          </a:lnRef>
+          <a:fillRef idx="3">
+            <a:schemeClr val="accent1"/>
+          </a:fillRef>
+          <a:effectRef idx="2">
+            <a:schemeClr val="accent1"/>
+          </a:effectRef>
+          <a:fontRef idx="minor">
+            <a:schemeClr val="lt1"/>
+          </a:fontRef>
+        </p:style>
+        <p:txBody>
+          <a:bodyPr rtlCol="0" anchor="ctr"/>
+          <a:lstStyle/>
+          <a:p>
+            <a:pPr algn="ctr"/>
+          </a:p>
+        </p:txBody>
+      </p:sp>
+      <p:sp>
+        <p:nvSpPr>
+          <p:cNvPr id="3" name="TextBox 2"/>
+          <p:cNvSpPr txBox="1"/>
+          <p:nvPr/>
+        </p:nvSpPr>
+        <p:spPr>
+          <a:xfrm>
+            <a:off x="640080" y="292608"/>
+            <a:ext cx="8686800" cy="365760"/>
+          </a:xfrm>
+          <a:prstGeom prst="rect">
+            <a:avLst/>
+          </a:prstGeom>
+          <a:noFill/>
+        </p:spPr>
+        <p:txBody>
+          <a:bodyPr wrap="square" anchor="t">
+            <a:spAutoFit/>
+          </a:bodyPr>
+          <a:lstStyle/>
+          <a:p>
+            <a:pPr algn="l">
+              <a:lnSpc>
+                <a:spcPct val="115000"/>
+              </a:lnSpc>
+            </a:pPr>
+            <a:r>
+              <a:rPr sz="1400" b="1" i="0">
+                <a:solidFill>
+                  <a:srgbClr val="1BAF7A"/>
+                </a:solidFill>
+                <a:latin typeface="Arial"/>
+              </a:rPr>
               <a:t>RESULTADOS</a:t>
             </a:r>
           </a:p>
@@ -6436,7 +6815,7 @@
                 </a:solidFill>
                 <a:latin typeface="Arial"/>
               </a:rPr>
-              <a:t>14</a:t>
+              <a:t>15</a:t>
             </a:r>
           </a:p>
         </p:txBody>
@@ -6449,7 +6828,7 @@
 </p:sld>
 </file>
 
-<file path=ppt/slides/slide15.xml><?xml version="1.0" encoding="utf-8"?>
+<file path=ppt/slides/slide16.xml><?xml version="1.0" encoding="utf-8"?>
 <p:sld xmlns:a="http://schemas.openxmlformats.org/drawingml/2006/main" xmlns:p="http://schemas.openxmlformats.org/presentationml/2006/main" xmlns:r="http://schemas.openxmlformats.org/officeDocument/2006/relationships">
   <p:cSld>
     <p:bg>
@@ -6705,7 +7084,7 @@
                 </a:solidFill>
                 <a:latin typeface="Arial"/>
               </a:rPr>
-              <a:t>15</a:t>
+              <a:t>16</a:t>
             </a:r>
           </a:p>
         </p:txBody>
@@ -6718,7 +7097,578 @@
 </p:sld>
 </file>
 
-<file path=ppt/slides/slide16.xml><?xml version="1.0" encoding="utf-8"?>
+<file path=ppt/slides/slide17.xml><?xml version="1.0" encoding="utf-8"?>
+<p:sld xmlns:a="http://schemas.openxmlformats.org/drawingml/2006/main" xmlns:p="http://schemas.openxmlformats.org/presentationml/2006/main" xmlns:r="http://schemas.openxmlformats.org/officeDocument/2006/relationships">
+  <p:cSld>
+    <p:bg>
+      <p:bgPr>
+        <a:solidFill>
+          <a:srgbClr val="FFFFFF"/>
+        </a:solidFill>
+        <a:effectLst/>
+      </p:bgPr>
+    </p:bg>
+    <p:spTree>
+      <p:nvGrpSpPr>
+        <p:cNvPr id="1" name=""/>
+        <p:cNvGrpSpPr/>
+        <p:nvPr/>
+      </p:nvGrpSpPr>
+      <p:grpSpPr/>
+      <p:sp>
+        <p:nvSpPr>
+          <p:cNvPr id="2" name="Rectangle 1"/>
+          <p:cNvSpPr/>
+          <p:nvPr/>
+        </p:nvSpPr>
+        <p:spPr>
+          <a:xfrm>
+            <a:off x="0" y="0"/>
+            <a:ext cx="12191695" cy="128016"/>
+          </a:xfrm>
+          <a:prstGeom prst="rect">
+            <a:avLst/>
+          </a:prstGeom>
+          <a:solidFill>
+            <a:srgbClr val="2A78D6"/>
+          </a:solidFill>
+          <a:ln>
+            <a:noFill/>
+          </a:ln>
+          <a:effectLst/>
+        </p:spPr>
+        <p:style>
+          <a:lnRef idx="1">
+            <a:schemeClr val="accent1"/>
+          </a:lnRef>
+          <a:fillRef idx="3">
+            <a:schemeClr val="accent1"/>
+          </a:fillRef>
+          <a:effectRef idx="2">
+            <a:schemeClr val="accent1"/>
+          </a:effectRef>
+          <a:fontRef idx="minor">
+            <a:schemeClr val="lt1"/>
+          </a:fontRef>
+        </p:style>
+        <p:txBody>
+          <a:bodyPr rtlCol="0" anchor="ctr"/>
+          <a:lstStyle/>
+          <a:p>
+            <a:pPr algn="ctr"/>
+          </a:p>
+        </p:txBody>
+      </p:sp>
+      <p:sp>
+        <p:nvSpPr>
+          <p:cNvPr id="3" name="TextBox 2"/>
+          <p:cNvSpPr txBox="1"/>
+          <p:nvPr/>
+        </p:nvSpPr>
+        <p:spPr>
+          <a:xfrm>
+            <a:off x="640080" y="292608"/>
+            <a:ext cx="8686800" cy="365760"/>
+          </a:xfrm>
+          <a:prstGeom prst="rect">
+            <a:avLst/>
+          </a:prstGeom>
+          <a:noFill/>
+        </p:spPr>
+        <p:txBody>
+          <a:bodyPr wrap="square" anchor="t">
+            <a:spAutoFit/>
+          </a:bodyPr>
+          <a:lstStyle/>
+          <a:p>
+            <a:pPr algn="l">
+              <a:lnSpc>
+                <a:spcPct val="115000"/>
+              </a:lnSpc>
+            </a:pPr>
+            <a:r>
+              <a:rPr sz="1400" b="1" i="0">
+                <a:solidFill>
+                  <a:srgbClr val="1BAF7A"/>
+                </a:solidFill>
+                <a:latin typeface="Arial"/>
+              </a:rPr>
+              <a:t>PARA SABER MAIS</a:t>
+            </a:r>
+          </a:p>
+        </p:txBody>
+      </p:sp>
+      <p:sp>
+        <p:nvSpPr>
+          <p:cNvPr id="4" name="TextBox 3"/>
+          <p:cNvSpPr txBox="1"/>
+          <p:nvPr/>
+        </p:nvSpPr>
+        <p:spPr>
+          <a:xfrm>
+            <a:off x="640080" y="594360"/>
+            <a:ext cx="10789920" cy="822960"/>
+          </a:xfrm>
+          <a:prstGeom prst="rect">
+            <a:avLst/>
+          </a:prstGeom>
+          <a:noFill/>
+        </p:spPr>
+        <p:txBody>
+          <a:bodyPr wrap="square" anchor="t">
+            <a:spAutoFit/>
+          </a:bodyPr>
+          <a:lstStyle/>
+          <a:p>
+            <a:pPr algn="l">
+              <a:lnSpc>
+                <a:spcPct val="115000"/>
+              </a:lnSpc>
+            </a:pPr>
+            <a:r>
+              <a:rPr sz="2900" b="1" i="0">
+                <a:solidFill>
+                  <a:srgbClr val="0B1F33"/>
+                </a:solidFill>
+                <a:latin typeface="Arial"/>
+              </a:rPr>
+              <a:t>Relatório de desenvolvimento</a:t>
+            </a:r>
+          </a:p>
+        </p:txBody>
+      </p:sp>
+      <p:sp>
+        <p:nvSpPr>
+          <p:cNvPr id="5" name="Rounded Rectangle 4"/>
+          <p:cNvSpPr/>
+          <p:nvPr/>
+        </p:nvSpPr>
+        <p:spPr>
+          <a:xfrm>
+            <a:off x="658368" y="1261872"/>
+            <a:ext cx="1188720" cy="50800"/>
+          </a:xfrm>
+          <a:prstGeom prst="roundRect">
+            <a:avLst>
+              <a:gd name="adj" fmla="val 50000"/>
+            </a:avLst>
+          </a:prstGeom>
+          <a:solidFill>
+            <a:srgbClr val="1BAF7A"/>
+          </a:solidFill>
+          <a:ln>
+            <a:noFill/>
+          </a:ln>
+          <a:effectLst/>
+        </p:spPr>
+        <p:style>
+          <a:lnRef idx="1">
+            <a:schemeClr val="accent1"/>
+          </a:lnRef>
+          <a:fillRef idx="3">
+            <a:schemeClr val="accent1"/>
+          </a:fillRef>
+          <a:effectRef idx="2">
+            <a:schemeClr val="accent1"/>
+          </a:effectRef>
+          <a:fontRef idx="minor">
+            <a:schemeClr val="lt1"/>
+          </a:fontRef>
+        </p:style>
+        <p:txBody>
+          <a:bodyPr rtlCol="0" anchor="ctr"/>
+          <a:lstStyle/>
+          <a:p>
+            <a:pPr algn="ctr"/>
+          </a:p>
+        </p:txBody>
+      </p:sp>
+      <p:pic>
+        <p:nvPicPr>
+          <p:cNvPr id="6" name="Picture 5" descr="aerotrack-icon.png"/>
+          <p:cNvPicPr>
+            <a:picLocks noChangeAspect="1"/>
+          </p:cNvPicPr>
+          <p:nvPr/>
+        </p:nvPicPr>
+        <p:blipFill>
+          <a:blip r:embed="rId2"/>
+          <a:stretch>
+            <a:fillRect/>
+          </a:stretch>
+        </p:blipFill>
+        <p:spPr>
+          <a:xfrm>
+            <a:off x="11292840" y="274320"/>
+            <a:ext cx="502920" cy="502920"/>
+          </a:xfrm>
+          <a:prstGeom prst="rect">
+            <a:avLst/>
+          </a:prstGeom>
+        </p:spPr>
+      </p:pic>
+      <p:pic>
+        <p:nvPicPr>
+          <p:cNvPr id="7" name="Picture 6" descr="report_preview.png"/>
+          <p:cNvPicPr>
+            <a:picLocks noChangeAspect="1"/>
+          </p:cNvPicPr>
+          <p:nvPr/>
+        </p:nvPicPr>
+        <p:blipFill>
+          <a:blip r:embed="rId3"/>
+          <a:stretch>
+            <a:fillRect/>
+          </a:stretch>
+        </p:blipFill>
+        <p:spPr>
+          <a:xfrm>
+            <a:off x="685800" y="1691640"/>
+            <a:ext cx="3331852" cy="4709160"/>
+          </a:xfrm>
+          <a:prstGeom prst="rect">
+            <a:avLst/>
+          </a:prstGeom>
+        </p:spPr>
+      </p:pic>
+      <p:sp>
+        <p:nvSpPr>
+          <p:cNvPr id="8" name="Rounded Rectangle 7"/>
+          <p:cNvSpPr/>
+          <p:nvPr/>
+        </p:nvSpPr>
+        <p:spPr>
+          <a:xfrm>
+            <a:off x="6903720" y="2103120"/>
+            <a:ext cx="4572000" cy="3840480"/>
+          </a:xfrm>
+          <a:prstGeom prst="roundRect">
+            <a:avLst>
+              <a:gd name="adj" fmla="val 10000"/>
+            </a:avLst>
+          </a:prstGeom>
+          <a:solidFill>
+            <a:srgbClr val="F2F7FB"/>
+          </a:solidFill>
+          <a:ln w="9525">
+            <a:solidFill>
+              <a:srgbClr val="C9D8E8"/>
+            </a:solidFill>
+          </a:ln>
+          <a:effectLst/>
+          <a:effectLst>
+            <a:outerShdw blurRad="180000" dist="45000" dir="5400000" rotWithShape="0">
+              <a:srgbClr val="0B1F33">
+                <a:alpha val="72000"/>
+              </a:srgbClr>
+            </a:outerShdw>
+          </a:effectLst>
+        </p:spPr>
+        <p:style>
+          <a:lnRef idx="1">
+            <a:schemeClr val="accent1"/>
+          </a:lnRef>
+          <a:fillRef idx="3">
+            <a:schemeClr val="accent1"/>
+          </a:fillRef>
+          <a:effectRef idx="2">
+            <a:schemeClr val="accent1"/>
+          </a:effectRef>
+          <a:fontRef idx="minor">
+            <a:schemeClr val="lt1"/>
+          </a:fontRef>
+        </p:style>
+        <p:txBody>
+          <a:bodyPr rtlCol="0" anchor="ctr"/>
+          <a:lstStyle/>
+          <a:p>
+            <a:pPr algn="ctr"/>
+          </a:p>
+        </p:txBody>
+      </p:sp>
+      <p:sp>
+        <p:nvSpPr>
+          <p:cNvPr id="9" name="TextBox 8"/>
+          <p:cNvSpPr txBox="1"/>
+          <p:nvPr/>
+        </p:nvSpPr>
+        <p:spPr>
+          <a:xfrm>
+            <a:off x="7178040" y="2331720"/>
+            <a:ext cx="4023360" cy="457200"/>
+          </a:xfrm>
+          <a:prstGeom prst="rect">
+            <a:avLst/>
+          </a:prstGeom>
+          <a:noFill/>
+        </p:spPr>
+        <p:txBody>
+          <a:bodyPr wrap="square" anchor="t">
+            <a:spAutoFit/>
+          </a:bodyPr>
+          <a:lstStyle/>
+          <a:p>
+            <a:pPr algn="l">
+              <a:lnSpc>
+                <a:spcPct val="115000"/>
+              </a:lnSpc>
+            </a:pPr>
+            <a:r>
+              <a:rPr sz="1300" b="1" i="0">
+                <a:solidFill>
+                  <a:srgbClr val="1BAF7A"/>
+                </a:solidFill>
+                <a:latin typeface="Arial"/>
+              </a:rPr>
+              <a:t>23 PÁGINAS</a:t>
+            </a:r>
+          </a:p>
+        </p:txBody>
+      </p:sp>
+      <p:sp>
+        <p:nvSpPr>
+          <p:cNvPr id="10" name="TextBox 9"/>
+          <p:cNvSpPr txBox="1"/>
+          <p:nvPr/>
+        </p:nvSpPr>
+        <p:spPr>
+          <a:xfrm>
+            <a:off x="7178040" y="2743200"/>
+            <a:ext cx="4023360" cy="3017520"/>
+          </a:xfrm>
+          <a:prstGeom prst="rect">
+            <a:avLst/>
+          </a:prstGeom>
+          <a:noFill/>
+        </p:spPr>
+        <p:txBody>
+          <a:bodyPr wrap="square">
+            <a:spAutoFit/>
+          </a:bodyPr>
+          <a:lstStyle/>
+          <a:p>
+            <a:pPr>
+              <a:lnSpc>
+                <a:spcPct val="115000"/>
+              </a:lnSpc>
+              <a:spcAft>
+                <a:spcPts val="1200"/>
+              </a:spcAft>
+            </a:pPr>
+            <a:r>
+              <a:rPr sz="1400">
+                <a:solidFill>
+                  <a:srgbClr val="26364A"/>
+                </a:solidFill>
+                <a:latin typeface="Arial"/>
+              </a:rPr>
+              <a:t>•  Arquitetura, pipelines e workflow em detalhe</a:t>
+            </a:r>
+          </a:p>
+          <a:p>
+            <a:pPr>
+              <a:lnSpc>
+                <a:spcPct val="115000"/>
+              </a:lnSpc>
+              <a:spcAft>
+                <a:spcPts val="1200"/>
+              </a:spcAft>
+            </a:pPr>
+            <a:r>
+              <a:rPr sz="1400">
+                <a:solidFill>
+                  <a:srgbClr val="26364A"/>
+                </a:solidFill>
+                <a:latin typeface="Arial"/>
+              </a:rPr>
+              <a:t>•  Tratamento de dados e ajustes técnicos</a:t>
+            </a:r>
+          </a:p>
+          <a:p>
+            <a:pPr>
+              <a:lnSpc>
+                <a:spcPct val="115000"/>
+              </a:lnSpc>
+              <a:spcAft>
+                <a:spcPts val="1200"/>
+              </a:spcAft>
+            </a:pPr>
+            <a:r>
+              <a:rPr sz="1400">
+                <a:solidFill>
+                  <a:srgbClr val="26364A"/>
+                </a:solidFill>
+                <a:latin typeface="Arial"/>
+              </a:rPr>
+              <a:t>•  Contrato do banco de dados</a:t>
+            </a:r>
+          </a:p>
+          <a:p>
+            <a:pPr>
+              <a:lnSpc>
+                <a:spcPct val="115000"/>
+              </a:lnSpc>
+              <a:spcAft>
+                <a:spcPts val="1200"/>
+              </a:spcAft>
+            </a:pPr>
+            <a:r>
+              <a:rPr sz="1400">
+                <a:solidFill>
+                  <a:srgbClr val="26364A"/>
+                </a:solidFill>
+                <a:latin typeface="Arial"/>
+              </a:rPr>
+              <a:t>•  Indicadores, dashboard e validação dos resultados</a:t>
+            </a:r>
+          </a:p>
+          <a:p>
+            <a:pPr>
+              <a:lnSpc>
+                <a:spcPct val="115000"/>
+              </a:lnSpc>
+              <a:spcAft>
+                <a:spcPts val="1200"/>
+              </a:spcAft>
+            </a:pPr>
+            <a:r>
+              <a:rPr sz="1400">
+                <a:solidFill>
+                  <a:srgbClr val="26364A"/>
+                </a:solidFill>
+                <a:latin typeface="Arial"/>
+              </a:rPr>
+              <a:t>•  Manual de replicação passo a passo</a:t>
+            </a:r>
+          </a:p>
+        </p:txBody>
+      </p:sp>
+      <p:sp>
+        <p:nvSpPr>
+          <p:cNvPr id="11" name="TextBox 10"/>
+          <p:cNvSpPr txBox="1"/>
+          <p:nvPr/>
+        </p:nvSpPr>
+        <p:spPr>
+          <a:xfrm>
+            <a:off x="7178040" y="5623560"/>
+            <a:ext cx="4023360" cy="548640"/>
+          </a:xfrm>
+          <a:prstGeom prst="rect">
+            <a:avLst/>
+          </a:prstGeom>
+          <a:noFill/>
+        </p:spPr>
+        <p:txBody>
+          <a:bodyPr wrap="square" anchor="t">
+            <a:spAutoFit/>
+          </a:bodyPr>
+          <a:lstStyle/>
+          <a:p>
+            <a:pPr algn="l">
+              <a:lnSpc>
+                <a:spcPct val="115000"/>
+              </a:lnSpc>
+            </a:pPr>
+            <a:r>
+              <a:rPr sz="1100" b="0" i="1">
+                <a:solidFill>
+                  <a:srgbClr val="898781"/>
+                </a:solidFill>
+                <a:latin typeface="Arial"/>
+              </a:rPr>
+              <a:t>docs/evidencias/relatorio-desenvolvimento-aerotrack.pdf</a:t>
+            </a:r>
+          </a:p>
+        </p:txBody>
+      </p:sp>
+      <p:sp>
+        <p:nvSpPr>
+          <p:cNvPr id="12" name="TextBox 11"/>
+          <p:cNvSpPr txBox="1"/>
+          <p:nvPr/>
+        </p:nvSpPr>
+        <p:spPr>
+          <a:xfrm>
+            <a:off x="640080" y="6510528"/>
+            <a:ext cx="5486400" cy="274320"/>
+          </a:xfrm>
+          <a:prstGeom prst="rect">
+            <a:avLst/>
+          </a:prstGeom>
+          <a:noFill/>
+        </p:spPr>
+        <p:txBody>
+          <a:bodyPr wrap="square" anchor="t">
+            <a:spAutoFit/>
+          </a:bodyPr>
+          <a:lstStyle/>
+          <a:p>
+            <a:pPr algn="l">
+              <a:lnSpc>
+                <a:spcPct val="115000"/>
+              </a:lnSpc>
+            </a:pPr>
+            <a:r>
+              <a:rPr sz="1000" b="0" i="0">
+                <a:solidFill>
+                  <a:srgbClr val="898781"/>
+                </a:solidFill>
+                <a:latin typeface="Arial"/>
+              </a:rPr>
+              <a:t>AeroTrack | Módulo 6 | Apache Hop</a:t>
+            </a:r>
+          </a:p>
+        </p:txBody>
+      </p:sp>
+      <p:sp>
+        <p:nvSpPr>
+          <p:cNvPr id="13" name="TextBox 12"/>
+          <p:cNvSpPr txBox="1"/>
+          <p:nvPr/>
+        </p:nvSpPr>
+        <p:spPr>
+          <a:xfrm>
+            <a:off x="10972800" y="6510528"/>
+            <a:ext cx="640080" cy="274320"/>
+          </a:xfrm>
+          <a:prstGeom prst="rect">
+            <a:avLst/>
+          </a:prstGeom>
+          <a:noFill/>
+        </p:spPr>
+        <p:txBody>
+          <a:bodyPr wrap="square" anchor="t">
+            <a:spAutoFit/>
+          </a:bodyPr>
+          <a:lstStyle/>
+          <a:p>
+            <a:pPr algn="r">
+              <a:lnSpc>
+                <a:spcPct val="115000"/>
+              </a:lnSpc>
+            </a:pPr>
+            <a:r>
+              <a:rPr sz="1000" b="0" i="0">
+                <a:solidFill>
+                  <a:srgbClr val="898781"/>
+                </a:solidFill>
+                <a:latin typeface="Arial"/>
+              </a:rPr>
+              <a:t>17</a:t>
+            </a:r>
+          </a:p>
+        </p:txBody>
+      </p:sp>
+    </p:spTree>
+  </p:cSld>
+  <p:clrMapOvr>
+    <a:masterClrMapping/>
+  </p:clrMapOvr>
+</p:sld>
+</file>
+
+<file path=ppt/slides/slide18.xml><?xml version="1.0" encoding="utf-8"?>
 <p:sld xmlns:a="http://schemas.openxmlformats.org/drawingml/2006/main" xmlns:p="http://schemas.openxmlformats.org/presentationml/2006/main" xmlns:r="http://schemas.openxmlformats.org/officeDocument/2006/relationships">
   <p:cSld>
     <p:bg>
@@ -8477,7 +9427,7 @@
         </p:blipFill>
         <p:spPr>
           <a:xfrm>
-            <a:off x="3566160" y="2286000"/>
+            <a:off x="4421124" y="2286000"/>
             <a:ext cx="3350260" cy="914400"/>
           </a:xfrm>
           <a:prstGeom prst="rect">

--- a/docs/evidencias/AeroTrack-Apresentacao-Modulo6.pptx
+++ b/docs/evidencias/AeroTrack-Apresentacao-Modulo6.pptx
@@ -7309,7 +7309,7 @@
       </p:pic>
       <p:pic>
         <p:nvPicPr>
-          <p:cNvPr id="7" name="Picture 6" descr="report_preview.png"/>
+          <p:cNvPr id="7" name="Picture 6" descr="report_cover.png"/>
           <p:cNvPicPr>
             <a:picLocks noChangeAspect="1"/>
           </p:cNvPicPr>
@@ -7323,17 +7323,119 @@
         </p:blipFill>
         <p:spPr>
           <a:xfrm>
-            <a:off x="685800" y="1691640"/>
-            <a:ext cx="3331852" cy="4709160"/>
+            <a:off x="502920" y="1691640"/>
+            <a:ext cx="2908495" cy="4114800"/>
           </a:xfrm>
           <a:prstGeom prst="rect">
             <a:avLst/>
           </a:prstGeom>
         </p:spPr>
       </p:pic>
-      <p:sp>
-        <p:nvSpPr>
-          <p:cNvPr id="8" name="Rounded Rectangle 7"/>
+      <p:pic>
+        <p:nvPicPr>
+          <p:cNvPr id="8" name="Picture 7" descr="report_sumario.png"/>
+          <p:cNvPicPr>
+            <a:picLocks noChangeAspect="1"/>
+          </p:cNvPicPr>
+          <p:nvPr/>
+        </p:nvPicPr>
+        <p:blipFill>
+          <a:blip r:embed="rId4"/>
+          <a:stretch>
+            <a:fillRect/>
+          </a:stretch>
+        </p:blipFill>
+        <p:spPr>
+          <a:xfrm>
+            <a:off x="3685735" y="1691640"/>
+            <a:ext cx="2908495" cy="4114800"/>
+          </a:xfrm>
+          <a:prstGeom prst="rect">
+            <a:avLst/>
+          </a:prstGeom>
+        </p:spPr>
+      </p:pic>
+      <p:sp>
+        <p:nvSpPr>
+          <p:cNvPr id="9" name="TextBox 8"/>
+          <p:cNvSpPr txBox="1"/>
+          <p:nvPr/>
+        </p:nvSpPr>
+        <p:spPr>
+          <a:xfrm>
+            <a:off x="502920" y="5879592"/>
+            <a:ext cx="2908495" cy="320040"/>
+          </a:xfrm>
+          <a:prstGeom prst="rect">
+            <a:avLst/>
+          </a:prstGeom>
+          <a:noFill/>
+        </p:spPr>
+        <p:txBody>
+          <a:bodyPr wrap="square" anchor="t">
+            <a:spAutoFit/>
+          </a:bodyPr>
+          <a:lstStyle/>
+          <a:p>
+            <a:pPr algn="ctr">
+              <a:lnSpc>
+                <a:spcPct val="115000"/>
+              </a:lnSpc>
+            </a:pPr>
+            <a:r>
+              <a:rPr sz="1200" b="0" i="0">
+                <a:solidFill>
+                  <a:srgbClr val="898781"/>
+                </a:solidFill>
+                <a:latin typeface="Arial"/>
+              </a:rPr>
+              <a:t>Capa</a:t>
+            </a:r>
+          </a:p>
+        </p:txBody>
+      </p:sp>
+      <p:sp>
+        <p:nvSpPr>
+          <p:cNvPr id="10" name="TextBox 9"/>
+          <p:cNvSpPr txBox="1"/>
+          <p:nvPr/>
+        </p:nvSpPr>
+        <p:spPr>
+          <a:xfrm>
+            <a:off x="3685735" y="5879592"/>
+            <a:ext cx="2908495" cy="320040"/>
+          </a:xfrm>
+          <a:prstGeom prst="rect">
+            <a:avLst/>
+          </a:prstGeom>
+          <a:noFill/>
+        </p:spPr>
+        <p:txBody>
+          <a:bodyPr wrap="square" anchor="t">
+            <a:spAutoFit/>
+          </a:bodyPr>
+          <a:lstStyle/>
+          <a:p>
+            <a:pPr algn="ctr">
+              <a:lnSpc>
+                <a:spcPct val="115000"/>
+              </a:lnSpc>
+            </a:pPr>
+            <a:r>
+              <a:rPr sz="1200" b="0" i="0">
+                <a:solidFill>
+                  <a:srgbClr val="898781"/>
+                </a:solidFill>
+                <a:latin typeface="Arial"/>
+              </a:rPr>
+              <a:t>Sumário</a:t>
+            </a:r>
+          </a:p>
+        </p:txBody>
+      </p:sp>
+      <p:sp>
+        <p:nvSpPr>
+          <p:cNvPr id="11" name="Rounded Rectangle 10"/>
           <p:cNvSpPr/>
           <p:nvPr/>
         </p:nvSpPr>
@@ -7388,7 +7490,7 @@
       </p:sp>
       <p:sp>
         <p:nvSpPr>
-          <p:cNvPr id="9" name="TextBox 8"/>
+          <p:cNvPr id="12" name="TextBox 11"/>
           <p:cNvSpPr txBox="1"/>
           <p:nvPr/>
         </p:nvSpPr>
@@ -7427,7 +7529,7 @@
       </p:sp>
       <p:sp>
         <p:nvSpPr>
-          <p:cNvPr id="10" name="TextBox 9"/>
+          <p:cNvPr id="13" name="TextBox 12"/>
           <p:cNvSpPr txBox="1"/>
           <p:nvPr/>
         </p:nvSpPr>
@@ -7545,7 +7647,7 @@
       </p:sp>
       <p:sp>
         <p:nvSpPr>
-          <p:cNvPr id="11" name="TextBox 10"/>
+          <p:cNvPr id="14" name="TextBox 13"/>
           <p:cNvSpPr txBox="1"/>
           <p:nvPr/>
         </p:nvSpPr>
@@ -7584,7 +7686,7 @@
       </p:sp>
       <p:sp>
         <p:nvSpPr>
-          <p:cNvPr id="12" name="TextBox 11"/>
+          <p:cNvPr id="15" name="TextBox 14"/>
           <p:cNvSpPr txBox="1"/>
           <p:nvPr/>
         </p:nvSpPr>
@@ -7623,7 +7725,7 @@
       </p:sp>
       <p:sp>
         <p:nvSpPr>
-          <p:cNvPr id="13" name="TextBox 12"/>
+          <p:cNvPr id="16" name="TextBox 15"/>
           <p:cNvSpPr txBox="1"/>
           <p:nvPr/>
         </p:nvSpPr>

--- a/docs/evidencias/AeroTrack-Apresentacao-Modulo6.pptx
+++ b/docs/evidencias/AeroTrack-Apresentacao-Modulo6.pptx
@@ -5187,11 +5187,20 @@
         <p:spPr>
           <a:xfrm>
             <a:off x="1234440" y="1600200"/>
-            <a:ext cx="9692640" cy="11358562"/>
-          </a:xfrm>
-          <a:prstGeom prst="rect">
-            <a:avLst/>
-          </a:prstGeom>
+            <a:ext cx="9692640" cy="10601325"/>
+          </a:xfrm>
+          <a:prstGeom prst="roundRect">
+            <a:avLst>
+              <a:gd name="adj" fmla="val 4000"/>
+            </a:avLst>
+          </a:prstGeom>
+          <a:effectLst>
+            <a:outerShdw blurRad="90000" dist="22000" dir="5400000" rotWithShape="0">
+              <a:srgbClr val="0B1F33">
+                <a:alpha val="50000"/>
+              </a:srgbClr>
+            </a:outerShdw>
+          </a:effectLst>
         </p:spPr>
       </p:pic>
       <p:sp>
@@ -5548,9 +5557,18 @@
             <a:off x="1737360" y="1737360"/>
             <a:ext cx="8686800" cy="3053953"/>
           </a:xfrm>
-          <a:prstGeom prst="rect">
-            <a:avLst/>
-          </a:prstGeom>
+          <a:prstGeom prst="roundRect">
+            <a:avLst>
+              <a:gd name="adj" fmla="val 4000"/>
+            </a:avLst>
+          </a:prstGeom>
+          <a:effectLst>
+            <a:outerShdw blurRad="90000" dist="22000" dir="5400000" rotWithShape="0">
+              <a:srgbClr val="0B1F33">
+                <a:alpha val="50000"/>
+              </a:srgbClr>
+            </a:outerShdw>
+          </a:effectLst>
         </p:spPr>
       </p:pic>
       <p:sp>
@@ -7326,9 +7344,18 @@
             <a:off x="502920" y="1691640"/>
             <a:ext cx="2908495" cy="4114800"/>
           </a:xfrm>
-          <a:prstGeom prst="rect">
-            <a:avLst/>
-          </a:prstGeom>
+          <a:prstGeom prst="roundRect">
+            <a:avLst>
+              <a:gd name="adj" fmla="val 10000"/>
+            </a:avLst>
+          </a:prstGeom>
+          <a:effectLst>
+            <a:outerShdw blurRad="90000" dist="22000" dir="5400000" rotWithShape="0">
+              <a:srgbClr val="0B1F33">
+                <a:alpha val="50000"/>
+              </a:srgbClr>
+            </a:outerShdw>
+          </a:effectLst>
         </p:spPr>
       </p:pic>
       <p:pic>
@@ -7350,9 +7377,18 @@
             <a:off x="3685735" y="1691640"/>
             <a:ext cx="2908495" cy="4114800"/>
           </a:xfrm>
-          <a:prstGeom prst="rect">
-            <a:avLst/>
-          </a:prstGeom>
+          <a:prstGeom prst="roundRect">
+            <a:avLst>
+              <a:gd name="adj" fmla="val 10000"/>
+            </a:avLst>
+          </a:prstGeom>
+          <a:effectLst>
+            <a:outerShdw blurRad="90000" dist="22000" dir="5400000" rotWithShape="0">
+              <a:srgbClr val="0B1F33">
+                <a:alpha val="50000"/>
+              </a:srgbClr>
+            </a:outerShdw>
+          </a:effectLst>
         </p:spPr>
       </p:pic>
       <p:sp>

--- a/docs/evidencias/AeroTrack-Apresentacao-Modulo6.pptx
+++ b/docs/evidencias/AeroTrack-Apresentacao-Modulo6.pptx
@@ -22,6 +22,7 @@
     <p:sldId id="270" r:id="rId21"/>
     <p:sldId id="271" r:id="rId22"/>
     <p:sldId id="272" r:id="rId23"/>
+    <p:sldId id="274" r:id="rId25"/>
     <p:sldId id="273" r:id="rId24"/>
   </p:sldIdLst>
   <p:sldSz cx="12191695" cy="6858000" type="screen4x3"/>
@@ -8348,6 +8349,374 @@
                 <a:latin typeface="Arial"/>
               </a:rPr>
               <a:t>Obrigado</a:t>
+            </a:r>
+          </a:p>
+        </p:txBody>
+      </p:sp>
+    </p:spTree>
+  </p:cSld>
+  <p:clrMapOvr>
+    <a:masterClrMapping/>
+  </p:clrMapOvr>
+</p:sld>
+</file>
+
+<file path=ppt/slides/slide19.xml><?xml version="1.0" encoding="utf-8"?>
+<p:sld xmlns:a="http://schemas.openxmlformats.org/drawingml/2006/main" xmlns:p="http://schemas.openxmlformats.org/presentationml/2006/main" xmlns:r="http://schemas.openxmlformats.org/officeDocument/2006/relationships">
+  <p:cSld>
+    <p:bg>
+      <p:bgPr>
+        <a:solidFill>
+          <a:srgbClr val="FFFFFF"/>
+        </a:solidFill>
+        <a:effectLst/>
+      </p:bgPr>
+    </p:bg>
+    <p:spTree>
+      <p:nvGrpSpPr>
+        <p:cNvPr id="1" name=""/>
+        <p:cNvGrpSpPr/>
+        <p:nvPr/>
+      </p:nvGrpSpPr>
+      <p:grpSpPr/>
+      <p:sp>
+        <p:nvSpPr>
+          <p:cNvPr id="2" name="Rectangle 1"/>
+          <p:cNvSpPr/>
+          <p:nvPr/>
+        </p:nvSpPr>
+        <p:spPr>
+          <a:xfrm>
+            <a:off x="0" y="0"/>
+            <a:ext cx="12191695" cy="128016"/>
+          </a:xfrm>
+          <a:prstGeom prst="rect">
+            <a:avLst/>
+          </a:prstGeom>
+          <a:solidFill>
+            <a:srgbClr val="2A78D6"/>
+          </a:solidFill>
+          <a:ln>
+            <a:noFill/>
+          </a:ln>
+          <a:effectLst/>
+        </p:spPr>
+        <p:style>
+          <a:lnRef idx="1">
+            <a:schemeClr val="accent1"/>
+          </a:lnRef>
+          <a:fillRef idx="3">
+            <a:schemeClr val="accent1"/>
+          </a:fillRef>
+          <a:effectRef idx="2">
+            <a:schemeClr val="accent1"/>
+          </a:effectRef>
+          <a:fontRef idx="minor">
+            <a:schemeClr val="lt1"/>
+          </a:fontRef>
+        </p:style>
+        <p:txBody>
+          <a:bodyPr rtlCol="0" anchor="ctr"/>
+          <a:lstStyle/>
+          <a:p>
+            <a:pPr algn="ctr"/>
+          </a:p>
+        </p:txBody>
+      </p:sp>
+      <p:sp>
+        <p:nvSpPr>
+          <p:cNvPr id="3" name="TextBox 2"/>
+          <p:cNvSpPr txBox="1"/>
+          <p:nvPr/>
+        </p:nvSpPr>
+        <p:spPr>
+          <a:xfrm>
+            <a:off x="640080" y="292608"/>
+            <a:ext cx="8686800" cy="365760"/>
+          </a:xfrm>
+          <a:prstGeom prst="rect">
+            <a:avLst/>
+          </a:prstGeom>
+          <a:noFill/>
+        </p:spPr>
+        <p:txBody>
+          <a:bodyPr wrap="square" anchor="t">
+            <a:spAutoFit/>
+          </a:bodyPr>
+          <a:lstStyle/>
+          <a:p>
+            <a:pPr algn="l">
+              <a:lnSpc>
+                <a:spcPct val="115000"/>
+              </a:lnSpc>
+            </a:pPr>
+            <a:r>
+              <a:rPr sz="1400" b="1" i="0">
+                <a:solidFill>
+                  <a:srgbClr val="1BAF7A"/>
+                </a:solidFill>
+                <a:latin typeface="Arial"/>
+              </a:rPr>
+              <a:t>VISUALIZAÇÃO</a:t>
+            </a:r>
+          </a:p>
+        </p:txBody>
+      </p:sp>
+      <p:sp>
+        <p:nvSpPr>
+          <p:cNvPr id="4" name="TextBox 3"/>
+          <p:cNvSpPr txBox="1"/>
+          <p:nvPr/>
+        </p:nvSpPr>
+        <p:spPr>
+          <a:xfrm>
+            <a:off x="640080" y="594360"/>
+            <a:ext cx="10789920" cy="822960"/>
+          </a:xfrm>
+          <a:prstGeom prst="rect">
+            <a:avLst/>
+          </a:prstGeom>
+          <a:noFill/>
+        </p:spPr>
+        <p:txBody>
+          <a:bodyPr wrap="square" anchor="t">
+            <a:spAutoFit/>
+          </a:bodyPr>
+          <a:lstStyle/>
+          <a:p>
+            <a:pPr algn="l">
+              <a:lnSpc>
+                <a:spcPct val="115000"/>
+              </a:lnSpc>
+            </a:pPr>
+            <a:r>
+              <a:rPr sz="2900" b="1" i="0">
+                <a:solidFill>
+                  <a:srgbClr val="0B1F33"/>
+                </a:solidFill>
+                <a:latin typeface="Arial"/>
+              </a:rPr>
+              <a:t>Tema claro, idioma e mais recursos</a:t>
+            </a:r>
+          </a:p>
+        </p:txBody>
+      </p:sp>
+      <p:sp>
+        <p:nvSpPr>
+          <p:cNvPr id="5" name="Rounded Rectangle 4"/>
+          <p:cNvSpPr/>
+          <p:nvPr/>
+        </p:nvSpPr>
+        <p:spPr>
+          <a:xfrm>
+            <a:off x="658368" y="1261872"/>
+            <a:ext cx="1188720" cy="50800"/>
+          </a:xfrm>
+          <a:prstGeom prst="roundRect">
+            <a:avLst>
+              <a:gd name="adj" fmla="val 50000"/>
+            </a:avLst>
+          </a:prstGeom>
+          <a:solidFill>
+            <a:srgbClr val="1BAF7A"/>
+          </a:solidFill>
+          <a:ln>
+            <a:noFill/>
+          </a:ln>
+          <a:effectLst/>
+        </p:spPr>
+        <p:style>
+          <a:lnRef idx="1">
+            <a:schemeClr val="accent1"/>
+          </a:lnRef>
+          <a:fillRef idx="3">
+            <a:schemeClr val="accent1"/>
+          </a:fillRef>
+          <a:effectRef idx="2">
+            <a:schemeClr val="accent1"/>
+          </a:effectRef>
+          <a:fontRef idx="minor">
+            <a:schemeClr val="lt1"/>
+          </a:fontRef>
+        </p:style>
+        <p:txBody>
+          <a:bodyPr rtlCol="0" anchor="ctr"/>
+          <a:lstStyle/>
+          <a:p>
+            <a:pPr algn="ctr"/>
+          </a:p>
+        </p:txBody>
+      </p:sp>
+      <p:pic>
+        <p:nvPicPr>
+          <p:cNvPr id="6" name="Picture 5" descr="aerotrack-icon.png"/>
+          <p:cNvPicPr>
+            <a:picLocks noChangeAspect="1"/>
+          </p:cNvPicPr>
+          <p:nvPr/>
+        </p:nvPicPr>
+        <p:blipFill>
+          <a:blip r:embed="rId2"/>
+          <a:stretch>
+            <a:fillRect/>
+          </a:stretch>
+        </p:blipFill>
+        <p:spPr>
+          <a:xfrm>
+            <a:off x="11292840" y="274320"/>
+            <a:ext cx="502920" cy="502920"/>
+          </a:xfrm>
+          <a:prstGeom prst="rect">
+            <a:avLst/>
+          </a:prstGeom>
+        </p:spPr>
+      </p:pic>
+      <p:pic>
+        <p:nvPicPr>
+          <p:cNvPr id="7" name="Picture 6" descr="E13-dashboard-light-theme-pt.png"/>
+          <p:cNvPicPr>
+            <a:picLocks noChangeAspect="1"/>
+          </p:cNvPicPr>
+          <p:nvPr/>
+        </p:nvPicPr>
+        <p:blipFill>
+          <a:blip r:embed="rId3"/>
+          <a:stretch>
+            <a:fillRect/>
+          </a:stretch>
+        </p:blipFill>
+        <p:spPr>
+          <a:xfrm>
+            <a:off x="1234440" y="1600200"/>
+            <a:ext cx="9692640" cy="10601325"/>
+          </a:xfrm>
+          <a:prstGeom prst="roundRect">
+            <a:avLst>
+              <a:gd name="adj" fmla="val 4000"/>
+            </a:avLst>
+          </a:prstGeom>
+          <a:effectLst>
+            <a:outerShdw blurRad="90000" dist="22000" dir="5400000" rotWithShape="0">
+              <a:srgbClr val="0B1F33">
+                <a:alpha val="50000"/>
+              </a:srgbClr>
+            </a:outerShdw>
+          </a:effectLst>
+        </p:spPr>
+      </p:pic>
+      <p:sp>
+        <p:nvSpPr>
+          <p:cNvPr id="8" name="TextBox 7"/>
+          <p:cNvSpPr txBox="1"/>
+          <p:nvPr/>
+        </p:nvSpPr>
+        <p:spPr>
+          <a:xfrm>
+            <a:off x="822960" y="6355080"/>
+            <a:ext cx="10515600" cy="365760"/>
+          </a:xfrm>
+          <a:prstGeom prst="rect">
+            <a:avLst/>
+          </a:prstGeom>
+          <a:noFill/>
+        </p:spPr>
+        <p:txBody>
+          <a:bodyPr wrap="square" anchor="t">
+            <a:spAutoFit/>
+          </a:bodyPr>
+          <a:lstStyle/>
+          <a:p>
+            <a:pPr algn="l">
+              <a:lnSpc>
+                <a:spcPct val="115000"/>
+              </a:lnSpc>
+            </a:pPr>
+            <a:r>
+              <a:rPr sz="1100" b="0" i="1">
+                <a:solidFill>
+                  <a:srgbClr val="898781"/>
+                </a:solidFill>
+                <a:latin typeface="Arial"/>
+              </a:rPr>
+              <a:t>Alternância de tema claro/escuro, idioma inglês/português e mapa de densidade mensal.</a:t>
+            </a:r>
+          </a:p>
+        </p:txBody>
+      </p:sp>
+      <p:sp>
+        <p:nvSpPr>
+          <p:cNvPr id="9" name="TextBox 8"/>
+          <p:cNvSpPr txBox="1"/>
+          <p:nvPr/>
+        </p:nvSpPr>
+        <p:spPr>
+          <a:xfrm>
+            <a:off x="640080" y="6510528"/>
+            <a:ext cx="5486400" cy="274320"/>
+          </a:xfrm>
+          <a:prstGeom prst="rect">
+            <a:avLst/>
+          </a:prstGeom>
+          <a:noFill/>
+        </p:spPr>
+        <p:txBody>
+          <a:bodyPr wrap="square" anchor="t">
+            <a:spAutoFit/>
+          </a:bodyPr>
+          <a:lstStyle/>
+          <a:p>
+            <a:pPr algn="l">
+              <a:lnSpc>
+                <a:spcPct val="115000"/>
+              </a:lnSpc>
+            </a:pPr>
+            <a:r>
+              <a:rPr sz="1000" b="0" i="0">
+                <a:solidFill>
+                  <a:srgbClr val="898781"/>
+                </a:solidFill>
+                <a:latin typeface="Arial"/>
+              </a:rPr>
+              <a:t>AeroTrack | Módulo 6 | Apache Hop</a:t>
+            </a:r>
+          </a:p>
+        </p:txBody>
+      </p:sp>
+      <p:sp>
+        <p:nvSpPr>
+          <p:cNvPr id="10" name="TextBox 9"/>
+          <p:cNvSpPr txBox="1"/>
+          <p:nvPr/>
+        </p:nvSpPr>
+        <p:spPr>
+          <a:xfrm>
+            <a:off x="10972800" y="6510528"/>
+            <a:ext cx="640080" cy="274320"/>
+          </a:xfrm>
+          <a:prstGeom prst="rect">
+            <a:avLst/>
+          </a:prstGeom>
+          <a:noFill/>
+        </p:spPr>
+        <p:txBody>
+          <a:bodyPr wrap="square" anchor="t">
+            <a:spAutoFit/>
+          </a:bodyPr>
+          <a:lstStyle/>
+          <a:p>
+            <a:pPr algn="r">
+              <a:lnSpc>
+                <a:spcPct val="115000"/>
+              </a:lnSpc>
+            </a:pPr>
+            <a:r>
+              <a:rPr sz="1000" b="0" i="0">
+                <a:solidFill>
+                  <a:srgbClr val="898781"/>
+                </a:solidFill>
+                <a:latin typeface="Arial"/>
+              </a:rPr>
+              <a:t>18</a:t>
             </a:r>
           </a:p>
         </p:txBody>
